--- a/01_Thermal/D_sketch/Flight Arena Sketch.pptx
+++ b/01_Thermal/D_sketch/Flight Arena Sketch.pptx
@@ -119,7 +119,7 @@
 <file path=ppt/revisionInfo.xml><?xml version="1.0" encoding="utf-8"?>
 <p1510:revInfo xmlns:a="http://schemas.openxmlformats.org/drawingml/2006/main" xmlns:r="http://schemas.openxmlformats.org/officeDocument/2006/relationships" xmlns:p1510="http://schemas.microsoft.com/office/powerpoint/2015/10/main">
   <p1510:revLst>
-    <p1510:client id="{7C61FE3C-C10E-4EE6-8D2D-81A36C423E2D}" v="159" dt="2026-02-05T06:07:17.469"/>
+    <p1510:client id="{86C5AF7C-76E7-4CCA-B41D-7A35E04DEA3C}" v="2" dt="2026-02-17T20:57:16.598"/>
   </p1510:revLst>
 </p1510:revInfo>
 </file>
@@ -129,12 +129,12 @@
   <pc:docChgLst>
     <pc:chgData name="Li, Hanchen F" userId="3aee791e-6a2d-4da7-a77b-fbdf7bf15886" providerId="ADAL" clId="{1EA8FAE0-933A-49DD-A724-68A18B8AE880}"/>
     <pc:docChg chg="undo redo custSel addSld delSld modSld modNotesMaster">
-      <pc:chgData name="Li, Hanchen F" userId="3aee791e-6a2d-4da7-a77b-fbdf7bf15886" providerId="ADAL" clId="{1EA8FAE0-933A-49DD-A724-68A18B8AE880}" dt="2026-02-05T06:07:33.353" v="1731" actId="1076"/>
+      <pc:chgData name="Li, Hanchen F" userId="3aee791e-6a2d-4da7-a77b-fbdf7bf15886" providerId="ADAL" clId="{1EA8FAE0-933A-49DD-A724-68A18B8AE880}" dt="2026-02-17T20:57:16.598" v="1735" actId="114"/>
       <pc:docMkLst>
         <pc:docMk/>
       </pc:docMkLst>
       <pc:sldChg chg="addSp delSp modSp mod">
-        <pc:chgData name="Li, Hanchen F" userId="3aee791e-6a2d-4da7-a77b-fbdf7bf15886" providerId="ADAL" clId="{1EA8FAE0-933A-49DD-A724-68A18B8AE880}" dt="2026-02-05T06:07:13.473" v="1728" actId="20577"/>
+        <pc:chgData name="Li, Hanchen F" userId="3aee791e-6a2d-4da7-a77b-fbdf7bf15886" providerId="ADAL" clId="{1EA8FAE0-933A-49DD-A724-68A18B8AE880}" dt="2026-02-17T20:56:59.954" v="1732" actId="114"/>
         <pc:sldMkLst>
           <pc:docMk/>
           <pc:sldMk cId="3834972223" sldId="258"/>
@@ -187,28 +187,12 @@
             <ac:spMk id="8" creationId="{78F60072-A859-99AE-3F9E-CCE49529D4B6}"/>
           </ac:spMkLst>
         </pc:spChg>
-        <pc:spChg chg="add del mod ord">
-          <ac:chgData name="Li, Hanchen F" userId="3aee791e-6a2d-4da7-a77b-fbdf7bf15886" providerId="ADAL" clId="{1EA8FAE0-933A-49DD-A724-68A18B8AE880}" dt="2026-02-05T05:51:49.849" v="1455" actId="478"/>
-          <ac:spMkLst>
-            <pc:docMk/>
-            <pc:sldMk cId="3834972223" sldId="258"/>
-            <ac:spMk id="10" creationId="{C199BB83-26A7-E669-C19E-9C3A8CD69DB2}"/>
-          </ac:spMkLst>
-        </pc:spChg>
         <pc:spChg chg="add mod topLvl">
           <ac:chgData name="Li, Hanchen F" userId="3aee791e-6a2d-4da7-a77b-fbdf7bf15886" providerId="ADAL" clId="{1EA8FAE0-933A-49DD-A724-68A18B8AE880}" dt="2026-02-05T05:50:57.707" v="1434" actId="208"/>
           <ac:spMkLst>
             <pc:docMk/>
             <pc:sldMk cId="3834972223" sldId="258"/>
             <ac:spMk id="13" creationId="{E0274BB4-BC49-B77D-FE97-E6C0397D62B0}"/>
-          </ac:spMkLst>
-        </pc:spChg>
-        <pc:spChg chg="add mod topLvl">
-          <ac:chgData name="Li, Hanchen F" userId="3aee791e-6a2d-4da7-a77b-fbdf7bf15886" providerId="ADAL" clId="{1EA8FAE0-933A-49DD-A724-68A18B8AE880}" dt="2026-01-16T20:17:34.273" v="543" actId="164"/>
-          <ac:spMkLst>
-            <pc:docMk/>
-            <pc:sldMk cId="3834972223" sldId="258"/>
-            <ac:spMk id="18" creationId="{330FA24B-AB9D-3C2D-21A4-B24B372EBF1F}"/>
           </ac:spMkLst>
         </pc:spChg>
         <pc:spChg chg="add mod">
@@ -249,14 +233,6 @@
             <pc:docMk/>
             <pc:sldMk cId="3834972223" sldId="258"/>
             <ac:spMk id="26" creationId="{426E059C-381F-E918-4E56-098CCB6CF11E}"/>
-          </ac:spMkLst>
-        </pc:spChg>
-        <pc:spChg chg="add mod topLvl">
-          <ac:chgData name="Li, Hanchen F" userId="3aee791e-6a2d-4da7-a77b-fbdf7bf15886" providerId="ADAL" clId="{1EA8FAE0-933A-49DD-A724-68A18B8AE880}" dt="2026-01-16T20:17:34.273" v="543" actId="164"/>
-          <ac:spMkLst>
-            <pc:docMk/>
-            <pc:sldMk cId="3834972223" sldId="258"/>
-            <ac:spMk id="28" creationId="{5C2395E9-1B91-3FE8-060C-A52323E240B5}"/>
           </ac:spMkLst>
         </pc:spChg>
         <pc:spChg chg="add mod topLvl">
@@ -308,7 +284,7 @@
           </ac:spMkLst>
         </pc:spChg>
         <pc:spChg chg="add mod">
-          <ac:chgData name="Li, Hanchen F" userId="3aee791e-6a2d-4da7-a77b-fbdf7bf15886" providerId="ADAL" clId="{1EA8FAE0-933A-49DD-A724-68A18B8AE880}" dt="2026-02-05T05:47:01.196" v="1354" actId="1037"/>
+          <ac:chgData name="Li, Hanchen F" userId="3aee791e-6a2d-4da7-a77b-fbdf7bf15886" providerId="ADAL" clId="{1EA8FAE0-933A-49DD-A724-68A18B8AE880}" dt="2026-02-17T20:56:59.954" v="1732" actId="114"/>
           <ac:spMkLst>
             <pc:docMk/>
             <pc:sldMk cId="3834972223" sldId="258"/>
@@ -316,7 +292,7 @@
           </ac:spMkLst>
         </pc:spChg>
         <pc:spChg chg="add mod">
-          <ac:chgData name="Li, Hanchen F" userId="3aee791e-6a2d-4da7-a77b-fbdf7bf15886" providerId="ADAL" clId="{1EA8FAE0-933A-49DD-A724-68A18B8AE880}" dt="2026-02-05T05:48:10.600" v="1389" actId="2711"/>
+          <ac:chgData name="Li, Hanchen F" userId="3aee791e-6a2d-4da7-a77b-fbdf7bf15886" providerId="ADAL" clId="{1EA8FAE0-933A-49DD-A724-68A18B8AE880}" dt="2026-02-17T20:56:59.954" v="1732" actId="114"/>
           <ac:spMkLst>
             <pc:docMk/>
             <pc:sldMk cId="3834972223" sldId="258"/>
@@ -324,7 +300,7 @@
           </ac:spMkLst>
         </pc:spChg>
         <pc:spChg chg="add mod">
-          <ac:chgData name="Li, Hanchen F" userId="3aee791e-6a2d-4da7-a77b-fbdf7bf15886" providerId="ADAL" clId="{1EA8FAE0-933A-49DD-A724-68A18B8AE880}" dt="2026-02-05T05:48:10.600" v="1389" actId="2711"/>
+          <ac:chgData name="Li, Hanchen F" userId="3aee791e-6a2d-4da7-a77b-fbdf7bf15886" providerId="ADAL" clId="{1EA8FAE0-933A-49DD-A724-68A18B8AE880}" dt="2026-02-17T20:56:59.954" v="1732" actId="114"/>
           <ac:spMkLst>
             <pc:docMk/>
             <pc:sldMk cId="3834972223" sldId="258"/>
@@ -371,54 +347,6 @@
             <ac:spMk id="117" creationId="{076286FC-4A81-CCDC-EDDC-6A5438AA0DE1}"/>
           </ac:spMkLst>
         </pc:spChg>
-        <pc:grpChg chg="mod">
-          <ac:chgData name="Li, Hanchen F" userId="3aee791e-6a2d-4da7-a77b-fbdf7bf15886" providerId="ADAL" clId="{1EA8FAE0-933A-49DD-A724-68A18B8AE880}" dt="2026-02-05T05:43:46.972" v="1320" actId="1076"/>
-          <ac:grpSpMkLst>
-            <pc:docMk/>
-            <pc:sldMk cId="3834972223" sldId="258"/>
-            <ac:grpSpMk id="47" creationId="{3B3B9E2B-4669-0B94-4FC5-DD06ADBC295C}"/>
-          </ac:grpSpMkLst>
-        </pc:grpChg>
-        <pc:grpChg chg="add mod">
-          <ac:chgData name="Li, Hanchen F" userId="3aee791e-6a2d-4da7-a77b-fbdf7bf15886" providerId="ADAL" clId="{1EA8FAE0-933A-49DD-A724-68A18B8AE880}" dt="2026-01-16T20:19:02.793" v="551" actId="1076"/>
-          <ac:grpSpMkLst>
-            <pc:docMk/>
-            <pc:sldMk cId="3834972223" sldId="258"/>
-            <ac:grpSpMk id="51" creationId="{CF4D6442-279A-1F66-4C8D-976C1626D541}"/>
-          </ac:grpSpMkLst>
-        </pc:grpChg>
-        <pc:cxnChg chg="add mod">
-          <ac:chgData name="Li, Hanchen F" userId="3aee791e-6a2d-4da7-a77b-fbdf7bf15886" providerId="ADAL" clId="{1EA8FAE0-933A-49DD-A724-68A18B8AE880}" dt="2026-01-15T19:44:01.081" v="99" actId="1582"/>
-          <ac:cxnSpMkLst>
-            <pc:docMk/>
-            <pc:sldMk cId="3834972223" sldId="258"/>
-            <ac:cxnSpMk id="42" creationId="{03005AD2-FAEE-A3BD-EACA-A8E900330585}"/>
-          </ac:cxnSpMkLst>
-        </pc:cxnChg>
-        <pc:cxnChg chg="add mod">
-          <ac:chgData name="Li, Hanchen F" userId="3aee791e-6a2d-4da7-a77b-fbdf7bf15886" providerId="ADAL" clId="{1EA8FAE0-933A-49DD-A724-68A18B8AE880}" dt="2026-01-15T19:44:01.081" v="99" actId="1582"/>
-          <ac:cxnSpMkLst>
-            <pc:docMk/>
-            <pc:sldMk cId="3834972223" sldId="258"/>
-            <ac:cxnSpMk id="50" creationId="{153D6D9E-F39D-7579-D71C-9DABD11CE2B1}"/>
-          </ac:cxnSpMkLst>
-        </pc:cxnChg>
-        <pc:cxnChg chg="add mod ord">
-          <ac:chgData name="Li, Hanchen F" userId="3aee791e-6a2d-4da7-a77b-fbdf7bf15886" providerId="ADAL" clId="{1EA8FAE0-933A-49DD-A724-68A18B8AE880}" dt="2026-01-16T20:14:33.896" v="509" actId="14100"/>
-          <ac:cxnSpMkLst>
-            <pc:docMk/>
-            <pc:sldMk cId="3834972223" sldId="258"/>
-            <ac:cxnSpMk id="54" creationId="{632803E5-D635-0852-DFD8-0D3CD477435D}"/>
-          </ac:cxnSpMkLst>
-        </pc:cxnChg>
-        <pc:cxnChg chg="add mod ord">
-          <ac:chgData name="Li, Hanchen F" userId="3aee791e-6a2d-4da7-a77b-fbdf7bf15886" providerId="ADAL" clId="{1EA8FAE0-933A-49DD-A724-68A18B8AE880}" dt="2026-01-16T20:14:45.842" v="511" actId="1076"/>
-          <ac:cxnSpMkLst>
-            <pc:docMk/>
-            <pc:sldMk cId="3834972223" sldId="258"/>
-            <ac:cxnSpMk id="96" creationId="{58080A1F-9765-DCA2-CA3E-32533EBD40F1}"/>
-          </ac:cxnSpMkLst>
-        </pc:cxnChg>
         <pc:cxnChg chg="add mod ord">
           <ac:chgData name="Li, Hanchen F" userId="3aee791e-6a2d-4da7-a77b-fbdf7bf15886" providerId="ADAL" clId="{1EA8FAE0-933A-49DD-A724-68A18B8AE880}" dt="2026-02-05T05:52:25.130" v="1463" actId="208"/>
           <ac:cxnSpMkLst>
@@ -469,7 +397,7 @@
         </pc:cxnChg>
       </pc:sldChg>
       <pc:sldChg chg="addSp delSp modSp add mod">
-        <pc:chgData name="Li, Hanchen F" userId="3aee791e-6a2d-4da7-a77b-fbdf7bf15886" providerId="ADAL" clId="{1EA8FAE0-933A-49DD-A724-68A18B8AE880}" dt="2026-02-05T06:07:33.353" v="1731" actId="1076"/>
+        <pc:chgData name="Li, Hanchen F" userId="3aee791e-6a2d-4da7-a77b-fbdf7bf15886" providerId="ADAL" clId="{1EA8FAE0-933A-49DD-A724-68A18B8AE880}" dt="2026-02-17T20:57:16.598" v="1735" actId="114"/>
         <pc:sldMkLst>
           <pc:docMk/>
           <pc:sldMk cId="3629937204" sldId="259"/>
@@ -498,28 +426,12 @@
             <ac:spMk id="4" creationId="{FB01EF7E-AF13-A8A1-E930-32F21072984C}"/>
           </ac:spMkLst>
         </pc:spChg>
-        <pc:spChg chg="mod">
-          <ac:chgData name="Li, Hanchen F" userId="3aee791e-6a2d-4da7-a77b-fbdf7bf15886" providerId="ADAL" clId="{1EA8FAE0-933A-49DD-A724-68A18B8AE880}" dt="2026-01-16T20:38:56.271" v="613" actId="164"/>
-          <ac:spMkLst>
-            <pc:docMk/>
-            <pc:sldMk cId="3629937204" sldId="259"/>
-            <ac:spMk id="7" creationId="{87E3B4E7-49ED-F580-3335-31EE451F6996}"/>
-          </ac:spMkLst>
-        </pc:spChg>
         <pc:spChg chg="mod topLvl">
           <ac:chgData name="Li, Hanchen F" userId="3aee791e-6a2d-4da7-a77b-fbdf7bf15886" providerId="ADAL" clId="{1EA8FAE0-933A-49DD-A724-68A18B8AE880}" dt="2026-02-05T05:52:59.765" v="1479" actId="208"/>
           <ac:spMkLst>
             <pc:docMk/>
             <pc:sldMk cId="3629937204" sldId="259"/>
             <ac:spMk id="8" creationId="{ADD9FACA-F8AE-3042-D0EA-572F51C160F5}"/>
-          </ac:spMkLst>
-        </pc:spChg>
-        <pc:spChg chg="del mod topLvl">
-          <ac:chgData name="Li, Hanchen F" userId="3aee791e-6a2d-4da7-a77b-fbdf7bf15886" providerId="ADAL" clId="{1EA8FAE0-933A-49DD-A724-68A18B8AE880}" dt="2026-02-05T05:53:26.691" v="1485" actId="478"/>
-          <ac:spMkLst>
-            <pc:docMk/>
-            <pc:sldMk cId="3629937204" sldId="259"/>
-            <ac:spMk id="10" creationId="{00A5797D-22F4-36FD-7EA4-9E454E5BFB82}"/>
           </ac:spMkLst>
         </pc:spChg>
         <pc:spChg chg="mod">
@@ -530,16 +442,8 @@
             <ac:spMk id="11" creationId="{82DD2601-D50C-6F6F-2DCC-4A5EF109FDE0}"/>
           </ac:spMkLst>
         </pc:spChg>
-        <pc:spChg chg="mod topLvl">
-          <ac:chgData name="Li, Hanchen F" userId="3aee791e-6a2d-4da7-a77b-fbdf7bf15886" providerId="ADAL" clId="{1EA8FAE0-933A-49DD-A724-68A18B8AE880}" dt="2026-01-16T20:38:56.271" v="613" actId="164"/>
-          <ac:spMkLst>
-            <pc:docMk/>
-            <pc:sldMk cId="3629937204" sldId="259"/>
-            <ac:spMk id="13" creationId="{FDED7651-D8FD-EEE2-B115-AA1AA02C3DD0}"/>
-          </ac:spMkLst>
-        </pc:spChg>
         <pc:spChg chg="mod">
-          <ac:chgData name="Li, Hanchen F" userId="3aee791e-6a2d-4da7-a77b-fbdf7bf15886" providerId="ADAL" clId="{1EA8FAE0-933A-49DD-A724-68A18B8AE880}" dt="2026-02-05T05:48:04.715" v="1388" actId="2711"/>
+          <ac:chgData name="Li, Hanchen F" userId="3aee791e-6a2d-4da7-a77b-fbdf7bf15886" providerId="ADAL" clId="{1EA8FAE0-933A-49DD-A724-68A18B8AE880}" dt="2026-02-17T20:57:08.693" v="1733" actId="114"/>
           <ac:spMkLst>
             <pc:docMk/>
             <pc:sldMk cId="3629937204" sldId="259"/>
@@ -547,7 +451,7 @@
           </ac:spMkLst>
         </pc:spChg>
         <pc:spChg chg="mod">
-          <ac:chgData name="Li, Hanchen F" userId="3aee791e-6a2d-4da7-a77b-fbdf7bf15886" providerId="ADAL" clId="{1EA8FAE0-933A-49DD-A724-68A18B8AE880}" dt="2026-02-05T05:48:04.715" v="1388" actId="2711"/>
+          <ac:chgData name="Li, Hanchen F" userId="3aee791e-6a2d-4da7-a77b-fbdf7bf15886" providerId="ADAL" clId="{1EA8FAE0-933A-49DD-A724-68A18B8AE880}" dt="2026-02-17T20:57:08.693" v="1733" actId="114"/>
           <ac:spMkLst>
             <pc:docMk/>
             <pc:sldMk cId="3629937204" sldId="259"/>
@@ -555,7 +459,7 @@
           </ac:spMkLst>
         </pc:spChg>
         <pc:spChg chg="mod">
-          <ac:chgData name="Li, Hanchen F" userId="3aee791e-6a2d-4da7-a77b-fbdf7bf15886" providerId="ADAL" clId="{1EA8FAE0-933A-49DD-A724-68A18B8AE880}" dt="2026-02-05T05:48:04.715" v="1388" actId="2711"/>
+          <ac:chgData name="Li, Hanchen F" userId="3aee791e-6a2d-4da7-a77b-fbdf7bf15886" providerId="ADAL" clId="{1EA8FAE0-933A-49DD-A724-68A18B8AE880}" dt="2026-02-17T20:57:08.693" v="1733" actId="114"/>
           <ac:spMkLst>
             <pc:docMk/>
             <pc:sldMk cId="3629937204" sldId="259"/>
@@ -594,14 +498,6 @@
             <ac:spMk id="21" creationId="{11E7C393-8688-8B96-A604-85CFD019ABC8}"/>
           </ac:spMkLst>
         </pc:spChg>
-        <pc:spChg chg="add mod">
-          <ac:chgData name="Li, Hanchen F" userId="3aee791e-6a2d-4da7-a77b-fbdf7bf15886" providerId="ADAL" clId="{1EA8FAE0-933A-49DD-A724-68A18B8AE880}" dt="2026-01-16T23:05:18.688" v="1309" actId="14100"/>
-          <ac:spMkLst>
-            <pc:docMk/>
-            <pc:sldMk cId="3629937204" sldId="259"/>
-            <ac:spMk id="22" creationId="{DC080539-6769-654F-0AB2-41C044030B21}"/>
-          </ac:spMkLst>
-        </pc:spChg>
         <pc:spChg chg="mod">
           <ac:chgData name="Li, Hanchen F" userId="3aee791e-6a2d-4da7-a77b-fbdf7bf15886" providerId="ADAL" clId="{1EA8FAE0-933A-49DD-A724-68A18B8AE880}" dt="2026-02-05T05:52:59.765" v="1479" actId="208"/>
           <ac:spMkLst>
@@ -616,14 +512,6 @@
             <pc:docMk/>
             <pc:sldMk cId="3629937204" sldId="259"/>
             <ac:spMk id="28" creationId="{D44DBE1A-2A81-E141-6728-FE55B0D15134}"/>
-          </ac:spMkLst>
-        </pc:spChg>
-        <pc:spChg chg="mod topLvl">
-          <ac:chgData name="Li, Hanchen F" userId="3aee791e-6a2d-4da7-a77b-fbdf7bf15886" providerId="ADAL" clId="{1EA8FAE0-933A-49DD-A724-68A18B8AE880}" dt="2026-01-16T20:38:56.271" v="613" actId="164"/>
-          <ac:spMkLst>
-            <pc:docMk/>
-            <pc:sldMk cId="3629937204" sldId="259"/>
-            <ac:spMk id="29" creationId="{EEC0F835-E324-7C6C-4465-86A0A717FBEE}"/>
           </ac:spMkLst>
         </pc:spChg>
         <pc:spChg chg="mod">
@@ -642,52 +530,12 @@
             <ac:spMk id="31" creationId="{6D9EC491-1221-ABD6-6396-FBA0A463248E}"/>
           </ac:spMkLst>
         </pc:spChg>
-        <pc:spChg chg="mod topLvl">
-          <ac:chgData name="Li, Hanchen F" userId="3aee791e-6a2d-4da7-a77b-fbdf7bf15886" providerId="ADAL" clId="{1EA8FAE0-933A-49DD-A724-68A18B8AE880}" dt="2026-01-16T20:38:56.271" v="613" actId="164"/>
-          <ac:spMkLst>
-            <pc:docMk/>
-            <pc:sldMk cId="3629937204" sldId="259"/>
-            <ac:spMk id="32" creationId="{23D685B3-8C6D-E214-DC0C-B2D8B8ED70BA}"/>
-          </ac:spMkLst>
-        </pc:spChg>
-        <pc:spChg chg="mod topLvl">
-          <ac:chgData name="Li, Hanchen F" userId="3aee791e-6a2d-4da7-a77b-fbdf7bf15886" providerId="ADAL" clId="{1EA8FAE0-933A-49DD-A724-68A18B8AE880}" dt="2026-01-16T20:38:56.271" v="613" actId="164"/>
-          <ac:spMkLst>
-            <pc:docMk/>
-            <pc:sldMk cId="3629937204" sldId="259"/>
-            <ac:spMk id="33" creationId="{5A6511E9-5434-09B0-2D38-E5ECF5BDE7A7}"/>
-          </ac:spMkLst>
-        </pc:spChg>
-        <pc:spChg chg="add mod">
-          <ac:chgData name="Li, Hanchen F" userId="3aee791e-6a2d-4da7-a77b-fbdf7bf15886" providerId="ADAL" clId="{1EA8FAE0-933A-49DD-A724-68A18B8AE880}" dt="2026-02-05T05:55:07.887" v="1498" actId="571"/>
-          <ac:spMkLst>
-            <pc:docMk/>
-            <pc:sldMk cId="3629937204" sldId="259"/>
-            <ac:spMk id="35" creationId="{0C16CF7A-2428-5783-2A3D-F22343FE51B7}"/>
-          </ac:spMkLst>
-        </pc:spChg>
         <pc:spChg chg="add mod">
           <ac:chgData name="Li, Hanchen F" userId="3aee791e-6a2d-4da7-a77b-fbdf7bf15886" providerId="ADAL" clId="{1EA8FAE0-933A-49DD-A724-68A18B8AE880}" dt="2026-02-05T06:06:26.958" v="1718" actId="1076"/>
           <ac:spMkLst>
             <pc:docMk/>
             <pc:sldMk cId="3629937204" sldId="259"/>
             <ac:spMk id="36" creationId="{F554BC62-AF51-1D26-C8FA-4C23383748FC}"/>
-          </ac:spMkLst>
-        </pc:spChg>
-        <pc:spChg chg="add mod">
-          <ac:chgData name="Li, Hanchen F" userId="3aee791e-6a2d-4da7-a77b-fbdf7bf15886" providerId="ADAL" clId="{1EA8FAE0-933A-49DD-A724-68A18B8AE880}" dt="2026-02-05T05:58:04.350" v="1539"/>
-          <ac:spMkLst>
-            <pc:docMk/>
-            <pc:sldMk cId="3629937204" sldId="259"/>
-            <ac:spMk id="37" creationId="{06C0149A-3396-97D4-59AC-17814C2E74E4}"/>
-          </ac:spMkLst>
-        </pc:spChg>
-        <pc:spChg chg="add del mod">
-          <ac:chgData name="Li, Hanchen F" userId="3aee791e-6a2d-4da7-a77b-fbdf7bf15886" providerId="ADAL" clId="{1EA8FAE0-933A-49DD-A724-68A18B8AE880}" dt="2026-02-05T05:58:29.546" v="1543" actId="478"/>
-          <ac:spMkLst>
-            <pc:docMk/>
-            <pc:sldMk cId="3629937204" sldId="259"/>
-            <ac:spMk id="38" creationId="{6CF310B1-D00C-1E90-5163-D759CBE9C540}"/>
           </ac:spMkLst>
         </pc:spChg>
         <pc:spChg chg="add mod">
@@ -731,14 +579,6 @@
           </ac:spMkLst>
         </pc:spChg>
         <pc:spChg chg="add mod">
-          <ac:chgData name="Li, Hanchen F" userId="3aee791e-6a2d-4da7-a77b-fbdf7bf15886" providerId="ADAL" clId="{1EA8FAE0-933A-49DD-A724-68A18B8AE880}" dt="2026-02-05T06:04:40.155" v="1683" actId="20577"/>
-          <ac:spMkLst>
-            <pc:docMk/>
-            <pc:sldMk cId="3629937204" sldId="259"/>
-            <ac:spMk id="48" creationId="{9AAAE5A3-6E22-3368-ADF6-66E425CF6998}"/>
-          </ac:spMkLst>
-        </pc:spChg>
-        <pc:spChg chg="add mod">
           <ac:chgData name="Li, Hanchen F" userId="3aee791e-6a2d-4da7-a77b-fbdf7bf15886" providerId="ADAL" clId="{1EA8FAE0-933A-49DD-A724-68A18B8AE880}" dt="2026-02-05T06:05:05.386" v="1699" actId="1076"/>
           <ac:spMkLst>
             <pc:docMk/>
@@ -747,43 +587,11 @@
           </ac:spMkLst>
         </pc:spChg>
         <pc:spChg chg="add mod">
-          <ac:chgData name="Li, Hanchen F" userId="3aee791e-6a2d-4da7-a77b-fbdf7bf15886" providerId="ADAL" clId="{1EA8FAE0-933A-49DD-A724-68A18B8AE880}" dt="2026-02-05T06:05:00.624" v="1697" actId="571"/>
-          <ac:spMkLst>
-            <pc:docMk/>
-            <pc:sldMk cId="3629937204" sldId="259"/>
-            <ac:spMk id="52" creationId="{4CCFAF61-F769-B6FB-09C5-6E79C88CA8DC}"/>
-          </ac:spMkLst>
-        </pc:spChg>
-        <pc:spChg chg="add mod">
-          <ac:chgData name="Li, Hanchen F" userId="3aee791e-6a2d-4da7-a77b-fbdf7bf15886" providerId="ADAL" clId="{1EA8FAE0-933A-49DD-A724-68A18B8AE880}" dt="2026-02-05T06:05:00.624" v="1697" actId="571"/>
-          <ac:spMkLst>
-            <pc:docMk/>
-            <pc:sldMk cId="3629937204" sldId="259"/>
-            <ac:spMk id="53" creationId="{B1F0E05C-821B-3D48-3FA5-DA0B809A7CB5}"/>
-          </ac:spMkLst>
-        </pc:spChg>
-        <pc:spChg chg="add mod">
-          <ac:chgData name="Li, Hanchen F" userId="3aee791e-6a2d-4da7-a77b-fbdf7bf15886" providerId="ADAL" clId="{1EA8FAE0-933A-49DD-A724-68A18B8AE880}" dt="2026-02-05T06:05:00.624" v="1697" actId="571"/>
-          <ac:spMkLst>
-            <pc:docMk/>
-            <pc:sldMk cId="3629937204" sldId="259"/>
-            <ac:spMk id="54" creationId="{3A12B8CD-EA52-1C8A-A97F-19BF97169B4B}"/>
-          </ac:spMkLst>
-        </pc:spChg>
-        <pc:spChg chg="add mod">
           <ac:chgData name="Li, Hanchen F" userId="3aee791e-6a2d-4da7-a77b-fbdf7bf15886" providerId="ADAL" clId="{1EA8FAE0-933A-49DD-A724-68A18B8AE880}" dt="2026-02-05T06:05:47.482" v="1714" actId="1076"/>
           <ac:spMkLst>
             <pc:docMk/>
             <pc:sldMk cId="3629937204" sldId="259"/>
             <ac:spMk id="55" creationId="{8B653361-2294-2471-71F4-C2E8013CD7A9}"/>
-          </ac:spMkLst>
-        </pc:spChg>
-        <pc:spChg chg="add del mod">
-          <ac:chgData name="Li, Hanchen F" userId="3aee791e-6a2d-4da7-a77b-fbdf7bf15886" providerId="ADAL" clId="{1EA8FAE0-933A-49DD-A724-68A18B8AE880}" dt="2026-02-05T06:05:36.961" v="1712" actId="478"/>
-          <ac:spMkLst>
-            <pc:docMk/>
-            <pc:sldMk cId="3629937204" sldId="259"/>
-            <ac:spMk id="56" creationId="{D217F05A-8975-78A6-8A94-70EBD03ABA5E}"/>
           </ac:spMkLst>
         </pc:spChg>
         <pc:spChg chg="add mod">
@@ -826,16 +634,8 @@
             <ac:grpSpMk id="9" creationId="{6AE8C16B-C4DD-D435-FDBD-C0BA7ABFF70C}"/>
           </ac:grpSpMkLst>
         </pc:grpChg>
-        <pc:grpChg chg="del mod">
-          <ac:chgData name="Li, Hanchen F" userId="3aee791e-6a2d-4da7-a77b-fbdf7bf15886" providerId="ADAL" clId="{1EA8FAE0-933A-49DD-A724-68A18B8AE880}" dt="2026-02-05T05:47:38.966" v="1383" actId="478"/>
-          <ac:grpSpMkLst>
-            <pc:docMk/>
-            <pc:sldMk cId="3629937204" sldId="259"/>
-            <ac:grpSpMk id="51" creationId="{3B104C43-B044-5DFA-03B5-A6CA7ADC80B5}"/>
-          </ac:grpSpMkLst>
-        </pc:grpChg>
         <pc:graphicFrameChg chg="add del mod ord">
-          <ac:chgData name="Li, Hanchen F" userId="3aee791e-6a2d-4da7-a77b-fbdf7bf15886" providerId="ADAL" clId="{1EA8FAE0-933A-49DD-A724-68A18B8AE880}" dt="2026-02-05T05:57:35.474" v="1535" actId="692"/>
+          <ac:chgData name="Li, Hanchen F" userId="3aee791e-6a2d-4da7-a77b-fbdf7bf15886" providerId="ADAL" clId="{1EA8FAE0-933A-49DD-A724-68A18B8AE880}" dt="2026-02-17T20:57:16.598" v="1735" actId="114"/>
           <ac:graphicFrameMkLst>
             <pc:docMk/>
             <pc:sldMk cId="3629937204" sldId="259"/>
@@ -2820,6 +2620,16 @@
                   </a:defRPr>
                 </a:pPr>
                 <a:r>
+                  <a:rPr lang="en-US" altLang="zh-CN" sz="1800" b="0" i="1" dirty="0">
+                    <a:solidFill>
+                      <a:schemeClr val="tx1"/>
+                    </a:solidFill>
+                    <a:latin typeface="Helvetica" panose="020B0604020202020204" pitchFamily="34" charset="0"/>
+                    <a:cs typeface="Helvetica" panose="020B0604020202020204" pitchFamily="34" charset="0"/>
+                  </a:rPr>
+                  <a:t>x</a:t>
+                </a:r>
+                <a:r>
                   <a:rPr lang="en-US" altLang="zh-CN" sz="1800" b="0" dirty="0">
                     <a:solidFill>
                       <a:schemeClr val="tx1"/>
@@ -2827,7 +2637,7 @@
                     <a:latin typeface="Helvetica" panose="020B0604020202020204" pitchFamily="34" charset="0"/>
                     <a:cs typeface="Helvetica" panose="020B0604020202020204" pitchFamily="34" charset="0"/>
                   </a:rPr>
-                  <a:t>x (m)</a:t>
+                  <a:t> (m)</a:t>
                 </a:r>
                 <a:endParaRPr lang="zh-CN" altLang="en-US" sz="1800" b="0" dirty="0">
                   <a:solidFill>
@@ -2954,7 +2764,7 @@
                   </a:defRPr>
                 </a:pPr>
                 <a:r>
-                  <a:rPr lang="en-US" altLang="zh-CN" sz="1800" dirty="0">
+                  <a:rPr lang="en-US" altLang="zh-CN" sz="1800" i="1" dirty="0">
                     <a:solidFill>
                       <a:schemeClr val="tx1"/>
                     </a:solidFill>
@@ -3823,7 +3633,7 @@
           <a:p>
             <a:fld id="{DF1088C5-931A-42D2-8AA4-FA289862AAD0}" type="datetimeFigureOut">
               <a:rPr lang="zh-CN" altLang="en-US" smtClean="0"/>
-              <a:t>2026/2/5</a:t>
+              <a:t>2026/2/17</a:t>
             </a:fld>
             <a:endParaRPr lang="zh-CN" altLang="en-US"/>
           </a:p>
@@ -4413,7 +4223,7 @@
           <a:p>
             <a:fld id="{3CAF1464-0EA4-453D-A90B-03B04D244405}" type="datetimeFigureOut">
               <a:rPr lang="zh-CN" altLang="en-US" smtClean="0"/>
-              <a:t>2026/2/5</a:t>
+              <a:t>2026/2/17</a:t>
             </a:fld>
             <a:endParaRPr lang="zh-CN" altLang="en-US"/>
           </a:p>
@@ -4583,7 +4393,7 @@
           <a:p>
             <a:fld id="{3CAF1464-0EA4-453D-A90B-03B04D244405}" type="datetimeFigureOut">
               <a:rPr lang="zh-CN" altLang="en-US" smtClean="0"/>
-              <a:t>2026/2/5</a:t>
+              <a:t>2026/2/17</a:t>
             </a:fld>
             <a:endParaRPr lang="zh-CN" altLang="en-US"/>
           </a:p>
@@ -4763,7 +4573,7 @@
           <a:p>
             <a:fld id="{3CAF1464-0EA4-453D-A90B-03B04D244405}" type="datetimeFigureOut">
               <a:rPr lang="zh-CN" altLang="en-US" smtClean="0"/>
-              <a:t>2026/2/5</a:t>
+              <a:t>2026/2/17</a:t>
             </a:fld>
             <a:endParaRPr lang="zh-CN" altLang="en-US"/>
           </a:p>
@@ -4933,7 +4743,7 @@
           <a:p>
             <a:fld id="{3CAF1464-0EA4-453D-A90B-03B04D244405}" type="datetimeFigureOut">
               <a:rPr lang="zh-CN" altLang="en-US" smtClean="0"/>
-              <a:t>2026/2/5</a:t>
+              <a:t>2026/2/17</a:t>
             </a:fld>
             <a:endParaRPr lang="zh-CN" altLang="en-US"/>
           </a:p>
@@ -5179,7 +4989,7 @@
           <a:p>
             <a:fld id="{3CAF1464-0EA4-453D-A90B-03B04D244405}" type="datetimeFigureOut">
               <a:rPr lang="zh-CN" altLang="en-US" smtClean="0"/>
-              <a:t>2026/2/5</a:t>
+              <a:t>2026/2/17</a:t>
             </a:fld>
             <a:endParaRPr lang="zh-CN" altLang="en-US"/>
           </a:p>
@@ -5411,7 +5221,7 @@
           <a:p>
             <a:fld id="{3CAF1464-0EA4-453D-A90B-03B04D244405}" type="datetimeFigureOut">
               <a:rPr lang="zh-CN" altLang="en-US" smtClean="0"/>
-              <a:t>2026/2/5</a:t>
+              <a:t>2026/2/17</a:t>
             </a:fld>
             <a:endParaRPr lang="zh-CN" altLang="en-US"/>
           </a:p>
@@ -5778,7 +5588,7 @@
           <a:p>
             <a:fld id="{3CAF1464-0EA4-453D-A90B-03B04D244405}" type="datetimeFigureOut">
               <a:rPr lang="zh-CN" altLang="en-US" smtClean="0"/>
-              <a:t>2026/2/5</a:t>
+              <a:t>2026/2/17</a:t>
             </a:fld>
             <a:endParaRPr lang="zh-CN" altLang="en-US"/>
           </a:p>
@@ -5896,7 +5706,7 @@
           <a:p>
             <a:fld id="{3CAF1464-0EA4-453D-A90B-03B04D244405}" type="datetimeFigureOut">
               <a:rPr lang="zh-CN" altLang="en-US" smtClean="0"/>
-              <a:t>2026/2/5</a:t>
+              <a:t>2026/2/17</a:t>
             </a:fld>
             <a:endParaRPr lang="zh-CN" altLang="en-US"/>
           </a:p>
@@ -5991,7 +5801,7 @@
           <a:p>
             <a:fld id="{3CAF1464-0EA4-453D-A90B-03B04D244405}" type="datetimeFigureOut">
               <a:rPr lang="zh-CN" altLang="en-US" smtClean="0"/>
-              <a:t>2026/2/5</a:t>
+              <a:t>2026/2/17</a:t>
             </a:fld>
             <a:endParaRPr lang="zh-CN" altLang="en-US"/>
           </a:p>
@@ -6268,7 +6078,7 @@
           <a:p>
             <a:fld id="{3CAF1464-0EA4-453D-A90B-03B04D244405}" type="datetimeFigureOut">
               <a:rPr lang="zh-CN" altLang="en-US" smtClean="0"/>
-              <a:t>2026/2/5</a:t>
+              <a:t>2026/2/17</a:t>
             </a:fld>
             <a:endParaRPr lang="zh-CN" altLang="en-US"/>
           </a:p>
@@ -6525,7 +6335,7 @@
           <a:p>
             <a:fld id="{3CAF1464-0EA4-453D-A90B-03B04D244405}" type="datetimeFigureOut">
               <a:rPr lang="zh-CN" altLang="en-US" smtClean="0"/>
-              <a:t>2026/2/5</a:t>
+              <a:t>2026/2/17</a:t>
             </a:fld>
             <a:endParaRPr lang="zh-CN" altLang="en-US"/>
           </a:p>
@@ -6738,7 +6548,7 @@
           <a:p>
             <a:fld id="{3CAF1464-0EA4-453D-A90B-03B04D244405}" type="datetimeFigureOut">
               <a:rPr lang="zh-CN" altLang="en-US" smtClean="0"/>
-              <a:t>2026/2/5</a:t>
+              <a:t>2026/2/17</a:t>
             </a:fld>
             <a:endParaRPr lang="zh-CN" altLang="en-US"/>
           </a:p>
@@ -7294,13 +7104,13 @@
             <a:lstStyle/>
             <a:p>
               <a:r>
-                <a:rPr lang="en-US" altLang="zh-CN" sz="2000" dirty="0">
+                <a:rPr lang="en-US" altLang="zh-CN" sz="2000" i="1" dirty="0">
                   <a:latin typeface="Helvetica" panose="020B0604020202020204" pitchFamily="34" charset="0"/>
                   <a:cs typeface="Helvetica" panose="020B0604020202020204" pitchFamily="34" charset="0"/>
                 </a:rPr>
                 <a:t>x</a:t>
               </a:r>
-              <a:endParaRPr lang="zh-CN" altLang="en-US" sz="2000" baseline="-25000" dirty="0">
+              <a:endParaRPr lang="zh-CN" altLang="en-US" sz="2000" i="1" baseline="-25000" dirty="0">
                 <a:latin typeface="Helvetica" panose="020B0604020202020204" pitchFamily="34" charset="0"/>
                 <a:cs typeface="Helvetica" panose="020B0604020202020204" pitchFamily="34" charset="0"/>
               </a:endParaRPr>
@@ -7336,13 +7146,13 @@
             <a:lstStyle/>
             <a:p>
               <a:r>
-                <a:rPr lang="en-US" altLang="zh-CN" sz="2000" dirty="0">
+                <a:rPr lang="en-US" altLang="zh-CN" sz="2000" i="1" dirty="0">
                   <a:latin typeface="Helvetica" panose="020B0604020202020204" pitchFamily="34" charset="0"/>
                   <a:cs typeface="Helvetica" panose="020B0604020202020204" pitchFamily="34" charset="0"/>
                 </a:rPr>
                 <a:t>z</a:t>
               </a:r>
-              <a:endParaRPr lang="zh-CN" altLang="en-US" sz="2000" baseline="-25000" dirty="0">
+              <a:endParaRPr lang="zh-CN" altLang="en-US" sz="2000" i="1" baseline="-25000" dirty="0">
                 <a:latin typeface="Helvetica" panose="020B0604020202020204" pitchFamily="34" charset="0"/>
                 <a:cs typeface="Helvetica" panose="020B0604020202020204" pitchFamily="34" charset="0"/>
               </a:endParaRPr>
@@ -7378,13 +7188,13 @@
             <a:lstStyle/>
             <a:p>
               <a:r>
-                <a:rPr lang="en-US" altLang="zh-CN" sz="2000" dirty="0">
+                <a:rPr lang="en-US" altLang="zh-CN" sz="2000" i="1" dirty="0">
                   <a:latin typeface="Helvetica" panose="020B0604020202020204" pitchFamily="34" charset="0"/>
                   <a:cs typeface="Helvetica" panose="020B0604020202020204" pitchFamily="34" charset="0"/>
                 </a:rPr>
                 <a:t>y</a:t>
               </a:r>
-              <a:endParaRPr lang="zh-CN" altLang="en-US" sz="2000" baseline="-25000" dirty="0">
+              <a:endParaRPr lang="zh-CN" altLang="en-US" sz="2000" i="1" baseline="-25000" dirty="0">
                 <a:latin typeface="Helvetica" panose="020B0604020202020204" pitchFamily="34" charset="0"/>
                 <a:cs typeface="Helvetica" panose="020B0604020202020204" pitchFamily="34" charset="0"/>
               </a:endParaRPr>
@@ -10169,7 +9979,7 @@
           <p:nvPr>
             <p:extLst>
               <p:ext uri="{D42A27DB-BD31-4B8C-83A1-F6EECF244321}">
-                <p14:modId xmlns:p14="http://schemas.microsoft.com/office/powerpoint/2010/main" val="1867462940"/>
+                <p14:modId xmlns:p14="http://schemas.microsoft.com/office/powerpoint/2010/main" val="1668513550"/>
               </p:ext>
             </p:extLst>
           </p:nvPr>
@@ -10427,13 +10237,13 @@
             <a:lstStyle/>
             <a:p>
               <a:r>
-                <a:rPr lang="en-US" altLang="zh-CN" sz="2000" dirty="0">
+                <a:rPr lang="en-US" altLang="zh-CN" sz="2000" i="1" dirty="0">
                   <a:latin typeface="Helvetica" panose="020B0604020202020204" pitchFamily="34" charset="0"/>
                   <a:cs typeface="Helvetica" panose="020B0604020202020204" pitchFamily="34" charset="0"/>
                 </a:rPr>
                 <a:t>x</a:t>
               </a:r>
-              <a:endParaRPr lang="zh-CN" altLang="en-US" sz="2000" baseline="-25000" dirty="0">
+              <a:endParaRPr lang="zh-CN" altLang="en-US" sz="2000" i="1" baseline="-25000" dirty="0">
                 <a:latin typeface="Helvetica" panose="020B0604020202020204" pitchFamily="34" charset="0"/>
                 <a:cs typeface="Helvetica" panose="020B0604020202020204" pitchFamily="34" charset="0"/>
               </a:endParaRPr>
@@ -10469,13 +10279,13 @@
             <a:lstStyle/>
             <a:p>
               <a:r>
-                <a:rPr lang="en-US" altLang="zh-CN" sz="2000" dirty="0">
+                <a:rPr lang="en-US" altLang="zh-CN" sz="2000" i="1" dirty="0">
                   <a:latin typeface="Helvetica" panose="020B0604020202020204" pitchFamily="34" charset="0"/>
                   <a:cs typeface="Helvetica" panose="020B0604020202020204" pitchFamily="34" charset="0"/>
                 </a:rPr>
                 <a:t>z</a:t>
               </a:r>
-              <a:endParaRPr lang="zh-CN" altLang="en-US" sz="2000" baseline="-25000" dirty="0">
+              <a:endParaRPr lang="zh-CN" altLang="en-US" sz="2000" i="1" baseline="-25000" dirty="0">
                 <a:latin typeface="Helvetica" panose="020B0604020202020204" pitchFamily="34" charset="0"/>
                 <a:cs typeface="Helvetica" panose="020B0604020202020204" pitchFamily="34" charset="0"/>
               </a:endParaRPr>
@@ -10511,13 +10321,13 @@
             <a:lstStyle/>
             <a:p>
               <a:r>
-                <a:rPr lang="en-US" altLang="zh-CN" sz="2000" dirty="0">
+                <a:rPr lang="en-US" altLang="zh-CN" sz="2000" i="1" dirty="0">
                   <a:latin typeface="Helvetica" panose="020B0604020202020204" pitchFamily="34" charset="0"/>
                   <a:cs typeface="Helvetica" panose="020B0604020202020204" pitchFamily="34" charset="0"/>
                 </a:rPr>
                 <a:t>y</a:t>
               </a:r>
-              <a:endParaRPr lang="zh-CN" altLang="en-US" sz="2000" baseline="-25000" dirty="0">
+              <a:endParaRPr lang="zh-CN" altLang="en-US" sz="2000" i="1" baseline="-25000" dirty="0">
                 <a:latin typeface="Helvetica" panose="020B0604020202020204" pitchFamily="34" charset="0"/>
                 <a:cs typeface="Helvetica" panose="020B0604020202020204" pitchFamily="34" charset="0"/>
               </a:endParaRPr>

--- a/01_Thermal/D_sketch/Flight Arena Sketch.pptx
+++ b/01_Thermal/D_sketch/Flight Arena Sketch.pptx
@@ -5,11 +5,12 @@
     <p:sldMasterId id="2147483672" r:id="rId1"/>
   </p:sldMasterIdLst>
   <p:notesMasterIdLst>
-    <p:notesMasterId r:id="rId4"/>
+    <p:notesMasterId r:id="rId5"/>
   </p:notesMasterIdLst>
   <p:sldIdLst>
     <p:sldId id="258" r:id="rId2"/>
     <p:sldId id="259" r:id="rId3"/>
+    <p:sldId id="260" r:id="rId4"/>
   </p:sldIdLst>
   <p:sldSz cx="12192000" cy="6858000"/>
   <p:notesSz cx="7102475" cy="10234613"/>
@@ -119,7 +120,7 @@
 <file path=ppt/revisionInfo.xml><?xml version="1.0" encoding="utf-8"?>
 <p1510:revInfo xmlns:a="http://schemas.openxmlformats.org/drawingml/2006/main" xmlns:r="http://schemas.openxmlformats.org/officeDocument/2006/relationships" xmlns:p1510="http://schemas.microsoft.com/office/powerpoint/2015/10/main">
   <p1510:revLst>
-    <p1510:client id="{86C5AF7C-76E7-4CCA-B41D-7A35E04DEA3C}" v="2" dt="2026-02-17T20:57:16.598"/>
+    <p1510:client id="{372C730B-1908-4A6A-802B-59AC80DA7F37}" v="300" dt="2026-03-16T17:05:55.856"/>
   </p1510:revLst>
 </p1510:revInfo>
 </file>
@@ -129,409 +130,34 @@
   <pc:docChgLst>
     <pc:chgData name="Li, Hanchen F" userId="3aee791e-6a2d-4da7-a77b-fbdf7bf15886" providerId="ADAL" clId="{1EA8FAE0-933A-49DD-A724-68A18B8AE880}"/>
     <pc:docChg chg="undo redo custSel addSld delSld modSld modNotesMaster">
-      <pc:chgData name="Li, Hanchen F" userId="3aee791e-6a2d-4da7-a77b-fbdf7bf15886" providerId="ADAL" clId="{1EA8FAE0-933A-49DD-A724-68A18B8AE880}" dt="2026-02-17T20:57:16.598" v="1735" actId="114"/>
+      <pc:chgData name="Li, Hanchen F" userId="3aee791e-6a2d-4da7-a77b-fbdf7bf15886" providerId="ADAL" clId="{1EA8FAE0-933A-49DD-A724-68A18B8AE880}" dt="2026-03-16T17:07:16.468" v="3199" actId="478"/>
       <pc:docMkLst>
         <pc:docMk/>
       </pc:docMkLst>
-      <pc:sldChg chg="addSp delSp modSp mod">
-        <pc:chgData name="Li, Hanchen F" userId="3aee791e-6a2d-4da7-a77b-fbdf7bf15886" providerId="ADAL" clId="{1EA8FAE0-933A-49DD-A724-68A18B8AE880}" dt="2026-02-17T20:56:59.954" v="1732" actId="114"/>
-        <pc:sldMkLst>
-          <pc:docMk/>
-          <pc:sldMk cId="3834972223" sldId="258"/>
-        </pc:sldMkLst>
-        <pc:spChg chg="add mod">
-          <ac:chgData name="Li, Hanchen F" userId="3aee791e-6a2d-4da7-a77b-fbdf7bf15886" providerId="ADAL" clId="{1EA8FAE0-933A-49DD-A724-68A18B8AE880}" dt="2026-02-05T05:51:24.541" v="1444" actId="208"/>
-          <ac:spMkLst>
-            <pc:docMk/>
-            <pc:sldMk cId="3834972223" sldId="258"/>
-            <ac:spMk id="2" creationId="{3C9275A5-2535-6F2D-67E9-ADB51B7DA3D0}"/>
-          </ac:spMkLst>
-        </pc:spChg>
-        <pc:spChg chg="add mod topLvl">
-          <ac:chgData name="Li, Hanchen F" userId="3aee791e-6a2d-4da7-a77b-fbdf7bf15886" providerId="ADAL" clId="{1EA8FAE0-933A-49DD-A724-68A18B8AE880}" dt="2026-02-05T05:51:24.541" v="1444" actId="208"/>
-          <ac:spMkLst>
-            <pc:docMk/>
-            <pc:sldMk cId="3834972223" sldId="258"/>
-            <ac:spMk id="3" creationId="{F2E6F187-1BCB-4791-5DE8-FFFDE759331C}"/>
-          </ac:spMkLst>
-        </pc:spChg>
-        <pc:spChg chg="add mod">
-          <ac:chgData name="Li, Hanchen F" userId="3aee791e-6a2d-4da7-a77b-fbdf7bf15886" providerId="ADAL" clId="{1EA8FAE0-933A-49DD-A724-68A18B8AE880}" dt="2026-02-05T05:51:24.541" v="1444" actId="208"/>
-          <ac:spMkLst>
-            <pc:docMk/>
-            <pc:sldMk cId="3834972223" sldId="258"/>
-            <ac:spMk id="4" creationId="{3141F771-028A-52A9-140C-32B2CB578395}"/>
-          </ac:spMkLst>
-        </pc:spChg>
-        <pc:spChg chg="add mod topLvl">
-          <ac:chgData name="Li, Hanchen F" userId="3aee791e-6a2d-4da7-a77b-fbdf7bf15886" providerId="ADAL" clId="{1EA8FAE0-933A-49DD-A724-68A18B8AE880}" dt="2026-02-05T05:51:24.541" v="1444" actId="208"/>
-          <ac:spMkLst>
-            <pc:docMk/>
-            <pc:sldMk cId="3834972223" sldId="258"/>
-            <ac:spMk id="6" creationId="{D8894A62-40AC-3DB5-2D3B-89D6B68B1DE4}"/>
-          </ac:spMkLst>
-        </pc:spChg>
-        <pc:spChg chg="add mod topLvl">
-          <ac:chgData name="Li, Hanchen F" userId="3aee791e-6a2d-4da7-a77b-fbdf7bf15886" providerId="ADAL" clId="{1EA8FAE0-933A-49DD-A724-68A18B8AE880}" dt="2026-02-05T05:51:24.541" v="1444" actId="208"/>
-          <ac:spMkLst>
-            <pc:docMk/>
-            <pc:sldMk cId="3834972223" sldId="258"/>
-            <ac:spMk id="7" creationId="{DF0E6C4F-6318-CAA3-A057-C2EE496ED0C3}"/>
-          </ac:spMkLst>
-        </pc:spChg>
-        <pc:spChg chg="add del mod topLvl">
-          <ac:chgData name="Li, Hanchen F" userId="3aee791e-6a2d-4da7-a77b-fbdf7bf15886" providerId="ADAL" clId="{1EA8FAE0-933A-49DD-A724-68A18B8AE880}" dt="2026-02-05T05:51:24.541" v="1444" actId="208"/>
-          <ac:spMkLst>
-            <pc:docMk/>
-            <pc:sldMk cId="3834972223" sldId="258"/>
-            <ac:spMk id="8" creationId="{78F60072-A859-99AE-3F9E-CCE49529D4B6}"/>
-          </ac:spMkLst>
-        </pc:spChg>
-        <pc:spChg chg="add mod topLvl">
-          <ac:chgData name="Li, Hanchen F" userId="3aee791e-6a2d-4da7-a77b-fbdf7bf15886" providerId="ADAL" clId="{1EA8FAE0-933A-49DD-A724-68A18B8AE880}" dt="2026-02-05T05:50:57.707" v="1434" actId="208"/>
-          <ac:spMkLst>
-            <pc:docMk/>
-            <pc:sldMk cId="3834972223" sldId="258"/>
-            <ac:spMk id="13" creationId="{E0274BB4-BC49-B77D-FE97-E6C0397D62B0}"/>
-          </ac:spMkLst>
-        </pc:spChg>
-        <pc:spChg chg="add mod">
-          <ac:chgData name="Li, Hanchen F" userId="3aee791e-6a2d-4da7-a77b-fbdf7bf15886" providerId="ADAL" clId="{1EA8FAE0-933A-49DD-A724-68A18B8AE880}" dt="2026-02-05T05:50:57.707" v="1434" actId="208"/>
-          <ac:spMkLst>
-            <pc:docMk/>
-            <pc:sldMk cId="3834972223" sldId="258"/>
-            <ac:spMk id="20" creationId="{7CA7663E-BB68-F410-6926-339F2569AF89}"/>
-          </ac:spMkLst>
-        </pc:spChg>
-        <pc:spChg chg="add mod topLvl">
-          <ac:chgData name="Li, Hanchen F" userId="3aee791e-6a2d-4da7-a77b-fbdf7bf15886" providerId="ADAL" clId="{1EA8FAE0-933A-49DD-A724-68A18B8AE880}" dt="2026-02-05T05:50:57.707" v="1434" actId="208"/>
-          <ac:spMkLst>
-            <pc:docMk/>
-            <pc:sldMk cId="3834972223" sldId="258"/>
-            <ac:spMk id="23" creationId="{CA5BE35D-EE19-8DE3-ADED-F656B5BD189D}"/>
-          </ac:spMkLst>
-        </pc:spChg>
-        <pc:spChg chg="add mod">
-          <ac:chgData name="Li, Hanchen F" userId="3aee791e-6a2d-4da7-a77b-fbdf7bf15886" providerId="ADAL" clId="{1EA8FAE0-933A-49DD-A724-68A18B8AE880}" dt="2026-02-05T05:50:57.707" v="1434" actId="208"/>
-          <ac:spMkLst>
-            <pc:docMk/>
-            <pc:sldMk cId="3834972223" sldId="258"/>
-            <ac:spMk id="24" creationId="{59057F11-740F-B258-587C-019F31519238}"/>
-          </ac:spMkLst>
-        </pc:spChg>
-        <pc:spChg chg="add mod topLvl">
-          <ac:chgData name="Li, Hanchen F" userId="3aee791e-6a2d-4da7-a77b-fbdf7bf15886" providerId="ADAL" clId="{1EA8FAE0-933A-49DD-A724-68A18B8AE880}" dt="2026-02-05T05:50:57.707" v="1434" actId="208"/>
-          <ac:spMkLst>
-            <pc:docMk/>
-            <pc:sldMk cId="3834972223" sldId="258"/>
-            <ac:spMk id="25" creationId="{D81E828C-8A6C-BDD0-AC7B-5F78BE7372ED}"/>
-          </ac:spMkLst>
-        </pc:spChg>
-        <pc:spChg chg="add del mod">
-          <ac:chgData name="Li, Hanchen F" userId="3aee791e-6a2d-4da7-a77b-fbdf7bf15886" providerId="ADAL" clId="{1EA8FAE0-933A-49DD-A724-68A18B8AE880}" dt="2026-02-05T05:50:57.707" v="1434" actId="208"/>
-          <ac:spMkLst>
-            <pc:docMk/>
-            <pc:sldMk cId="3834972223" sldId="258"/>
-            <ac:spMk id="26" creationId="{426E059C-381F-E918-4E56-098CCB6CF11E}"/>
-          </ac:spMkLst>
-        </pc:spChg>
-        <pc:spChg chg="add mod topLvl">
-          <ac:chgData name="Li, Hanchen F" userId="3aee791e-6a2d-4da7-a77b-fbdf7bf15886" providerId="ADAL" clId="{1EA8FAE0-933A-49DD-A724-68A18B8AE880}" dt="2026-02-05T05:50:57.707" v="1434" actId="208"/>
-          <ac:spMkLst>
-            <pc:docMk/>
-            <pc:sldMk cId="3834972223" sldId="258"/>
-            <ac:spMk id="29" creationId="{46482BBB-5F1C-9761-79F4-A4BC3EBC390B}"/>
-          </ac:spMkLst>
-        </pc:spChg>
-        <pc:spChg chg="add mod topLvl">
-          <ac:chgData name="Li, Hanchen F" userId="3aee791e-6a2d-4da7-a77b-fbdf7bf15886" providerId="ADAL" clId="{1EA8FAE0-933A-49DD-A724-68A18B8AE880}" dt="2026-02-05T05:50:57.707" v="1434" actId="208"/>
-          <ac:spMkLst>
-            <pc:docMk/>
-            <pc:sldMk cId="3834972223" sldId="258"/>
-            <ac:spMk id="30" creationId="{A883B023-53CF-6828-3169-57B6F6FDF081}"/>
-          </ac:spMkLst>
-        </pc:spChg>
-        <pc:spChg chg="add mod topLvl">
-          <ac:chgData name="Li, Hanchen F" userId="3aee791e-6a2d-4da7-a77b-fbdf7bf15886" providerId="ADAL" clId="{1EA8FAE0-933A-49DD-A724-68A18B8AE880}" dt="2026-02-05T05:48:10.600" v="1389" actId="2711"/>
-          <ac:spMkLst>
-            <pc:docMk/>
-            <pc:sldMk cId="3834972223" sldId="258"/>
-            <ac:spMk id="31" creationId="{8B09735E-1D0B-D0B2-7E6F-FB2530423FE9}"/>
-          </ac:spMkLst>
-        </pc:spChg>
-        <pc:spChg chg="add del mod">
-          <ac:chgData name="Li, Hanchen F" userId="3aee791e-6a2d-4da7-a77b-fbdf7bf15886" providerId="ADAL" clId="{1EA8FAE0-933A-49DD-A724-68A18B8AE880}" dt="2026-02-05T05:51:24.541" v="1444" actId="208"/>
-          <ac:spMkLst>
-            <pc:docMk/>
-            <pc:sldMk cId="3834972223" sldId="258"/>
-            <ac:spMk id="32" creationId="{EF59C657-5F5A-2F68-789F-C0AD9E28364C}"/>
-          </ac:spMkLst>
-        </pc:spChg>
-        <pc:spChg chg="add mod">
-          <ac:chgData name="Li, Hanchen F" userId="3aee791e-6a2d-4da7-a77b-fbdf7bf15886" providerId="ADAL" clId="{1EA8FAE0-933A-49DD-A724-68A18B8AE880}" dt="2026-02-05T05:51:24.541" v="1444" actId="208"/>
-          <ac:spMkLst>
-            <pc:docMk/>
-            <pc:sldMk cId="3834972223" sldId="258"/>
-            <ac:spMk id="33" creationId="{626681A8-BA49-E5FE-E98F-F9F8C6A4E824}"/>
-          </ac:spMkLst>
-        </pc:spChg>
-        <pc:spChg chg="add mod">
-          <ac:chgData name="Li, Hanchen F" userId="3aee791e-6a2d-4da7-a77b-fbdf7bf15886" providerId="ADAL" clId="{1EA8FAE0-933A-49DD-A724-68A18B8AE880}" dt="2026-02-05T05:48:10.600" v="1389" actId="2711"/>
-          <ac:spMkLst>
-            <pc:docMk/>
-            <pc:sldMk cId="3834972223" sldId="258"/>
-            <ac:spMk id="34" creationId="{DAC5D89C-F766-7D0F-FCA2-402D1B167185}"/>
-          </ac:spMkLst>
-        </pc:spChg>
-        <pc:spChg chg="add mod">
-          <ac:chgData name="Li, Hanchen F" userId="3aee791e-6a2d-4da7-a77b-fbdf7bf15886" providerId="ADAL" clId="{1EA8FAE0-933A-49DD-A724-68A18B8AE880}" dt="2026-02-17T20:56:59.954" v="1732" actId="114"/>
-          <ac:spMkLst>
-            <pc:docMk/>
-            <pc:sldMk cId="3834972223" sldId="258"/>
-            <ac:spMk id="43" creationId="{E02F4E31-7EA7-6B75-9ACE-39CD2E8DB40E}"/>
-          </ac:spMkLst>
-        </pc:spChg>
-        <pc:spChg chg="add mod">
-          <ac:chgData name="Li, Hanchen F" userId="3aee791e-6a2d-4da7-a77b-fbdf7bf15886" providerId="ADAL" clId="{1EA8FAE0-933A-49DD-A724-68A18B8AE880}" dt="2026-02-17T20:56:59.954" v="1732" actId="114"/>
-          <ac:spMkLst>
-            <pc:docMk/>
-            <pc:sldMk cId="3834972223" sldId="258"/>
-            <ac:spMk id="44" creationId="{3B07C5D8-3065-F5BF-3A74-7AD5451EE6AD}"/>
-          </ac:spMkLst>
-        </pc:spChg>
-        <pc:spChg chg="add mod">
-          <ac:chgData name="Li, Hanchen F" userId="3aee791e-6a2d-4da7-a77b-fbdf7bf15886" providerId="ADAL" clId="{1EA8FAE0-933A-49DD-A724-68A18B8AE880}" dt="2026-02-17T20:56:59.954" v="1732" actId="114"/>
-          <ac:spMkLst>
-            <pc:docMk/>
-            <pc:sldMk cId="3834972223" sldId="258"/>
-            <ac:spMk id="45" creationId="{6995A01D-10ED-5ECA-D010-5A4CCFD2D214}"/>
-          </ac:spMkLst>
-        </pc:spChg>
-        <pc:spChg chg="add mod ord">
-          <ac:chgData name="Li, Hanchen F" userId="3aee791e-6a2d-4da7-a77b-fbdf7bf15886" providerId="ADAL" clId="{1EA8FAE0-933A-49DD-A724-68A18B8AE880}" dt="2026-02-05T06:07:12.737" v="1727" actId="20577"/>
-          <ac:spMkLst>
-            <pc:docMk/>
-            <pc:sldMk cId="3834972223" sldId="258"/>
-            <ac:spMk id="55" creationId="{6D4E2EF8-669F-A13E-E82A-4D6C82A96856}"/>
-          </ac:spMkLst>
-        </pc:spChg>
-        <pc:spChg chg="add mod ord topLvl">
-          <ac:chgData name="Li, Hanchen F" userId="3aee791e-6a2d-4da7-a77b-fbdf7bf15886" providerId="ADAL" clId="{1EA8FAE0-933A-49DD-A724-68A18B8AE880}" dt="2026-02-05T06:07:11.634" v="1726" actId="20577"/>
-          <ac:spMkLst>
-            <pc:docMk/>
-            <pc:sldMk cId="3834972223" sldId="258"/>
-            <ac:spMk id="97" creationId="{AC3E0CCD-375A-AF72-CE87-0F13F7941500}"/>
-          </ac:spMkLst>
-        </pc:spChg>
-        <pc:spChg chg="add mod ord topLvl">
-          <ac:chgData name="Li, Hanchen F" userId="3aee791e-6a2d-4da7-a77b-fbdf7bf15886" providerId="ADAL" clId="{1EA8FAE0-933A-49DD-A724-68A18B8AE880}" dt="2026-02-05T05:52:09.592" v="1460" actId="692"/>
-          <ac:spMkLst>
-            <pc:docMk/>
-            <pc:sldMk cId="3834972223" sldId="258"/>
-            <ac:spMk id="98" creationId="{2A24D53C-EA98-C10B-A6A5-0BB7FAAA8ADF}"/>
-          </ac:spMkLst>
-        </pc:spChg>
-        <pc:spChg chg="add mod ord">
-          <ac:chgData name="Li, Hanchen F" userId="3aee791e-6a2d-4da7-a77b-fbdf7bf15886" providerId="ADAL" clId="{1EA8FAE0-933A-49DD-A724-68A18B8AE880}" dt="2026-02-05T06:07:09.944" v="1725" actId="20577"/>
-          <ac:spMkLst>
-            <pc:docMk/>
-            <pc:sldMk cId="3834972223" sldId="258"/>
-            <ac:spMk id="106" creationId="{7CD7D3ED-91AC-3828-FD63-B770D15ABCE1}"/>
-          </ac:spMkLst>
-        </pc:spChg>
-        <pc:spChg chg="add mod ord">
-          <ac:chgData name="Li, Hanchen F" userId="3aee791e-6a2d-4da7-a77b-fbdf7bf15886" providerId="ADAL" clId="{1EA8FAE0-933A-49DD-A724-68A18B8AE880}" dt="2026-02-05T06:07:13.473" v="1728" actId="20577"/>
-          <ac:spMkLst>
-            <pc:docMk/>
-            <pc:sldMk cId="3834972223" sldId="258"/>
-            <ac:spMk id="117" creationId="{076286FC-4A81-CCDC-EDDC-6A5438AA0DE1}"/>
-          </ac:spMkLst>
-        </pc:spChg>
-        <pc:cxnChg chg="add mod ord">
-          <ac:chgData name="Li, Hanchen F" userId="3aee791e-6a2d-4da7-a77b-fbdf7bf15886" providerId="ADAL" clId="{1EA8FAE0-933A-49DD-A724-68A18B8AE880}" dt="2026-02-05T05:52:25.130" v="1463" actId="208"/>
-          <ac:cxnSpMkLst>
-            <pc:docMk/>
-            <pc:sldMk cId="3834972223" sldId="258"/>
-            <ac:cxnSpMk id="99" creationId="{6DFE06E0-995C-4068-A809-66F653A6E67E}"/>
-          </ac:cxnSpMkLst>
-        </pc:cxnChg>
-        <pc:cxnChg chg="add mod ord">
-          <ac:chgData name="Li, Hanchen F" userId="3aee791e-6a2d-4da7-a77b-fbdf7bf15886" providerId="ADAL" clId="{1EA8FAE0-933A-49DD-A724-68A18B8AE880}" dt="2026-02-05T05:52:25.130" v="1463" actId="208"/>
-          <ac:cxnSpMkLst>
-            <pc:docMk/>
-            <pc:sldMk cId="3834972223" sldId="258"/>
-            <ac:cxnSpMk id="116" creationId="{9042C0EE-CADB-09A5-14D4-ECBC1C764CA6}"/>
-          </ac:cxnSpMkLst>
-        </pc:cxnChg>
-        <pc:cxnChg chg="add mod">
-          <ac:chgData name="Li, Hanchen F" userId="3aee791e-6a2d-4da7-a77b-fbdf7bf15886" providerId="ADAL" clId="{1EA8FAE0-933A-49DD-A724-68A18B8AE880}" dt="2026-02-05T05:52:25.130" v="1463" actId="208"/>
-          <ac:cxnSpMkLst>
-            <pc:docMk/>
-            <pc:sldMk cId="3834972223" sldId="258"/>
-            <ac:cxnSpMk id="120" creationId="{457877DB-DC3E-EE3F-C769-B0592D9ECA39}"/>
-          </ac:cxnSpMkLst>
-        </pc:cxnChg>
-        <pc:cxnChg chg="add mod">
-          <ac:chgData name="Li, Hanchen F" userId="3aee791e-6a2d-4da7-a77b-fbdf7bf15886" providerId="ADAL" clId="{1EA8FAE0-933A-49DD-A724-68A18B8AE880}" dt="2026-02-05T05:52:25.130" v="1463" actId="208"/>
-          <ac:cxnSpMkLst>
-            <pc:docMk/>
-            <pc:sldMk cId="3834972223" sldId="258"/>
-            <ac:cxnSpMk id="122" creationId="{92FBC2CE-D479-7095-DF70-42429BBA047F}"/>
-          </ac:cxnSpMkLst>
-        </pc:cxnChg>
-        <pc:cxnChg chg="add mod">
-          <ac:chgData name="Li, Hanchen F" userId="3aee791e-6a2d-4da7-a77b-fbdf7bf15886" providerId="ADAL" clId="{1EA8FAE0-933A-49DD-A724-68A18B8AE880}" dt="2026-02-05T05:52:25.130" v="1463" actId="208"/>
-          <ac:cxnSpMkLst>
-            <pc:docMk/>
-            <pc:sldMk cId="3834972223" sldId="258"/>
-            <ac:cxnSpMk id="124" creationId="{FBDD178E-1E33-3C34-0998-888BA31F4CAC}"/>
-          </ac:cxnSpMkLst>
-        </pc:cxnChg>
-        <pc:cxnChg chg="add mod">
-          <ac:chgData name="Li, Hanchen F" userId="3aee791e-6a2d-4da7-a77b-fbdf7bf15886" providerId="ADAL" clId="{1EA8FAE0-933A-49DD-A724-68A18B8AE880}" dt="2026-02-05T05:52:25.130" v="1463" actId="208"/>
-          <ac:cxnSpMkLst>
-            <pc:docMk/>
-            <pc:sldMk cId="3834972223" sldId="258"/>
-            <ac:cxnSpMk id="126" creationId="{D29CC4EF-1A19-A5F1-A7DC-689DDB175889}"/>
-          </ac:cxnSpMkLst>
-        </pc:cxnChg>
-      </pc:sldChg>
       <pc:sldChg chg="addSp delSp modSp add mod">
-        <pc:chgData name="Li, Hanchen F" userId="3aee791e-6a2d-4da7-a77b-fbdf7bf15886" providerId="ADAL" clId="{1EA8FAE0-933A-49DD-A724-68A18B8AE880}" dt="2026-02-17T20:57:16.598" v="1735" actId="114"/>
+        <pc:chgData name="Li, Hanchen F" userId="3aee791e-6a2d-4da7-a77b-fbdf7bf15886" providerId="ADAL" clId="{1EA8FAE0-933A-49DD-A724-68A18B8AE880}" dt="2026-03-16T16:30:39.627" v="1759" actId="1076"/>
         <pc:sldMkLst>
           <pc:docMk/>
           <pc:sldMk cId="3629937204" sldId="259"/>
         </pc:sldMkLst>
         <pc:spChg chg="mod">
-          <ac:chgData name="Li, Hanchen F" userId="3aee791e-6a2d-4da7-a77b-fbdf7bf15886" providerId="ADAL" clId="{1EA8FAE0-933A-49DD-A724-68A18B8AE880}" dt="2026-02-05T05:52:59.765" v="1479" actId="208"/>
-          <ac:spMkLst>
-            <pc:docMk/>
-            <pc:sldMk cId="3629937204" sldId="259"/>
-            <ac:spMk id="2" creationId="{3CAAAD34-FE6A-B9E4-A70D-F37D84D74315}"/>
-          </ac:spMkLst>
-        </pc:spChg>
-        <pc:spChg chg="mod topLvl">
-          <ac:chgData name="Li, Hanchen F" userId="3aee791e-6a2d-4da7-a77b-fbdf7bf15886" providerId="ADAL" clId="{1EA8FAE0-933A-49DD-A724-68A18B8AE880}" dt="2026-02-05T05:52:59.765" v="1479" actId="208"/>
-          <ac:spMkLst>
-            <pc:docMk/>
-            <pc:sldMk cId="3629937204" sldId="259"/>
-            <ac:spMk id="3" creationId="{C548E602-2A6A-1583-7E9D-68E8927BFAAB}"/>
-          </ac:spMkLst>
-        </pc:spChg>
-        <pc:spChg chg="mod topLvl">
-          <ac:chgData name="Li, Hanchen F" userId="3aee791e-6a2d-4da7-a77b-fbdf7bf15886" providerId="ADAL" clId="{1EA8FAE0-933A-49DD-A724-68A18B8AE880}" dt="2026-02-05T05:52:59.765" v="1479" actId="208"/>
-          <ac:spMkLst>
-            <pc:docMk/>
-            <pc:sldMk cId="3629937204" sldId="259"/>
-            <ac:spMk id="4" creationId="{FB01EF7E-AF13-A8A1-E930-32F21072984C}"/>
-          </ac:spMkLst>
-        </pc:spChg>
-        <pc:spChg chg="mod topLvl">
-          <ac:chgData name="Li, Hanchen F" userId="3aee791e-6a2d-4da7-a77b-fbdf7bf15886" providerId="ADAL" clId="{1EA8FAE0-933A-49DD-A724-68A18B8AE880}" dt="2026-02-05T05:52:59.765" v="1479" actId="208"/>
-          <ac:spMkLst>
-            <pc:docMk/>
-            <pc:sldMk cId="3629937204" sldId="259"/>
-            <ac:spMk id="8" creationId="{ADD9FACA-F8AE-3042-D0EA-572F51C160F5}"/>
-          </ac:spMkLst>
-        </pc:spChg>
-        <pc:spChg chg="mod">
-          <ac:chgData name="Li, Hanchen F" userId="3aee791e-6a2d-4da7-a77b-fbdf7bf15886" providerId="ADAL" clId="{1EA8FAE0-933A-49DD-A724-68A18B8AE880}" dt="2026-02-05T05:47:39.237" v="1384"/>
-          <ac:spMkLst>
-            <pc:docMk/>
-            <pc:sldMk cId="3629937204" sldId="259"/>
-            <ac:spMk id="11" creationId="{82DD2601-D50C-6F6F-2DCC-4A5EF109FDE0}"/>
-          </ac:spMkLst>
-        </pc:spChg>
-        <pc:spChg chg="mod">
-          <ac:chgData name="Li, Hanchen F" userId="3aee791e-6a2d-4da7-a77b-fbdf7bf15886" providerId="ADAL" clId="{1EA8FAE0-933A-49DD-A724-68A18B8AE880}" dt="2026-02-17T20:57:08.693" v="1733" actId="114"/>
-          <ac:spMkLst>
-            <pc:docMk/>
-            <pc:sldMk cId="3629937204" sldId="259"/>
-            <ac:spMk id="15" creationId="{DB793CD5-53F0-EE6C-2511-3C35DA442EF0}"/>
-          </ac:spMkLst>
-        </pc:spChg>
-        <pc:spChg chg="mod">
-          <ac:chgData name="Li, Hanchen F" userId="3aee791e-6a2d-4da7-a77b-fbdf7bf15886" providerId="ADAL" clId="{1EA8FAE0-933A-49DD-A724-68A18B8AE880}" dt="2026-02-17T20:57:08.693" v="1733" actId="114"/>
-          <ac:spMkLst>
-            <pc:docMk/>
-            <pc:sldMk cId="3629937204" sldId="259"/>
-            <ac:spMk id="16" creationId="{F5539EFD-AE04-2672-2FA1-5FCC93F3BDE8}"/>
-          </ac:spMkLst>
-        </pc:spChg>
-        <pc:spChg chg="mod">
-          <ac:chgData name="Li, Hanchen F" userId="3aee791e-6a2d-4da7-a77b-fbdf7bf15886" providerId="ADAL" clId="{1EA8FAE0-933A-49DD-A724-68A18B8AE880}" dt="2026-02-17T20:57:08.693" v="1733" actId="114"/>
-          <ac:spMkLst>
-            <pc:docMk/>
-            <pc:sldMk cId="3629937204" sldId="259"/>
-            <ac:spMk id="17" creationId="{1E2807BA-A4DE-88A2-5070-386EEFA75F86}"/>
-          </ac:spMkLst>
-        </pc:spChg>
-        <pc:spChg chg="mod">
-          <ac:chgData name="Li, Hanchen F" userId="3aee791e-6a2d-4da7-a77b-fbdf7bf15886" providerId="ADAL" clId="{1EA8FAE0-933A-49DD-A724-68A18B8AE880}" dt="2026-02-05T05:52:59.765" v="1479" actId="208"/>
-          <ac:spMkLst>
-            <pc:docMk/>
-            <pc:sldMk cId="3629937204" sldId="259"/>
-            <ac:spMk id="18" creationId="{48BABCF4-CF0F-B5B2-DC0A-3254C7737B40}"/>
-          </ac:spMkLst>
-        </pc:spChg>
-        <pc:spChg chg="add mod ord">
-          <ac:chgData name="Li, Hanchen F" userId="3aee791e-6a2d-4da7-a77b-fbdf7bf15886" providerId="ADAL" clId="{1EA8FAE0-933A-49DD-A724-68A18B8AE880}" dt="2026-02-05T06:05:02.713" v="1698" actId="1076"/>
+          <ac:chgData name="Li, Hanchen F" userId="3aee791e-6a2d-4da7-a77b-fbdf7bf15886" providerId="ADAL" clId="{1EA8FAE0-933A-49DD-A724-68A18B8AE880}" dt="2026-03-16T16:30:39.627" v="1759" actId="1076"/>
           <ac:spMkLst>
             <pc:docMk/>
             <pc:sldMk cId="3629937204" sldId="259"/>
             <ac:spMk id="19" creationId="{05DD7E1A-3AFE-89F1-8750-632571690AB1}"/>
           </ac:spMkLst>
         </pc:spChg>
-        <pc:spChg chg="mod topLvl">
-          <ac:chgData name="Li, Hanchen F" userId="3aee791e-6a2d-4da7-a77b-fbdf7bf15886" providerId="ADAL" clId="{1EA8FAE0-933A-49DD-A724-68A18B8AE880}" dt="2026-02-05T05:52:59.765" v="1479" actId="208"/>
-          <ac:spMkLst>
-            <pc:docMk/>
-            <pc:sldMk cId="3629937204" sldId="259"/>
-            <ac:spMk id="20" creationId="{74E17905-0679-7A2C-AAA5-E015F3CB0F98}"/>
-          </ac:spMkLst>
-        </pc:spChg>
         <pc:spChg chg="add mod ord">
-          <ac:chgData name="Li, Hanchen F" userId="3aee791e-6a2d-4da7-a77b-fbdf7bf15886" providerId="ADAL" clId="{1EA8FAE0-933A-49DD-A724-68A18B8AE880}" dt="2026-02-05T06:05:17.703" v="1702" actId="14100"/>
+          <ac:chgData name="Li, Hanchen F" userId="3aee791e-6a2d-4da7-a77b-fbdf7bf15886" providerId="ADAL" clId="{1EA8FAE0-933A-49DD-A724-68A18B8AE880}" dt="2026-03-16T16:30:39.627" v="1759" actId="1076"/>
           <ac:spMkLst>
             <pc:docMk/>
             <pc:sldMk cId="3629937204" sldId="259"/>
             <ac:spMk id="21" creationId="{11E7C393-8688-8B96-A604-85CFD019ABC8}"/>
           </ac:spMkLst>
         </pc:spChg>
-        <pc:spChg chg="mod">
-          <ac:chgData name="Li, Hanchen F" userId="3aee791e-6a2d-4da7-a77b-fbdf7bf15886" providerId="ADAL" clId="{1EA8FAE0-933A-49DD-A724-68A18B8AE880}" dt="2026-02-05T05:52:59.765" v="1479" actId="208"/>
-          <ac:spMkLst>
-            <pc:docMk/>
-            <pc:sldMk cId="3629937204" sldId="259"/>
-            <ac:spMk id="23" creationId="{3AC4DF19-27EB-E32F-C04C-F1E56E98D9A4}"/>
-          </ac:spMkLst>
-        </pc:spChg>
-        <pc:spChg chg="mod">
-          <ac:chgData name="Li, Hanchen F" userId="3aee791e-6a2d-4da7-a77b-fbdf7bf15886" providerId="ADAL" clId="{1EA8FAE0-933A-49DD-A724-68A18B8AE880}" dt="2026-02-05T05:52:59.765" v="1479" actId="208"/>
-          <ac:spMkLst>
-            <pc:docMk/>
-            <pc:sldMk cId="3629937204" sldId="259"/>
-            <ac:spMk id="28" creationId="{D44DBE1A-2A81-E141-6728-FE55B0D15134}"/>
-          </ac:spMkLst>
-        </pc:spChg>
-        <pc:spChg chg="mod">
-          <ac:chgData name="Li, Hanchen F" userId="3aee791e-6a2d-4da7-a77b-fbdf7bf15886" providerId="ADAL" clId="{1EA8FAE0-933A-49DD-A724-68A18B8AE880}" dt="2026-02-05T05:52:59.765" v="1479" actId="208"/>
-          <ac:spMkLst>
-            <pc:docMk/>
-            <pc:sldMk cId="3629937204" sldId="259"/>
-            <ac:spMk id="30" creationId="{64E9A49E-9BD9-A46C-D061-40972B456322}"/>
-          </ac:spMkLst>
-        </pc:spChg>
-        <pc:spChg chg="mod">
-          <ac:chgData name="Li, Hanchen F" userId="3aee791e-6a2d-4da7-a77b-fbdf7bf15886" providerId="ADAL" clId="{1EA8FAE0-933A-49DD-A724-68A18B8AE880}" dt="2026-02-05T05:52:59.765" v="1479" actId="208"/>
-          <ac:spMkLst>
-            <pc:docMk/>
-            <pc:sldMk cId="3629937204" sldId="259"/>
-            <ac:spMk id="31" creationId="{6D9EC491-1221-ABD6-6396-FBA0A463248E}"/>
-          </ac:spMkLst>
-        </pc:spChg>
         <pc:spChg chg="add mod">
-          <ac:chgData name="Li, Hanchen F" userId="3aee791e-6a2d-4da7-a77b-fbdf7bf15886" providerId="ADAL" clId="{1EA8FAE0-933A-49DD-A724-68A18B8AE880}" dt="2026-02-05T06:06:26.958" v="1718" actId="1076"/>
+          <ac:chgData name="Li, Hanchen F" userId="3aee791e-6a2d-4da7-a77b-fbdf7bf15886" providerId="ADAL" clId="{1EA8FAE0-933A-49DD-A724-68A18B8AE880}" dt="2026-03-16T16:25:54.538" v="1733" actId="1076"/>
           <ac:spMkLst>
             <pc:docMk/>
             <pc:sldMk cId="3629937204" sldId="259"/>
@@ -539,15 +165,7 @@
           </ac:spMkLst>
         </pc:spChg>
         <pc:spChg chg="add mod">
-          <ac:chgData name="Li, Hanchen F" userId="3aee791e-6a2d-4da7-a77b-fbdf7bf15886" providerId="ADAL" clId="{1EA8FAE0-933A-49DD-A724-68A18B8AE880}" dt="2026-02-05T06:00:39.391" v="1638" actId="1076"/>
-          <ac:spMkLst>
-            <pc:docMk/>
-            <pc:sldMk cId="3629937204" sldId="259"/>
-            <ac:spMk id="39" creationId="{AB21A739-B8E0-4FE6-B418-ED5C8C6C6ED1}"/>
-          </ac:spMkLst>
-        </pc:spChg>
-        <pc:spChg chg="add mod">
-          <ac:chgData name="Li, Hanchen F" userId="3aee791e-6a2d-4da7-a77b-fbdf7bf15886" providerId="ADAL" clId="{1EA8FAE0-933A-49DD-A724-68A18B8AE880}" dt="2026-02-05T06:02:19.284" v="1643" actId="1076"/>
+          <ac:chgData name="Li, Hanchen F" userId="3aee791e-6a2d-4da7-a77b-fbdf7bf15886" providerId="ADAL" clId="{1EA8FAE0-933A-49DD-A724-68A18B8AE880}" dt="2026-03-16T16:25:54.538" v="1733" actId="1076"/>
           <ac:spMkLst>
             <pc:docMk/>
             <pc:sldMk cId="3629937204" sldId="259"/>
@@ -555,7 +173,7 @@
           </ac:spMkLst>
         </pc:spChg>
         <pc:spChg chg="add mod">
-          <ac:chgData name="Li, Hanchen F" userId="3aee791e-6a2d-4da7-a77b-fbdf7bf15886" providerId="ADAL" clId="{1EA8FAE0-933A-49DD-A724-68A18B8AE880}" dt="2026-02-05T06:03:54.864" v="1646" actId="1076"/>
+          <ac:chgData name="Li, Hanchen F" userId="3aee791e-6a2d-4da7-a77b-fbdf7bf15886" providerId="ADAL" clId="{1EA8FAE0-933A-49DD-A724-68A18B8AE880}" dt="2026-03-16T16:25:54.538" v="1733" actId="1076"/>
           <ac:spMkLst>
             <pc:docMk/>
             <pc:sldMk cId="3629937204" sldId="259"/>
@@ -563,7 +181,7 @@
           </ac:spMkLst>
         </pc:spChg>
         <pc:spChg chg="add mod">
-          <ac:chgData name="Li, Hanchen F" userId="3aee791e-6a2d-4da7-a77b-fbdf7bf15886" providerId="ADAL" clId="{1EA8FAE0-933A-49DD-A724-68A18B8AE880}" dt="2026-02-05T06:04:02.206" v="1648" actId="1076"/>
+          <ac:chgData name="Li, Hanchen F" userId="3aee791e-6a2d-4da7-a77b-fbdf7bf15886" providerId="ADAL" clId="{1EA8FAE0-933A-49DD-A724-68A18B8AE880}" dt="2026-03-16T16:25:54.538" v="1733" actId="1076"/>
           <ac:spMkLst>
             <pc:docMk/>
             <pc:sldMk cId="3629937204" sldId="259"/>
@@ -571,7 +189,7 @@
           </ac:spMkLst>
         </pc:spChg>
         <pc:spChg chg="add mod">
-          <ac:chgData name="Li, Hanchen F" userId="3aee791e-6a2d-4da7-a77b-fbdf7bf15886" providerId="ADAL" clId="{1EA8FAE0-933A-49DD-A724-68A18B8AE880}" dt="2026-02-05T06:05:10.542" v="1700" actId="1076"/>
+          <ac:chgData name="Li, Hanchen F" userId="3aee791e-6a2d-4da7-a77b-fbdf7bf15886" providerId="ADAL" clId="{1EA8FAE0-933A-49DD-A724-68A18B8AE880}" dt="2026-03-16T16:30:39.627" v="1759" actId="1076"/>
           <ac:spMkLst>
             <pc:docMk/>
             <pc:sldMk cId="3629937204" sldId="259"/>
@@ -579,7 +197,7 @@
           </ac:spMkLst>
         </pc:spChg>
         <pc:spChg chg="add mod">
-          <ac:chgData name="Li, Hanchen F" userId="3aee791e-6a2d-4da7-a77b-fbdf7bf15886" providerId="ADAL" clId="{1EA8FAE0-933A-49DD-A724-68A18B8AE880}" dt="2026-02-05T06:05:05.386" v="1699" actId="1076"/>
+          <ac:chgData name="Li, Hanchen F" userId="3aee791e-6a2d-4da7-a77b-fbdf7bf15886" providerId="ADAL" clId="{1EA8FAE0-933A-49DD-A724-68A18B8AE880}" dt="2026-03-16T16:30:39.627" v="1759" actId="1076"/>
           <ac:spMkLst>
             <pc:docMk/>
             <pc:sldMk cId="3629937204" sldId="259"/>
@@ -587,7 +205,7 @@
           </ac:spMkLst>
         </pc:spChg>
         <pc:spChg chg="add mod">
-          <ac:chgData name="Li, Hanchen F" userId="3aee791e-6a2d-4da7-a77b-fbdf7bf15886" providerId="ADAL" clId="{1EA8FAE0-933A-49DD-A724-68A18B8AE880}" dt="2026-02-05T06:05:47.482" v="1714" actId="1076"/>
+          <ac:chgData name="Li, Hanchen F" userId="3aee791e-6a2d-4da7-a77b-fbdf7bf15886" providerId="ADAL" clId="{1EA8FAE0-933A-49DD-A724-68A18B8AE880}" dt="2026-03-16T16:30:39.627" v="1759" actId="1076"/>
           <ac:spMkLst>
             <pc:docMk/>
             <pc:sldMk cId="3629937204" sldId="259"/>
@@ -595,7 +213,7 @@
           </ac:spMkLst>
         </pc:spChg>
         <pc:spChg chg="add mod">
-          <ac:chgData name="Li, Hanchen F" userId="3aee791e-6a2d-4da7-a77b-fbdf7bf15886" providerId="ADAL" clId="{1EA8FAE0-933A-49DD-A724-68A18B8AE880}" dt="2026-02-05T06:06:03.842" v="1717" actId="207"/>
+          <ac:chgData name="Li, Hanchen F" userId="3aee791e-6a2d-4da7-a77b-fbdf7bf15886" providerId="ADAL" clId="{1EA8FAE0-933A-49DD-A724-68A18B8AE880}" dt="2026-03-16T16:30:39.627" v="1759" actId="1076"/>
           <ac:spMkLst>
             <pc:docMk/>
             <pc:sldMk cId="3629937204" sldId="259"/>
@@ -603,75 +221,466 @@
           </ac:spMkLst>
         </pc:spChg>
         <pc:spChg chg="add mod">
-          <ac:chgData name="Li, Hanchen F" userId="3aee791e-6a2d-4da7-a77b-fbdf7bf15886" providerId="ADAL" clId="{1EA8FAE0-933A-49DD-A724-68A18B8AE880}" dt="2026-02-05T06:07:05.468" v="1724" actId="20577"/>
+          <ac:chgData name="Li, Hanchen F" userId="3aee791e-6a2d-4da7-a77b-fbdf7bf15886" providerId="ADAL" clId="{1EA8FAE0-933A-49DD-A724-68A18B8AE880}" dt="2026-03-16T16:25:54.538" v="1733" actId="1076"/>
           <ac:spMkLst>
             <pc:docMk/>
             <pc:sldMk cId="3629937204" sldId="259"/>
             <ac:spMk id="59" creationId="{99691316-2869-D306-99E3-877DBA2E91E0}"/>
           </ac:spMkLst>
         </pc:spChg>
-        <pc:spChg chg="add mod">
-          <ac:chgData name="Li, Hanchen F" userId="3aee791e-6a2d-4da7-a77b-fbdf7bf15886" providerId="ADAL" clId="{1EA8FAE0-933A-49DD-A724-68A18B8AE880}" dt="2026-02-05T06:07:33.353" v="1731" actId="1076"/>
+      </pc:sldChg>
+      <pc:sldChg chg="addSp delSp modSp add mod">
+        <pc:chgData name="Li, Hanchen F" userId="3aee791e-6a2d-4da7-a77b-fbdf7bf15886" providerId="ADAL" clId="{1EA8FAE0-933A-49DD-A724-68A18B8AE880}" dt="2026-03-16T17:07:16.468" v="3199" actId="478"/>
+        <pc:sldMkLst>
+          <pc:docMk/>
+          <pc:sldMk cId="3601829480" sldId="260"/>
+        </pc:sldMkLst>
+        <pc:spChg chg="del">
+          <ac:chgData name="Li, Hanchen F" userId="3aee791e-6a2d-4da7-a77b-fbdf7bf15886" providerId="ADAL" clId="{1EA8FAE0-933A-49DD-A724-68A18B8AE880}" dt="2026-03-16T16:25:59.833" v="1735" actId="478"/>
           <ac:spMkLst>
             <pc:docMk/>
-            <pc:sldMk cId="3629937204" sldId="259"/>
-            <ac:spMk id="61" creationId="{B3CAF2B1-3BD0-4456-8CF1-34A10E9D3671}"/>
+            <pc:sldMk cId="3601829480" sldId="260"/>
+            <ac:spMk id="19" creationId="{0BDA3B8F-B9E3-9E95-80BE-49D7385DBB96}"/>
+          </ac:spMkLst>
+        </pc:spChg>
+        <pc:spChg chg="del">
+          <ac:chgData name="Li, Hanchen F" userId="3aee791e-6a2d-4da7-a77b-fbdf7bf15886" providerId="ADAL" clId="{1EA8FAE0-933A-49DD-A724-68A18B8AE880}" dt="2026-03-16T16:25:59.833" v="1735" actId="478"/>
+          <ac:spMkLst>
+            <pc:docMk/>
+            <pc:sldMk cId="3601829480" sldId="260"/>
+            <ac:spMk id="21" creationId="{3C9B579D-8682-D674-9D1B-6D3C19A920B7}"/>
+          </ac:spMkLst>
+        </pc:spChg>
+        <pc:spChg chg="del">
+          <ac:chgData name="Li, Hanchen F" userId="3aee791e-6a2d-4da7-a77b-fbdf7bf15886" providerId="ADAL" clId="{1EA8FAE0-933A-49DD-A724-68A18B8AE880}" dt="2026-03-16T16:25:59.833" v="1735" actId="478"/>
+          <ac:spMkLst>
+            <pc:docMk/>
+            <pc:sldMk cId="3601829480" sldId="260"/>
+            <ac:spMk id="36" creationId="{DEFE4BA7-0FCC-10B0-6C32-54E1EB88162C}"/>
+          </ac:spMkLst>
+        </pc:spChg>
+        <pc:spChg chg="del">
+          <ac:chgData name="Li, Hanchen F" userId="3aee791e-6a2d-4da7-a77b-fbdf7bf15886" providerId="ADAL" clId="{1EA8FAE0-933A-49DD-A724-68A18B8AE880}" dt="2026-03-16T16:25:59.833" v="1735" actId="478"/>
+          <ac:spMkLst>
+            <pc:docMk/>
+            <pc:sldMk cId="3601829480" sldId="260"/>
+            <ac:spMk id="39" creationId="{3EA8722F-F984-F347-7A49-76BA83DC2B0B}"/>
+          </ac:spMkLst>
+        </pc:spChg>
+        <pc:spChg chg="add mod">
+          <ac:chgData name="Li, Hanchen F" userId="3aee791e-6a2d-4da7-a77b-fbdf7bf15886" providerId="ADAL" clId="{1EA8FAE0-933A-49DD-A724-68A18B8AE880}" dt="2026-03-16T16:32:01.102" v="1784" actId="14100"/>
+          <ac:spMkLst>
+            <pc:docMk/>
+            <pc:sldMk cId="3601829480" sldId="260"/>
+            <ac:spMk id="43" creationId="{A787041E-AD0B-771E-F74E-4F1B271118D5}"/>
+          </ac:spMkLst>
+        </pc:spChg>
+        <pc:spChg chg="add mod">
+          <ac:chgData name="Li, Hanchen F" userId="3aee791e-6a2d-4da7-a77b-fbdf7bf15886" providerId="ADAL" clId="{1EA8FAE0-933A-49DD-A724-68A18B8AE880}" dt="2026-03-16T16:31:58.830" v="1783" actId="14100"/>
+          <ac:spMkLst>
+            <pc:docMk/>
+            <pc:sldMk cId="3601829480" sldId="260"/>
+            <ac:spMk id="44" creationId="{E966EC97-29EC-C43A-652E-6D976C644771}"/>
+          </ac:spMkLst>
+        </pc:spChg>
+        <pc:spChg chg="del">
+          <ac:chgData name="Li, Hanchen F" userId="3aee791e-6a2d-4da7-a77b-fbdf7bf15886" providerId="ADAL" clId="{1EA8FAE0-933A-49DD-A724-68A18B8AE880}" dt="2026-03-16T16:25:59.833" v="1735" actId="478"/>
+          <ac:spMkLst>
+            <pc:docMk/>
+            <pc:sldMk cId="3601829480" sldId="260"/>
+            <ac:spMk id="46" creationId="{375A9314-3EDC-A56E-180F-2EC6F09FC037}"/>
+          </ac:spMkLst>
+        </pc:spChg>
+        <pc:spChg chg="del">
+          <ac:chgData name="Li, Hanchen F" userId="3aee791e-6a2d-4da7-a77b-fbdf7bf15886" providerId="ADAL" clId="{1EA8FAE0-933A-49DD-A724-68A18B8AE880}" dt="2026-03-16T16:25:59.833" v="1735" actId="478"/>
+          <ac:spMkLst>
+            <pc:docMk/>
+            <pc:sldMk cId="3601829480" sldId="260"/>
+            <ac:spMk id="47" creationId="{A686F468-D012-5E5C-CD02-4F9B54174A62}"/>
+          </ac:spMkLst>
+        </pc:spChg>
+        <pc:spChg chg="del">
+          <ac:chgData name="Li, Hanchen F" userId="3aee791e-6a2d-4da7-a77b-fbdf7bf15886" providerId="ADAL" clId="{1EA8FAE0-933A-49DD-A724-68A18B8AE880}" dt="2026-03-16T16:25:59.833" v="1735" actId="478"/>
+          <ac:spMkLst>
+            <pc:docMk/>
+            <pc:sldMk cId="3601829480" sldId="260"/>
+            <ac:spMk id="49" creationId="{F3ED2291-528A-CB9E-2BA3-79C7F6CB00A5}"/>
+          </ac:spMkLst>
+        </pc:spChg>
+        <pc:spChg chg="mod">
+          <ac:chgData name="Li, Hanchen F" userId="3aee791e-6a2d-4da7-a77b-fbdf7bf15886" providerId="ADAL" clId="{1EA8FAE0-933A-49DD-A724-68A18B8AE880}" dt="2026-03-16T16:33:25.142" v="1821"/>
+          <ac:spMkLst>
+            <pc:docMk/>
+            <pc:sldMk cId="3601829480" sldId="260"/>
+            <ac:spMk id="50" creationId="{F83A2DB2-AC1F-C768-D738-2CAB84590019}"/>
+          </ac:spMkLst>
+        </pc:spChg>
+        <pc:spChg chg="mod">
+          <ac:chgData name="Li, Hanchen F" userId="3aee791e-6a2d-4da7-a77b-fbdf7bf15886" providerId="ADAL" clId="{1EA8FAE0-933A-49DD-A724-68A18B8AE880}" dt="2026-03-16T16:33:25.142" v="1821"/>
+          <ac:spMkLst>
+            <pc:docMk/>
+            <pc:sldMk cId="3601829480" sldId="260"/>
+            <ac:spMk id="52" creationId="{2528140B-CFEE-B29A-406A-29B2482137EE}"/>
+          </ac:spMkLst>
+        </pc:spChg>
+        <pc:spChg chg="mod">
+          <ac:chgData name="Li, Hanchen F" userId="3aee791e-6a2d-4da7-a77b-fbdf7bf15886" providerId="ADAL" clId="{1EA8FAE0-933A-49DD-A724-68A18B8AE880}" dt="2026-03-16T16:33:25.142" v="1821"/>
+          <ac:spMkLst>
+            <pc:docMk/>
+            <pc:sldMk cId="3601829480" sldId="260"/>
+            <ac:spMk id="53" creationId="{6B295CF3-0BFD-10BF-98BD-8DA94BD4170D}"/>
+          </ac:spMkLst>
+        </pc:spChg>
+        <pc:spChg chg="mod">
+          <ac:chgData name="Li, Hanchen F" userId="3aee791e-6a2d-4da7-a77b-fbdf7bf15886" providerId="ADAL" clId="{1EA8FAE0-933A-49DD-A724-68A18B8AE880}" dt="2026-03-16T16:33:25.142" v="1821"/>
+          <ac:spMkLst>
+            <pc:docMk/>
+            <pc:sldMk cId="3601829480" sldId="260"/>
+            <ac:spMk id="54" creationId="{FA802924-B260-75DE-7253-0D97D86471A6}"/>
+          </ac:spMkLst>
+        </pc:spChg>
+        <pc:spChg chg="del">
+          <ac:chgData name="Li, Hanchen F" userId="3aee791e-6a2d-4da7-a77b-fbdf7bf15886" providerId="ADAL" clId="{1EA8FAE0-933A-49DD-A724-68A18B8AE880}" dt="2026-03-16T16:25:59.833" v="1735" actId="478"/>
+          <ac:spMkLst>
+            <pc:docMk/>
+            <pc:sldMk cId="3601829480" sldId="260"/>
+            <ac:spMk id="55" creationId="{6A610530-F7BA-4081-813B-27156A2E3B63}"/>
+          </ac:spMkLst>
+        </pc:spChg>
+        <pc:spChg chg="del">
+          <ac:chgData name="Li, Hanchen F" userId="3aee791e-6a2d-4da7-a77b-fbdf7bf15886" providerId="ADAL" clId="{1EA8FAE0-933A-49DD-A724-68A18B8AE880}" dt="2026-03-16T16:25:59.833" v="1735" actId="478"/>
+          <ac:spMkLst>
+            <pc:docMk/>
+            <pc:sldMk cId="3601829480" sldId="260"/>
+            <ac:spMk id="59" creationId="{193A67B2-0E88-78E3-A110-DA6F6475EDEC}"/>
+          </ac:spMkLst>
+        </pc:spChg>
+        <pc:spChg chg="del">
+          <ac:chgData name="Li, Hanchen F" userId="3aee791e-6a2d-4da7-a77b-fbdf7bf15886" providerId="ADAL" clId="{1EA8FAE0-933A-49DD-A724-68A18B8AE880}" dt="2026-03-16T16:25:59.833" v="1735" actId="478"/>
+          <ac:spMkLst>
+            <pc:docMk/>
+            <pc:sldMk cId="3601829480" sldId="260"/>
+            <ac:spMk id="61" creationId="{C7D05C56-2E98-D159-22FD-3CB6D8AE3B12}"/>
+          </ac:spMkLst>
+        </pc:spChg>
+        <pc:spChg chg="add del mod">
+          <ac:chgData name="Li, Hanchen F" userId="3aee791e-6a2d-4da7-a77b-fbdf7bf15886" providerId="ADAL" clId="{1EA8FAE0-933A-49DD-A724-68A18B8AE880}" dt="2026-03-16T16:36:00.623" v="1878" actId="478"/>
+          <ac:spMkLst>
+            <pc:docMk/>
+            <pc:sldMk cId="3601829480" sldId="260"/>
+            <ac:spMk id="62" creationId="{49856CA0-E28F-EE34-35AE-D6E4519E8461}"/>
+          </ac:spMkLst>
+        </pc:spChg>
+        <pc:spChg chg="add mod">
+          <ac:chgData name="Li, Hanchen F" userId="3aee791e-6a2d-4da7-a77b-fbdf7bf15886" providerId="ADAL" clId="{1EA8FAE0-933A-49DD-A724-68A18B8AE880}" dt="2026-03-16T16:51:05.657" v="3010" actId="14100"/>
+          <ac:spMkLst>
+            <pc:docMk/>
+            <pc:sldMk cId="3601829480" sldId="260"/>
+            <ac:spMk id="63" creationId="{F114FEDF-DB33-6D27-0C7B-402685C3FEA6}"/>
+          </ac:spMkLst>
+        </pc:spChg>
+        <pc:spChg chg="add mod">
+          <ac:chgData name="Li, Hanchen F" userId="3aee791e-6a2d-4da7-a77b-fbdf7bf15886" providerId="ADAL" clId="{1EA8FAE0-933A-49DD-A724-68A18B8AE880}" dt="2026-03-16T16:44:23.496" v="2917" actId="1076"/>
+          <ac:spMkLst>
+            <pc:docMk/>
+            <pc:sldMk cId="3601829480" sldId="260"/>
+            <ac:spMk id="92" creationId="{791F1E7C-ADF1-8CD5-4AAD-B4FE4565B178}"/>
+          </ac:spMkLst>
+        </pc:spChg>
+        <pc:spChg chg="add del mod">
+          <ac:chgData name="Li, Hanchen F" userId="3aee791e-6a2d-4da7-a77b-fbdf7bf15886" providerId="ADAL" clId="{1EA8FAE0-933A-49DD-A724-68A18B8AE880}" dt="2026-03-16T16:45:58.946" v="2936" actId="478"/>
+          <ac:spMkLst>
+            <pc:docMk/>
+            <pc:sldMk cId="3601829480" sldId="260"/>
+            <ac:spMk id="94" creationId="{B32E1554-A733-E049-4E34-63FEFFFBBEB2}"/>
+          </ac:spMkLst>
+        </pc:spChg>
+        <pc:spChg chg="add mod">
+          <ac:chgData name="Li, Hanchen F" userId="3aee791e-6a2d-4da7-a77b-fbdf7bf15886" providerId="ADAL" clId="{1EA8FAE0-933A-49DD-A724-68A18B8AE880}" dt="2026-03-16T16:57:49.035" v="3105" actId="1076"/>
+          <ac:spMkLst>
+            <pc:docMk/>
+            <pc:sldMk cId="3601829480" sldId="260"/>
+            <ac:spMk id="96" creationId="{223E6F7E-EAC4-91F7-59DE-C034C907ADB0}"/>
+          </ac:spMkLst>
+        </pc:spChg>
+        <pc:spChg chg="add mod">
+          <ac:chgData name="Li, Hanchen F" userId="3aee791e-6a2d-4da7-a77b-fbdf7bf15886" providerId="ADAL" clId="{1EA8FAE0-933A-49DD-A724-68A18B8AE880}" dt="2026-03-16T16:53:04.930" v="3048" actId="207"/>
+          <ac:spMkLst>
+            <pc:docMk/>
+            <pc:sldMk cId="3601829480" sldId="260"/>
+            <ac:spMk id="132" creationId="{FEB56916-96C1-7BAE-CDDC-4445CCE47D29}"/>
+          </ac:spMkLst>
+        </pc:spChg>
+        <pc:spChg chg="add mod">
+          <ac:chgData name="Li, Hanchen F" userId="3aee791e-6a2d-4da7-a77b-fbdf7bf15886" providerId="ADAL" clId="{1EA8FAE0-933A-49DD-A724-68A18B8AE880}" dt="2026-03-16T16:55:34.242" v="3074" actId="14100"/>
+          <ac:spMkLst>
+            <pc:docMk/>
+            <pc:sldMk cId="3601829480" sldId="260"/>
+            <ac:spMk id="136" creationId="{9500AF6D-4FC1-F159-5F63-E87E7AFA2541}"/>
+          </ac:spMkLst>
+        </pc:spChg>
+        <pc:spChg chg="add del mod">
+          <ac:chgData name="Li, Hanchen F" userId="3aee791e-6a2d-4da7-a77b-fbdf7bf15886" providerId="ADAL" clId="{1EA8FAE0-933A-49DD-A724-68A18B8AE880}" dt="2026-03-16T16:57:51.109" v="3106" actId="478"/>
+          <ac:spMkLst>
+            <pc:docMk/>
+            <pc:sldMk cId="3601829480" sldId="260"/>
+            <ac:spMk id="148" creationId="{686255BF-BECA-1C16-7628-37F6D245DE76}"/>
+          </ac:spMkLst>
+        </pc:spChg>
+        <pc:spChg chg="add del mod">
+          <ac:chgData name="Li, Hanchen F" userId="3aee791e-6a2d-4da7-a77b-fbdf7bf15886" providerId="ADAL" clId="{1EA8FAE0-933A-49DD-A724-68A18B8AE880}" dt="2026-03-16T16:59:38.695" v="3130" actId="478"/>
+          <ac:spMkLst>
+            <pc:docMk/>
+            <pc:sldMk cId="3601829480" sldId="260"/>
+            <ac:spMk id="149" creationId="{D6AD3BCF-B246-03EC-9672-42D595F687CE}"/>
+          </ac:spMkLst>
+        </pc:spChg>
+        <pc:spChg chg="add mod">
+          <ac:chgData name="Li, Hanchen F" userId="3aee791e-6a2d-4da7-a77b-fbdf7bf15886" providerId="ADAL" clId="{1EA8FAE0-933A-49DD-A724-68A18B8AE880}" dt="2026-03-16T17:06:26.596" v="3198" actId="20577"/>
+          <ac:spMkLst>
+            <pc:docMk/>
+            <pc:sldMk cId="3601829480" sldId="260"/>
+            <ac:spMk id="157" creationId="{C0D6F6BC-1F30-7B2F-2C54-BE620694E6E6}"/>
           </ac:spMkLst>
         </pc:spChg>
         <pc:grpChg chg="add mod">
-          <ac:chgData name="Li, Hanchen F" userId="3aee791e-6a2d-4da7-a77b-fbdf7bf15886" providerId="ADAL" clId="{1EA8FAE0-933A-49DD-A724-68A18B8AE880}" dt="2026-02-05T05:47:43.806" v="1385" actId="1076"/>
+          <ac:chgData name="Li, Hanchen F" userId="3aee791e-6a2d-4da7-a77b-fbdf7bf15886" providerId="ADAL" clId="{1EA8FAE0-933A-49DD-A724-68A18B8AE880}" dt="2026-03-16T16:35:26.314" v="1867" actId="1076"/>
           <ac:grpSpMkLst>
             <pc:docMk/>
-            <pc:sldMk cId="3629937204" sldId="259"/>
-            <ac:grpSpMk id="5" creationId="{C5D41095-A693-E3AE-A84C-B804E5A12ABE}"/>
+            <pc:sldMk cId="3601829480" sldId="260"/>
+            <ac:grpSpMk id="45" creationId="{FF58B426-DE29-A57F-8B57-2B3E3E28F296}"/>
           </ac:grpSpMkLst>
         </pc:grpChg>
-        <pc:grpChg chg="mod ord">
-          <ac:chgData name="Li, Hanchen F" userId="3aee791e-6a2d-4da7-a77b-fbdf7bf15886" providerId="ADAL" clId="{1EA8FAE0-933A-49DD-A724-68A18B8AE880}" dt="2026-02-05T05:54:56.102" v="1495" actId="167"/>
+        <pc:grpChg chg="add mod">
+          <ac:chgData name="Li, Hanchen F" userId="3aee791e-6a2d-4da7-a77b-fbdf7bf15886" providerId="ADAL" clId="{1EA8FAE0-933A-49DD-A724-68A18B8AE880}" dt="2026-03-16T16:33:32.476" v="1829" actId="1076"/>
           <ac:grpSpMkLst>
             <pc:docMk/>
-            <pc:sldMk cId="3629937204" sldId="259"/>
-            <ac:grpSpMk id="9" creationId="{6AE8C16B-C4DD-D435-FDBD-C0BA7ABFF70C}"/>
+            <pc:sldMk cId="3601829480" sldId="260"/>
+            <ac:grpSpMk id="48" creationId="{00C62610-6248-D9F6-F870-1310F77B9D78}"/>
           </ac:grpSpMkLst>
         </pc:grpChg>
-        <pc:graphicFrameChg chg="add del mod ord">
-          <ac:chgData name="Li, Hanchen F" userId="3aee791e-6a2d-4da7-a77b-fbdf7bf15886" providerId="ADAL" clId="{1EA8FAE0-933A-49DD-A724-68A18B8AE880}" dt="2026-02-17T20:57:16.598" v="1735" actId="114"/>
-          <ac:graphicFrameMkLst>
+        <pc:grpChg chg="add mod">
+          <ac:chgData name="Li, Hanchen F" userId="3aee791e-6a2d-4da7-a77b-fbdf7bf15886" providerId="ADAL" clId="{1EA8FAE0-933A-49DD-A724-68A18B8AE880}" dt="2026-03-16T16:43:38.141" v="2911" actId="14861"/>
+          <ac:grpSpMkLst>
             <pc:docMk/>
-            <pc:sldMk cId="3629937204" sldId="259"/>
-            <ac:graphicFrameMk id="12" creationId="{6A77711E-A40C-59C7-E1AE-CC6963F911B8}"/>
-          </ac:graphicFrameMkLst>
-        </pc:graphicFrameChg>
+            <pc:sldMk cId="3601829480" sldId="260"/>
+            <ac:grpSpMk id="93" creationId="{244AA9C1-5E07-A14B-0D4C-E801B1456F50}"/>
+          </ac:grpSpMkLst>
+        </pc:grpChg>
+        <pc:grpChg chg="add mod">
+          <ac:chgData name="Li, Hanchen F" userId="3aee791e-6a2d-4da7-a77b-fbdf7bf15886" providerId="ADAL" clId="{1EA8FAE0-933A-49DD-A724-68A18B8AE880}" dt="2026-03-16T16:46:40.996" v="2953" actId="1076"/>
+          <ac:grpSpMkLst>
+            <pc:docMk/>
+            <pc:sldMk cId="3601829480" sldId="260"/>
+            <ac:grpSpMk id="97" creationId="{726F47DF-DC4D-A9E1-35B8-F9671DEE85EC}"/>
+          </ac:grpSpMkLst>
+        </pc:grpChg>
+        <pc:grpChg chg="add mod">
+          <ac:chgData name="Li, Hanchen F" userId="3aee791e-6a2d-4da7-a77b-fbdf7bf15886" providerId="ADAL" clId="{1EA8FAE0-933A-49DD-A724-68A18B8AE880}" dt="2026-03-16T16:48:16.311" v="2966" actId="1076"/>
+          <ac:grpSpMkLst>
+            <pc:docMk/>
+            <pc:sldMk cId="3601829480" sldId="260"/>
+            <ac:grpSpMk id="104" creationId="{F6B8C7C2-79F6-AEFF-0EB7-0CC98069A858}"/>
+          </ac:grpSpMkLst>
+        </pc:grpChg>
+        <pc:grpChg chg="add mod">
+          <ac:chgData name="Li, Hanchen F" userId="3aee791e-6a2d-4da7-a77b-fbdf7bf15886" providerId="ADAL" clId="{1EA8FAE0-933A-49DD-A724-68A18B8AE880}" dt="2026-03-16T16:49:38.482" v="2990"/>
+          <ac:grpSpMkLst>
+            <pc:docMk/>
+            <pc:sldMk cId="3601829480" sldId="260"/>
+            <ac:grpSpMk id="117" creationId="{323D098F-BFD7-CB49-30F1-211C01F31ACC}"/>
+          </ac:grpSpMkLst>
+        </pc:grpChg>
+        <pc:grpChg chg="add mod">
+          <ac:chgData name="Li, Hanchen F" userId="3aee791e-6a2d-4da7-a77b-fbdf7bf15886" providerId="ADAL" clId="{1EA8FAE0-933A-49DD-A724-68A18B8AE880}" dt="2026-03-16T16:56:45.320" v="3089" actId="14100"/>
+          <ac:grpSpMkLst>
+            <pc:docMk/>
+            <pc:sldMk cId="3601829480" sldId="260"/>
+            <ac:grpSpMk id="139" creationId="{38130447-C12B-A7B8-EB4C-5922EB5047DA}"/>
+          </ac:grpSpMkLst>
+        </pc:grpChg>
+        <pc:picChg chg="add mod modCrop">
+          <ac:chgData name="Li, Hanchen F" userId="3aee791e-6a2d-4da7-a77b-fbdf7bf15886" providerId="ADAL" clId="{1EA8FAE0-933A-49DD-A724-68A18B8AE880}" dt="2026-03-16T16:31:52.685" v="1781" actId="164"/>
+          <ac:picMkLst>
+            <pc:docMk/>
+            <pc:sldMk cId="3601829480" sldId="260"/>
+            <ac:picMk id="34" creationId="{84503412-639B-F7DD-9180-D6A8BDB36F6C}"/>
+          </ac:picMkLst>
+        </pc:picChg>
+        <pc:picChg chg="add mod modCrop">
+          <ac:chgData name="Li, Hanchen F" userId="3aee791e-6a2d-4da7-a77b-fbdf7bf15886" providerId="ADAL" clId="{1EA8FAE0-933A-49DD-A724-68A18B8AE880}" dt="2026-03-16T16:50:36.567" v="3003" actId="1076"/>
+          <ac:picMkLst>
+            <pc:docMk/>
+            <pc:sldMk cId="3601829480" sldId="260"/>
+            <ac:picMk id="37" creationId="{C09BB204-9C6C-3C04-182A-FEBA2E4B5413}"/>
+          </ac:picMkLst>
+        </pc:picChg>
+        <pc:picChg chg="add del mod ord modCrop">
+          <ac:chgData name="Li, Hanchen F" userId="3aee791e-6a2d-4da7-a77b-fbdf7bf15886" providerId="ADAL" clId="{1EA8FAE0-933A-49DD-A724-68A18B8AE880}" dt="2026-03-16T16:44:37.491" v="2924" actId="1038"/>
+          <ac:picMkLst>
+            <pc:docMk/>
+            <pc:sldMk cId="3601829480" sldId="260"/>
+            <ac:picMk id="38" creationId="{B226DDD7-0D3C-C8C4-F666-4CA16C1D3391}"/>
+          </ac:picMkLst>
+        </pc:picChg>
+        <pc:picChg chg="add mod modCrop">
+          <ac:chgData name="Li, Hanchen F" userId="3aee791e-6a2d-4da7-a77b-fbdf7bf15886" providerId="ADAL" clId="{1EA8FAE0-933A-49DD-A724-68A18B8AE880}" dt="2026-03-16T16:36:08.428" v="1879" actId="14100"/>
+          <ac:picMkLst>
+            <pc:docMk/>
+            <pc:sldMk cId="3601829480" sldId="260"/>
+            <ac:picMk id="42" creationId="{B632C22F-E55E-2C15-352E-71B3B3268CCD}"/>
+          </ac:picMkLst>
+        </pc:picChg>
+        <pc:picChg chg="add del">
+          <ac:chgData name="Li, Hanchen F" userId="3aee791e-6a2d-4da7-a77b-fbdf7bf15886" providerId="ADAL" clId="{1EA8FAE0-933A-49DD-A724-68A18B8AE880}" dt="2026-03-16T17:01:07.034" v="3132" actId="22"/>
+          <ac:picMkLst>
+            <pc:docMk/>
+            <pc:sldMk cId="3601829480" sldId="260"/>
+            <ac:picMk id="152" creationId="{6D7934B7-6D72-DD45-CDEC-908478269F33}"/>
+          </ac:picMkLst>
+        </pc:picChg>
+        <pc:picChg chg="add del mod">
+          <ac:chgData name="Li, Hanchen F" userId="3aee791e-6a2d-4da7-a77b-fbdf7bf15886" providerId="ADAL" clId="{1EA8FAE0-933A-49DD-A724-68A18B8AE880}" dt="2026-03-16T17:05:21.514" v="3139" actId="478"/>
+          <ac:picMkLst>
+            <pc:docMk/>
+            <pc:sldMk cId="3601829480" sldId="260"/>
+            <ac:picMk id="154" creationId="{CE7E5B28-B3EF-A7A1-C877-59BF443AFEDD}"/>
+          </ac:picMkLst>
+        </pc:picChg>
+        <pc:picChg chg="add mod">
+          <ac:chgData name="Li, Hanchen F" userId="3aee791e-6a2d-4da7-a77b-fbdf7bf15886" providerId="ADAL" clId="{1EA8FAE0-933A-49DD-A724-68A18B8AE880}" dt="2026-03-16T17:06:23.419" v="3196" actId="1076"/>
+          <ac:picMkLst>
+            <pc:docMk/>
+            <pc:sldMk cId="3601829480" sldId="260"/>
+            <ac:picMk id="156" creationId="{7F952B11-04CF-2366-921E-1E3D86B8DA42}"/>
+          </ac:picMkLst>
+        </pc:picChg>
         <pc:cxnChg chg="mod">
-          <ac:chgData name="Li, Hanchen F" userId="3aee791e-6a2d-4da7-a77b-fbdf7bf15886" providerId="ADAL" clId="{1EA8FAE0-933A-49DD-A724-68A18B8AE880}" dt="2026-02-05T05:47:39.237" v="1384"/>
+          <ac:chgData name="Li, Hanchen F" userId="3aee791e-6a2d-4da7-a77b-fbdf7bf15886" providerId="ADAL" clId="{1EA8FAE0-933A-49DD-A724-68A18B8AE880}" dt="2026-03-16T16:33:25.142" v="1821"/>
           <ac:cxnSpMkLst>
             <pc:docMk/>
-            <pc:sldMk cId="3629937204" sldId="259"/>
-            <ac:cxnSpMk id="14" creationId="{FE813F94-6C03-32EA-B737-B589BC228B9C}"/>
+            <pc:sldMk cId="3601829480" sldId="260"/>
+            <ac:cxnSpMk id="51" creationId="{5B64D195-D00F-F8FF-5414-EE23D96BB564}"/>
           </ac:cxnSpMkLst>
         </pc:cxnChg>
         <pc:cxnChg chg="mod">
-          <ac:chgData name="Li, Hanchen F" userId="3aee791e-6a2d-4da7-a77b-fbdf7bf15886" providerId="ADAL" clId="{1EA8FAE0-933A-49DD-A724-68A18B8AE880}" dt="2026-02-05T05:47:39.237" v="1384"/>
+          <ac:chgData name="Li, Hanchen F" userId="3aee791e-6a2d-4da7-a77b-fbdf7bf15886" providerId="ADAL" clId="{1EA8FAE0-933A-49DD-A724-68A18B8AE880}" dt="2026-03-16T16:33:25.142" v="1821"/>
           <ac:cxnSpMkLst>
             <pc:docMk/>
-            <pc:sldMk cId="3629937204" sldId="259"/>
-            <ac:cxnSpMk id="27" creationId="{9E15C07B-2F30-6879-24C1-573E6362B48E}"/>
+            <pc:sldMk cId="3601829480" sldId="260"/>
+            <ac:cxnSpMk id="56" creationId="{39A60258-A7E0-FB61-230B-476DBE02FABA}"/>
+          </ac:cxnSpMkLst>
+        </pc:cxnChg>
+        <pc:cxnChg chg="add del mod">
+          <ac:chgData name="Li, Hanchen F" userId="3aee791e-6a2d-4da7-a77b-fbdf7bf15886" providerId="ADAL" clId="{1EA8FAE0-933A-49DD-A724-68A18B8AE880}" dt="2026-03-16T17:07:16.468" v="3199" actId="478"/>
+          <ac:cxnSpMkLst>
+            <pc:docMk/>
+            <pc:sldMk cId="3601829480" sldId="260"/>
+            <ac:cxnSpMk id="65" creationId="{2D982D7A-48D5-8845-B3FE-DFFFAA9772EC}"/>
+          </ac:cxnSpMkLst>
+        </pc:cxnChg>
+        <pc:cxnChg chg="add del">
+          <ac:chgData name="Li, Hanchen F" userId="3aee791e-6a2d-4da7-a77b-fbdf7bf15886" providerId="ADAL" clId="{1EA8FAE0-933A-49DD-A724-68A18B8AE880}" dt="2026-03-16T16:39:17.260" v="2620" actId="11529"/>
+          <ac:cxnSpMkLst>
+            <pc:docMk/>
+            <pc:sldMk cId="3601829480" sldId="260"/>
+            <ac:cxnSpMk id="67" creationId="{C9C8A10B-DB7A-1BF7-D0CB-900C69969165}"/>
+          </ac:cxnSpMkLst>
+        </pc:cxnChg>
+        <pc:cxnChg chg="add del">
+          <ac:chgData name="Li, Hanchen F" userId="3aee791e-6a2d-4da7-a77b-fbdf7bf15886" providerId="ADAL" clId="{1EA8FAE0-933A-49DD-A724-68A18B8AE880}" dt="2026-03-16T16:39:28.484" v="2622" actId="11529"/>
+          <ac:cxnSpMkLst>
+            <pc:docMk/>
+            <pc:sldMk cId="3601829480" sldId="260"/>
+            <ac:cxnSpMk id="69" creationId="{A0EC0ABB-CB23-04BD-F1AC-12D71AAC20B5}"/>
+          </ac:cxnSpMkLst>
+        </pc:cxnChg>
+        <pc:cxnChg chg="add del">
+          <ac:chgData name="Li, Hanchen F" userId="3aee791e-6a2d-4da7-a77b-fbdf7bf15886" providerId="ADAL" clId="{1EA8FAE0-933A-49DD-A724-68A18B8AE880}" dt="2026-03-16T16:39:36.684" v="2624" actId="11529"/>
+          <ac:cxnSpMkLst>
+            <pc:docMk/>
+            <pc:sldMk cId="3601829480" sldId="260"/>
+            <ac:cxnSpMk id="71" creationId="{A8940E59-B21B-542E-4848-0B4D2F4EB784}"/>
           </ac:cxnSpMkLst>
         </pc:cxnChg>
         <pc:cxnChg chg="add mod">
-          <ac:chgData name="Li, Hanchen F" userId="3aee791e-6a2d-4da7-a77b-fbdf7bf15886" providerId="ADAL" clId="{1EA8FAE0-933A-49DD-A724-68A18B8AE880}" dt="2026-02-05T06:06:59.904" v="1722" actId="1076"/>
+          <ac:chgData name="Li, Hanchen F" userId="3aee791e-6a2d-4da7-a77b-fbdf7bf15886" providerId="ADAL" clId="{1EA8FAE0-933A-49DD-A724-68A18B8AE880}" dt="2026-03-16T16:43:14.933" v="2664" actId="164"/>
           <ac:cxnSpMkLst>
             <pc:docMk/>
-            <pc:sldMk cId="3629937204" sldId="259"/>
-            <ac:cxnSpMk id="58" creationId="{A22E3420-C4BE-7C0F-2A86-1B1B9297665D}"/>
+            <pc:sldMk cId="3601829480" sldId="260"/>
+            <ac:cxnSpMk id="73" creationId="{A3A91A2E-7852-FC83-BF92-BF52241D1080}"/>
           </ac:cxnSpMkLst>
         </pc:cxnChg>
         <pc:cxnChg chg="add mod">
-          <ac:chgData name="Li, Hanchen F" userId="3aee791e-6a2d-4da7-a77b-fbdf7bf15886" providerId="ADAL" clId="{1EA8FAE0-933A-49DD-A724-68A18B8AE880}" dt="2026-02-05T06:07:33.353" v="1731" actId="1076"/>
+          <ac:chgData name="Li, Hanchen F" userId="3aee791e-6a2d-4da7-a77b-fbdf7bf15886" providerId="ADAL" clId="{1EA8FAE0-933A-49DD-A724-68A18B8AE880}" dt="2026-03-16T16:43:14.933" v="2664" actId="164"/>
           <ac:cxnSpMkLst>
             <pc:docMk/>
-            <pc:sldMk cId="3629937204" sldId="259"/>
-            <ac:cxnSpMk id="60" creationId="{4BC4C509-5C9B-FBA1-F846-0CB57C1DA4CA}"/>
+            <pc:sldMk cId="3601829480" sldId="260"/>
+            <ac:cxnSpMk id="81" creationId="{490367D2-3871-1604-4466-5893EC9691DD}"/>
+          </ac:cxnSpMkLst>
+        </pc:cxnChg>
+        <pc:cxnChg chg="mod">
+          <ac:chgData name="Li, Hanchen F" userId="3aee791e-6a2d-4da7-a77b-fbdf7bf15886" providerId="ADAL" clId="{1EA8FAE0-933A-49DD-A724-68A18B8AE880}" dt="2026-03-16T16:57:46.812" v="3103" actId="692"/>
+          <ac:cxnSpMkLst>
+            <pc:docMk/>
+            <pc:sldMk cId="3601829480" sldId="260"/>
+            <ac:cxnSpMk id="98" creationId="{5B8710CF-6427-DFDB-2CC3-B7F5BC317BAA}"/>
+          </ac:cxnSpMkLst>
+        </pc:cxnChg>
+        <pc:cxnChg chg="mod">
+          <ac:chgData name="Li, Hanchen F" userId="3aee791e-6a2d-4da7-a77b-fbdf7bf15886" providerId="ADAL" clId="{1EA8FAE0-933A-49DD-A724-68A18B8AE880}" dt="2026-03-16T16:57:49.035" v="3105" actId="1076"/>
+          <ac:cxnSpMkLst>
+            <pc:docMk/>
+            <pc:sldMk cId="3601829480" sldId="260"/>
+            <ac:cxnSpMk id="99" creationId="{D30FDA9A-B44C-7A28-85F1-967F50148D04}"/>
+          </ac:cxnSpMkLst>
+        </pc:cxnChg>
+        <pc:cxnChg chg="mod">
+          <ac:chgData name="Li, Hanchen F" userId="3aee791e-6a2d-4da7-a77b-fbdf7bf15886" providerId="ADAL" clId="{1EA8FAE0-933A-49DD-A724-68A18B8AE880}" dt="2026-03-16T16:48:56.442" v="2977" actId="14100"/>
+          <ac:cxnSpMkLst>
+            <pc:docMk/>
+            <pc:sldMk cId="3601829480" sldId="260"/>
+            <ac:cxnSpMk id="105" creationId="{F12C5782-1761-F746-A380-93E323ABC10D}"/>
+          </ac:cxnSpMkLst>
+        </pc:cxnChg>
+        <pc:cxnChg chg="mod">
+          <ac:chgData name="Li, Hanchen F" userId="3aee791e-6a2d-4da7-a77b-fbdf7bf15886" providerId="ADAL" clId="{1EA8FAE0-933A-49DD-A724-68A18B8AE880}" dt="2026-03-16T16:55:37.342" v="3075" actId="14100"/>
+          <ac:cxnSpMkLst>
+            <pc:docMk/>
+            <pc:sldMk cId="3601829480" sldId="260"/>
+            <ac:cxnSpMk id="106" creationId="{367B6F0B-1F0E-9BB2-A188-C5E687862AA6}"/>
+          </ac:cxnSpMkLst>
+        </pc:cxnChg>
+        <pc:cxnChg chg="mod">
+          <ac:chgData name="Li, Hanchen F" userId="3aee791e-6a2d-4da7-a77b-fbdf7bf15886" providerId="ADAL" clId="{1EA8FAE0-933A-49DD-A724-68A18B8AE880}" dt="2026-03-16T16:50:18.023" v="2999" actId="692"/>
+          <ac:cxnSpMkLst>
+            <pc:docMk/>
+            <pc:sldMk cId="3601829480" sldId="260"/>
+            <ac:cxnSpMk id="118" creationId="{FADF621A-A40E-F801-D6BD-44BCB595F9FA}"/>
+          </ac:cxnSpMkLst>
+        </pc:cxnChg>
+        <pc:cxnChg chg="mod">
+          <ac:chgData name="Li, Hanchen F" userId="3aee791e-6a2d-4da7-a77b-fbdf7bf15886" providerId="ADAL" clId="{1EA8FAE0-933A-49DD-A724-68A18B8AE880}" dt="2026-03-16T16:53:00.585" v="3046" actId="14100"/>
+          <ac:cxnSpMkLst>
+            <pc:docMk/>
+            <pc:sldMk cId="3601829480" sldId="260"/>
+            <ac:cxnSpMk id="119" creationId="{116040EE-5590-EDE1-2067-00412E180FFB}"/>
+          </ac:cxnSpMkLst>
+        </pc:cxnChg>
+        <pc:cxnChg chg="mod">
+          <ac:chgData name="Li, Hanchen F" userId="3aee791e-6a2d-4da7-a77b-fbdf7bf15886" providerId="ADAL" clId="{1EA8FAE0-933A-49DD-A724-68A18B8AE880}" dt="2026-03-16T16:57:06.988" v="3096" actId="14100"/>
+          <ac:cxnSpMkLst>
+            <pc:docMk/>
+            <pc:sldMk cId="3601829480" sldId="260"/>
+            <ac:cxnSpMk id="140" creationId="{C7B6B979-85D8-D7CC-B537-7B16ED999594}"/>
+          </ac:cxnSpMkLst>
+        </pc:cxnChg>
+        <pc:cxnChg chg="mod">
+          <ac:chgData name="Li, Hanchen F" userId="3aee791e-6a2d-4da7-a77b-fbdf7bf15886" providerId="ADAL" clId="{1EA8FAE0-933A-49DD-A724-68A18B8AE880}" dt="2026-03-16T16:59:38.695" v="3130" actId="478"/>
+          <ac:cxnSpMkLst>
+            <pc:docMk/>
+            <pc:sldMk cId="3601829480" sldId="260"/>
+            <ac:cxnSpMk id="141" creationId="{532268C6-1CF2-232B-3609-71DF18EADE88}"/>
           </ac:cxnSpMkLst>
         </pc:cxnChg>
       </pc:sldChg>
@@ -2620,16 +2629,6 @@
                   </a:defRPr>
                 </a:pPr>
                 <a:r>
-                  <a:rPr lang="en-US" altLang="zh-CN" sz="1800" b="0" i="1" dirty="0">
-                    <a:solidFill>
-                      <a:schemeClr val="tx1"/>
-                    </a:solidFill>
-                    <a:latin typeface="Helvetica" panose="020B0604020202020204" pitchFamily="34" charset="0"/>
-                    <a:cs typeface="Helvetica" panose="020B0604020202020204" pitchFamily="34" charset="0"/>
-                  </a:rPr>
-                  <a:t>x</a:t>
-                </a:r>
-                <a:r>
                   <a:rPr lang="en-US" altLang="zh-CN" sz="1800" b="0" dirty="0">
                     <a:solidFill>
                       <a:schemeClr val="tx1"/>
@@ -2637,7 +2636,7 @@
                     <a:latin typeface="Helvetica" panose="020B0604020202020204" pitchFamily="34" charset="0"/>
                     <a:cs typeface="Helvetica" panose="020B0604020202020204" pitchFamily="34" charset="0"/>
                   </a:rPr>
-                  <a:t> (m)</a:t>
+                  <a:t>x (m)</a:t>
                 </a:r>
                 <a:endParaRPr lang="zh-CN" altLang="en-US" sz="1800" b="0" dirty="0">
                   <a:solidFill>
@@ -2764,7 +2763,7 @@
                   </a:defRPr>
                 </a:pPr>
                 <a:r>
-                  <a:rPr lang="en-US" altLang="zh-CN" sz="1800" i="1" dirty="0">
+                  <a:rPr lang="en-US" altLang="zh-CN" sz="1800" dirty="0">
                     <a:solidFill>
                       <a:schemeClr val="tx1"/>
                     </a:solidFill>
@@ -3633,7 +3632,7 @@
           <a:p>
             <a:fld id="{DF1088C5-931A-42D2-8AA4-FA289862AAD0}" type="datetimeFigureOut">
               <a:rPr lang="zh-CN" altLang="en-US" smtClean="0"/>
-              <a:t>2026/2/17</a:t>
+              <a:t>2026/3/16</a:t>
             </a:fld>
             <a:endParaRPr lang="zh-CN" altLang="en-US"/>
           </a:p>
@@ -4092,6 +4091,114 @@
 </p:notes>
 </file>
 
+<file path=ppt/notesSlides/notesSlide3.xml><?xml version="1.0" encoding="utf-8"?>
+<p:notes xmlns:a="http://schemas.openxmlformats.org/drawingml/2006/main" xmlns:r="http://schemas.openxmlformats.org/officeDocument/2006/relationships" xmlns:p="http://schemas.openxmlformats.org/presentationml/2006/main">
+  <p:cSld>
+    <p:spTree>
+      <p:nvGrpSpPr>
+        <p:cNvPr id="1" name="">
+          <a:extLst>
+            <a:ext uri="{FF2B5EF4-FFF2-40B4-BE49-F238E27FC236}">
+              <a16:creationId xmlns:a16="http://schemas.microsoft.com/office/drawing/2014/main" id="{65C95781-E18C-33FC-9A52-2115B3DE77F7}"/>
+            </a:ext>
+          </a:extLst>
+        </p:cNvPr>
+        <p:cNvGrpSpPr/>
+        <p:nvPr/>
+      </p:nvGrpSpPr>
+      <p:grpSpPr>
+        <a:xfrm>
+          <a:off x="0" y="0"/>
+          <a:ext cx="0" cy="0"/>
+          <a:chOff x="0" y="0"/>
+          <a:chExt cx="0" cy="0"/>
+        </a:xfrm>
+      </p:grpSpPr>
+      <p:sp>
+        <p:nvSpPr>
+          <p:cNvPr id="2" name="幻灯片图像占位符 1">
+            <a:extLst>
+              <a:ext uri="{FF2B5EF4-FFF2-40B4-BE49-F238E27FC236}">
+                <a16:creationId xmlns:a16="http://schemas.microsoft.com/office/drawing/2014/main" id="{D45AEFA7-8265-7C89-EA14-636900BBDF35}"/>
+              </a:ext>
+            </a:extLst>
+          </p:cNvPr>
+          <p:cNvSpPr>
+            <a:spLocks noGrp="1" noRot="1" noChangeAspect="1"/>
+          </p:cNvSpPr>
+          <p:nvPr>
+            <p:ph type="sldImg"/>
+          </p:nvPr>
+        </p:nvSpPr>
+        <p:spPr/>
+      </p:sp>
+      <p:sp>
+        <p:nvSpPr>
+          <p:cNvPr id="3" name="备注占位符 2">
+            <a:extLst>
+              <a:ext uri="{FF2B5EF4-FFF2-40B4-BE49-F238E27FC236}">
+                <a16:creationId xmlns:a16="http://schemas.microsoft.com/office/drawing/2014/main" id="{06717B9C-7937-D60C-00ED-B5C447712AA0}"/>
+              </a:ext>
+            </a:extLst>
+          </p:cNvPr>
+          <p:cNvSpPr>
+            <a:spLocks noGrp="1"/>
+          </p:cNvSpPr>
+          <p:nvPr>
+            <p:ph type="body" idx="1"/>
+          </p:nvPr>
+        </p:nvSpPr>
+        <p:spPr/>
+        <p:txBody>
+          <a:bodyPr/>
+          <a:lstStyle/>
+          <a:p>
+            <a:endParaRPr lang="zh-CN" altLang="en-US" dirty="0"/>
+          </a:p>
+        </p:txBody>
+      </p:sp>
+      <p:sp>
+        <p:nvSpPr>
+          <p:cNvPr id="4" name="灯片编号占位符 3">
+            <a:extLst>
+              <a:ext uri="{FF2B5EF4-FFF2-40B4-BE49-F238E27FC236}">
+                <a16:creationId xmlns:a16="http://schemas.microsoft.com/office/drawing/2014/main" id="{6A46AAF7-B05D-9227-9BE4-91C24C34B3E0}"/>
+              </a:ext>
+            </a:extLst>
+          </p:cNvPr>
+          <p:cNvSpPr>
+            <a:spLocks noGrp="1"/>
+          </p:cNvSpPr>
+          <p:nvPr>
+            <p:ph type="sldNum" sz="quarter" idx="5"/>
+          </p:nvPr>
+        </p:nvSpPr>
+        <p:spPr/>
+        <p:txBody>
+          <a:bodyPr/>
+          <a:lstStyle/>
+          <a:p>
+            <a:fld id="{AF077E88-3244-4C0E-BEFE-A6A75CD3D1BB}" type="slidenum">
+              <a:rPr lang="zh-CN" altLang="en-US" smtClean="0"/>
+              <a:t>3</a:t>
+            </a:fld>
+            <a:endParaRPr lang="zh-CN" altLang="en-US"/>
+          </a:p>
+        </p:txBody>
+      </p:sp>
+    </p:spTree>
+    <p:extLst>
+      <p:ext uri="{BB962C8B-B14F-4D97-AF65-F5344CB8AC3E}">
+        <p14:creationId xmlns:p14="http://schemas.microsoft.com/office/powerpoint/2010/main" val="469018389"/>
+      </p:ext>
+    </p:extLst>
+  </p:cSld>
+  <p:clrMapOvr>
+    <a:masterClrMapping/>
+  </p:clrMapOvr>
+</p:notes>
+</file>
+
 <file path=ppt/slideLayouts/slideLayout1.xml><?xml version="1.0" encoding="utf-8"?>
 <p:sldLayout xmlns:a="http://schemas.openxmlformats.org/drawingml/2006/main" xmlns:r="http://schemas.openxmlformats.org/officeDocument/2006/relationships" xmlns:p="http://schemas.openxmlformats.org/presentationml/2006/main" type="title" preserve="1">
   <p:cSld name="标题幻灯片">
@@ -4223,7 +4330,7 @@
           <a:p>
             <a:fld id="{3CAF1464-0EA4-453D-A90B-03B04D244405}" type="datetimeFigureOut">
               <a:rPr lang="zh-CN" altLang="en-US" smtClean="0"/>
-              <a:t>2026/2/17</a:t>
+              <a:t>2026/3/16</a:t>
             </a:fld>
             <a:endParaRPr lang="zh-CN" altLang="en-US"/>
           </a:p>
@@ -4393,7 +4500,7 @@
           <a:p>
             <a:fld id="{3CAF1464-0EA4-453D-A90B-03B04D244405}" type="datetimeFigureOut">
               <a:rPr lang="zh-CN" altLang="en-US" smtClean="0"/>
-              <a:t>2026/2/17</a:t>
+              <a:t>2026/3/16</a:t>
             </a:fld>
             <a:endParaRPr lang="zh-CN" altLang="en-US"/>
           </a:p>
@@ -4573,7 +4680,7 @@
           <a:p>
             <a:fld id="{3CAF1464-0EA4-453D-A90B-03B04D244405}" type="datetimeFigureOut">
               <a:rPr lang="zh-CN" altLang="en-US" smtClean="0"/>
-              <a:t>2026/2/17</a:t>
+              <a:t>2026/3/16</a:t>
             </a:fld>
             <a:endParaRPr lang="zh-CN" altLang="en-US"/>
           </a:p>
@@ -4743,7 +4850,7 @@
           <a:p>
             <a:fld id="{3CAF1464-0EA4-453D-A90B-03B04D244405}" type="datetimeFigureOut">
               <a:rPr lang="zh-CN" altLang="en-US" smtClean="0"/>
-              <a:t>2026/2/17</a:t>
+              <a:t>2026/3/16</a:t>
             </a:fld>
             <a:endParaRPr lang="zh-CN" altLang="en-US"/>
           </a:p>
@@ -4989,7 +5096,7 @@
           <a:p>
             <a:fld id="{3CAF1464-0EA4-453D-A90B-03B04D244405}" type="datetimeFigureOut">
               <a:rPr lang="zh-CN" altLang="en-US" smtClean="0"/>
-              <a:t>2026/2/17</a:t>
+              <a:t>2026/3/16</a:t>
             </a:fld>
             <a:endParaRPr lang="zh-CN" altLang="en-US"/>
           </a:p>
@@ -5221,7 +5328,7 @@
           <a:p>
             <a:fld id="{3CAF1464-0EA4-453D-A90B-03B04D244405}" type="datetimeFigureOut">
               <a:rPr lang="zh-CN" altLang="en-US" smtClean="0"/>
-              <a:t>2026/2/17</a:t>
+              <a:t>2026/3/16</a:t>
             </a:fld>
             <a:endParaRPr lang="zh-CN" altLang="en-US"/>
           </a:p>
@@ -5588,7 +5695,7 @@
           <a:p>
             <a:fld id="{3CAF1464-0EA4-453D-A90B-03B04D244405}" type="datetimeFigureOut">
               <a:rPr lang="zh-CN" altLang="en-US" smtClean="0"/>
-              <a:t>2026/2/17</a:t>
+              <a:t>2026/3/16</a:t>
             </a:fld>
             <a:endParaRPr lang="zh-CN" altLang="en-US"/>
           </a:p>
@@ -5706,7 +5813,7 @@
           <a:p>
             <a:fld id="{3CAF1464-0EA4-453D-A90B-03B04D244405}" type="datetimeFigureOut">
               <a:rPr lang="zh-CN" altLang="en-US" smtClean="0"/>
-              <a:t>2026/2/17</a:t>
+              <a:t>2026/3/16</a:t>
             </a:fld>
             <a:endParaRPr lang="zh-CN" altLang="en-US"/>
           </a:p>
@@ -5801,7 +5908,7 @@
           <a:p>
             <a:fld id="{3CAF1464-0EA4-453D-A90B-03B04D244405}" type="datetimeFigureOut">
               <a:rPr lang="zh-CN" altLang="en-US" smtClean="0"/>
-              <a:t>2026/2/17</a:t>
+              <a:t>2026/3/16</a:t>
             </a:fld>
             <a:endParaRPr lang="zh-CN" altLang="en-US"/>
           </a:p>
@@ -6078,7 +6185,7 @@
           <a:p>
             <a:fld id="{3CAF1464-0EA4-453D-A90B-03B04D244405}" type="datetimeFigureOut">
               <a:rPr lang="zh-CN" altLang="en-US" smtClean="0"/>
-              <a:t>2026/2/17</a:t>
+              <a:t>2026/3/16</a:t>
             </a:fld>
             <a:endParaRPr lang="zh-CN" altLang="en-US"/>
           </a:p>
@@ -6335,7 +6442,7 @@
           <a:p>
             <a:fld id="{3CAF1464-0EA4-453D-A90B-03B04D244405}" type="datetimeFigureOut">
               <a:rPr lang="zh-CN" altLang="en-US" smtClean="0"/>
-              <a:t>2026/2/17</a:t>
+              <a:t>2026/3/16</a:t>
             </a:fld>
             <a:endParaRPr lang="zh-CN" altLang="en-US"/>
           </a:p>
@@ -6548,7 +6655,7 @@
           <a:p>
             <a:fld id="{3CAF1464-0EA4-453D-A90B-03B04D244405}" type="datetimeFigureOut">
               <a:rPr lang="zh-CN" altLang="en-US" smtClean="0"/>
-              <a:t>2026/2/17</a:t>
+              <a:t>2026/3/16</a:t>
             </a:fld>
             <a:endParaRPr lang="zh-CN" altLang="en-US"/>
           </a:p>
@@ -7104,13 +7211,13 @@
             <a:lstStyle/>
             <a:p>
               <a:r>
-                <a:rPr lang="en-US" altLang="zh-CN" sz="2000" i="1" dirty="0">
+                <a:rPr lang="en-US" altLang="zh-CN" sz="2000" dirty="0">
                   <a:latin typeface="Helvetica" panose="020B0604020202020204" pitchFamily="34" charset="0"/>
                   <a:cs typeface="Helvetica" panose="020B0604020202020204" pitchFamily="34" charset="0"/>
                 </a:rPr>
                 <a:t>x</a:t>
               </a:r>
-              <a:endParaRPr lang="zh-CN" altLang="en-US" sz="2000" i="1" baseline="-25000" dirty="0">
+              <a:endParaRPr lang="zh-CN" altLang="en-US" sz="2000" baseline="-25000" dirty="0">
                 <a:latin typeface="Helvetica" panose="020B0604020202020204" pitchFamily="34" charset="0"/>
                 <a:cs typeface="Helvetica" panose="020B0604020202020204" pitchFamily="34" charset="0"/>
               </a:endParaRPr>
@@ -7146,13 +7253,13 @@
             <a:lstStyle/>
             <a:p>
               <a:r>
-                <a:rPr lang="en-US" altLang="zh-CN" sz="2000" i="1" dirty="0">
+                <a:rPr lang="en-US" altLang="zh-CN" sz="2000" dirty="0">
                   <a:latin typeface="Helvetica" panose="020B0604020202020204" pitchFamily="34" charset="0"/>
                   <a:cs typeface="Helvetica" panose="020B0604020202020204" pitchFamily="34" charset="0"/>
                 </a:rPr>
                 <a:t>z</a:t>
               </a:r>
-              <a:endParaRPr lang="zh-CN" altLang="en-US" sz="2000" i="1" baseline="-25000" dirty="0">
+              <a:endParaRPr lang="zh-CN" altLang="en-US" sz="2000" baseline="-25000" dirty="0">
                 <a:latin typeface="Helvetica" panose="020B0604020202020204" pitchFamily="34" charset="0"/>
                 <a:cs typeface="Helvetica" panose="020B0604020202020204" pitchFamily="34" charset="0"/>
               </a:endParaRPr>
@@ -7188,13 +7295,13 @@
             <a:lstStyle/>
             <a:p>
               <a:r>
-                <a:rPr lang="en-US" altLang="zh-CN" sz="2000" i="1" dirty="0">
+                <a:rPr lang="en-US" altLang="zh-CN" sz="2000" dirty="0">
                   <a:latin typeface="Helvetica" panose="020B0604020202020204" pitchFamily="34" charset="0"/>
                   <a:cs typeface="Helvetica" panose="020B0604020202020204" pitchFamily="34" charset="0"/>
                 </a:rPr>
                 <a:t>y</a:t>
               </a:r>
-              <a:endParaRPr lang="zh-CN" altLang="en-US" sz="2000" i="1" baseline="-25000" dirty="0">
+              <a:endParaRPr lang="zh-CN" altLang="en-US" sz="2000" baseline="-25000" dirty="0">
                 <a:latin typeface="Helvetica" panose="020B0604020202020204" pitchFamily="34" charset="0"/>
                 <a:cs typeface="Helvetica" panose="020B0604020202020204" pitchFamily="34" charset="0"/>
               </a:endParaRPr>
@@ -9979,7 +10086,7 @@
           <p:nvPr>
             <p:extLst>
               <p:ext uri="{D42A27DB-BD31-4B8C-83A1-F6EECF244321}">
-                <p14:modId xmlns:p14="http://schemas.microsoft.com/office/powerpoint/2010/main" val="1668513550"/>
+                <p14:modId xmlns:p14="http://schemas.microsoft.com/office/powerpoint/2010/main" val="459893666"/>
               </p:ext>
             </p:extLst>
           </p:nvPr>
@@ -10237,13 +10344,13 @@
             <a:lstStyle/>
             <a:p>
               <a:r>
-                <a:rPr lang="en-US" altLang="zh-CN" sz="2000" i="1" dirty="0">
+                <a:rPr lang="en-US" altLang="zh-CN" sz="2000" dirty="0">
                   <a:latin typeface="Helvetica" panose="020B0604020202020204" pitchFamily="34" charset="0"/>
                   <a:cs typeface="Helvetica" panose="020B0604020202020204" pitchFamily="34" charset="0"/>
                 </a:rPr>
                 <a:t>x</a:t>
               </a:r>
-              <a:endParaRPr lang="zh-CN" altLang="en-US" sz="2000" i="1" baseline="-25000" dirty="0">
+              <a:endParaRPr lang="zh-CN" altLang="en-US" sz="2000" baseline="-25000" dirty="0">
                 <a:latin typeface="Helvetica" panose="020B0604020202020204" pitchFamily="34" charset="0"/>
                 <a:cs typeface="Helvetica" panose="020B0604020202020204" pitchFamily="34" charset="0"/>
               </a:endParaRPr>
@@ -10279,13 +10386,13 @@
             <a:lstStyle/>
             <a:p>
               <a:r>
-                <a:rPr lang="en-US" altLang="zh-CN" sz="2000" i="1" dirty="0">
+                <a:rPr lang="en-US" altLang="zh-CN" sz="2000" dirty="0">
                   <a:latin typeface="Helvetica" panose="020B0604020202020204" pitchFamily="34" charset="0"/>
                   <a:cs typeface="Helvetica" panose="020B0604020202020204" pitchFamily="34" charset="0"/>
                 </a:rPr>
                 <a:t>z</a:t>
               </a:r>
-              <a:endParaRPr lang="zh-CN" altLang="en-US" sz="2000" i="1" baseline="-25000" dirty="0">
+              <a:endParaRPr lang="zh-CN" altLang="en-US" sz="2000" baseline="-25000" dirty="0">
                 <a:latin typeface="Helvetica" panose="020B0604020202020204" pitchFamily="34" charset="0"/>
                 <a:cs typeface="Helvetica" panose="020B0604020202020204" pitchFamily="34" charset="0"/>
               </a:endParaRPr>
@@ -10321,13 +10428,13 @@
             <a:lstStyle/>
             <a:p>
               <a:r>
-                <a:rPr lang="en-US" altLang="zh-CN" sz="2000" i="1" dirty="0">
+                <a:rPr lang="en-US" altLang="zh-CN" sz="2000" dirty="0">
                   <a:latin typeface="Helvetica" panose="020B0604020202020204" pitchFamily="34" charset="0"/>
                   <a:cs typeface="Helvetica" panose="020B0604020202020204" pitchFamily="34" charset="0"/>
                 </a:rPr>
                 <a:t>y</a:t>
               </a:r>
-              <a:endParaRPr lang="zh-CN" altLang="en-US" sz="2000" i="1" baseline="-25000" dirty="0">
+              <a:endParaRPr lang="zh-CN" altLang="en-US" sz="2000" baseline="-25000" dirty="0">
                 <a:latin typeface="Helvetica" panose="020B0604020202020204" pitchFamily="34" charset="0"/>
                 <a:cs typeface="Helvetica" panose="020B0604020202020204" pitchFamily="34" charset="0"/>
               </a:endParaRPr>
@@ -11095,6 +11202,1276 @@
     <p:extLst>
       <p:ext uri="{BB962C8B-B14F-4D97-AF65-F5344CB8AC3E}">
         <p14:creationId xmlns:p14="http://schemas.microsoft.com/office/powerpoint/2010/main" val="3629937204"/>
+      </p:ext>
+    </p:extLst>
+  </p:cSld>
+  <p:clrMapOvr>
+    <a:masterClrMapping/>
+  </p:clrMapOvr>
+</p:sld>
+</file>
+
+<file path=ppt/slides/slide3.xml><?xml version="1.0" encoding="utf-8"?>
+<p:sld xmlns:a="http://schemas.openxmlformats.org/drawingml/2006/main" xmlns:r="http://schemas.openxmlformats.org/officeDocument/2006/relationships" xmlns:p="http://schemas.openxmlformats.org/presentationml/2006/main">
+  <p:cSld>
+    <p:spTree>
+      <p:nvGrpSpPr>
+        <p:cNvPr id="1" name="">
+          <a:extLst>
+            <a:ext uri="{FF2B5EF4-FFF2-40B4-BE49-F238E27FC236}">
+              <a16:creationId xmlns:a16="http://schemas.microsoft.com/office/drawing/2014/main" id="{2D827EC2-D3E9-D4B5-DA7B-B7A1EF02A691}"/>
+            </a:ext>
+          </a:extLst>
+        </p:cNvPr>
+        <p:cNvGrpSpPr/>
+        <p:nvPr/>
+      </p:nvGrpSpPr>
+      <p:grpSpPr>
+        <a:xfrm>
+          <a:off x="0" y="0"/>
+          <a:ext cx="0" cy="0"/>
+          <a:chOff x="0" y="0"/>
+          <a:chExt cx="0" cy="0"/>
+        </a:xfrm>
+      </p:grpSpPr>
+      <p:pic>
+        <p:nvPicPr>
+          <p:cNvPr id="37" name="图片 36">
+            <a:extLst>
+              <a:ext uri="{FF2B5EF4-FFF2-40B4-BE49-F238E27FC236}">
+                <a16:creationId xmlns:a16="http://schemas.microsoft.com/office/drawing/2014/main" id="{C09BB204-9C6C-3C04-182A-FEBA2E4B5413}"/>
+              </a:ext>
+            </a:extLst>
+          </p:cNvPr>
+          <p:cNvPicPr>
+            <a:picLocks noChangeAspect="1"/>
+          </p:cNvPicPr>
+          <p:nvPr/>
+        </p:nvPicPr>
+        <p:blipFill>
+          <a:blip r:embed="rId3">
+            <a:extLst>
+              <a:ext uri="{28A0092B-C50C-407E-A947-70E740481C1C}">
+                <a14:useLocalDpi xmlns:a14="http://schemas.microsoft.com/office/drawing/2010/main" val="0"/>
+              </a:ext>
+            </a:extLst>
+          </a:blip>
+          <a:srcRect t="3077" r="15249" b="3818"/>
+          <a:stretch>
+            <a:fillRect/>
+          </a:stretch>
+        </p:blipFill>
+        <p:spPr>
+          <a:xfrm>
+            <a:off x="9057019" y="337931"/>
+            <a:ext cx="3130353" cy="6113670"/>
+          </a:xfrm>
+          <a:prstGeom prst="rect">
+            <a:avLst/>
+          </a:prstGeom>
+        </p:spPr>
+      </p:pic>
+      <p:pic>
+        <p:nvPicPr>
+          <p:cNvPr id="42" name="图片 41">
+            <a:extLst>
+              <a:ext uri="{FF2B5EF4-FFF2-40B4-BE49-F238E27FC236}">
+                <a16:creationId xmlns:a16="http://schemas.microsoft.com/office/drawing/2014/main" id="{B632C22F-E55E-2C15-352E-71B3B3268CCD}"/>
+              </a:ext>
+            </a:extLst>
+          </p:cNvPr>
+          <p:cNvPicPr>
+            <a:picLocks noChangeAspect="1"/>
+          </p:cNvPicPr>
+          <p:nvPr/>
+        </p:nvPicPr>
+        <p:blipFill>
+          <a:blip r:embed="rId4">
+            <a:extLst>
+              <a:ext uri="{28A0092B-C50C-407E-A947-70E740481C1C}">
+                <a14:useLocalDpi xmlns:a14="http://schemas.microsoft.com/office/drawing/2010/main" val="0"/>
+              </a:ext>
+            </a:extLst>
+          </a:blip>
+          <a:srcRect l="-318" t="981" r="80427" b="69004"/>
+          <a:stretch>
+            <a:fillRect/>
+          </a:stretch>
+        </p:blipFill>
+        <p:spPr>
+          <a:xfrm>
+            <a:off x="5242663" y="337930"/>
+            <a:ext cx="1658880" cy="1251384"/>
+          </a:xfrm>
+          <a:prstGeom prst="rect">
+            <a:avLst/>
+          </a:prstGeom>
+        </p:spPr>
+      </p:pic>
+      <p:grpSp>
+        <p:nvGrpSpPr>
+          <p:cNvPr id="45" name="组合 44">
+            <a:extLst>
+              <a:ext uri="{FF2B5EF4-FFF2-40B4-BE49-F238E27FC236}">
+                <a16:creationId xmlns:a16="http://schemas.microsoft.com/office/drawing/2014/main" id="{FF58B426-DE29-A57F-8B57-2B3E3E28F296}"/>
+              </a:ext>
+            </a:extLst>
+          </p:cNvPr>
+          <p:cNvGrpSpPr/>
+          <p:nvPr/>
+        </p:nvGrpSpPr>
+        <p:grpSpPr>
+          <a:xfrm>
+            <a:off x="0" y="1728526"/>
+            <a:ext cx="7021653" cy="4114326"/>
+            <a:chOff x="234548" y="2141793"/>
+            <a:chExt cx="6096000" cy="3571941"/>
+          </a:xfrm>
+        </p:grpSpPr>
+        <p:pic>
+          <p:nvPicPr>
+            <p:cNvPr id="34" name="图片 33">
+              <a:extLst>
+                <a:ext uri="{FF2B5EF4-FFF2-40B4-BE49-F238E27FC236}">
+                  <a16:creationId xmlns:a16="http://schemas.microsoft.com/office/drawing/2014/main" id="{84503412-639B-F7DD-9180-D6A8BDB36F6C}"/>
+                </a:ext>
+              </a:extLst>
+            </p:cNvPr>
+            <p:cNvPicPr>
+              <a:picLocks noChangeAspect="1"/>
+            </p:cNvPicPr>
+            <p:nvPr/>
+          </p:nvPicPr>
+          <p:blipFill>
+            <a:blip r:embed="rId4">
+              <a:extLst>
+                <a:ext uri="{28A0092B-C50C-407E-A947-70E740481C1C}">
+                  <a14:useLocalDpi xmlns:a14="http://schemas.microsoft.com/office/drawing/2010/main" val="0"/>
+                </a:ext>
+              </a:extLst>
+            </a:blip>
+            <a:srcRect l="15125"/>
+            <a:stretch>
+              <a:fillRect/>
+            </a:stretch>
+          </p:blipFill>
+          <p:spPr>
+            <a:xfrm>
+              <a:off x="266008" y="2141793"/>
+              <a:ext cx="6064540" cy="3571941"/>
+            </a:xfrm>
+            <a:prstGeom prst="rect">
+              <a:avLst/>
+            </a:prstGeom>
+          </p:spPr>
+        </p:pic>
+        <p:sp>
+          <p:nvSpPr>
+            <p:cNvPr id="43" name="矩形 42">
+              <a:extLst>
+                <a:ext uri="{FF2B5EF4-FFF2-40B4-BE49-F238E27FC236}">
+                  <a16:creationId xmlns:a16="http://schemas.microsoft.com/office/drawing/2014/main" id="{A787041E-AD0B-771E-F74E-4F1B271118D5}"/>
+                </a:ext>
+              </a:extLst>
+            </p:cNvPr>
+            <p:cNvSpPr/>
+            <p:nvPr/>
+          </p:nvSpPr>
+          <p:spPr>
+            <a:xfrm>
+              <a:off x="266008" y="4854633"/>
+              <a:ext cx="340821" cy="764771"/>
+            </a:xfrm>
+            <a:prstGeom prst="rect">
+              <a:avLst/>
+            </a:prstGeom>
+            <a:solidFill>
+              <a:schemeClr val="bg1"/>
+            </a:solidFill>
+            <a:ln>
+              <a:noFill/>
+            </a:ln>
+          </p:spPr>
+          <p:style>
+            <a:lnRef idx="2">
+              <a:schemeClr val="accent1">
+                <a:shade val="15000"/>
+              </a:schemeClr>
+            </a:lnRef>
+            <a:fillRef idx="1">
+              <a:schemeClr val="accent1"/>
+            </a:fillRef>
+            <a:effectRef idx="0">
+              <a:schemeClr val="accent1"/>
+            </a:effectRef>
+            <a:fontRef idx="minor">
+              <a:schemeClr val="lt1"/>
+            </a:fontRef>
+          </p:style>
+          <p:txBody>
+            <a:bodyPr rtlCol="0" anchor="ctr"/>
+            <a:lstStyle/>
+            <a:p>
+              <a:pPr algn="ctr"/>
+              <a:endParaRPr lang="en-GB"/>
+            </a:p>
+          </p:txBody>
+        </p:sp>
+        <p:sp>
+          <p:nvSpPr>
+            <p:cNvPr id="44" name="矩形 43">
+              <a:extLst>
+                <a:ext uri="{FF2B5EF4-FFF2-40B4-BE49-F238E27FC236}">
+                  <a16:creationId xmlns:a16="http://schemas.microsoft.com/office/drawing/2014/main" id="{E966EC97-29EC-C43A-652E-6D976C644771}"/>
+                </a:ext>
+              </a:extLst>
+            </p:cNvPr>
+            <p:cNvSpPr/>
+            <p:nvPr/>
+          </p:nvSpPr>
+          <p:spPr>
+            <a:xfrm>
+              <a:off x="234548" y="2141793"/>
+              <a:ext cx="372281" cy="1154143"/>
+            </a:xfrm>
+            <a:prstGeom prst="rect">
+              <a:avLst/>
+            </a:prstGeom>
+            <a:solidFill>
+              <a:schemeClr val="bg1"/>
+            </a:solidFill>
+            <a:ln>
+              <a:noFill/>
+            </a:ln>
+          </p:spPr>
+          <p:style>
+            <a:lnRef idx="2">
+              <a:schemeClr val="accent1">
+                <a:shade val="15000"/>
+              </a:schemeClr>
+            </a:lnRef>
+            <a:fillRef idx="1">
+              <a:schemeClr val="accent1"/>
+            </a:fillRef>
+            <a:effectRef idx="0">
+              <a:schemeClr val="accent1"/>
+            </a:effectRef>
+            <a:fontRef idx="minor">
+              <a:schemeClr val="lt1"/>
+            </a:fontRef>
+          </p:style>
+          <p:txBody>
+            <a:bodyPr rtlCol="0" anchor="ctr"/>
+            <a:lstStyle/>
+            <a:p>
+              <a:pPr algn="ctr"/>
+              <a:endParaRPr lang="en-GB" dirty="0"/>
+            </a:p>
+          </p:txBody>
+        </p:sp>
+      </p:grpSp>
+      <p:pic>
+        <p:nvPicPr>
+          <p:cNvPr id="38" name="图片 37">
+            <a:extLst>
+              <a:ext uri="{FF2B5EF4-FFF2-40B4-BE49-F238E27FC236}">
+                <a16:creationId xmlns:a16="http://schemas.microsoft.com/office/drawing/2014/main" id="{B226DDD7-0D3C-C8C4-F666-4CA16C1D3391}"/>
+              </a:ext>
+            </a:extLst>
+          </p:cNvPr>
+          <p:cNvPicPr>
+            <a:picLocks noChangeAspect="1"/>
+          </p:cNvPicPr>
+          <p:nvPr/>
+        </p:nvPicPr>
+        <p:blipFill>
+          <a:blip r:embed="rId5">
+            <a:extLst>
+              <a:ext uri="{BEBA8EAE-BF5A-486C-A8C5-ECC9F3942E4B}">
+                <a14:imgProps xmlns:a14="http://schemas.microsoft.com/office/drawing/2010/main">
+                  <a14:imgLayer r:embed="rId6">
+                    <a14:imgEffect>
+                      <a14:backgroundRemoval t="71195" b="95275" l="6246" r="17284">
+                        <a14:foregroundMark x1="6427" y1="95320" x2="6427" y2="95320"/>
+                        <a14:foregroundMark x1="9357" y1="90959" x2="9357" y2="90959"/>
+                        <a14:foregroundMark x1="8812" y1="73194" x2="8812" y2="73194"/>
+                        <a14:foregroundMark x1="8426" y1="72876" x2="8426" y2="72876"/>
+                        <a14:foregroundMark x1="9221" y1="72785" x2="9221" y2="72785"/>
+                        <a14:foregroundMark x1="9085" y1="71195" x2="9085" y2="71195"/>
+                        <a14:foregroundMark x1="9176" y1="71286" x2="9176" y2="71286"/>
+                        <a14:foregroundMark x1="8358" y1="71422" x2="8358" y2="71422"/>
+                        <a14:foregroundMark x1="16648" y1="90232" x2="16648" y2="90232"/>
+                        <a14:foregroundMark x1="17057" y1="91458" x2="17057" y2="91458"/>
+                        <a14:foregroundMark x1="16330" y1="91368" x2="16330" y2="91368"/>
+                        <a14:foregroundMark x1="17284" y1="91686" x2="17284" y2="91686"/>
+                        <a14:foregroundMark x1="17170" y1="89050" x2="17170" y2="89050"/>
+                        <a14:foregroundMark x1="16239" y1="91686" x2="16239" y2="91686"/>
+                      </a14:backgroundRemoval>
+                    </a14:imgEffect>
+                  </a14:imgLayer>
+                </a14:imgProps>
+              </a:ext>
+              <a:ext uri="{28A0092B-C50C-407E-A947-70E740481C1C}">
+                <a14:useLocalDpi xmlns:a14="http://schemas.microsoft.com/office/drawing/2010/main" val="0"/>
+              </a:ext>
+            </a:extLst>
+          </a:blip>
+          <a:srcRect l="5003" t="69969" r="82153" b="2677"/>
+          <a:stretch>
+            <a:fillRect/>
+          </a:stretch>
+        </p:blipFill>
+        <p:spPr>
+          <a:xfrm>
+            <a:off x="93635" y="5474538"/>
+            <a:ext cx="917709" cy="977063"/>
+          </a:xfrm>
+          <a:prstGeom prst="rect">
+            <a:avLst/>
+          </a:prstGeom>
+        </p:spPr>
+      </p:pic>
+      <p:sp>
+        <p:nvSpPr>
+          <p:cNvPr id="63" name="矩形 62">
+            <a:extLst>
+              <a:ext uri="{FF2B5EF4-FFF2-40B4-BE49-F238E27FC236}">
+                <a16:creationId xmlns:a16="http://schemas.microsoft.com/office/drawing/2014/main" id="{F114FEDF-DB33-6D27-0C7B-402685C3FEA6}"/>
+              </a:ext>
+            </a:extLst>
+          </p:cNvPr>
+          <p:cNvSpPr/>
+          <p:nvPr/>
+        </p:nvSpPr>
+        <p:spPr>
+          <a:xfrm>
+            <a:off x="9004221" y="0"/>
+            <a:ext cx="1302657" cy="6858000"/>
+          </a:xfrm>
+          <a:prstGeom prst="rect">
+            <a:avLst/>
+          </a:prstGeom>
+          <a:gradFill>
+            <a:gsLst>
+              <a:gs pos="34000">
+                <a:srgbClr val="FFFFFF"/>
+              </a:gs>
+              <a:gs pos="95000">
+                <a:srgbClr val="FEFEFE">
+                  <a:alpha val="43000"/>
+                </a:srgbClr>
+              </a:gs>
+              <a:gs pos="88000">
+                <a:srgbClr val="FEFEFE">
+                  <a:alpha val="70000"/>
+                </a:srgbClr>
+              </a:gs>
+              <a:gs pos="100000">
+                <a:schemeClr val="bg1">
+                  <a:lumMod val="99000"/>
+                  <a:alpha val="0"/>
+                </a:schemeClr>
+              </a:gs>
+            </a:gsLst>
+            <a:lin ang="0" scaled="0"/>
+          </a:gradFill>
+          <a:ln>
+            <a:noFill/>
+          </a:ln>
+        </p:spPr>
+        <p:style>
+          <a:lnRef idx="2">
+            <a:schemeClr val="accent1">
+              <a:shade val="15000"/>
+            </a:schemeClr>
+          </a:lnRef>
+          <a:fillRef idx="1">
+            <a:schemeClr val="accent1"/>
+          </a:fillRef>
+          <a:effectRef idx="0">
+            <a:schemeClr val="accent1"/>
+          </a:effectRef>
+          <a:fontRef idx="minor">
+            <a:schemeClr val="lt1"/>
+          </a:fontRef>
+        </p:style>
+        <p:txBody>
+          <a:bodyPr rtlCol="0" anchor="ctr"/>
+          <a:lstStyle/>
+          <a:p>
+            <a:pPr algn="ctr"/>
+            <a:endParaRPr lang="en-GB" dirty="0"/>
+          </a:p>
+        </p:txBody>
+      </p:sp>
+      <p:grpSp>
+        <p:nvGrpSpPr>
+          <p:cNvPr id="93" name="组合 92">
+            <a:extLst>
+              <a:ext uri="{FF2B5EF4-FFF2-40B4-BE49-F238E27FC236}">
+                <a16:creationId xmlns:a16="http://schemas.microsoft.com/office/drawing/2014/main" id="{244AA9C1-5E07-A14B-0D4C-E801B1456F50}"/>
+              </a:ext>
+            </a:extLst>
+          </p:cNvPr>
+          <p:cNvGrpSpPr/>
+          <p:nvPr/>
+        </p:nvGrpSpPr>
+        <p:grpSpPr>
+          <a:xfrm>
+            <a:off x="9364436" y="5372100"/>
+            <a:ext cx="2292803" cy="862693"/>
+            <a:chOff x="9364436" y="5372100"/>
+            <a:chExt cx="2292803" cy="862693"/>
+          </a:xfrm>
+          <a:effectLst>
+            <a:outerShdw blurRad="63500" sx="101000" sy="101000" algn="ctr" rotWithShape="0">
+              <a:schemeClr val="bg1"/>
+            </a:outerShdw>
+          </a:effectLst>
+        </p:grpSpPr>
+        <p:cxnSp>
+          <p:nvCxnSpPr>
+            <p:cNvPr id="73" name="直接箭头连接符 72">
+              <a:extLst>
+                <a:ext uri="{FF2B5EF4-FFF2-40B4-BE49-F238E27FC236}">
+                  <a16:creationId xmlns:a16="http://schemas.microsoft.com/office/drawing/2014/main" id="{A3A91A2E-7852-FC83-BF92-BF52241D1080}"/>
+                </a:ext>
+              </a:extLst>
+            </p:cNvPr>
+            <p:cNvCxnSpPr>
+              <a:cxnSpLocks/>
+            </p:cNvCxnSpPr>
+            <p:nvPr/>
+          </p:nvCxnSpPr>
+          <p:spPr>
+            <a:xfrm flipV="1">
+              <a:off x="11171464" y="5372100"/>
+              <a:ext cx="485775" cy="470752"/>
+            </a:xfrm>
+            <a:prstGeom prst="straightConnector1">
+              <a:avLst/>
+            </a:prstGeom>
+            <a:ln w="31750">
+              <a:solidFill>
+                <a:srgbClr val="DE862F"/>
+              </a:solidFill>
+              <a:tailEnd type="triangle"/>
+            </a:ln>
+          </p:spPr>
+          <p:style>
+            <a:lnRef idx="2">
+              <a:schemeClr val="accent1"/>
+            </a:lnRef>
+            <a:fillRef idx="0">
+              <a:schemeClr val="accent1"/>
+            </a:fillRef>
+            <a:effectRef idx="1">
+              <a:schemeClr val="accent1"/>
+            </a:effectRef>
+            <a:fontRef idx="minor">
+              <a:schemeClr val="tx1"/>
+            </a:fontRef>
+          </p:style>
+        </p:cxnSp>
+        <p:cxnSp>
+          <p:nvCxnSpPr>
+            <p:cNvPr id="81" name="直接连接符 80">
+              <a:extLst>
+                <a:ext uri="{FF2B5EF4-FFF2-40B4-BE49-F238E27FC236}">
+                  <a16:creationId xmlns:a16="http://schemas.microsoft.com/office/drawing/2014/main" id="{490367D2-3871-1604-4466-5893EC9691DD}"/>
+                </a:ext>
+              </a:extLst>
+            </p:cNvPr>
+            <p:cNvCxnSpPr>
+              <a:cxnSpLocks/>
+            </p:cNvCxnSpPr>
+            <p:nvPr/>
+          </p:nvCxnSpPr>
+          <p:spPr>
+            <a:xfrm flipH="1">
+              <a:off x="9364436" y="5842852"/>
+              <a:ext cx="1807027" cy="391941"/>
+            </a:xfrm>
+            <a:prstGeom prst="line">
+              <a:avLst/>
+            </a:prstGeom>
+            <a:ln w="31750">
+              <a:solidFill>
+                <a:srgbClr val="DE862F"/>
+              </a:solidFill>
+            </a:ln>
+          </p:spPr>
+          <p:style>
+            <a:lnRef idx="2">
+              <a:schemeClr val="accent1"/>
+            </a:lnRef>
+            <a:fillRef idx="0">
+              <a:schemeClr val="accent1"/>
+            </a:fillRef>
+            <a:effectRef idx="1">
+              <a:schemeClr val="accent1"/>
+            </a:effectRef>
+            <a:fontRef idx="minor">
+              <a:schemeClr val="tx1"/>
+            </a:fontRef>
+          </p:style>
+        </p:cxnSp>
+      </p:grpSp>
+      <p:sp>
+        <p:nvSpPr>
+          <p:cNvPr id="92" name="文本框 91">
+            <a:extLst>
+              <a:ext uri="{FF2B5EF4-FFF2-40B4-BE49-F238E27FC236}">
+                <a16:creationId xmlns:a16="http://schemas.microsoft.com/office/drawing/2014/main" id="{791F1E7C-ADF1-8CD5-4AAD-B4FE4565B178}"/>
+              </a:ext>
+            </a:extLst>
+          </p:cNvPr>
+          <p:cNvSpPr txBox="1"/>
+          <p:nvPr/>
+        </p:nvSpPr>
+        <p:spPr>
+          <a:xfrm>
+            <a:off x="7146391" y="5607476"/>
+            <a:ext cx="2153999" cy="883832"/>
+          </a:xfrm>
+          <a:prstGeom prst="rect">
+            <a:avLst/>
+          </a:prstGeom>
+          <a:noFill/>
+        </p:spPr>
+        <p:txBody>
+          <a:bodyPr wrap="square" rtlCol="0">
+            <a:spAutoFit/>
+          </a:bodyPr>
+          <a:lstStyle/>
+          <a:p>
+            <a:pPr>
+              <a:lnSpc>
+                <a:spcPct val="110000"/>
+              </a:lnSpc>
+            </a:pPr>
+            <a:r>
+              <a:rPr lang="en-US" altLang="zh-CN" sz="1600" dirty="0">
+                <a:solidFill>
+                  <a:srgbClr val="DE862F"/>
+                </a:solidFill>
+                <a:latin typeface="Helvetica" panose="020B0604020202020204" pitchFamily="34" charset="0"/>
+                <a:cs typeface="Helvetica" panose="020B0604020202020204" pitchFamily="34" charset="0"/>
+              </a:rPr>
+              <a:t>BENETECH GM8903 constant‑temperature hot‑wire anemometer</a:t>
+            </a:r>
+            <a:endParaRPr lang="zh-CN" altLang="en-US" sz="1600" dirty="0">
+              <a:solidFill>
+                <a:srgbClr val="DE862F"/>
+              </a:solidFill>
+              <a:latin typeface="Helvetica" panose="020B0604020202020204" pitchFamily="34" charset="0"/>
+              <a:cs typeface="Helvetica" panose="020B0604020202020204" pitchFamily="34" charset="0"/>
+            </a:endParaRPr>
+          </a:p>
+        </p:txBody>
+      </p:sp>
+      <p:sp>
+        <p:nvSpPr>
+          <p:cNvPr id="96" name="文本框 95">
+            <a:extLst>
+              <a:ext uri="{FF2B5EF4-FFF2-40B4-BE49-F238E27FC236}">
+                <a16:creationId xmlns:a16="http://schemas.microsoft.com/office/drawing/2014/main" id="{223E6F7E-EAC4-91F7-59DE-C034C907ADB0}"/>
+              </a:ext>
+            </a:extLst>
+          </p:cNvPr>
+          <p:cNvSpPr txBox="1"/>
+          <p:nvPr/>
+        </p:nvSpPr>
+        <p:spPr>
+          <a:xfrm>
+            <a:off x="7146391" y="3813319"/>
+            <a:ext cx="1637381" cy="830997"/>
+          </a:xfrm>
+          <a:prstGeom prst="rect">
+            <a:avLst/>
+          </a:prstGeom>
+          <a:noFill/>
+        </p:spPr>
+        <p:txBody>
+          <a:bodyPr wrap="square" anchor="ctr">
+            <a:spAutoFit/>
+          </a:bodyPr>
+          <a:lstStyle/>
+          <a:p>
+            <a:endParaRPr lang="en-GB" altLang="zh-CN" sz="1600" dirty="0">
+              <a:latin typeface="Helvetica" panose="020B0604020202020204" pitchFamily="34" charset="0"/>
+              <a:cs typeface="Helvetica" panose="020B0604020202020204" pitchFamily="34" charset="0"/>
+            </a:endParaRPr>
+          </a:p>
+          <a:p>
+            <a:r>
+              <a:rPr lang="en-GB" altLang="zh-CN" sz="1600" dirty="0">
+                <a:latin typeface="Helvetica" panose="020B0604020202020204" pitchFamily="34" charset="0"/>
+                <a:cs typeface="Helvetica" panose="020B0604020202020204" pitchFamily="34" charset="0"/>
+              </a:rPr>
+              <a:t>height-indexed</a:t>
+            </a:r>
+          </a:p>
+          <a:p>
+            <a:r>
+              <a:rPr lang="en-GB" altLang="zh-CN" sz="1600" dirty="0">
+                <a:latin typeface="Helvetica" panose="020B0604020202020204" pitchFamily="34" charset="0"/>
+                <a:cs typeface="Helvetica" panose="020B0604020202020204" pitchFamily="34" charset="0"/>
+              </a:rPr>
+              <a:t>custom support</a:t>
+            </a:r>
+            <a:endParaRPr lang="en-GB" sz="1600" dirty="0">
+              <a:latin typeface="Helvetica" panose="020B0604020202020204" pitchFamily="34" charset="0"/>
+              <a:cs typeface="Helvetica" panose="020B0604020202020204" pitchFamily="34" charset="0"/>
+            </a:endParaRPr>
+          </a:p>
+        </p:txBody>
+      </p:sp>
+      <p:grpSp>
+        <p:nvGrpSpPr>
+          <p:cNvPr id="97" name="组合 96">
+            <a:extLst>
+              <a:ext uri="{FF2B5EF4-FFF2-40B4-BE49-F238E27FC236}">
+                <a16:creationId xmlns:a16="http://schemas.microsoft.com/office/drawing/2014/main" id="{726F47DF-DC4D-A9E1-35B8-F9671DEE85EC}"/>
+              </a:ext>
+            </a:extLst>
+          </p:cNvPr>
+          <p:cNvGrpSpPr/>
+          <p:nvPr/>
+        </p:nvGrpSpPr>
+        <p:grpSpPr>
+          <a:xfrm>
+            <a:off x="8783772" y="4138965"/>
+            <a:ext cx="2820399" cy="129560"/>
+            <a:chOff x="9371958" y="5842852"/>
+            <a:chExt cx="2820399" cy="129560"/>
+          </a:xfrm>
+          <a:effectLst>
+            <a:outerShdw blurRad="63500" sx="101000" sy="101000" algn="ctr" rotWithShape="0">
+              <a:schemeClr val="bg1"/>
+            </a:outerShdw>
+          </a:effectLst>
+        </p:grpSpPr>
+        <p:cxnSp>
+          <p:nvCxnSpPr>
+            <p:cNvPr id="98" name="直接箭头连接符 97">
+              <a:extLst>
+                <a:ext uri="{FF2B5EF4-FFF2-40B4-BE49-F238E27FC236}">
+                  <a16:creationId xmlns:a16="http://schemas.microsoft.com/office/drawing/2014/main" id="{5B8710CF-6427-DFDB-2CC3-B7F5BC317BAA}"/>
+                </a:ext>
+              </a:extLst>
+            </p:cNvPr>
+            <p:cNvCxnSpPr>
+              <a:cxnSpLocks/>
+            </p:cNvCxnSpPr>
+            <p:nvPr/>
+          </p:nvCxnSpPr>
+          <p:spPr>
+            <a:xfrm>
+              <a:off x="11171464" y="5842852"/>
+              <a:ext cx="1020893" cy="129560"/>
+            </a:xfrm>
+            <a:prstGeom prst="straightConnector1">
+              <a:avLst/>
+            </a:prstGeom>
+            <a:ln w="31750">
+              <a:solidFill>
+                <a:schemeClr val="tx1"/>
+              </a:solidFill>
+              <a:tailEnd type="triangle"/>
+            </a:ln>
+          </p:spPr>
+          <p:style>
+            <a:lnRef idx="2">
+              <a:schemeClr val="accent1"/>
+            </a:lnRef>
+            <a:fillRef idx="0">
+              <a:schemeClr val="accent1"/>
+            </a:fillRef>
+            <a:effectRef idx="1">
+              <a:schemeClr val="accent1"/>
+            </a:effectRef>
+            <a:fontRef idx="minor">
+              <a:schemeClr val="tx1"/>
+            </a:fontRef>
+          </p:style>
+        </p:cxnSp>
+        <p:cxnSp>
+          <p:nvCxnSpPr>
+            <p:cNvPr id="99" name="直接连接符 98">
+              <a:extLst>
+                <a:ext uri="{FF2B5EF4-FFF2-40B4-BE49-F238E27FC236}">
+                  <a16:creationId xmlns:a16="http://schemas.microsoft.com/office/drawing/2014/main" id="{D30FDA9A-B44C-7A28-85F1-967F50148D04}"/>
+                </a:ext>
+              </a:extLst>
+            </p:cNvPr>
+            <p:cNvCxnSpPr>
+              <a:cxnSpLocks/>
+              <a:endCxn id="96" idx="3"/>
+            </p:cNvCxnSpPr>
+            <p:nvPr/>
+          </p:nvCxnSpPr>
+          <p:spPr>
+            <a:xfrm flipH="1">
+              <a:off x="9371958" y="5842852"/>
+              <a:ext cx="1799505" cy="89853"/>
+            </a:xfrm>
+            <a:prstGeom prst="line">
+              <a:avLst/>
+            </a:prstGeom>
+            <a:ln w="31750">
+              <a:solidFill>
+                <a:schemeClr val="tx1"/>
+              </a:solidFill>
+            </a:ln>
+          </p:spPr>
+          <p:style>
+            <a:lnRef idx="2">
+              <a:schemeClr val="accent1"/>
+            </a:lnRef>
+            <a:fillRef idx="0">
+              <a:schemeClr val="accent1"/>
+            </a:fillRef>
+            <a:effectRef idx="1">
+              <a:schemeClr val="accent1"/>
+            </a:effectRef>
+            <a:fontRef idx="minor">
+              <a:schemeClr val="tx1"/>
+            </a:fontRef>
+          </p:style>
+        </p:cxnSp>
+      </p:grpSp>
+      <p:grpSp>
+        <p:nvGrpSpPr>
+          <p:cNvPr id="104" name="组合 103">
+            <a:extLst>
+              <a:ext uri="{FF2B5EF4-FFF2-40B4-BE49-F238E27FC236}">
+                <a16:creationId xmlns:a16="http://schemas.microsoft.com/office/drawing/2014/main" id="{F6B8C7C2-79F6-AEFF-0EB7-0CC98069A858}"/>
+              </a:ext>
+            </a:extLst>
+          </p:cNvPr>
+          <p:cNvGrpSpPr/>
+          <p:nvPr/>
+        </p:nvGrpSpPr>
+        <p:grpSpPr>
+          <a:xfrm>
+            <a:off x="7877626" y="2078852"/>
+            <a:ext cx="3145974" cy="1017720"/>
+            <a:chOff x="8655632" y="5431624"/>
+            <a:chExt cx="3145974" cy="1017720"/>
+          </a:xfrm>
+          <a:effectLst>
+            <a:outerShdw blurRad="63500" sx="101000" sy="101000" algn="ctr" rotWithShape="0">
+              <a:schemeClr val="bg1"/>
+            </a:outerShdw>
+          </a:effectLst>
+        </p:grpSpPr>
+        <p:cxnSp>
+          <p:nvCxnSpPr>
+            <p:cNvPr id="105" name="直接箭头连接符 104">
+              <a:extLst>
+                <a:ext uri="{FF2B5EF4-FFF2-40B4-BE49-F238E27FC236}">
+                  <a16:creationId xmlns:a16="http://schemas.microsoft.com/office/drawing/2014/main" id="{F12C5782-1761-F746-A380-93E323ABC10D}"/>
+                </a:ext>
+              </a:extLst>
+            </p:cNvPr>
+            <p:cNvCxnSpPr>
+              <a:cxnSpLocks/>
+            </p:cNvCxnSpPr>
+            <p:nvPr/>
+          </p:nvCxnSpPr>
+          <p:spPr>
+            <a:xfrm>
+              <a:off x="11679102" y="5787543"/>
+              <a:ext cx="122504" cy="661801"/>
+            </a:xfrm>
+            <a:prstGeom prst="straightConnector1">
+              <a:avLst/>
+            </a:prstGeom>
+            <a:ln w="31750">
+              <a:solidFill>
+                <a:srgbClr val="67645F"/>
+              </a:solidFill>
+              <a:tailEnd type="triangle"/>
+            </a:ln>
+          </p:spPr>
+          <p:style>
+            <a:lnRef idx="2">
+              <a:schemeClr val="accent1"/>
+            </a:lnRef>
+            <a:fillRef idx="0">
+              <a:schemeClr val="accent1"/>
+            </a:fillRef>
+            <a:effectRef idx="1">
+              <a:schemeClr val="accent1"/>
+            </a:effectRef>
+            <a:fontRef idx="minor">
+              <a:schemeClr val="tx1"/>
+            </a:fontRef>
+          </p:style>
+        </p:cxnSp>
+        <p:cxnSp>
+          <p:nvCxnSpPr>
+            <p:cNvPr id="106" name="直接连接符 105">
+              <a:extLst>
+                <a:ext uri="{FF2B5EF4-FFF2-40B4-BE49-F238E27FC236}">
+                  <a16:creationId xmlns:a16="http://schemas.microsoft.com/office/drawing/2014/main" id="{367B6F0B-1F0E-9BB2-A188-C5E687862AA6}"/>
+                </a:ext>
+              </a:extLst>
+            </p:cNvPr>
+            <p:cNvCxnSpPr>
+              <a:cxnSpLocks/>
+              <a:endCxn id="136" idx="3"/>
+            </p:cNvCxnSpPr>
+            <p:nvPr/>
+          </p:nvCxnSpPr>
+          <p:spPr>
+            <a:xfrm flipH="1" flipV="1">
+              <a:off x="8655632" y="5431624"/>
+              <a:ext cx="3036663" cy="363077"/>
+            </a:xfrm>
+            <a:prstGeom prst="line">
+              <a:avLst/>
+            </a:prstGeom>
+            <a:ln w="31750">
+              <a:solidFill>
+                <a:srgbClr val="67645F"/>
+              </a:solidFill>
+            </a:ln>
+          </p:spPr>
+          <p:style>
+            <a:lnRef idx="2">
+              <a:schemeClr val="accent1"/>
+            </a:lnRef>
+            <a:fillRef idx="0">
+              <a:schemeClr val="accent1"/>
+            </a:fillRef>
+            <a:effectRef idx="1">
+              <a:schemeClr val="accent1"/>
+            </a:effectRef>
+            <a:fontRef idx="minor">
+              <a:schemeClr val="tx1"/>
+            </a:fontRef>
+          </p:style>
+        </p:cxnSp>
+      </p:grpSp>
+      <p:grpSp>
+        <p:nvGrpSpPr>
+          <p:cNvPr id="117" name="组合 116">
+            <a:extLst>
+              <a:ext uri="{FF2B5EF4-FFF2-40B4-BE49-F238E27FC236}">
+                <a16:creationId xmlns:a16="http://schemas.microsoft.com/office/drawing/2014/main" id="{323D098F-BFD7-CB49-30F1-211C01F31ACC}"/>
+              </a:ext>
+            </a:extLst>
+          </p:cNvPr>
+          <p:cNvGrpSpPr/>
+          <p:nvPr/>
+        </p:nvGrpSpPr>
+        <p:grpSpPr>
+          <a:xfrm>
+            <a:off x="8747760" y="1536413"/>
+            <a:ext cx="2909479" cy="1729301"/>
+            <a:chOff x="9373366" y="4736785"/>
+            <a:chExt cx="2909479" cy="1729301"/>
+          </a:xfrm>
+          <a:effectLst>
+            <a:outerShdw blurRad="63500" sx="101000" sy="101000" algn="ctr" rotWithShape="0">
+              <a:schemeClr val="bg1"/>
+            </a:outerShdw>
+          </a:effectLst>
+        </p:grpSpPr>
+        <p:cxnSp>
+          <p:nvCxnSpPr>
+            <p:cNvPr id="118" name="直接箭头连接符 117">
+              <a:extLst>
+                <a:ext uri="{FF2B5EF4-FFF2-40B4-BE49-F238E27FC236}">
+                  <a16:creationId xmlns:a16="http://schemas.microsoft.com/office/drawing/2014/main" id="{FADF621A-A40E-F801-D6BD-44BCB595F9FA}"/>
+                </a:ext>
+              </a:extLst>
+            </p:cNvPr>
+            <p:cNvCxnSpPr>
+              <a:cxnSpLocks/>
+            </p:cNvCxnSpPr>
+            <p:nvPr/>
+          </p:nvCxnSpPr>
+          <p:spPr>
+            <a:xfrm>
+              <a:off x="11679102" y="5029172"/>
+              <a:ext cx="603743" cy="1436914"/>
+            </a:xfrm>
+            <a:prstGeom prst="straightConnector1">
+              <a:avLst/>
+            </a:prstGeom>
+            <a:ln w="31750">
+              <a:solidFill>
+                <a:srgbClr val="77797D"/>
+              </a:solidFill>
+              <a:tailEnd type="triangle"/>
+            </a:ln>
+          </p:spPr>
+          <p:style>
+            <a:lnRef idx="2">
+              <a:schemeClr val="accent1"/>
+            </a:lnRef>
+            <a:fillRef idx="0">
+              <a:schemeClr val="accent1"/>
+            </a:fillRef>
+            <a:effectRef idx="1">
+              <a:schemeClr val="accent1"/>
+            </a:effectRef>
+            <a:fontRef idx="minor">
+              <a:schemeClr val="tx1"/>
+            </a:fontRef>
+          </p:style>
+        </p:cxnSp>
+        <p:cxnSp>
+          <p:nvCxnSpPr>
+            <p:cNvPr id="119" name="直接连接符 118">
+              <a:extLst>
+                <a:ext uri="{FF2B5EF4-FFF2-40B4-BE49-F238E27FC236}">
+                  <a16:creationId xmlns:a16="http://schemas.microsoft.com/office/drawing/2014/main" id="{116040EE-5590-EDE1-2067-00412E180FFB}"/>
+                </a:ext>
+              </a:extLst>
+            </p:cNvPr>
+            <p:cNvCxnSpPr>
+              <a:cxnSpLocks/>
+            </p:cNvCxnSpPr>
+            <p:nvPr/>
+          </p:nvCxnSpPr>
+          <p:spPr>
+            <a:xfrm flipH="1" flipV="1">
+              <a:off x="9373366" y="4736785"/>
+              <a:ext cx="2316208" cy="301912"/>
+            </a:xfrm>
+            <a:prstGeom prst="line">
+              <a:avLst/>
+            </a:prstGeom>
+            <a:ln w="31750">
+              <a:solidFill>
+                <a:srgbClr val="77797D"/>
+              </a:solidFill>
+            </a:ln>
+          </p:spPr>
+          <p:style>
+            <a:lnRef idx="2">
+              <a:schemeClr val="accent1"/>
+            </a:lnRef>
+            <a:fillRef idx="0">
+              <a:schemeClr val="accent1"/>
+            </a:fillRef>
+            <a:effectRef idx="1">
+              <a:schemeClr val="accent1"/>
+            </a:effectRef>
+            <a:fontRef idx="minor">
+              <a:schemeClr val="tx1"/>
+            </a:fontRef>
+          </p:style>
+        </p:cxnSp>
+      </p:grpSp>
+      <p:sp>
+        <p:nvSpPr>
+          <p:cNvPr id="132" name="文本框 131">
+            <a:extLst>
+              <a:ext uri="{FF2B5EF4-FFF2-40B4-BE49-F238E27FC236}">
+                <a16:creationId xmlns:a16="http://schemas.microsoft.com/office/drawing/2014/main" id="{FEB56916-96C1-7BAE-CDDC-4445CCE47D29}"/>
+              </a:ext>
+            </a:extLst>
+          </p:cNvPr>
+          <p:cNvSpPr txBox="1"/>
+          <p:nvPr/>
+        </p:nvSpPr>
+        <p:spPr>
+          <a:xfrm>
+            <a:off x="7146391" y="1092367"/>
+            <a:ext cx="1897289" cy="584775"/>
+          </a:xfrm>
+          <a:prstGeom prst="rect">
+            <a:avLst/>
+          </a:prstGeom>
+          <a:noFill/>
+        </p:spPr>
+        <p:txBody>
+          <a:bodyPr wrap="square" anchor="ctr">
+            <a:spAutoFit/>
+          </a:bodyPr>
+          <a:lstStyle/>
+          <a:p>
+            <a:r>
+              <a:rPr lang="en-US" altLang="zh-CN" sz="1600" dirty="0" err="1">
+                <a:solidFill>
+                  <a:srgbClr val="77797D"/>
+                </a:solidFill>
+                <a:latin typeface="Helvetica" panose="020B0604020202020204" pitchFamily="34" charset="0"/>
+                <a:cs typeface="Helvetica" panose="020B0604020202020204" pitchFamily="34" charset="0"/>
+              </a:rPr>
+              <a:t>fibreglass</a:t>
+            </a:r>
+            <a:r>
+              <a:rPr lang="en-US" altLang="zh-CN" sz="1600" dirty="0">
+                <a:solidFill>
+                  <a:srgbClr val="77797D"/>
+                </a:solidFill>
+                <a:latin typeface="Helvetica" panose="020B0604020202020204" pitchFamily="34" charset="0"/>
+                <a:cs typeface="Helvetica" panose="020B0604020202020204" pitchFamily="34" charset="0"/>
+              </a:rPr>
+              <a:t> reinforced tape</a:t>
+            </a:r>
+            <a:endParaRPr lang="en-GB" sz="1600" dirty="0">
+              <a:solidFill>
+                <a:srgbClr val="77797D"/>
+              </a:solidFill>
+              <a:latin typeface="Helvetica" panose="020B0604020202020204" pitchFamily="34" charset="0"/>
+              <a:cs typeface="Helvetica" panose="020B0604020202020204" pitchFamily="34" charset="0"/>
+            </a:endParaRPr>
+          </a:p>
+        </p:txBody>
+      </p:sp>
+      <p:sp>
+        <p:nvSpPr>
+          <p:cNvPr id="136" name="文本框 135">
+            <a:extLst>
+              <a:ext uri="{FF2B5EF4-FFF2-40B4-BE49-F238E27FC236}">
+                <a16:creationId xmlns:a16="http://schemas.microsoft.com/office/drawing/2014/main" id="{9500AF6D-4FC1-F159-5F63-E87E7AFA2541}"/>
+              </a:ext>
+            </a:extLst>
+          </p:cNvPr>
+          <p:cNvSpPr txBox="1"/>
+          <p:nvPr/>
+        </p:nvSpPr>
+        <p:spPr>
+          <a:xfrm>
+            <a:off x="7146392" y="1909575"/>
+            <a:ext cx="731234" cy="338554"/>
+          </a:xfrm>
+          <a:prstGeom prst="rect">
+            <a:avLst/>
+          </a:prstGeom>
+          <a:noFill/>
+        </p:spPr>
+        <p:txBody>
+          <a:bodyPr wrap="square" anchor="ctr">
+            <a:spAutoFit/>
+          </a:bodyPr>
+          <a:lstStyle/>
+          <a:p>
+            <a:r>
+              <a:rPr lang="en-US" sz="1600" dirty="0">
+                <a:solidFill>
+                  <a:srgbClr val="67645F"/>
+                </a:solidFill>
+                <a:latin typeface="Helvetica" panose="020B0604020202020204" pitchFamily="34" charset="0"/>
+                <a:cs typeface="Helvetica" panose="020B0604020202020204" pitchFamily="34" charset="0"/>
+              </a:rPr>
+              <a:t>probe</a:t>
+            </a:r>
+            <a:endParaRPr lang="en-GB" sz="1600" dirty="0">
+              <a:solidFill>
+                <a:srgbClr val="67645F"/>
+              </a:solidFill>
+              <a:latin typeface="Helvetica" panose="020B0604020202020204" pitchFamily="34" charset="0"/>
+              <a:cs typeface="Helvetica" panose="020B0604020202020204" pitchFamily="34" charset="0"/>
+            </a:endParaRPr>
+          </a:p>
+        </p:txBody>
+      </p:sp>
+      <p:grpSp>
+        <p:nvGrpSpPr>
+          <p:cNvPr id="139" name="组合 138">
+            <a:extLst>
+              <a:ext uri="{FF2B5EF4-FFF2-40B4-BE49-F238E27FC236}">
+                <a16:creationId xmlns:a16="http://schemas.microsoft.com/office/drawing/2014/main" id="{38130447-C12B-A7B8-EB4C-5922EB5047DA}"/>
+              </a:ext>
+            </a:extLst>
+          </p:cNvPr>
+          <p:cNvGrpSpPr/>
+          <p:nvPr/>
+        </p:nvGrpSpPr>
+        <p:grpSpPr>
+          <a:xfrm flipV="1">
+            <a:off x="8779312" y="2979060"/>
+            <a:ext cx="1770758" cy="358838"/>
+            <a:chOff x="9862795" y="5698475"/>
+            <a:chExt cx="2308273" cy="273931"/>
+          </a:xfrm>
+          <a:effectLst>
+            <a:outerShdw blurRad="63500" sx="101000" sy="101000" algn="ctr" rotWithShape="0">
+              <a:schemeClr val="bg1"/>
+            </a:outerShdw>
+          </a:effectLst>
+        </p:grpSpPr>
+        <p:cxnSp>
+          <p:nvCxnSpPr>
+            <p:cNvPr id="140" name="直接箭头连接符 139">
+              <a:extLst>
+                <a:ext uri="{FF2B5EF4-FFF2-40B4-BE49-F238E27FC236}">
+                  <a16:creationId xmlns:a16="http://schemas.microsoft.com/office/drawing/2014/main" id="{C7B6B979-85D8-D7CC-B537-7B16ED999594}"/>
+                </a:ext>
+              </a:extLst>
+            </p:cNvPr>
+            <p:cNvCxnSpPr>
+              <a:cxnSpLocks/>
+            </p:cNvCxnSpPr>
+            <p:nvPr/>
+          </p:nvCxnSpPr>
+          <p:spPr>
+            <a:xfrm>
+              <a:off x="11260538" y="5698475"/>
+              <a:ext cx="910530" cy="273931"/>
+            </a:xfrm>
+            <a:prstGeom prst="straightConnector1">
+              <a:avLst/>
+            </a:prstGeom>
+            <a:ln w="31750">
+              <a:solidFill>
+                <a:schemeClr val="tx1"/>
+              </a:solidFill>
+              <a:tailEnd type="triangle"/>
+            </a:ln>
+          </p:spPr>
+          <p:style>
+            <a:lnRef idx="2">
+              <a:schemeClr val="accent1"/>
+            </a:lnRef>
+            <a:fillRef idx="0">
+              <a:schemeClr val="accent1"/>
+            </a:fillRef>
+            <a:effectRef idx="1">
+              <a:schemeClr val="accent1"/>
+            </a:effectRef>
+            <a:fontRef idx="minor">
+              <a:schemeClr val="tx1"/>
+            </a:fontRef>
+          </p:style>
+        </p:cxnSp>
+        <p:cxnSp>
+          <p:nvCxnSpPr>
+            <p:cNvPr id="141" name="直接连接符 140">
+              <a:extLst>
+                <a:ext uri="{FF2B5EF4-FFF2-40B4-BE49-F238E27FC236}">
+                  <a16:creationId xmlns:a16="http://schemas.microsoft.com/office/drawing/2014/main" id="{532268C6-1CF2-232B-3609-71DF18EADE88}"/>
+                </a:ext>
+              </a:extLst>
+            </p:cNvPr>
+            <p:cNvCxnSpPr>
+              <a:cxnSpLocks/>
+            </p:cNvCxnSpPr>
+            <p:nvPr/>
+          </p:nvCxnSpPr>
+          <p:spPr>
+            <a:xfrm flipH="1">
+              <a:off x="9862795" y="5698475"/>
+              <a:ext cx="1416665" cy="81359"/>
+            </a:xfrm>
+            <a:prstGeom prst="line">
+              <a:avLst/>
+            </a:prstGeom>
+            <a:ln w="31750">
+              <a:solidFill>
+                <a:schemeClr val="tx1"/>
+              </a:solidFill>
+            </a:ln>
+          </p:spPr>
+          <p:style>
+            <a:lnRef idx="2">
+              <a:schemeClr val="accent1"/>
+            </a:lnRef>
+            <a:fillRef idx="0">
+              <a:schemeClr val="accent1"/>
+            </a:fillRef>
+            <a:effectRef idx="1">
+              <a:schemeClr val="accent1"/>
+            </a:effectRef>
+            <a:fontRef idx="minor">
+              <a:schemeClr val="tx1"/>
+            </a:fontRef>
+          </p:style>
+        </p:cxnSp>
+      </p:grpSp>
+      <p:pic>
+        <p:nvPicPr>
+          <p:cNvPr id="156" name="图形 155">
+            <a:extLst>
+              <a:ext uri="{FF2B5EF4-FFF2-40B4-BE49-F238E27FC236}">
+                <a16:creationId xmlns:a16="http://schemas.microsoft.com/office/drawing/2014/main" id="{7F952B11-04CF-2366-921E-1E3D86B8DA42}"/>
+              </a:ext>
+            </a:extLst>
+          </p:cNvPr>
+          <p:cNvPicPr>
+            <a:picLocks noChangeAspect="1"/>
+          </p:cNvPicPr>
+          <p:nvPr/>
+        </p:nvPicPr>
+        <p:blipFill>
+          <a:blip r:embed="rId7">
+            <a:extLst>
+              <a:ext uri="{96DAC541-7B7A-43D3-8B79-37D633B846F1}">
+                <asvg:svgBlip xmlns:asvg="http://schemas.microsoft.com/office/drawing/2016/SVG/main" r:embed="rId8"/>
+              </a:ext>
+            </a:extLst>
+          </a:blip>
+          <a:stretch>
+            <a:fillRect/>
+          </a:stretch>
+        </p:blipFill>
+        <p:spPr>
+          <a:xfrm flipH="1">
+            <a:off x="7840468" y="2669667"/>
+            <a:ext cx="713125" cy="1003562"/>
+          </a:xfrm>
+          <a:prstGeom prst="rect">
+            <a:avLst/>
+          </a:prstGeom>
+        </p:spPr>
+      </p:pic>
+      <p:sp>
+        <p:nvSpPr>
+          <p:cNvPr id="157" name="文本框 156">
+            <a:extLst>
+              <a:ext uri="{FF2B5EF4-FFF2-40B4-BE49-F238E27FC236}">
+                <a16:creationId xmlns:a16="http://schemas.microsoft.com/office/drawing/2014/main" id="{C0D6F6BC-1F30-7B2F-2C54-BE620694E6E6}"/>
+              </a:ext>
+            </a:extLst>
+          </p:cNvPr>
+          <p:cNvSpPr txBox="1"/>
+          <p:nvPr/>
+        </p:nvSpPr>
+        <p:spPr>
+          <a:xfrm>
+            <a:off x="7476309" y="2500390"/>
+            <a:ext cx="2034319" cy="338554"/>
+          </a:xfrm>
+          <a:prstGeom prst="rect">
+            <a:avLst/>
+          </a:prstGeom>
+          <a:noFill/>
+        </p:spPr>
+        <p:txBody>
+          <a:bodyPr wrap="square" anchor="ctr">
+            <a:spAutoFit/>
+          </a:bodyPr>
+          <a:lstStyle/>
+          <a:p>
+            <a:r>
+              <a:rPr lang="en-GB" altLang="zh-CN" sz="1600" dirty="0">
+                <a:latin typeface="Helvetica" panose="020B0604020202020204" pitchFamily="34" charset="0"/>
+                <a:cs typeface="Helvetica" panose="020B0604020202020204" pitchFamily="34" charset="0"/>
+              </a:rPr>
+              <a:t>wind       </a:t>
+            </a:r>
+            <a:r>
+              <a:rPr lang="en-GB" sz="1600" dirty="0">
+                <a:latin typeface="Helvetica" panose="020B0604020202020204" pitchFamily="34" charset="0"/>
+                <a:cs typeface="Helvetica" panose="020B0604020202020204" pitchFamily="34" charset="0"/>
+              </a:rPr>
+              <a:t>direction</a:t>
+            </a:r>
+          </a:p>
+        </p:txBody>
+      </p:sp>
+    </p:spTree>
+    <p:extLst>
+      <p:ext uri="{BB962C8B-B14F-4D97-AF65-F5344CB8AC3E}">
+        <p14:creationId xmlns:p14="http://schemas.microsoft.com/office/powerpoint/2010/main" val="3601829480"/>
       </p:ext>
     </p:extLst>
   </p:cSld>

--- a/01_Thermal/D_sketch/Flight Arena Sketch.pptx
+++ b/01_Thermal/D_sketch/Flight Arena Sketch.pptx
@@ -120,7 +120,7 @@
 <file path=ppt/revisionInfo.xml><?xml version="1.0" encoding="utf-8"?>
 <p1510:revInfo xmlns:a="http://schemas.openxmlformats.org/drawingml/2006/main" xmlns:r="http://schemas.openxmlformats.org/officeDocument/2006/relationships" xmlns:p1510="http://schemas.microsoft.com/office/powerpoint/2015/10/main">
   <p1510:revLst>
-    <p1510:client id="{372C730B-1908-4A6A-802B-59AC80DA7F37}" v="300" dt="2026-03-16T17:05:55.856"/>
+    <p1510:client id="{081880D3-A72C-42BF-A908-E2C77D9998D0}" v="29" dt="2026-03-24T20:12:33.663"/>
   </p1510:revLst>
 </p1510:revInfo>
 </file>
@@ -130,12 +130,12 @@
   <pc:docChgLst>
     <pc:chgData name="Li, Hanchen F" userId="3aee791e-6a2d-4da7-a77b-fbdf7bf15886" providerId="ADAL" clId="{1EA8FAE0-933A-49DD-A724-68A18B8AE880}"/>
     <pc:docChg chg="undo redo custSel addSld delSld modSld modNotesMaster">
-      <pc:chgData name="Li, Hanchen F" userId="3aee791e-6a2d-4da7-a77b-fbdf7bf15886" providerId="ADAL" clId="{1EA8FAE0-933A-49DD-A724-68A18B8AE880}" dt="2026-03-16T17:07:16.468" v="3199" actId="478"/>
+      <pc:chgData name="Li, Hanchen F" userId="3aee791e-6a2d-4da7-a77b-fbdf7bf15886" providerId="ADAL" clId="{1EA8FAE0-933A-49DD-A724-68A18B8AE880}" dt="2026-03-24T20:15:22.784" v="3484" actId="1076"/>
       <pc:docMkLst>
         <pc:docMk/>
       </pc:docMkLst>
       <pc:sldChg chg="addSp delSp modSp add mod">
-        <pc:chgData name="Li, Hanchen F" userId="3aee791e-6a2d-4da7-a77b-fbdf7bf15886" providerId="ADAL" clId="{1EA8FAE0-933A-49DD-A724-68A18B8AE880}" dt="2026-03-16T16:30:39.627" v="1759" actId="1076"/>
+        <pc:chgData name="Li, Hanchen F" userId="3aee791e-6a2d-4da7-a77b-fbdf7bf15886" providerId="ADAL" clId="{1EA8FAE0-933A-49DD-A724-68A18B8AE880}" dt="2026-03-24T20:10:48.309" v="3382" actId="1076"/>
         <pc:sldMkLst>
           <pc:docMk/>
           <pc:sldMk cId="3629937204" sldId="259"/>
@@ -148,8 +148,8 @@
             <ac:spMk id="19" creationId="{05DD7E1A-3AFE-89F1-8750-632571690AB1}"/>
           </ac:spMkLst>
         </pc:spChg>
-        <pc:spChg chg="add mod ord">
-          <ac:chgData name="Li, Hanchen F" userId="3aee791e-6a2d-4da7-a77b-fbdf7bf15886" providerId="ADAL" clId="{1EA8FAE0-933A-49DD-A724-68A18B8AE880}" dt="2026-03-16T16:30:39.627" v="1759" actId="1076"/>
+        <pc:spChg chg="add del mod ord">
+          <ac:chgData name="Li, Hanchen F" userId="3aee791e-6a2d-4da7-a77b-fbdf7bf15886" providerId="ADAL" clId="{1EA8FAE0-933A-49DD-A724-68A18B8AE880}" dt="2026-03-24T20:10:20.202" v="3377" actId="478"/>
           <ac:spMkLst>
             <pc:docMk/>
             <pc:sldMk cId="3629937204" sldId="259"/>
@@ -188,32 +188,32 @@
             <ac:spMk id="46" creationId="{4BA0DA3A-6D2B-FB26-C226-1351C5C8D192}"/>
           </ac:spMkLst>
         </pc:spChg>
-        <pc:spChg chg="add mod">
-          <ac:chgData name="Li, Hanchen F" userId="3aee791e-6a2d-4da7-a77b-fbdf7bf15886" providerId="ADAL" clId="{1EA8FAE0-933A-49DD-A724-68A18B8AE880}" dt="2026-03-16T16:30:39.627" v="1759" actId="1076"/>
+        <pc:spChg chg="add del mod">
+          <ac:chgData name="Li, Hanchen F" userId="3aee791e-6a2d-4da7-a77b-fbdf7bf15886" providerId="ADAL" clId="{1EA8FAE0-933A-49DD-A724-68A18B8AE880}" dt="2026-03-24T20:10:23.896" v="3378" actId="478"/>
           <ac:spMkLst>
             <pc:docMk/>
             <pc:sldMk cId="3629937204" sldId="259"/>
             <ac:spMk id="47" creationId="{F134A86F-C04C-6307-9C75-E04235FF642A}"/>
           </ac:spMkLst>
         </pc:spChg>
-        <pc:spChg chg="add mod">
-          <ac:chgData name="Li, Hanchen F" userId="3aee791e-6a2d-4da7-a77b-fbdf7bf15886" providerId="ADAL" clId="{1EA8FAE0-933A-49DD-A724-68A18B8AE880}" dt="2026-03-16T16:30:39.627" v="1759" actId="1076"/>
+        <pc:spChg chg="add del mod">
+          <ac:chgData name="Li, Hanchen F" userId="3aee791e-6a2d-4da7-a77b-fbdf7bf15886" providerId="ADAL" clId="{1EA8FAE0-933A-49DD-A724-68A18B8AE880}" dt="2026-03-24T20:10:23.896" v="3378" actId="478"/>
           <ac:spMkLst>
             <pc:docMk/>
             <pc:sldMk cId="3629937204" sldId="259"/>
             <ac:spMk id="49" creationId="{24BAAFDD-F195-1346-6C3E-C1C0A3A4CE0B}"/>
           </ac:spMkLst>
         </pc:spChg>
-        <pc:spChg chg="add mod">
-          <ac:chgData name="Li, Hanchen F" userId="3aee791e-6a2d-4da7-a77b-fbdf7bf15886" providerId="ADAL" clId="{1EA8FAE0-933A-49DD-A724-68A18B8AE880}" dt="2026-03-16T16:30:39.627" v="1759" actId="1076"/>
+        <pc:spChg chg="add del mod">
+          <ac:chgData name="Li, Hanchen F" userId="3aee791e-6a2d-4da7-a77b-fbdf7bf15886" providerId="ADAL" clId="{1EA8FAE0-933A-49DD-A724-68A18B8AE880}" dt="2026-03-24T20:10:23.896" v="3378" actId="478"/>
           <ac:spMkLst>
             <pc:docMk/>
             <pc:sldMk cId="3629937204" sldId="259"/>
             <ac:spMk id="55" creationId="{8B653361-2294-2471-71F4-C2E8013CD7A9}"/>
           </ac:spMkLst>
         </pc:spChg>
-        <pc:spChg chg="add mod">
-          <ac:chgData name="Li, Hanchen F" userId="3aee791e-6a2d-4da7-a77b-fbdf7bf15886" providerId="ADAL" clId="{1EA8FAE0-933A-49DD-A724-68A18B8AE880}" dt="2026-03-16T16:30:39.627" v="1759" actId="1076"/>
+        <pc:spChg chg="add del mod">
+          <ac:chgData name="Li, Hanchen F" userId="3aee791e-6a2d-4da7-a77b-fbdf7bf15886" providerId="ADAL" clId="{1EA8FAE0-933A-49DD-A724-68A18B8AE880}" dt="2026-03-24T20:10:23.896" v="3378" actId="478"/>
           <ac:spMkLst>
             <pc:docMk/>
             <pc:sldMk cId="3629937204" sldId="259"/>
@@ -221,154 +221,146 @@
           </ac:spMkLst>
         </pc:spChg>
         <pc:spChg chg="add mod">
-          <ac:chgData name="Li, Hanchen F" userId="3aee791e-6a2d-4da7-a77b-fbdf7bf15886" providerId="ADAL" clId="{1EA8FAE0-933A-49DD-A724-68A18B8AE880}" dt="2026-03-16T16:25:54.538" v="1733" actId="1076"/>
+          <ac:chgData name="Li, Hanchen F" userId="3aee791e-6a2d-4da7-a77b-fbdf7bf15886" providerId="ADAL" clId="{1EA8FAE0-933A-49DD-A724-68A18B8AE880}" dt="2026-03-24T20:10:48.309" v="3382" actId="1076"/>
           <ac:spMkLst>
             <pc:docMk/>
             <pc:sldMk cId="3629937204" sldId="259"/>
             <ac:spMk id="59" creationId="{99691316-2869-D306-99E3-877DBA2E91E0}"/>
           </ac:spMkLst>
         </pc:spChg>
+        <pc:spChg chg="mod">
+          <ac:chgData name="Li, Hanchen F" userId="3aee791e-6a2d-4da7-a77b-fbdf7bf15886" providerId="ADAL" clId="{1EA8FAE0-933A-49DD-A724-68A18B8AE880}" dt="2026-03-24T20:10:34.876" v="3380" actId="403"/>
+          <ac:spMkLst>
+            <pc:docMk/>
+            <pc:sldMk cId="3629937204" sldId="259"/>
+            <ac:spMk id="61" creationId="{B3CAF2B1-3BD0-4456-8CF1-34A10E9D3671}"/>
+          </ac:spMkLst>
+        </pc:spChg>
+        <pc:grpChg chg="del">
+          <ac:chgData name="Li, Hanchen F" userId="3aee791e-6a2d-4da7-a77b-fbdf7bf15886" providerId="ADAL" clId="{1EA8FAE0-933A-49DD-A724-68A18B8AE880}" dt="2026-03-24T20:10:26.939" v="3379" actId="478"/>
+          <ac:grpSpMkLst>
+            <pc:docMk/>
+            <pc:sldMk cId="3629937204" sldId="259"/>
+            <ac:grpSpMk id="5" creationId="{C5D41095-A693-E3AE-A84C-B804E5A12ABE}"/>
+          </ac:grpSpMkLst>
+        </pc:grpChg>
+        <pc:graphicFrameChg chg="add del mod">
+          <ac:chgData name="Li, Hanchen F" userId="3aee791e-6a2d-4da7-a77b-fbdf7bf15886" providerId="ADAL" clId="{1EA8FAE0-933A-49DD-A724-68A18B8AE880}" dt="2026-03-24T15:19:14.526" v="3258" actId="478"/>
+          <ac:graphicFrameMkLst>
+            <pc:docMk/>
+            <pc:sldMk cId="3629937204" sldId="259"/>
+            <ac:graphicFrameMk id="10" creationId="{4878FBC0-5F92-6DC5-AF3B-27B6EAA508C2}"/>
+          </ac:graphicFrameMkLst>
+        </pc:graphicFrameChg>
+        <pc:graphicFrameChg chg="mod">
+          <ac:chgData name="Li, Hanchen F" userId="3aee791e-6a2d-4da7-a77b-fbdf7bf15886" providerId="ADAL" clId="{1EA8FAE0-933A-49DD-A724-68A18B8AE880}" dt="2026-03-24T20:10:17.142" v="3376"/>
+          <ac:graphicFrameMkLst>
+            <pc:docMk/>
+            <pc:sldMk cId="3629937204" sldId="259"/>
+            <ac:graphicFrameMk id="12" creationId="{6A77711E-A40C-59C7-E1AE-CC6963F911B8}"/>
+          </ac:graphicFrameMkLst>
+        </pc:graphicFrameChg>
       </pc:sldChg>
       <pc:sldChg chg="addSp delSp modSp add mod">
-        <pc:chgData name="Li, Hanchen F" userId="3aee791e-6a2d-4da7-a77b-fbdf7bf15886" providerId="ADAL" clId="{1EA8FAE0-933A-49DD-A724-68A18B8AE880}" dt="2026-03-16T17:07:16.468" v="3199" actId="478"/>
+        <pc:chgData name="Li, Hanchen F" userId="3aee791e-6a2d-4da7-a77b-fbdf7bf15886" providerId="ADAL" clId="{1EA8FAE0-933A-49DD-A724-68A18B8AE880}" dt="2026-03-24T20:15:22.784" v="3484" actId="1076"/>
         <pc:sldMkLst>
           <pc:docMk/>
           <pc:sldMk cId="3601829480" sldId="260"/>
         </pc:sldMkLst>
-        <pc:spChg chg="del">
-          <ac:chgData name="Li, Hanchen F" userId="3aee791e-6a2d-4da7-a77b-fbdf7bf15886" providerId="ADAL" clId="{1EA8FAE0-933A-49DD-A724-68A18B8AE880}" dt="2026-03-16T16:25:59.833" v="1735" actId="478"/>
+        <pc:spChg chg="add mod">
+          <ac:chgData name="Li, Hanchen F" userId="3aee791e-6a2d-4da7-a77b-fbdf7bf15886" providerId="ADAL" clId="{1EA8FAE0-933A-49DD-A724-68A18B8AE880}" dt="2026-03-24T20:11:58.618" v="3399" actId="1036"/>
           <ac:spMkLst>
             <pc:docMk/>
             <pc:sldMk cId="3601829480" sldId="260"/>
-            <ac:spMk id="19" creationId="{0BDA3B8F-B9E3-9E95-80BE-49D7385DBB96}"/>
+            <ac:spMk id="5" creationId="{A10C37A3-F8BB-0A73-46AD-ADB8904485DF}"/>
           </ac:spMkLst>
         </pc:spChg>
-        <pc:spChg chg="del">
-          <ac:chgData name="Li, Hanchen F" userId="3aee791e-6a2d-4da7-a77b-fbdf7bf15886" providerId="ADAL" clId="{1EA8FAE0-933A-49DD-A724-68A18B8AE880}" dt="2026-03-16T16:25:59.833" v="1735" actId="478"/>
+        <pc:spChg chg="add mod">
+          <ac:chgData name="Li, Hanchen F" userId="3aee791e-6a2d-4da7-a77b-fbdf7bf15886" providerId="ADAL" clId="{1EA8FAE0-933A-49DD-A724-68A18B8AE880}" dt="2026-03-24T15:22:47.343" v="3358" actId="1037"/>
           <ac:spMkLst>
             <pc:docMk/>
             <pc:sldMk cId="3601829480" sldId="260"/>
-            <ac:spMk id="21" creationId="{3C9B579D-8682-D674-9D1B-6D3C19A920B7}"/>
+            <ac:spMk id="6" creationId="{7514CCCC-9226-1B11-499D-4D18C67C000C}"/>
           </ac:spMkLst>
         </pc:spChg>
-        <pc:spChg chg="del">
-          <ac:chgData name="Li, Hanchen F" userId="3aee791e-6a2d-4da7-a77b-fbdf7bf15886" providerId="ADAL" clId="{1EA8FAE0-933A-49DD-A724-68A18B8AE880}" dt="2026-03-16T16:25:59.833" v="1735" actId="478"/>
+        <pc:spChg chg="mod">
+          <ac:chgData name="Li, Hanchen F" userId="3aee791e-6a2d-4da7-a77b-fbdf7bf15886" providerId="ADAL" clId="{1EA8FAE0-933A-49DD-A724-68A18B8AE880}" dt="2026-03-24T15:21:28.548" v="3313" actId="208"/>
           <ac:spMkLst>
             <pc:docMk/>
             <pc:sldMk cId="3601829480" sldId="260"/>
-            <ac:spMk id="36" creationId="{DEFE4BA7-0FCC-10B0-6C32-54E1EB88162C}"/>
+            <ac:spMk id="8" creationId="{8CDC6514-4009-BEAD-0D71-715A14505557}"/>
           </ac:spMkLst>
         </pc:spChg>
-        <pc:spChg chg="del">
-          <ac:chgData name="Li, Hanchen F" userId="3aee791e-6a2d-4da7-a77b-fbdf7bf15886" providerId="ADAL" clId="{1EA8FAE0-933A-49DD-A724-68A18B8AE880}" dt="2026-03-16T16:25:59.833" v="1735" actId="478"/>
+        <pc:spChg chg="mod">
+          <ac:chgData name="Li, Hanchen F" userId="3aee791e-6a2d-4da7-a77b-fbdf7bf15886" providerId="ADAL" clId="{1EA8FAE0-933A-49DD-A724-68A18B8AE880}" dt="2026-03-24T15:21:38.992" v="3314" actId="2085"/>
           <ac:spMkLst>
             <pc:docMk/>
             <pc:sldMk cId="3601829480" sldId="260"/>
-            <ac:spMk id="39" creationId="{3EA8722F-F984-F347-7A49-76BA83DC2B0B}"/>
+            <ac:spMk id="10" creationId="{BD17057F-468B-E944-E9B2-EEA15316E163}"/>
+          </ac:spMkLst>
+        </pc:spChg>
+        <pc:spChg chg="mod">
+          <ac:chgData name="Li, Hanchen F" userId="3aee791e-6a2d-4da7-a77b-fbdf7bf15886" providerId="ADAL" clId="{1EA8FAE0-933A-49DD-A724-68A18B8AE880}" dt="2026-03-24T15:21:38.992" v="3314" actId="2085"/>
+          <ac:spMkLst>
+            <pc:docMk/>
+            <pc:sldMk cId="3601829480" sldId="260"/>
+            <ac:spMk id="11" creationId="{6B5BED7B-9DA6-F8AC-3D71-EE0FAA3E0515}"/>
+          </ac:spMkLst>
+        </pc:spChg>
+        <pc:spChg chg="mod">
+          <ac:chgData name="Li, Hanchen F" userId="3aee791e-6a2d-4da7-a77b-fbdf7bf15886" providerId="ADAL" clId="{1EA8FAE0-933A-49DD-A724-68A18B8AE880}" dt="2026-03-24T15:21:38.992" v="3314" actId="2085"/>
+          <ac:spMkLst>
+            <pc:docMk/>
+            <pc:sldMk cId="3601829480" sldId="260"/>
+            <ac:spMk id="12" creationId="{8F5A32A8-6296-347C-16F2-B619D961D4ED}"/>
+          </ac:spMkLst>
+        </pc:spChg>
+        <pc:spChg chg="add del mod">
+          <ac:chgData name="Li, Hanchen F" userId="3aee791e-6a2d-4da7-a77b-fbdf7bf15886" providerId="ADAL" clId="{1EA8FAE0-933A-49DD-A724-68A18B8AE880}" dt="2026-03-24T20:14:24.742" v="3454" actId="478"/>
+          <ac:spMkLst>
+            <pc:docMk/>
+            <pc:sldMk cId="3601829480" sldId="260"/>
+            <ac:spMk id="14" creationId="{002203EE-21A4-4750-4B21-9F5E0C154688}"/>
+          </ac:spMkLst>
+        </pc:spChg>
+        <pc:spChg chg="add del mod">
+          <ac:chgData name="Li, Hanchen F" userId="3aee791e-6a2d-4da7-a77b-fbdf7bf15886" providerId="ADAL" clId="{1EA8FAE0-933A-49DD-A724-68A18B8AE880}" dt="2026-03-24T20:14:26.050" v="3455" actId="478"/>
+          <ac:spMkLst>
+            <pc:docMk/>
+            <pc:sldMk cId="3601829480" sldId="260"/>
+            <ac:spMk id="15" creationId="{EDDEDE52-B619-1EB1-43E2-5C7C4B2A6861}"/>
+          </ac:spMkLst>
+        </pc:spChg>
+        <pc:spChg chg="mod">
+          <ac:chgData name="Li, Hanchen F" userId="3aee791e-6a2d-4da7-a77b-fbdf7bf15886" providerId="ADAL" clId="{1EA8FAE0-933A-49DD-A724-68A18B8AE880}" dt="2026-03-24T15:20:42.489" v="3292" actId="571"/>
+          <ac:spMkLst>
+            <pc:docMk/>
+            <pc:sldMk cId="3601829480" sldId="260"/>
+            <ac:spMk id="16" creationId="{FEFF3FBE-27E9-DADF-6AAA-3696E642B464}"/>
+          </ac:spMkLst>
+        </pc:spChg>
+        <pc:spChg chg="mod">
+          <ac:chgData name="Li, Hanchen F" userId="3aee791e-6a2d-4da7-a77b-fbdf7bf15886" providerId="ADAL" clId="{1EA8FAE0-933A-49DD-A724-68A18B8AE880}" dt="2026-03-24T15:20:42.489" v="3292" actId="571"/>
+          <ac:spMkLst>
+            <pc:docMk/>
+            <pc:sldMk cId="3601829480" sldId="260"/>
+            <ac:spMk id="17" creationId="{19CD5AB0-71D5-913F-A052-E8F876853460}"/>
           </ac:spMkLst>
         </pc:spChg>
         <pc:spChg chg="add mod">
-          <ac:chgData name="Li, Hanchen F" userId="3aee791e-6a2d-4da7-a77b-fbdf7bf15886" providerId="ADAL" clId="{1EA8FAE0-933A-49DD-A724-68A18B8AE880}" dt="2026-03-16T16:32:01.102" v="1784" actId="14100"/>
+          <ac:chgData name="Li, Hanchen F" userId="3aee791e-6a2d-4da7-a77b-fbdf7bf15886" providerId="ADAL" clId="{1EA8FAE0-933A-49DD-A724-68A18B8AE880}" dt="2026-03-24T15:22:11.430" v="3326" actId="1076"/>
           <ac:spMkLst>
             <pc:docMk/>
             <pc:sldMk cId="3601829480" sldId="260"/>
-            <ac:spMk id="43" creationId="{A787041E-AD0B-771E-F74E-4F1B271118D5}"/>
+            <ac:spMk id="18" creationId="{D4D1BDDC-E0C3-4C5C-AA08-A6CCCA207049}"/>
           </ac:spMkLst>
         </pc:spChg>
         <pc:spChg chg="add mod">
-          <ac:chgData name="Li, Hanchen F" userId="3aee791e-6a2d-4da7-a77b-fbdf7bf15886" providerId="ADAL" clId="{1EA8FAE0-933A-49DD-A724-68A18B8AE880}" dt="2026-03-16T16:31:58.830" v="1783" actId="14100"/>
+          <ac:chgData name="Li, Hanchen F" userId="3aee791e-6a2d-4da7-a77b-fbdf7bf15886" providerId="ADAL" clId="{1EA8FAE0-933A-49DD-A724-68A18B8AE880}" dt="2026-03-24T15:22:11.430" v="3326" actId="1076"/>
           <ac:spMkLst>
             <pc:docMk/>
             <pc:sldMk cId="3601829480" sldId="260"/>
-            <ac:spMk id="44" creationId="{E966EC97-29EC-C43A-652E-6D976C644771}"/>
-          </ac:spMkLst>
-        </pc:spChg>
-        <pc:spChg chg="del">
-          <ac:chgData name="Li, Hanchen F" userId="3aee791e-6a2d-4da7-a77b-fbdf7bf15886" providerId="ADAL" clId="{1EA8FAE0-933A-49DD-A724-68A18B8AE880}" dt="2026-03-16T16:25:59.833" v="1735" actId="478"/>
-          <ac:spMkLst>
-            <pc:docMk/>
-            <pc:sldMk cId="3601829480" sldId="260"/>
-            <ac:spMk id="46" creationId="{375A9314-3EDC-A56E-180F-2EC6F09FC037}"/>
-          </ac:spMkLst>
-        </pc:spChg>
-        <pc:spChg chg="del">
-          <ac:chgData name="Li, Hanchen F" userId="3aee791e-6a2d-4da7-a77b-fbdf7bf15886" providerId="ADAL" clId="{1EA8FAE0-933A-49DD-A724-68A18B8AE880}" dt="2026-03-16T16:25:59.833" v="1735" actId="478"/>
-          <ac:spMkLst>
-            <pc:docMk/>
-            <pc:sldMk cId="3601829480" sldId="260"/>
-            <ac:spMk id="47" creationId="{A686F468-D012-5E5C-CD02-4F9B54174A62}"/>
-          </ac:spMkLst>
-        </pc:spChg>
-        <pc:spChg chg="del">
-          <ac:chgData name="Li, Hanchen F" userId="3aee791e-6a2d-4da7-a77b-fbdf7bf15886" providerId="ADAL" clId="{1EA8FAE0-933A-49DD-A724-68A18B8AE880}" dt="2026-03-16T16:25:59.833" v="1735" actId="478"/>
-          <ac:spMkLst>
-            <pc:docMk/>
-            <pc:sldMk cId="3601829480" sldId="260"/>
-            <ac:spMk id="49" creationId="{F3ED2291-528A-CB9E-2BA3-79C7F6CB00A5}"/>
-          </ac:spMkLst>
-        </pc:spChg>
-        <pc:spChg chg="mod">
-          <ac:chgData name="Li, Hanchen F" userId="3aee791e-6a2d-4da7-a77b-fbdf7bf15886" providerId="ADAL" clId="{1EA8FAE0-933A-49DD-A724-68A18B8AE880}" dt="2026-03-16T16:33:25.142" v="1821"/>
-          <ac:spMkLst>
-            <pc:docMk/>
-            <pc:sldMk cId="3601829480" sldId="260"/>
-            <ac:spMk id="50" creationId="{F83A2DB2-AC1F-C768-D738-2CAB84590019}"/>
-          </ac:spMkLst>
-        </pc:spChg>
-        <pc:spChg chg="mod">
-          <ac:chgData name="Li, Hanchen F" userId="3aee791e-6a2d-4da7-a77b-fbdf7bf15886" providerId="ADAL" clId="{1EA8FAE0-933A-49DD-A724-68A18B8AE880}" dt="2026-03-16T16:33:25.142" v="1821"/>
-          <ac:spMkLst>
-            <pc:docMk/>
-            <pc:sldMk cId="3601829480" sldId="260"/>
-            <ac:spMk id="52" creationId="{2528140B-CFEE-B29A-406A-29B2482137EE}"/>
-          </ac:spMkLst>
-        </pc:spChg>
-        <pc:spChg chg="mod">
-          <ac:chgData name="Li, Hanchen F" userId="3aee791e-6a2d-4da7-a77b-fbdf7bf15886" providerId="ADAL" clId="{1EA8FAE0-933A-49DD-A724-68A18B8AE880}" dt="2026-03-16T16:33:25.142" v="1821"/>
-          <ac:spMkLst>
-            <pc:docMk/>
-            <pc:sldMk cId="3601829480" sldId="260"/>
-            <ac:spMk id="53" creationId="{6B295CF3-0BFD-10BF-98BD-8DA94BD4170D}"/>
-          </ac:spMkLst>
-        </pc:spChg>
-        <pc:spChg chg="mod">
-          <ac:chgData name="Li, Hanchen F" userId="3aee791e-6a2d-4da7-a77b-fbdf7bf15886" providerId="ADAL" clId="{1EA8FAE0-933A-49DD-A724-68A18B8AE880}" dt="2026-03-16T16:33:25.142" v="1821"/>
-          <ac:spMkLst>
-            <pc:docMk/>
-            <pc:sldMk cId="3601829480" sldId="260"/>
-            <ac:spMk id="54" creationId="{FA802924-B260-75DE-7253-0D97D86471A6}"/>
-          </ac:spMkLst>
-        </pc:spChg>
-        <pc:spChg chg="del">
-          <ac:chgData name="Li, Hanchen F" userId="3aee791e-6a2d-4da7-a77b-fbdf7bf15886" providerId="ADAL" clId="{1EA8FAE0-933A-49DD-A724-68A18B8AE880}" dt="2026-03-16T16:25:59.833" v="1735" actId="478"/>
-          <ac:spMkLst>
-            <pc:docMk/>
-            <pc:sldMk cId="3601829480" sldId="260"/>
-            <ac:spMk id="55" creationId="{6A610530-F7BA-4081-813B-27156A2E3B63}"/>
-          </ac:spMkLst>
-        </pc:spChg>
-        <pc:spChg chg="del">
-          <ac:chgData name="Li, Hanchen F" userId="3aee791e-6a2d-4da7-a77b-fbdf7bf15886" providerId="ADAL" clId="{1EA8FAE0-933A-49DD-A724-68A18B8AE880}" dt="2026-03-16T16:25:59.833" v="1735" actId="478"/>
-          <ac:spMkLst>
-            <pc:docMk/>
-            <pc:sldMk cId="3601829480" sldId="260"/>
-            <ac:spMk id="59" creationId="{193A67B2-0E88-78E3-A110-DA6F6475EDEC}"/>
-          </ac:spMkLst>
-        </pc:spChg>
-        <pc:spChg chg="del">
-          <ac:chgData name="Li, Hanchen F" userId="3aee791e-6a2d-4da7-a77b-fbdf7bf15886" providerId="ADAL" clId="{1EA8FAE0-933A-49DD-A724-68A18B8AE880}" dt="2026-03-16T16:25:59.833" v="1735" actId="478"/>
-          <ac:spMkLst>
-            <pc:docMk/>
-            <pc:sldMk cId="3601829480" sldId="260"/>
-            <ac:spMk id="61" creationId="{C7D05C56-2E98-D159-22FD-3CB6D8AE3B12}"/>
-          </ac:spMkLst>
-        </pc:spChg>
-        <pc:spChg chg="add del mod">
-          <ac:chgData name="Li, Hanchen F" userId="3aee791e-6a2d-4da7-a77b-fbdf7bf15886" providerId="ADAL" clId="{1EA8FAE0-933A-49DD-A724-68A18B8AE880}" dt="2026-03-16T16:36:00.623" v="1878" actId="478"/>
-          <ac:spMkLst>
-            <pc:docMk/>
-            <pc:sldMk cId="3601829480" sldId="260"/>
-            <ac:spMk id="62" creationId="{49856CA0-E28F-EE34-35AE-D6E4519E8461}"/>
+            <ac:spMk id="19" creationId="{FA66A814-5E14-E047-9FE6-A154DAB19CE4}"/>
           </ac:spMkLst>
         </pc:spChg>
         <pc:spChg chg="add mod">
@@ -380,23 +372,15 @@
           </ac:spMkLst>
         </pc:spChg>
         <pc:spChg chg="add mod">
-          <ac:chgData name="Li, Hanchen F" userId="3aee791e-6a2d-4da7-a77b-fbdf7bf15886" providerId="ADAL" clId="{1EA8FAE0-933A-49DD-A724-68A18B8AE880}" dt="2026-03-16T16:44:23.496" v="2917" actId="1076"/>
+          <ac:chgData name="Li, Hanchen F" userId="3aee791e-6a2d-4da7-a77b-fbdf7bf15886" providerId="ADAL" clId="{1EA8FAE0-933A-49DD-A724-68A18B8AE880}" dt="2026-03-24T20:12:54.258" v="3404" actId="692"/>
           <ac:spMkLst>
             <pc:docMk/>
             <pc:sldMk cId="3601829480" sldId="260"/>
             <ac:spMk id="92" creationId="{791F1E7C-ADF1-8CD5-4AAD-B4FE4565B178}"/>
           </ac:spMkLst>
         </pc:spChg>
-        <pc:spChg chg="add del mod">
-          <ac:chgData name="Li, Hanchen F" userId="3aee791e-6a2d-4da7-a77b-fbdf7bf15886" providerId="ADAL" clId="{1EA8FAE0-933A-49DD-A724-68A18B8AE880}" dt="2026-03-16T16:45:58.946" v="2936" actId="478"/>
-          <ac:spMkLst>
-            <pc:docMk/>
-            <pc:sldMk cId="3601829480" sldId="260"/>
-            <ac:spMk id="94" creationId="{B32E1554-A733-E049-4E34-63FEFFFBBEB2}"/>
-          </ac:spMkLst>
-        </pc:spChg>
         <pc:spChg chg="add mod">
-          <ac:chgData name="Li, Hanchen F" userId="3aee791e-6a2d-4da7-a77b-fbdf7bf15886" providerId="ADAL" clId="{1EA8FAE0-933A-49DD-A724-68A18B8AE880}" dt="2026-03-16T16:57:49.035" v="3105" actId="1076"/>
+          <ac:chgData name="Li, Hanchen F" userId="3aee791e-6a2d-4da7-a77b-fbdf7bf15886" providerId="ADAL" clId="{1EA8FAE0-933A-49DD-A724-68A18B8AE880}" dt="2026-03-24T15:15:16.622" v="3238" actId="692"/>
           <ac:spMkLst>
             <pc:docMk/>
             <pc:sldMk cId="3601829480" sldId="260"/>
@@ -404,7 +388,7 @@
           </ac:spMkLst>
         </pc:spChg>
         <pc:spChg chg="add mod">
-          <ac:chgData name="Li, Hanchen F" userId="3aee791e-6a2d-4da7-a77b-fbdf7bf15886" providerId="ADAL" clId="{1EA8FAE0-933A-49DD-A724-68A18B8AE880}" dt="2026-03-16T16:53:04.930" v="3048" actId="207"/>
+          <ac:chgData name="Li, Hanchen F" userId="3aee791e-6a2d-4da7-a77b-fbdf7bf15886" providerId="ADAL" clId="{1EA8FAE0-933A-49DD-A724-68A18B8AE880}" dt="2026-03-24T20:14:03.065" v="3450" actId="692"/>
           <ac:spMkLst>
             <pc:docMk/>
             <pc:sldMk cId="3601829480" sldId="260"/>
@@ -412,7 +396,7 @@
           </ac:spMkLst>
         </pc:spChg>
         <pc:spChg chg="add mod">
-          <ac:chgData name="Li, Hanchen F" userId="3aee791e-6a2d-4da7-a77b-fbdf7bf15886" providerId="ADAL" clId="{1EA8FAE0-933A-49DD-A724-68A18B8AE880}" dt="2026-03-16T16:55:34.242" v="3074" actId="14100"/>
+          <ac:chgData name="Li, Hanchen F" userId="3aee791e-6a2d-4da7-a77b-fbdf7bf15886" providerId="ADAL" clId="{1EA8FAE0-933A-49DD-A724-68A18B8AE880}" dt="2026-03-24T20:14:12.581" v="3452" actId="207"/>
           <ac:spMkLst>
             <pc:docMk/>
             <pc:sldMk cId="3601829480" sldId="260"/>
@@ -420,23 +404,7 @@
           </ac:spMkLst>
         </pc:spChg>
         <pc:spChg chg="add del mod">
-          <ac:chgData name="Li, Hanchen F" userId="3aee791e-6a2d-4da7-a77b-fbdf7bf15886" providerId="ADAL" clId="{1EA8FAE0-933A-49DD-A724-68A18B8AE880}" dt="2026-03-16T16:57:51.109" v="3106" actId="478"/>
-          <ac:spMkLst>
-            <pc:docMk/>
-            <pc:sldMk cId="3601829480" sldId="260"/>
-            <ac:spMk id="148" creationId="{686255BF-BECA-1C16-7628-37F6D245DE76}"/>
-          </ac:spMkLst>
-        </pc:spChg>
-        <pc:spChg chg="add del mod">
-          <ac:chgData name="Li, Hanchen F" userId="3aee791e-6a2d-4da7-a77b-fbdf7bf15886" providerId="ADAL" clId="{1EA8FAE0-933A-49DD-A724-68A18B8AE880}" dt="2026-03-16T16:59:38.695" v="3130" actId="478"/>
-          <ac:spMkLst>
-            <pc:docMk/>
-            <pc:sldMk cId="3601829480" sldId="260"/>
-            <ac:spMk id="149" creationId="{D6AD3BCF-B246-03EC-9672-42D595F687CE}"/>
-          </ac:spMkLst>
-        </pc:spChg>
-        <pc:spChg chg="add mod">
-          <ac:chgData name="Li, Hanchen F" userId="3aee791e-6a2d-4da7-a77b-fbdf7bf15886" providerId="ADAL" clId="{1EA8FAE0-933A-49DD-A724-68A18B8AE880}" dt="2026-03-16T17:06:26.596" v="3198" actId="20577"/>
+          <ac:chgData name="Li, Hanchen F" userId="3aee791e-6a2d-4da7-a77b-fbdf7bf15886" providerId="ADAL" clId="{1EA8FAE0-933A-49DD-A724-68A18B8AE880}" dt="2026-03-24T20:15:10.731" v="3481" actId="478"/>
           <ac:spMkLst>
             <pc:docMk/>
             <pc:sldMk cId="3601829480" sldId="260"/>
@@ -444,19 +412,27 @@
           </ac:spMkLst>
         </pc:spChg>
         <pc:grpChg chg="add mod">
-          <ac:chgData name="Li, Hanchen F" userId="3aee791e-6a2d-4da7-a77b-fbdf7bf15886" providerId="ADAL" clId="{1EA8FAE0-933A-49DD-A724-68A18B8AE880}" dt="2026-03-16T16:35:26.314" v="1867" actId="1076"/>
+          <ac:chgData name="Li, Hanchen F" userId="3aee791e-6a2d-4da7-a77b-fbdf7bf15886" providerId="ADAL" clId="{1EA8FAE0-933A-49DD-A724-68A18B8AE880}" dt="2026-03-24T15:21:01.696" v="3311" actId="1076"/>
+          <ac:grpSpMkLst>
+            <pc:docMk/>
+            <pc:sldMk cId="3601829480" sldId="260"/>
+            <ac:grpSpMk id="7" creationId="{5E1CF8AE-04E4-25D5-94B9-BA18B3DE535B}"/>
+          </ac:grpSpMkLst>
+        </pc:grpChg>
+        <pc:grpChg chg="add mod">
+          <ac:chgData name="Li, Hanchen F" userId="3aee791e-6a2d-4da7-a77b-fbdf7bf15886" providerId="ADAL" clId="{1EA8FAE0-933A-49DD-A724-68A18B8AE880}" dt="2026-03-24T15:20:42.489" v="3292" actId="571"/>
+          <ac:grpSpMkLst>
+            <pc:docMk/>
+            <pc:sldMk cId="3601829480" sldId="260"/>
+            <ac:grpSpMk id="14" creationId="{B80D0955-8948-D5DF-66F7-BE4201F66548}"/>
+          </ac:grpSpMkLst>
+        </pc:grpChg>
+        <pc:grpChg chg="add del mod">
+          <ac:chgData name="Li, Hanchen F" userId="3aee791e-6a2d-4da7-a77b-fbdf7bf15886" providerId="ADAL" clId="{1EA8FAE0-933A-49DD-A724-68A18B8AE880}" dt="2026-03-24T20:11:13.906" v="3387" actId="478"/>
           <ac:grpSpMkLst>
             <pc:docMk/>
             <pc:sldMk cId="3601829480" sldId="260"/>
             <ac:grpSpMk id="45" creationId="{FF58B426-DE29-A57F-8B57-2B3E3E28F296}"/>
-          </ac:grpSpMkLst>
-        </pc:grpChg>
-        <pc:grpChg chg="add mod">
-          <ac:chgData name="Li, Hanchen F" userId="3aee791e-6a2d-4da7-a77b-fbdf7bf15886" providerId="ADAL" clId="{1EA8FAE0-933A-49DD-A724-68A18B8AE880}" dt="2026-03-16T16:33:32.476" v="1829" actId="1076"/>
-          <ac:grpSpMkLst>
-            <pc:docMk/>
-            <pc:sldMk cId="3601829480" sldId="260"/>
-            <ac:grpSpMk id="48" creationId="{00C62610-6248-D9F6-F870-1310F77B9D78}"/>
           </ac:grpSpMkLst>
         </pc:grpChg>
         <pc:grpChg chg="add mod">
@@ -499,16 +475,48 @@
             <ac:grpSpMk id="139" creationId="{38130447-C12B-A7B8-EB4C-5922EB5047DA}"/>
           </ac:grpSpMkLst>
         </pc:grpChg>
-        <pc:picChg chg="add mod modCrop">
-          <ac:chgData name="Li, Hanchen F" userId="3aee791e-6a2d-4da7-a77b-fbdf7bf15886" providerId="ADAL" clId="{1EA8FAE0-933A-49DD-A724-68A18B8AE880}" dt="2026-03-16T16:31:52.685" v="1781" actId="164"/>
+        <pc:graphicFrameChg chg="add mod">
+          <ac:chgData name="Li, Hanchen F" userId="3aee791e-6a2d-4da7-a77b-fbdf7bf15886" providerId="ADAL" clId="{1EA8FAE0-933A-49DD-A724-68A18B8AE880}" dt="2026-03-24T15:19:05.883" v="3255" actId="1076"/>
+          <ac:graphicFrameMkLst>
+            <pc:docMk/>
+            <pc:sldMk cId="3601829480" sldId="260"/>
+            <ac:graphicFrameMk id="3" creationId="{0B085B20-4EE6-AFCF-D5F1-F33B03C94AC1}"/>
+          </ac:graphicFrameMkLst>
+        </pc:graphicFrameChg>
+        <pc:picChg chg="add">
+          <ac:chgData name="Li, Hanchen F" userId="3aee791e-6a2d-4da7-a77b-fbdf7bf15886" providerId="ADAL" clId="{1EA8FAE0-933A-49DD-A724-68A18B8AE880}" dt="2026-03-24T20:10:55.378" v="3383"/>
           <ac:picMkLst>
             <pc:docMk/>
             <pc:sldMk cId="3601829480" sldId="260"/>
-            <ac:picMk id="34" creationId="{84503412-639B-F7DD-9180-D6A8BDB36F6C}"/>
+            <ac:picMk id="2" creationId="{1F81E77B-4269-2D38-1A93-D173DFD590B1}"/>
+          </ac:picMkLst>
+        </pc:picChg>
+        <pc:picChg chg="add">
+          <ac:chgData name="Li, Hanchen F" userId="3aee791e-6a2d-4da7-a77b-fbdf7bf15886" providerId="ADAL" clId="{1EA8FAE0-933A-49DD-A724-68A18B8AE880}" dt="2026-03-24T20:10:59.713" v="3384"/>
+          <ac:picMkLst>
+            <pc:docMk/>
+            <pc:sldMk cId="3601829480" sldId="260"/>
+            <ac:picMk id="3" creationId="{EF133752-BC48-B801-61ED-495D5CEDAD5D}"/>
+          </ac:picMkLst>
+        </pc:picChg>
+        <pc:picChg chg="add mod ord modCrop">
+          <ac:chgData name="Li, Hanchen F" userId="3aee791e-6a2d-4da7-a77b-fbdf7bf15886" providerId="ADAL" clId="{1EA8FAE0-933A-49DD-A724-68A18B8AE880}" dt="2026-03-24T20:11:51.991" v="3396" actId="1076"/>
+          <ac:picMkLst>
+            <pc:docMk/>
+            <pc:sldMk cId="3601829480" sldId="260"/>
+            <ac:picMk id="4" creationId="{10BF806C-AF9E-4902-3729-7AB1BBB09083}"/>
+          </ac:picMkLst>
+        </pc:picChg>
+        <pc:picChg chg="mod">
+          <ac:chgData name="Li, Hanchen F" userId="3aee791e-6a2d-4da7-a77b-fbdf7bf15886" providerId="ADAL" clId="{1EA8FAE0-933A-49DD-A724-68A18B8AE880}" dt="2026-03-24T15:20:42.489" v="3292" actId="571"/>
+          <ac:picMkLst>
+            <pc:docMk/>
+            <pc:sldMk cId="3601829480" sldId="260"/>
+            <ac:picMk id="15" creationId="{B033379A-978D-C998-C123-C827F0C83245}"/>
           </ac:picMkLst>
         </pc:picChg>
         <pc:picChg chg="add mod modCrop">
-          <ac:chgData name="Li, Hanchen F" userId="3aee791e-6a2d-4da7-a77b-fbdf7bf15886" providerId="ADAL" clId="{1EA8FAE0-933A-49DD-A724-68A18B8AE880}" dt="2026-03-16T16:50:36.567" v="3003" actId="1076"/>
+          <ac:chgData name="Li, Hanchen F" userId="3aee791e-6a2d-4da7-a77b-fbdf7bf15886" providerId="ADAL" clId="{1EA8FAE0-933A-49DD-A724-68A18B8AE880}" dt="2026-03-24T15:14:01.318" v="3204" actId="732"/>
           <ac:picMkLst>
             <pc:docMk/>
             <pc:sldMk cId="3601829480" sldId="260"/>
@@ -516,7 +524,7 @@
           </ac:picMkLst>
         </pc:picChg>
         <pc:picChg chg="add del mod ord modCrop">
-          <ac:chgData name="Li, Hanchen F" userId="3aee791e-6a2d-4da7-a77b-fbdf7bf15886" providerId="ADAL" clId="{1EA8FAE0-933A-49DD-A724-68A18B8AE880}" dt="2026-03-16T16:44:37.491" v="2924" actId="1038"/>
+          <ac:chgData name="Li, Hanchen F" userId="3aee791e-6a2d-4da7-a77b-fbdf7bf15886" providerId="ADAL" clId="{1EA8FAE0-933A-49DD-A724-68A18B8AE880}" dt="2026-03-24T15:20:21.890" v="3281" actId="478"/>
           <ac:picMkLst>
             <pc:docMk/>
             <pc:sldMk cId="3601829480" sldId="260"/>
@@ -531,24 +539,8 @@
             <ac:picMk id="42" creationId="{B632C22F-E55E-2C15-352E-71B3B3268CCD}"/>
           </ac:picMkLst>
         </pc:picChg>
-        <pc:picChg chg="add del">
-          <ac:chgData name="Li, Hanchen F" userId="3aee791e-6a2d-4da7-a77b-fbdf7bf15886" providerId="ADAL" clId="{1EA8FAE0-933A-49DD-A724-68A18B8AE880}" dt="2026-03-16T17:01:07.034" v="3132" actId="22"/>
-          <ac:picMkLst>
-            <pc:docMk/>
-            <pc:sldMk cId="3601829480" sldId="260"/>
-            <ac:picMk id="152" creationId="{6D7934B7-6D72-DD45-CDEC-908478269F33}"/>
-          </ac:picMkLst>
-        </pc:picChg>
-        <pc:picChg chg="add del mod">
-          <ac:chgData name="Li, Hanchen F" userId="3aee791e-6a2d-4da7-a77b-fbdf7bf15886" providerId="ADAL" clId="{1EA8FAE0-933A-49DD-A724-68A18B8AE880}" dt="2026-03-16T17:05:21.514" v="3139" actId="478"/>
-          <ac:picMkLst>
-            <pc:docMk/>
-            <pc:sldMk cId="3601829480" sldId="260"/>
-            <ac:picMk id="154" creationId="{CE7E5B28-B3EF-A7A1-C877-59BF443AFEDD}"/>
-          </ac:picMkLst>
-        </pc:picChg>
         <pc:picChg chg="add mod">
-          <ac:chgData name="Li, Hanchen F" userId="3aee791e-6a2d-4da7-a77b-fbdf7bf15886" providerId="ADAL" clId="{1EA8FAE0-933A-49DD-A724-68A18B8AE880}" dt="2026-03-16T17:06:23.419" v="3196" actId="1076"/>
+          <ac:chgData name="Li, Hanchen F" userId="3aee791e-6a2d-4da7-a77b-fbdf7bf15886" providerId="ADAL" clId="{1EA8FAE0-933A-49DD-A724-68A18B8AE880}" dt="2026-03-24T20:15:22.784" v="3484" actId="1076"/>
           <ac:picMkLst>
             <pc:docMk/>
             <pc:sldMk cId="3601829480" sldId="260"/>
@@ -556,55 +548,23 @@
           </ac:picMkLst>
         </pc:picChg>
         <pc:cxnChg chg="mod">
-          <ac:chgData name="Li, Hanchen F" userId="3aee791e-6a2d-4da7-a77b-fbdf7bf15886" providerId="ADAL" clId="{1EA8FAE0-933A-49DD-A724-68A18B8AE880}" dt="2026-03-16T16:33:25.142" v="1821"/>
+          <ac:chgData name="Li, Hanchen F" userId="3aee791e-6a2d-4da7-a77b-fbdf7bf15886" providerId="ADAL" clId="{1EA8FAE0-933A-49DD-A724-68A18B8AE880}" dt="2026-03-24T15:21:28.548" v="3313" actId="208"/>
           <ac:cxnSpMkLst>
             <pc:docMk/>
             <pc:sldMk cId="3601829480" sldId="260"/>
-            <ac:cxnSpMk id="51" creationId="{5B64D195-D00F-F8FF-5414-EE23D96BB564}"/>
+            <ac:cxnSpMk id="9" creationId="{B7ED1122-EC8C-90D2-7671-4E0D5E1412DA}"/>
           </ac:cxnSpMkLst>
         </pc:cxnChg>
         <pc:cxnChg chg="mod">
-          <ac:chgData name="Li, Hanchen F" userId="3aee791e-6a2d-4da7-a77b-fbdf7bf15886" providerId="ADAL" clId="{1EA8FAE0-933A-49DD-A724-68A18B8AE880}" dt="2026-03-16T16:33:25.142" v="1821"/>
+          <ac:chgData name="Li, Hanchen F" userId="3aee791e-6a2d-4da7-a77b-fbdf7bf15886" providerId="ADAL" clId="{1EA8FAE0-933A-49DD-A724-68A18B8AE880}" dt="2026-03-24T15:21:28.548" v="3313" actId="208"/>
           <ac:cxnSpMkLst>
             <pc:docMk/>
             <pc:sldMk cId="3601829480" sldId="260"/>
-            <ac:cxnSpMk id="56" creationId="{39A60258-A7E0-FB61-230B-476DBE02FABA}"/>
-          </ac:cxnSpMkLst>
-        </pc:cxnChg>
-        <pc:cxnChg chg="add del mod">
-          <ac:chgData name="Li, Hanchen F" userId="3aee791e-6a2d-4da7-a77b-fbdf7bf15886" providerId="ADAL" clId="{1EA8FAE0-933A-49DD-A724-68A18B8AE880}" dt="2026-03-16T17:07:16.468" v="3199" actId="478"/>
-          <ac:cxnSpMkLst>
-            <pc:docMk/>
-            <pc:sldMk cId="3601829480" sldId="260"/>
-            <ac:cxnSpMk id="65" creationId="{2D982D7A-48D5-8845-B3FE-DFFFAA9772EC}"/>
-          </ac:cxnSpMkLst>
-        </pc:cxnChg>
-        <pc:cxnChg chg="add del">
-          <ac:chgData name="Li, Hanchen F" userId="3aee791e-6a2d-4da7-a77b-fbdf7bf15886" providerId="ADAL" clId="{1EA8FAE0-933A-49DD-A724-68A18B8AE880}" dt="2026-03-16T16:39:17.260" v="2620" actId="11529"/>
-          <ac:cxnSpMkLst>
-            <pc:docMk/>
-            <pc:sldMk cId="3601829480" sldId="260"/>
-            <ac:cxnSpMk id="67" creationId="{C9C8A10B-DB7A-1BF7-D0CB-900C69969165}"/>
-          </ac:cxnSpMkLst>
-        </pc:cxnChg>
-        <pc:cxnChg chg="add del">
-          <ac:chgData name="Li, Hanchen F" userId="3aee791e-6a2d-4da7-a77b-fbdf7bf15886" providerId="ADAL" clId="{1EA8FAE0-933A-49DD-A724-68A18B8AE880}" dt="2026-03-16T16:39:28.484" v="2622" actId="11529"/>
-          <ac:cxnSpMkLst>
-            <pc:docMk/>
-            <pc:sldMk cId="3601829480" sldId="260"/>
-            <ac:cxnSpMk id="69" creationId="{A0EC0ABB-CB23-04BD-F1AC-12D71AAC20B5}"/>
-          </ac:cxnSpMkLst>
-        </pc:cxnChg>
-        <pc:cxnChg chg="add del">
-          <ac:chgData name="Li, Hanchen F" userId="3aee791e-6a2d-4da7-a77b-fbdf7bf15886" providerId="ADAL" clId="{1EA8FAE0-933A-49DD-A724-68A18B8AE880}" dt="2026-03-16T16:39:36.684" v="2624" actId="11529"/>
-          <ac:cxnSpMkLst>
-            <pc:docMk/>
-            <pc:sldMk cId="3601829480" sldId="260"/>
-            <ac:cxnSpMk id="71" creationId="{A8940E59-B21B-542E-4848-0B4D2F4EB784}"/>
+            <ac:cxnSpMk id="13" creationId="{AE073A06-4C73-8F4D-605A-A37E53B31C36}"/>
           </ac:cxnSpMkLst>
         </pc:cxnChg>
         <pc:cxnChg chg="add mod">
-          <ac:chgData name="Li, Hanchen F" userId="3aee791e-6a2d-4da7-a77b-fbdf7bf15886" providerId="ADAL" clId="{1EA8FAE0-933A-49DD-A724-68A18B8AE880}" dt="2026-03-16T16:43:14.933" v="2664" actId="164"/>
+          <ac:chgData name="Li, Hanchen F" userId="3aee791e-6a2d-4da7-a77b-fbdf7bf15886" providerId="ADAL" clId="{1EA8FAE0-933A-49DD-A724-68A18B8AE880}" dt="2026-03-24T20:13:06.680" v="3405" actId="692"/>
           <ac:cxnSpMkLst>
             <pc:docMk/>
             <pc:sldMk cId="3601829480" sldId="260"/>
@@ -612,7 +572,7 @@
           </ac:cxnSpMkLst>
         </pc:cxnChg>
         <pc:cxnChg chg="add mod">
-          <ac:chgData name="Li, Hanchen F" userId="3aee791e-6a2d-4da7-a77b-fbdf7bf15886" providerId="ADAL" clId="{1EA8FAE0-933A-49DD-A724-68A18B8AE880}" dt="2026-03-16T16:43:14.933" v="2664" actId="164"/>
+          <ac:chgData name="Li, Hanchen F" userId="3aee791e-6a2d-4da7-a77b-fbdf7bf15886" providerId="ADAL" clId="{1EA8FAE0-933A-49DD-A724-68A18B8AE880}" dt="2026-03-24T20:13:06.680" v="3405" actId="692"/>
           <ac:cxnSpMkLst>
             <pc:docMk/>
             <pc:sldMk cId="3601829480" sldId="260"/>
@@ -628,7 +588,7 @@
           </ac:cxnSpMkLst>
         </pc:cxnChg>
         <pc:cxnChg chg="mod">
-          <ac:chgData name="Li, Hanchen F" userId="3aee791e-6a2d-4da7-a77b-fbdf7bf15886" providerId="ADAL" clId="{1EA8FAE0-933A-49DD-A724-68A18B8AE880}" dt="2026-03-16T16:57:49.035" v="3105" actId="1076"/>
+          <ac:chgData name="Li, Hanchen F" userId="3aee791e-6a2d-4da7-a77b-fbdf7bf15886" providerId="ADAL" clId="{1EA8FAE0-933A-49DD-A724-68A18B8AE880}" dt="2026-03-24T15:14:27.641" v="3215" actId="113"/>
           <ac:cxnSpMkLst>
             <pc:docMk/>
             <pc:sldMk cId="3601829480" sldId="260"/>
@@ -636,7 +596,7 @@
           </ac:cxnSpMkLst>
         </pc:cxnChg>
         <pc:cxnChg chg="mod">
-          <ac:chgData name="Li, Hanchen F" userId="3aee791e-6a2d-4da7-a77b-fbdf7bf15886" providerId="ADAL" clId="{1EA8FAE0-933A-49DD-A724-68A18B8AE880}" dt="2026-03-16T16:48:56.442" v="2977" actId="14100"/>
+          <ac:chgData name="Li, Hanchen F" userId="3aee791e-6a2d-4da7-a77b-fbdf7bf15886" providerId="ADAL" clId="{1EA8FAE0-933A-49DD-A724-68A18B8AE880}" dt="2026-03-24T20:14:20.180" v="3453" actId="208"/>
           <ac:cxnSpMkLst>
             <pc:docMk/>
             <pc:sldMk cId="3601829480" sldId="260"/>
@@ -644,7 +604,7 @@
           </ac:cxnSpMkLst>
         </pc:cxnChg>
         <pc:cxnChg chg="mod">
-          <ac:chgData name="Li, Hanchen F" userId="3aee791e-6a2d-4da7-a77b-fbdf7bf15886" providerId="ADAL" clId="{1EA8FAE0-933A-49DD-A724-68A18B8AE880}" dt="2026-03-16T16:55:37.342" v="3075" actId="14100"/>
+          <ac:chgData name="Li, Hanchen F" userId="3aee791e-6a2d-4da7-a77b-fbdf7bf15886" providerId="ADAL" clId="{1EA8FAE0-933A-49DD-A724-68A18B8AE880}" dt="2026-03-24T20:14:20.180" v="3453" actId="208"/>
           <ac:cxnSpMkLst>
             <pc:docMk/>
             <pc:sldMk cId="3601829480" sldId="260"/>
@@ -652,7 +612,7 @@
           </ac:cxnSpMkLst>
         </pc:cxnChg>
         <pc:cxnChg chg="mod">
-          <ac:chgData name="Li, Hanchen F" userId="3aee791e-6a2d-4da7-a77b-fbdf7bf15886" providerId="ADAL" clId="{1EA8FAE0-933A-49DD-A724-68A18B8AE880}" dt="2026-03-16T16:50:18.023" v="2999" actId="692"/>
+          <ac:chgData name="Li, Hanchen F" userId="3aee791e-6a2d-4da7-a77b-fbdf7bf15886" providerId="ADAL" clId="{1EA8FAE0-933A-49DD-A724-68A18B8AE880}" dt="2026-03-24T20:14:20.180" v="3453" actId="208"/>
           <ac:cxnSpMkLst>
             <pc:docMk/>
             <pc:sldMk cId="3601829480" sldId="260"/>
@@ -660,7 +620,7 @@
           </ac:cxnSpMkLst>
         </pc:cxnChg>
         <pc:cxnChg chg="mod">
-          <ac:chgData name="Li, Hanchen F" userId="3aee791e-6a2d-4da7-a77b-fbdf7bf15886" providerId="ADAL" clId="{1EA8FAE0-933A-49DD-A724-68A18B8AE880}" dt="2026-03-16T16:53:00.585" v="3046" actId="14100"/>
+          <ac:chgData name="Li, Hanchen F" userId="3aee791e-6a2d-4da7-a77b-fbdf7bf15886" providerId="ADAL" clId="{1EA8FAE0-933A-49DD-A724-68A18B8AE880}" dt="2026-03-24T20:14:20.180" v="3453" actId="208"/>
           <ac:cxnSpMkLst>
             <pc:docMk/>
             <pc:sldMk cId="3601829480" sldId="260"/>
@@ -710,9 +670,9 @@
           <c:layoutTarget val="inner"/>
           <c:xMode val="edge"/>
           <c:yMode val="edge"/>
-          <c:x val="0.24698733299006786"/>
+          <c:x val="0.2460184165898858"/>
           <c:y val="3.1839382189102636E-2"/>
-          <c:w val="0.72597383992412745"/>
+          <c:w val="0.72190968363807584"/>
           <c:h val="0.83226655174954467"/>
         </c:manualLayout>
       </c:layout>
@@ -2612,76 +2572,6 @@
             <a:effectLst/>
           </c:spPr>
         </c:majorGridlines>
-        <c:title>
-          <c:tx>
-            <c:rich>
-              <a:bodyPr rot="0" spcFirstLastPara="1" vertOverflow="ellipsis" vert="horz" wrap="square" anchor="ctr" anchorCtr="1"/>
-              <a:lstStyle/>
-              <a:p>
-                <a:pPr>
-                  <a:defRPr sz="1800" b="0" i="0" u="none" strike="noStrike" kern="1200" baseline="0">
-                    <a:solidFill>
-                      <a:schemeClr val="tx1"/>
-                    </a:solidFill>
-                    <a:latin typeface="Helvetica" panose="020B0604020202020204" pitchFamily="34" charset="0"/>
-                    <a:ea typeface="+mn-ea"/>
-                    <a:cs typeface="Helvetica" panose="020B0604020202020204" pitchFamily="34" charset="0"/>
-                  </a:defRPr>
-                </a:pPr>
-                <a:r>
-                  <a:rPr lang="en-US" altLang="zh-CN" sz="1800" b="0" dirty="0">
-                    <a:solidFill>
-                      <a:schemeClr val="tx1"/>
-                    </a:solidFill>
-                    <a:latin typeface="Helvetica" panose="020B0604020202020204" pitchFamily="34" charset="0"/>
-                    <a:cs typeface="Helvetica" panose="020B0604020202020204" pitchFamily="34" charset="0"/>
-                  </a:rPr>
-                  <a:t>x (m)</a:t>
-                </a:r>
-                <a:endParaRPr lang="zh-CN" altLang="en-US" sz="1800" b="0" dirty="0">
-                  <a:solidFill>
-                    <a:schemeClr val="tx1"/>
-                  </a:solidFill>
-                  <a:latin typeface="Helvetica" panose="020B0604020202020204" pitchFamily="34" charset="0"/>
-                  <a:cs typeface="Helvetica" panose="020B0604020202020204" pitchFamily="34" charset="0"/>
-                </a:endParaRPr>
-              </a:p>
-            </c:rich>
-          </c:tx>
-          <c:layout>
-            <c:manualLayout>
-              <c:xMode val="edge"/>
-              <c:yMode val="edge"/>
-              <c:x val="0.58740465127988017"/>
-              <c:y val="0.94459496854914848"/>
-            </c:manualLayout>
-          </c:layout>
-          <c:overlay val="0"/>
-          <c:spPr>
-            <a:noFill/>
-            <a:ln>
-              <a:noFill/>
-            </a:ln>
-            <a:effectLst/>
-          </c:spPr>
-          <c:txPr>
-            <a:bodyPr rot="0" spcFirstLastPara="1" vertOverflow="ellipsis" vert="horz" wrap="square" anchor="ctr" anchorCtr="1"/>
-            <a:lstStyle/>
-            <a:p>
-              <a:pPr>
-                <a:defRPr sz="1800" b="0" i="0" u="none" strike="noStrike" kern="1200" baseline="0">
-                  <a:solidFill>
-                    <a:schemeClr val="tx1"/>
-                  </a:solidFill>
-                  <a:latin typeface="Helvetica" panose="020B0604020202020204" pitchFamily="34" charset="0"/>
-                  <a:ea typeface="+mn-ea"/>
-                  <a:cs typeface="Helvetica" panose="020B0604020202020204" pitchFamily="34" charset="0"/>
-                </a:defRPr>
-              </a:pPr>
-              <a:endParaRPr lang="zh-CN" altLang="en-US"/>
-            </a:p>
-          </c:txPr>
-        </c:title>
         <c:numFmt formatCode="#,##0.0_);[Red]\(#,##0.0\)" sourceLinked="0"/>
         <c:majorTickMark val="none"/>
         <c:minorTickMark val="none"/>
@@ -2708,7 +2598,7 @@
           <a:lstStyle/>
           <a:p>
             <a:pPr>
-              <a:defRPr sz="1600" b="0" i="0" u="none" strike="noStrike" kern="1200" baseline="0">
+              <a:defRPr sz="2000" b="0" i="0" u="none" strike="noStrike" kern="1200" baseline="0">
                 <a:ln>
                   <a:noFill/>
                 </a:ln>
@@ -2746,86 +2636,6 @@
             <a:effectLst/>
           </c:spPr>
         </c:majorGridlines>
-        <c:title>
-          <c:tx>
-            <c:rich>
-              <a:bodyPr rot="-5400000" spcFirstLastPara="1" vertOverflow="ellipsis" vert="horz" wrap="square" anchor="ctr" anchorCtr="1"/>
-              <a:lstStyle/>
-              <a:p>
-                <a:pPr>
-                  <a:defRPr sz="1800" b="0" i="0" u="none" strike="noStrike" kern="1200" baseline="0">
-                    <a:solidFill>
-                      <a:schemeClr val="tx1"/>
-                    </a:solidFill>
-                    <a:latin typeface="Helvetica" panose="020B0604020202020204" pitchFamily="34" charset="0"/>
-                    <a:ea typeface="+mn-ea"/>
-                    <a:cs typeface="Helvetica" panose="020B0604020202020204" pitchFamily="34" charset="0"/>
-                  </a:defRPr>
-                </a:pPr>
-                <a:r>
-                  <a:rPr lang="en-US" altLang="zh-CN" sz="1800" dirty="0">
-                    <a:solidFill>
-                      <a:schemeClr val="tx1"/>
-                    </a:solidFill>
-                    <a:latin typeface="Helvetica" panose="020B0604020202020204" pitchFamily="34" charset="0"/>
-                    <a:cs typeface="Helvetica" panose="020B0604020202020204" pitchFamily="34" charset="0"/>
-                  </a:rPr>
-                  <a:t>y</a:t>
-                </a:r>
-                <a:r>
-                  <a:rPr lang="en-US" altLang="zh-CN" sz="1800" baseline="0" dirty="0">
-                    <a:solidFill>
-                      <a:schemeClr val="tx1"/>
-                    </a:solidFill>
-                    <a:latin typeface="Helvetica" panose="020B0604020202020204" pitchFamily="34" charset="0"/>
-                    <a:cs typeface="Helvetica" panose="020B0604020202020204" pitchFamily="34" charset="0"/>
-                  </a:rPr>
-                  <a:t> (m)</a:t>
-                </a:r>
-                <a:endParaRPr lang="zh-CN" altLang="en-US" sz="1800" dirty="0">
-                  <a:solidFill>
-                    <a:schemeClr val="tx1"/>
-                  </a:solidFill>
-                  <a:latin typeface="Helvetica" panose="020B0604020202020204" pitchFamily="34" charset="0"/>
-                  <a:cs typeface="Helvetica" panose="020B0604020202020204" pitchFamily="34" charset="0"/>
-                </a:endParaRPr>
-              </a:p>
-            </c:rich>
-          </c:tx>
-          <c:layout>
-            <c:manualLayout>
-              <c:xMode val="edge"/>
-              <c:yMode val="edge"/>
-              <c:x val="0.14139254226310122"/>
-              <c:y val="0.4032952713203532"/>
-            </c:manualLayout>
-          </c:layout>
-          <c:overlay val="0"/>
-          <c:spPr>
-            <a:noFill/>
-            <a:ln>
-              <a:noFill/>
-            </a:ln>
-            <a:effectLst/>
-          </c:spPr>
-          <c:txPr>
-            <a:bodyPr rot="-5400000" spcFirstLastPara="1" vertOverflow="ellipsis" vert="horz" wrap="square" anchor="ctr" anchorCtr="1"/>
-            <a:lstStyle/>
-            <a:p>
-              <a:pPr>
-                <a:defRPr sz="1800" b="0" i="0" u="none" strike="noStrike" kern="1200" baseline="0">
-                  <a:solidFill>
-                    <a:schemeClr val="tx1"/>
-                  </a:solidFill>
-                  <a:latin typeface="Helvetica" panose="020B0604020202020204" pitchFamily="34" charset="0"/>
-                  <a:ea typeface="+mn-ea"/>
-                  <a:cs typeface="Helvetica" panose="020B0604020202020204" pitchFamily="34" charset="0"/>
-                </a:defRPr>
-              </a:pPr>
-              <a:endParaRPr lang="zh-CN" altLang="en-US"/>
-            </a:p>
-          </c:txPr>
-        </c:title>
         <c:numFmt formatCode="#,##0.0_);[Red]\(#,##0.0\)" sourceLinked="0"/>
         <c:majorTickMark val="none"/>
         <c:minorTickMark val="none"/>
@@ -2847,7 +2657,7 @@
           <a:lstStyle/>
           <a:p>
             <a:pPr>
-              <a:defRPr sz="1600" b="0" i="0" u="none" strike="noStrike" kern="1200" baseline="0">
+              <a:defRPr sz="2000" b="0" i="0" u="none" strike="noStrike" kern="1200" baseline="0">
                 <a:solidFill>
                   <a:schemeClr val="tx1"/>
                 </a:solidFill>
@@ -3632,7 +3442,7 @@
           <a:p>
             <a:fld id="{DF1088C5-931A-42D2-8AA4-FA289862AAD0}" type="datetimeFigureOut">
               <a:rPr lang="zh-CN" altLang="en-US" smtClean="0"/>
-              <a:t>2026/3/16</a:t>
+              <a:t>2026/3/24</a:t>
             </a:fld>
             <a:endParaRPr lang="zh-CN" altLang="en-US"/>
           </a:p>
@@ -4330,7 +4140,7 @@
           <a:p>
             <a:fld id="{3CAF1464-0EA4-453D-A90B-03B04D244405}" type="datetimeFigureOut">
               <a:rPr lang="zh-CN" altLang="en-US" smtClean="0"/>
-              <a:t>2026/3/16</a:t>
+              <a:t>2026/3/24</a:t>
             </a:fld>
             <a:endParaRPr lang="zh-CN" altLang="en-US"/>
           </a:p>
@@ -4500,7 +4310,7 @@
           <a:p>
             <a:fld id="{3CAF1464-0EA4-453D-A90B-03B04D244405}" type="datetimeFigureOut">
               <a:rPr lang="zh-CN" altLang="en-US" smtClean="0"/>
-              <a:t>2026/3/16</a:t>
+              <a:t>2026/3/24</a:t>
             </a:fld>
             <a:endParaRPr lang="zh-CN" altLang="en-US"/>
           </a:p>
@@ -4680,7 +4490,7 @@
           <a:p>
             <a:fld id="{3CAF1464-0EA4-453D-A90B-03B04D244405}" type="datetimeFigureOut">
               <a:rPr lang="zh-CN" altLang="en-US" smtClean="0"/>
-              <a:t>2026/3/16</a:t>
+              <a:t>2026/3/24</a:t>
             </a:fld>
             <a:endParaRPr lang="zh-CN" altLang="en-US"/>
           </a:p>
@@ -4850,7 +4660,7 @@
           <a:p>
             <a:fld id="{3CAF1464-0EA4-453D-A90B-03B04D244405}" type="datetimeFigureOut">
               <a:rPr lang="zh-CN" altLang="en-US" smtClean="0"/>
-              <a:t>2026/3/16</a:t>
+              <a:t>2026/3/24</a:t>
             </a:fld>
             <a:endParaRPr lang="zh-CN" altLang="en-US"/>
           </a:p>
@@ -5096,7 +4906,7 @@
           <a:p>
             <a:fld id="{3CAF1464-0EA4-453D-A90B-03B04D244405}" type="datetimeFigureOut">
               <a:rPr lang="zh-CN" altLang="en-US" smtClean="0"/>
-              <a:t>2026/3/16</a:t>
+              <a:t>2026/3/24</a:t>
             </a:fld>
             <a:endParaRPr lang="zh-CN" altLang="en-US"/>
           </a:p>
@@ -5328,7 +5138,7 @@
           <a:p>
             <a:fld id="{3CAF1464-0EA4-453D-A90B-03B04D244405}" type="datetimeFigureOut">
               <a:rPr lang="zh-CN" altLang="en-US" smtClean="0"/>
-              <a:t>2026/3/16</a:t>
+              <a:t>2026/3/24</a:t>
             </a:fld>
             <a:endParaRPr lang="zh-CN" altLang="en-US"/>
           </a:p>
@@ -5695,7 +5505,7 @@
           <a:p>
             <a:fld id="{3CAF1464-0EA4-453D-A90B-03B04D244405}" type="datetimeFigureOut">
               <a:rPr lang="zh-CN" altLang="en-US" smtClean="0"/>
-              <a:t>2026/3/16</a:t>
+              <a:t>2026/3/24</a:t>
             </a:fld>
             <a:endParaRPr lang="zh-CN" altLang="en-US"/>
           </a:p>
@@ -5813,7 +5623,7 @@
           <a:p>
             <a:fld id="{3CAF1464-0EA4-453D-A90B-03B04D244405}" type="datetimeFigureOut">
               <a:rPr lang="zh-CN" altLang="en-US" smtClean="0"/>
-              <a:t>2026/3/16</a:t>
+              <a:t>2026/3/24</a:t>
             </a:fld>
             <a:endParaRPr lang="zh-CN" altLang="en-US"/>
           </a:p>
@@ -5908,7 +5718,7 @@
           <a:p>
             <a:fld id="{3CAF1464-0EA4-453D-A90B-03B04D244405}" type="datetimeFigureOut">
               <a:rPr lang="zh-CN" altLang="en-US" smtClean="0"/>
-              <a:t>2026/3/16</a:t>
+              <a:t>2026/3/24</a:t>
             </a:fld>
             <a:endParaRPr lang="zh-CN" altLang="en-US"/>
           </a:p>
@@ -6185,7 +5995,7 @@
           <a:p>
             <a:fld id="{3CAF1464-0EA4-453D-A90B-03B04D244405}" type="datetimeFigureOut">
               <a:rPr lang="zh-CN" altLang="en-US" smtClean="0"/>
-              <a:t>2026/3/16</a:t>
+              <a:t>2026/3/24</a:t>
             </a:fld>
             <a:endParaRPr lang="zh-CN" altLang="en-US"/>
           </a:p>
@@ -6442,7 +6252,7 @@
           <a:p>
             <a:fld id="{3CAF1464-0EA4-453D-A90B-03B04D244405}" type="datetimeFigureOut">
               <a:rPr lang="zh-CN" altLang="en-US" smtClean="0"/>
-              <a:t>2026/3/16</a:t>
+              <a:t>2026/3/24</a:t>
             </a:fld>
             <a:endParaRPr lang="zh-CN" altLang="en-US"/>
           </a:p>
@@ -6655,7 +6465,7 @@
           <a:p>
             <a:fld id="{3CAF1464-0EA4-453D-A90B-03B04D244405}" type="datetimeFigureOut">
               <a:rPr lang="zh-CN" altLang="en-US" smtClean="0"/>
-              <a:t>2026/3/16</a:t>
+              <a:t>2026/3/24</a:t>
             </a:fld>
             <a:endParaRPr lang="zh-CN" altLang="en-US"/>
           </a:p>
@@ -10086,14 +9896,14 @@
           <p:nvPr>
             <p:extLst>
               <p:ext uri="{D42A27DB-BD31-4B8C-83A1-F6EECF244321}">
-                <p14:modId xmlns:p14="http://schemas.microsoft.com/office/powerpoint/2010/main" val="459893666"/>
+                <p14:modId xmlns:p14="http://schemas.microsoft.com/office/powerpoint/2010/main" val="408956107"/>
               </p:ext>
             </p:extLst>
           </p:nvPr>
         </p:nvGraphicFramePr>
         <p:xfrm>
           <a:off x="1450110" y="1165117"/>
-          <a:ext cx="9374667" cy="4668872"/>
+          <a:ext cx="9428347" cy="4668872"/>
         </p:xfrm>
         <a:graphic>
           <a:graphicData uri="http://schemas.openxmlformats.org/drawingml/2006/chart">
@@ -10195,349 +10005,6 @@
           </a:p>
         </p:txBody>
       </p:sp>
-      <p:grpSp>
-        <p:nvGrpSpPr>
-          <p:cNvPr id="5" name="组合 4">
-            <a:extLst>
-              <a:ext uri="{FF2B5EF4-FFF2-40B4-BE49-F238E27FC236}">
-                <a16:creationId xmlns:a16="http://schemas.microsoft.com/office/drawing/2014/main" id="{C5D41095-A693-E3AE-A84C-B804E5A12ABE}"/>
-              </a:ext>
-            </a:extLst>
-          </p:cNvPr>
-          <p:cNvGrpSpPr/>
-          <p:nvPr/>
-        </p:nvGrpSpPr>
-        <p:grpSpPr>
-          <a:xfrm>
-            <a:off x="1776892" y="4314821"/>
-            <a:ext cx="1252365" cy="1466011"/>
-            <a:chOff x="477462" y="5023578"/>
-            <a:chExt cx="1252365" cy="1466011"/>
-          </a:xfrm>
-        </p:grpSpPr>
-        <p:sp>
-          <p:nvSpPr>
-            <p:cNvPr id="11" name="流程图: 汇总连接 10">
-              <a:extLst>
-                <a:ext uri="{FF2B5EF4-FFF2-40B4-BE49-F238E27FC236}">
-                  <a16:creationId xmlns:a16="http://schemas.microsoft.com/office/drawing/2014/main" id="{82DD2601-D50C-6F6F-2DCC-4A5EF109FDE0}"/>
-                </a:ext>
-              </a:extLst>
-            </p:cNvPr>
-            <p:cNvSpPr/>
-            <p:nvPr/>
-          </p:nvSpPr>
-          <p:spPr>
-            <a:xfrm>
-              <a:off x="764580" y="6049510"/>
-              <a:ext cx="124085" cy="124085"/>
-            </a:xfrm>
-            <a:prstGeom prst="flowChartSummingJunction">
-              <a:avLst/>
-            </a:prstGeom>
-            <a:noFill/>
-            <a:ln w="15875">
-              <a:solidFill>
-                <a:schemeClr val="tx1"/>
-              </a:solidFill>
-            </a:ln>
-          </p:spPr>
-          <p:style>
-            <a:lnRef idx="2">
-              <a:schemeClr val="accent1">
-                <a:shade val="15000"/>
-              </a:schemeClr>
-            </a:lnRef>
-            <a:fillRef idx="1">
-              <a:schemeClr val="accent1"/>
-            </a:fillRef>
-            <a:effectRef idx="0">
-              <a:schemeClr val="accent1"/>
-            </a:effectRef>
-            <a:fontRef idx="minor">
-              <a:schemeClr val="lt1"/>
-            </a:fontRef>
-          </p:style>
-          <p:txBody>
-            <a:bodyPr rtlCol="0" anchor="ctr"/>
-            <a:lstStyle/>
-            <a:p>
-              <a:pPr algn="ctr"/>
-              <a:endParaRPr lang="zh-CN" altLang="en-US" i="1" dirty="0">
-                <a:solidFill>
-                  <a:schemeClr val="tx1"/>
-                </a:solidFill>
-              </a:endParaRPr>
-            </a:p>
-          </p:txBody>
-        </p:sp>
-        <p:cxnSp>
-          <p:nvCxnSpPr>
-            <p:cNvPr id="14" name="直接箭头连接符 13">
-              <a:extLst>
-                <a:ext uri="{FF2B5EF4-FFF2-40B4-BE49-F238E27FC236}">
-                  <a16:creationId xmlns:a16="http://schemas.microsoft.com/office/drawing/2014/main" id="{FE813F94-6C03-32EA-B737-B589BC228B9C}"/>
-                </a:ext>
-              </a:extLst>
-            </p:cNvPr>
-            <p:cNvCxnSpPr>
-              <a:cxnSpLocks/>
-            </p:cNvCxnSpPr>
-            <p:nvPr/>
-          </p:nvCxnSpPr>
-          <p:spPr>
-            <a:xfrm flipH="1" flipV="1">
-              <a:off x="826622" y="5516033"/>
-              <a:ext cx="494" cy="528256"/>
-            </a:xfrm>
-            <a:prstGeom prst="straightConnector1">
-              <a:avLst/>
-            </a:prstGeom>
-            <a:ln w="12700">
-              <a:solidFill>
-                <a:schemeClr val="tx1"/>
-              </a:solidFill>
-              <a:tailEnd type="triangle"/>
-            </a:ln>
-          </p:spPr>
-          <p:style>
-            <a:lnRef idx="2">
-              <a:schemeClr val="accent1"/>
-            </a:lnRef>
-            <a:fillRef idx="0">
-              <a:schemeClr val="accent1"/>
-            </a:fillRef>
-            <a:effectRef idx="1">
-              <a:schemeClr val="accent1"/>
-            </a:effectRef>
-            <a:fontRef idx="minor">
-              <a:schemeClr val="tx1"/>
-            </a:fontRef>
-          </p:style>
-        </p:cxnSp>
-        <p:sp>
-          <p:nvSpPr>
-            <p:cNvPr id="15" name="文本框 14">
-              <a:extLst>
-                <a:ext uri="{FF2B5EF4-FFF2-40B4-BE49-F238E27FC236}">
-                  <a16:creationId xmlns:a16="http://schemas.microsoft.com/office/drawing/2014/main" id="{DB793CD5-53F0-EE6C-2511-3C35DA442EF0}"/>
-                </a:ext>
-              </a:extLst>
-            </p:cNvPr>
-            <p:cNvSpPr txBox="1"/>
-            <p:nvPr/>
-          </p:nvSpPr>
-          <p:spPr>
-            <a:xfrm>
-              <a:off x="1416921" y="5897900"/>
-              <a:ext cx="312906" cy="400110"/>
-            </a:xfrm>
-            <a:prstGeom prst="rect">
-              <a:avLst/>
-            </a:prstGeom>
-            <a:noFill/>
-          </p:spPr>
-          <p:txBody>
-            <a:bodyPr wrap="none" rtlCol="0">
-              <a:spAutoFit/>
-            </a:bodyPr>
-            <a:lstStyle/>
-            <a:p>
-              <a:r>
-                <a:rPr lang="en-US" altLang="zh-CN" sz="2000" dirty="0">
-                  <a:latin typeface="Helvetica" panose="020B0604020202020204" pitchFamily="34" charset="0"/>
-                  <a:cs typeface="Helvetica" panose="020B0604020202020204" pitchFamily="34" charset="0"/>
-                </a:rPr>
-                <a:t>x</a:t>
-              </a:r>
-              <a:endParaRPr lang="zh-CN" altLang="en-US" sz="2000" baseline="-25000" dirty="0">
-                <a:latin typeface="Helvetica" panose="020B0604020202020204" pitchFamily="34" charset="0"/>
-                <a:cs typeface="Helvetica" panose="020B0604020202020204" pitchFamily="34" charset="0"/>
-              </a:endParaRPr>
-            </a:p>
-          </p:txBody>
-        </p:sp>
-        <p:sp>
-          <p:nvSpPr>
-            <p:cNvPr id="16" name="文本框 15">
-              <a:extLst>
-                <a:ext uri="{FF2B5EF4-FFF2-40B4-BE49-F238E27FC236}">
-                  <a16:creationId xmlns:a16="http://schemas.microsoft.com/office/drawing/2014/main" id="{F5539EFD-AE04-2672-2FA1-5FCC93F3BDE8}"/>
-                </a:ext>
-              </a:extLst>
-            </p:cNvPr>
-            <p:cNvSpPr txBox="1"/>
-            <p:nvPr/>
-          </p:nvSpPr>
-          <p:spPr>
-            <a:xfrm>
-              <a:off x="477462" y="6089479"/>
-              <a:ext cx="312906" cy="400110"/>
-            </a:xfrm>
-            <a:prstGeom prst="rect">
-              <a:avLst/>
-            </a:prstGeom>
-            <a:noFill/>
-          </p:spPr>
-          <p:txBody>
-            <a:bodyPr wrap="none" rtlCol="0">
-              <a:spAutoFit/>
-            </a:bodyPr>
-            <a:lstStyle/>
-            <a:p>
-              <a:r>
-                <a:rPr lang="en-US" altLang="zh-CN" sz="2000" dirty="0">
-                  <a:latin typeface="Helvetica" panose="020B0604020202020204" pitchFamily="34" charset="0"/>
-                  <a:cs typeface="Helvetica" panose="020B0604020202020204" pitchFamily="34" charset="0"/>
-                </a:rPr>
-                <a:t>z</a:t>
-              </a:r>
-              <a:endParaRPr lang="zh-CN" altLang="en-US" sz="2000" baseline="-25000" dirty="0">
-                <a:latin typeface="Helvetica" panose="020B0604020202020204" pitchFamily="34" charset="0"/>
-                <a:cs typeface="Helvetica" panose="020B0604020202020204" pitchFamily="34" charset="0"/>
-              </a:endParaRPr>
-            </a:p>
-          </p:txBody>
-        </p:sp>
-        <p:sp>
-          <p:nvSpPr>
-            <p:cNvPr id="17" name="文本框 16">
-              <a:extLst>
-                <a:ext uri="{FF2B5EF4-FFF2-40B4-BE49-F238E27FC236}">
-                  <a16:creationId xmlns:a16="http://schemas.microsoft.com/office/drawing/2014/main" id="{1E2807BA-A4DE-88A2-5070-386EEFA75F86}"/>
-                </a:ext>
-              </a:extLst>
-            </p:cNvPr>
-            <p:cNvSpPr txBox="1"/>
-            <p:nvPr/>
-          </p:nvSpPr>
-          <p:spPr>
-            <a:xfrm>
-              <a:off x="666794" y="5023578"/>
-              <a:ext cx="312906" cy="400110"/>
-            </a:xfrm>
-            <a:prstGeom prst="rect">
-              <a:avLst/>
-            </a:prstGeom>
-            <a:noFill/>
-          </p:spPr>
-          <p:txBody>
-            <a:bodyPr wrap="none" rtlCol="0">
-              <a:spAutoFit/>
-            </a:bodyPr>
-            <a:lstStyle/>
-            <a:p>
-              <a:r>
-                <a:rPr lang="en-US" altLang="zh-CN" sz="2000" dirty="0">
-                  <a:latin typeface="Helvetica" panose="020B0604020202020204" pitchFamily="34" charset="0"/>
-                  <a:cs typeface="Helvetica" panose="020B0604020202020204" pitchFamily="34" charset="0"/>
-                </a:rPr>
-                <a:t>y</a:t>
-              </a:r>
-              <a:endParaRPr lang="zh-CN" altLang="en-US" sz="2000" baseline="-25000" dirty="0">
-                <a:latin typeface="Helvetica" panose="020B0604020202020204" pitchFamily="34" charset="0"/>
-                <a:cs typeface="Helvetica" panose="020B0604020202020204" pitchFamily="34" charset="0"/>
-              </a:endParaRPr>
-            </a:p>
-          </p:txBody>
-        </p:sp>
-        <p:cxnSp>
-          <p:nvCxnSpPr>
-            <p:cNvPr id="27" name="直接箭头连接符 26">
-              <a:extLst>
-                <a:ext uri="{FF2B5EF4-FFF2-40B4-BE49-F238E27FC236}">
-                  <a16:creationId xmlns:a16="http://schemas.microsoft.com/office/drawing/2014/main" id="{9E15C07B-2F30-6879-24C1-573E6362B48E}"/>
-                </a:ext>
-              </a:extLst>
-            </p:cNvPr>
-            <p:cNvCxnSpPr>
-              <a:cxnSpLocks/>
-            </p:cNvCxnSpPr>
-            <p:nvPr/>
-          </p:nvCxnSpPr>
-          <p:spPr>
-            <a:xfrm rot="5400000" flipH="1" flipV="1">
-              <a:off x="1152546" y="5846739"/>
-              <a:ext cx="494" cy="528256"/>
-            </a:xfrm>
-            <a:prstGeom prst="straightConnector1">
-              <a:avLst/>
-            </a:prstGeom>
-            <a:ln w="12700">
-              <a:solidFill>
-                <a:schemeClr val="tx1"/>
-              </a:solidFill>
-              <a:tailEnd type="triangle"/>
-            </a:ln>
-          </p:spPr>
-          <p:style>
-            <a:lnRef idx="2">
-              <a:schemeClr val="accent1"/>
-            </a:lnRef>
-            <a:fillRef idx="0">
-              <a:schemeClr val="accent1"/>
-            </a:fillRef>
-            <a:effectRef idx="1">
-              <a:schemeClr val="accent1"/>
-            </a:effectRef>
-            <a:fontRef idx="minor">
-              <a:schemeClr val="tx1"/>
-            </a:fontRef>
-          </p:style>
-        </p:cxnSp>
-      </p:grpSp>
-      <p:sp>
-        <p:nvSpPr>
-          <p:cNvPr id="21" name="矩形 20">
-            <a:extLst>
-              <a:ext uri="{FF2B5EF4-FFF2-40B4-BE49-F238E27FC236}">
-                <a16:creationId xmlns:a16="http://schemas.microsoft.com/office/drawing/2014/main" id="{11E7C393-8688-8B96-A604-85CFD019ABC8}"/>
-              </a:ext>
-            </a:extLst>
-          </p:cNvPr>
-          <p:cNvSpPr/>
-          <p:nvPr/>
-        </p:nvSpPr>
-        <p:spPr>
-          <a:xfrm>
-            <a:off x="1367223" y="1203968"/>
-            <a:ext cx="1744652" cy="1390836"/>
-          </a:xfrm>
-          <a:prstGeom prst="rect">
-            <a:avLst/>
-          </a:prstGeom>
-          <a:noFill/>
-          <a:ln w="12700">
-            <a:solidFill>
-              <a:schemeClr val="tx1"/>
-            </a:solidFill>
-          </a:ln>
-        </p:spPr>
-        <p:style>
-          <a:lnRef idx="2">
-            <a:schemeClr val="accent1">
-              <a:shade val="15000"/>
-            </a:schemeClr>
-          </a:lnRef>
-          <a:fillRef idx="1">
-            <a:schemeClr val="accent1"/>
-          </a:fillRef>
-          <a:effectRef idx="0">
-            <a:schemeClr val="accent1"/>
-          </a:effectRef>
-          <a:fontRef idx="minor">
-            <a:schemeClr val="lt1"/>
-          </a:fontRef>
-        </p:style>
-        <p:txBody>
-          <a:bodyPr rtlCol="0" anchor="ctr"/>
-          <a:lstStyle/>
-          <a:p>
-            <a:pPr algn="ctr"/>
-            <a:endParaRPr lang="zh-CN" altLang="en-US"/>
-          </a:p>
-        </p:txBody>
-      </p:sp>
       <p:sp>
         <p:nvSpPr>
           <p:cNvPr id="36" name="椭圆 35">
@@ -10780,198 +10247,6 @@
             </a:srgbClr>
           </a:solidFill>
           <a:ln w="25400">
-            <a:prstDash val="dash"/>
-          </a:ln>
-        </p:spPr>
-        <p:style>
-          <a:lnRef idx="2">
-            <a:schemeClr val="accent1">
-              <a:shade val="15000"/>
-            </a:schemeClr>
-          </a:lnRef>
-          <a:fillRef idx="1">
-            <a:schemeClr val="accent1"/>
-          </a:fillRef>
-          <a:effectRef idx="0">
-            <a:schemeClr val="accent1"/>
-          </a:effectRef>
-          <a:fontRef idx="minor">
-            <a:schemeClr val="lt1"/>
-          </a:fontRef>
-        </p:style>
-        <p:txBody>
-          <a:bodyPr rtlCol="0" anchor="ctr"/>
-          <a:lstStyle/>
-          <a:p>
-            <a:pPr algn="ctr"/>
-            <a:endParaRPr lang="zh-CN" altLang="en-US"/>
-          </a:p>
-        </p:txBody>
-      </p:sp>
-      <p:sp>
-        <p:nvSpPr>
-          <p:cNvPr id="47" name="文本框 46">
-            <a:extLst>
-              <a:ext uri="{FF2B5EF4-FFF2-40B4-BE49-F238E27FC236}">
-                <a16:creationId xmlns:a16="http://schemas.microsoft.com/office/drawing/2014/main" id="{F134A86F-C04C-6307-9C75-E04235FF642A}"/>
-              </a:ext>
-            </a:extLst>
-          </p:cNvPr>
-          <p:cNvSpPr txBox="1"/>
-          <p:nvPr/>
-        </p:nvSpPr>
-        <p:spPr>
-          <a:xfrm>
-            <a:off x="1751012" y="1669641"/>
-            <a:ext cx="1360863" cy="338554"/>
-          </a:xfrm>
-          <a:prstGeom prst="rect">
-            <a:avLst/>
-          </a:prstGeom>
-          <a:noFill/>
-        </p:spPr>
-        <p:txBody>
-          <a:bodyPr wrap="square" rtlCol="0">
-            <a:spAutoFit/>
-          </a:bodyPr>
-          <a:lstStyle/>
-          <a:p>
-            <a:r>
-              <a:rPr lang="en-US" altLang="zh-CN" sz="1600" dirty="0">
-                <a:latin typeface="Helvetica" panose="020B0604020202020204" pitchFamily="34" charset="0"/>
-                <a:cs typeface="Helvetica" panose="020B0604020202020204" pitchFamily="34" charset="0"/>
-              </a:rPr>
-              <a:t>1-fan case</a:t>
-            </a:r>
-            <a:endParaRPr lang="zh-CN" altLang="en-US" sz="1600" dirty="0">
-              <a:latin typeface="Helvetica" panose="020B0604020202020204" pitchFamily="34" charset="0"/>
-              <a:cs typeface="Helvetica" panose="020B0604020202020204" pitchFamily="34" charset="0"/>
-            </a:endParaRPr>
-          </a:p>
-        </p:txBody>
-      </p:sp>
-      <p:sp>
-        <p:nvSpPr>
-          <p:cNvPr id="49" name="文本框 48">
-            <a:extLst>
-              <a:ext uri="{FF2B5EF4-FFF2-40B4-BE49-F238E27FC236}">
-                <a16:creationId xmlns:a16="http://schemas.microsoft.com/office/drawing/2014/main" id="{24BAAFDD-F195-1346-6C3E-C1C0A3A4CE0B}"/>
-              </a:ext>
-            </a:extLst>
-          </p:cNvPr>
-          <p:cNvSpPr txBox="1"/>
-          <p:nvPr/>
-        </p:nvSpPr>
-        <p:spPr>
-          <a:xfrm>
-            <a:off x="1751013" y="2163997"/>
-            <a:ext cx="1360863" cy="338554"/>
-          </a:xfrm>
-          <a:prstGeom prst="rect">
-            <a:avLst/>
-          </a:prstGeom>
-          <a:noFill/>
-        </p:spPr>
-        <p:txBody>
-          <a:bodyPr wrap="square" rtlCol="0">
-            <a:spAutoFit/>
-          </a:bodyPr>
-          <a:lstStyle/>
-          <a:p>
-            <a:r>
-              <a:rPr lang="en-US" altLang="zh-CN" sz="1600" dirty="0">
-                <a:latin typeface="Helvetica" panose="020B0604020202020204" pitchFamily="34" charset="0"/>
-                <a:cs typeface="Helvetica" panose="020B0604020202020204" pitchFamily="34" charset="0"/>
-              </a:rPr>
-              <a:t>4-fan case</a:t>
-            </a:r>
-            <a:endParaRPr lang="zh-CN" altLang="en-US" sz="1600" dirty="0">
-              <a:latin typeface="Helvetica" panose="020B0604020202020204" pitchFamily="34" charset="0"/>
-              <a:cs typeface="Helvetica" panose="020B0604020202020204" pitchFamily="34" charset="0"/>
-            </a:endParaRPr>
-          </a:p>
-        </p:txBody>
-      </p:sp>
-      <p:sp>
-        <p:nvSpPr>
-          <p:cNvPr id="55" name="椭圆 54">
-            <a:extLst>
-              <a:ext uri="{FF2B5EF4-FFF2-40B4-BE49-F238E27FC236}">
-                <a16:creationId xmlns:a16="http://schemas.microsoft.com/office/drawing/2014/main" id="{8B653361-2294-2471-71F4-C2E8013CD7A9}"/>
-              </a:ext>
-            </a:extLst>
-          </p:cNvPr>
-          <p:cNvSpPr/>
-          <p:nvPr/>
-        </p:nvSpPr>
-        <p:spPr>
-          <a:xfrm>
-            <a:off x="1472656" y="1727965"/>
-            <a:ext cx="230690" cy="230690"/>
-          </a:xfrm>
-          <a:prstGeom prst="ellipse">
-            <a:avLst/>
-          </a:prstGeom>
-          <a:solidFill>
-            <a:srgbClr val="F6C63C">
-              <a:alpha val="67000"/>
-            </a:srgbClr>
-          </a:solidFill>
-          <a:ln w="19050">
-            <a:prstDash val="dash"/>
-          </a:ln>
-        </p:spPr>
-        <p:style>
-          <a:lnRef idx="2">
-            <a:schemeClr val="accent1">
-              <a:shade val="15000"/>
-            </a:schemeClr>
-          </a:lnRef>
-          <a:fillRef idx="1">
-            <a:schemeClr val="accent1"/>
-          </a:fillRef>
-          <a:effectRef idx="0">
-            <a:schemeClr val="accent1"/>
-          </a:effectRef>
-          <a:fontRef idx="minor">
-            <a:schemeClr val="lt1"/>
-          </a:fontRef>
-        </p:style>
-        <p:txBody>
-          <a:bodyPr rtlCol="0" anchor="ctr"/>
-          <a:lstStyle/>
-          <a:p>
-            <a:pPr algn="ctr"/>
-            <a:endParaRPr lang="zh-CN" altLang="en-US"/>
-          </a:p>
-        </p:txBody>
-      </p:sp>
-      <p:sp>
-        <p:nvSpPr>
-          <p:cNvPr id="57" name="椭圆 56">
-            <a:extLst>
-              <a:ext uri="{FF2B5EF4-FFF2-40B4-BE49-F238E27FC236}">
-                <a16:creationId xmlns:a16="http://schemas.microsoft.com/office/drawing/2014/main" id="{A1FCA709-E0C9-FADA-AB77-33EEF2F12D69}"/>
-              </a:ext>
-            </a:extLst>
-          </p:cNvPr>
-          <p:cNvSpPr/>
-          <p:nvPr/>
-        </p:nvSpPr>
-        <p:spPr>
-          <a:xfrm>
-            <a:off x="1477759" y="2217929"/>
-            <a:ext cx="230690" cy="230690"/>
-          </a:xfrm>
-          <a:prstGeom prst="ellipse">
-            <a:avLst/>
-          </a:prstGeom>
-          <a:solidFill>
-            <a:srgbClr val="B43970">
-              <a:alpha val="67000"/>
-            </a:srgbClr>
-          </a:solidFill>
-          <a:ln w="19050">
             <a:prstDash val="dash"/>
           </a:ln>
         </p:spPr>
@@ -11059,8 +10334,8 @@
         </p:nvSpPr>
         <p:spPr>
           <a:xfrm>
-            <a:off x="9663016" y="1727965"/>
-            <a:ext cx="847401" cy="338554"/>
+            <a:off x="9632824" y="1762138"/>
+            <a:ext cx="907205" cy="369332"/>
           </a:xfrm>
           <a:prstGeom prst="rect">
             <a:avLst/>
@@ -11078,7 +10353,7 @@
           <a:p>
             <a:pPr algn="ctr"/>
             <a:r>
-              <a:rPr lang="en-US" altLang="zh-CN" sz="1600" dirty="0">
+              <a:rPr lang="en-US" altLang="zh-CN" dirty="0">
                 <a:solidFill>
                   <a:srgbClr val="D96558"/>
                 </a:solidFill>
@@ -11088,7 +10363,7 @@
               </a:rPr>
               <a:t>1.20 m</a:t>
             </a:r>
-            <a:endParaRPr lang="zh-CN" altLang="en-US" sz="1600" baseline="-25000" dirty="0">
+            <a:endParaRPr lang="zh-CN" altLang="en-US" baseline="-25000" dirty="0">
               <a:solidFill>
                 <a:srgbClr val="D96558"/>
               </a:solidFill>
@@ -11157,8 +10432,8 @@
         </p:nvSpPr>
         <p:spPr>
           <a:xfrm>
-            <a:off x="9679906" y="3328374"/>
-            <a:ext cx="813043" cy="338554"/>
+            <a:off x="9641434" y="3328374"/>
+            <a:ext cx="889987" cy="369332"/>
           </a:xfrm>
           <a:prstGeom prst="rect">
             <a:avLst/>
@@ -11178,7 +10453,7 @@
           <a:p>
             <a:pPr algn="ctr"/>
             <a:r>
-              <a:rPr lang="en-US" altLang="zh-CN" sz="1600" dirty="0">
+              <a:rPr lang="en-US" altLang="zh-CN" dirty="0">
                 <a:solidFill>
                   <a:srgbClr val="D96558"/>
                 </a:solidFill>
@@ -11188,7 +10463,7 @@
               </a:rPr>
               <a:t>1.80 m</a:t>
             </a:r>
-            <a:endParaRPr lang="zh-CN" altLang="en-US" sz="1600" baseline="-25000" dirty="0">
+            <a:endParaRPr lang="zh-CN" altLang="en-US" baseline="-25000" dirty="0">
               <a:solidFill>
                 <a:srgbClr val="D96558"/>
               </a:solidFill>
@@ -11236,6 +10511,37 @@
       </p:grpSpPr>
       <p:pic>
         <p:nvPicPr>
+          <p:cNvPr id="4" name="图片 3">
+            <a:extLst>
+              <a:ext uri="{FF2B5EF4-FFF2-40B4-BE49-F238E27FC236}">
+                <a16:creationId xmlns:a16="http://schemas.microsoft.com/office/drawing/2014/main" id="{10BF806C-AF9E-4902-3729-7AB1BBB09083}"/>
+              </a:ext>
+            </a:extLst>
+          </p:cNvPr>
+          <p:cNvPicPr>
+            <a:picLocks noChangeAspect="1"/>
+          </p:cNvPicPr>
+          <p:nvPr/>
+        </p:nvPicPr>
+        <p:blipFill>
+          <a:blip r:embed="rId3"/>
+          <a:srcRect l="16901"/>
+          <a:stretch>
+            <a:fillRect/>
+          </a:stretch>
+        </p:blipFill>
+        <p:spPr>
+          <a:xfrm>
+            <a:off x="466188" y="1752699"/>
+            <a:ext cx="6694218" cy="3988798"/>
+          </a:xfrm>
+          <a:prstGeom prst="rect">
+            <a:avLst/>
+          </a:prstGeom>
+        </p:spPr>
+      </p:pic>
+      <p:pic>
+        <p:nvPicPr>
           <p:cNvPr id="37" name="图片 36">
             <a:extLst>
               <a:ext uri="{FF2B5EF4-FFF2-40B4-BE49-F238E27FC236}">
@@ -11249,7 +10555,7 @@
           <p:nvPr/>
         </p:nvPicPr>
         <p:blipFill>
-          <a:blip r:embed="rId3">
+          <a:blip r:embed="rId4">
             <a:extLst>
               <a:ext uri="{28A0092B-C50C-407E-A947-70E740481C1C}">
                 <a14:useLocalDpi xmlns:a14="http://schemas.microsoft.com/office/drawing/2010/main" val="0"/>
@@ -11286,7 +10592,7 @@
           <p:nvPr/>
         </p:nvPicPr>
         <p:blipFill>
-          <a:blip r:embed="rId4">
+          <a:blip r:embed="rId5">
             <a:extLst>
               <a:ext uri="{28A0092B-C50C-407E-A947-70E740481C1C}">
                 <a14:useLocalDpi xmlns:a14="http://schemas.microsoft.com/office/drawing/2010/main" val="0"/>
@@ -11302,229 +10608,6 @@
           <a:xfrm>
             <a:off x="5242663" y="337930"/>
             <a:ext cx="1658880" cy="1251384"/>
-          </a:xfrm>
-          <a:prstGeom prst="rect">
-            <a:avLst/>
-          </a:prstGeom>
-        </p:spPr>
-      </p:pic>
-      <p:grpSp>
-        <p:nvGrpSpPr>
-          <p:cNvPr id="45" name="组合 44">
-            <a:extLst>
-              <a:ext uri="{FF2B5EF4-FFF2-40B4-BE49-F238E27FC236}">
-                <a16:creationId xmlns:a16="http://schemas.microsoft.com/office/drawing/2014/main" id="{FF58B426-DE29-A57F-8B57-2B3E3E28F296}"/>
-              </a:ext>
-            </a:extLst>
-          </p:cNvPr>
-          <p:cNvGrpSpPr/>
-          <p:nvPr/>
-        </p:nvGrpSpPr>
-        <p:grpSpPr>
-          <a:xfrm>
-            <a:off x="0" y="1728526"/>
-            <a:ext cx="7021653" cy="4114326"/>
-            <a:chOff x="234548" y="2141793"/>
-            <a:chExt cx="6096000" cy="3571941"/>
-          </a:xfrm>
-        </p:grpSpPr>
-        <p:pic>
-          <p:nvPicPr>
-            <p:cNvPr id="34" name="图片 33">
-              <a:extLst>
-                <a:ext uri="{FF2B5EF4-FFF2-40B4-BE49-F238E27FC236}">
-                  <a16:creationId xmlns:a16="http://schemas.microsoft.com/office/drawing/2014/main" id="{84503412-639B-F7DD-9180-D6A8BDB36F6C}"/>
-                </a:ext>
-              </a:extLst>
-            </p:cNvPr>
-            <p:cNvPicPr>
-              <a:picLocks noChangeAspect="1"/>
-            </p:cNvPicPr>
-            <p:nvPr/>
-          </p:nvPicPr>
-          <p:blipFill>
-            <a:blip r:embed="rId4">
-              <a:extLst>
-                <a:ext uri="{28A0092B-C50C-407E-A947-70E740481C1C}">
-                  <a14:useLocalDpi xmlns:a14="http://schemas.microsoft.com/office/drawing/2010/main" val="0"/>
-                </a:ext>
-              </a:extLst>
-            </a:blip>
-            <a:srcRect l="15125"/>
-            <a:stretch>
-              <a:fillRect/>
-            </a:stretch>
-          </p:blipFill>
-          <p:spPr>
-            <a:xfrm>
-              <a:off x="266008" y="2141793"/>
-              <a:ext cx="6064540" cy="3571941"/>
-            </a:xfrm>
-            <a:prstGeom prst="rect">
-              <a:avLst/>
-            </a:prstGeom>
-          </p:spPr>
-        </p:pic>
-        <p:sp>
-          <p:nvSpPr>
-            <p:cNvPr id="43" name="矩形 42">
-              <a:extLst>
-                <a:ext uri="{FF2B5EF4-FFF2-40B4-BE49-F238E27FC236}">
-                  <a16:creationId xmlns:a16="http://schemas.microsoft.com/office/drawing/2014/main" id="{A787041E-AD0B-771E-F74E-4F1B271118D5}"/>
-                </a:ext>
-              </a:extLst>
-            </p:cNvPr>
-            <p:cNvSpPr/>
-            <p:nvPr/>
-          </p:nvSpPr>
-          <p:spPr>
-            <a:xfrm>
-              <a:off x="266008" y="4854633"/>
-              <a:ext cx="340821" cy="764771"/>
-            </a:xfrm>
-            <a:prstGeom prst="rect">
-              <a:avLst/>
-            </a:prstGeom>
-            <a:solidFill>
-              <a:schemeClr val="bg1"/>
-            </a:solidFill>
-            <a:ln>
-              <a:noFill/>
-            </a:ln>
-          </p:spPr>
-          <p:style>
-            <a:lnRef idx="2">
-              <a:schemeClr val="accent1">
-                <a:shade val="15000"/>
-              </a:schemeClr>
-            </a:lnRef>
-            <a:fillRef idx="1">
-              <a:schemeClr val="accent1"/>
-            </a:fillRef>
-            <a:effectRef idx="0">
-              <a:schemeClr val="accent1"/>
-            </a:effectRef>
-            <a:fontRef idx="minor">
-              <a:schemeClr val="lt1"/>
-            </a:fontRef>
-          </p:style>
-          <p:txBody>
-            <a:bodyPr rtlCol="0" anchor="ctr"/>
-            <a:lstStyle/>
-            <a:p>
-              <a:pPr algn="ctr"/>
-              <a:endParaRPr lang="en-GB"/>
-            </a:p>
-          </p:txBody>
-        </p:sp>
-        <p:sp>
-          <p:nvSpPr>
-            <p:cNvPr id="44" name="矩形 43">
-              <a:extLst>
-                <a:ext uri="{FF2B5EF4-FFF2-40B4-BE49-F238E27FC236}">
-                  <a16:creationId xmlns:a16="http://schemas.microsoft.com/office/drawing/2014/main" id="{E966EC97-29EC-C43A-652E-6D976C644771}"/>
-                </a:ext>
-              </a:extLst>
-            </p:cNvPr>
-            <p:cNvSpPr/>
-            <p:nvPr/>
-          </p:nvSpPr>
-          <p:spPr>
-            <a:xfrm>
-              <a:off x="234548" y="2141793"/>
-              <a:ext cx="372281" cy="1154143"/>
-            </a:xfrm>
-            <a:prstGeom prst="rect">
-              <a:avLst/>
-            </a:prstGeom>
-            <a:solidFill>
-              <a:schemeClr val="bg1"/>
-            </a:solidFill>
-            <a:ln>
-              <a:noFill/>
-            </a:ln>
-          </p:spPr>
-          <p:style>
-            <a:lnRef idx="2">
-              <a:schemeClr val="accent1">
-                <a:shade val="15000"/>
-              </a:schemeClr>
-            </a:lnRef>
-            <a:fillRef idx="1">
-              <a:schemeClr val="accent1"/>
-            </a:fillRef>
-            <a:effectRef idx="0">
-              <a:schemeClr val="accent1"/>
-            </a:effectRef>
-            <a:fontRef idx="minor">
-              <a:schemeClr val="lt1"/>
-            </a:fontRef>
-          </p:style>
-          <p:txBody>
-            <a:bodyPr rtlCol="0" anchor="ctr"/>
-            <a:lstStyle/>
-            <a:p>
-              <a:pPr algn="ctr"/>
-              <a:endParaRPr lang="en-GB" dirty="0"/>
-            </a:p>
-          </p:txBody>
-        </p:sp>
-      </p:grpSp>
-      <p:pic>
-        <p:nvPicPr>
-          <p:cNvPr id="38" name="图片 37">
-            <a:extLst>
-              <a:ext uri="{FF2B5EF4-FFF2-40B4-BE49-F238E27FC236}">
-                <a16:creationId xmlns:a16="http://schemas.microsoft.com/office/drawing/2014/main" id="{B226DDD7-0D3C-C8C4-F666-4CA16C1D3391}"/>
-              </a:ext>
-            </a:extLst>
-          </p:cNvPr>
-          <p:cNvPicPr>
-            <a:picLocks noChangeAspect="1"/>
-          </p:cNvPicPr>
-          <p:nvPr/>
-        </p:nvPicPr>
-        <p:blipFill>
-          <a:blip r:embed="rId5">
-            <a:extLst>
-              <a:ext uri="{BEBA8EAE-BF5A-486C-A8C5-ECC9F3942E4B}">
-                <a14:imgProps xmlns:a14="http://schemas.microsoft.com/office/drawing/2010/main">
-                  <a14:imgLayer r:embed="rId6">
-                    <a14:imgEffect>
-                      <a14:backgroundRemoval t="71195" b="95275" l="6246" r="17284">
-                        <a14:foregroundMark x1="6427" y1="95320" x2="6427" y2="95320"/>
-                        <a14:foregroundMark x1="9357" y1="90959" x2="9357" y2="90959"/>
-                        <a14:foregroundMark x1="8812" y1="73194" x2="8812" y2="73194"/>
-                        <a14:foregroundMark x1="8426" y1="72876" x2="8426" y2="72876"/>
-                        <a14:foregroundMark x1="9221" y1="72785" x2="9221" y2="72785"/>
-                        <a14:foregroundMark x1="9085" y1="71195" x2="9085" y2="71195"/>
-                        <a14:foregroundMark x1="9176" y1="71286" x2="9176" y2="71286"/>
-                        <a14:foregroundMark x1="8358" y1="71422" x2="8358" y2="71422"/>
-                        <a14:foregroundMark x1="16648" y1="90232" x2="16648" y2="90232"/>
-                        <a14:foregroundMark x1="17057" y1="91458" x2="17057" y2="91458"/>
-                        <a14:foregroundMark x1="16330" y1="91368" x2="16330" y2="91368"/>
-                        <a14:foregroundMark x1="17284" y1="91686" x2="17284" y2="91686"/>
-                        <a14:foregroundMark x1="17170" y1="89050" x2="17170" y2="89050"/>
-                        <a14:foregroundMark x1="16239" y1="91686" x2="16239" y2="91686"/>
-                      </a14:backgroundRemoval>
-                    </a14:imgEffect>
-                  </a14:imgLayer>
-                </a14:imgProps>
-              </a:ext>
-              <a:ext uri="{28A0092B-C50C-407E-A947-70E740481C1C}">
-                <a14:useLocalDpi xmlns:a14="http://schemas.microsoft.com/office/drawing/2010/main" val="0"/>
-              </a:ext>
-            </a:extLst>
-          </a:blip>
-          <a:srcRect l="5003" t="69969" r="82153" b="2677"/>
-          <a:stretch>
-            <a:fillRect/>
-          </a:stretch>
-        </p:blipFill>
-        <p:spPr>
-          <a:xfrm>
-            <a:off x="93635" y="5474538"/>
-            <a:ext cx="917709" cy="977063"/>
           </a:xfrm>
           <a:prstGeom prst="rect">
             <a:avLst/>
@@ -11653,7 +10736,7 @@
             </a:prstGeom>
             <a:ln w="31750">
               <a:solidFill>
-                <a:srgbClr val="DE862F"/>
+                <a:srgbClr val="D96558"/>
               </a:solidFill>
               <a:tailEnd type="triangle"/>
             </a:ln>
@@ -11697,7 +10780,7 @@
             </a:prstGeom>
             <a:ln w="31750">
               <a:solidFill>
-                <a:srgbClr val="DE862F"/>
+                <a:srgbClr val="D96558"/>
               </a:solidFill>
             </a:ln>
           </p:spPr>
@@ -11731,8 +10814,8 @@
         </p:nvSpPr>
         <p:spPr>
           <a:xfrm>
-            <a:off x="7146391" y="5607476"/>
-            <a:ext cx="2153999" cy="883832"/>
+            <a:off x="7146391" y="5483938"/>
+            <a:ext cx="2218044" cy="883832"/>
           </a:xfrm>
           <a:prstGeom prst="rect">
             <a:avLst/>
@@ -11752,8 +10835,13 @@
             </a:pPr>
             <a:r>
               <a:rPr lang="en-US" altLang="zh-CN" sz="1600" dirty="0">
+                <a:ln w="3175">
+                  <a:solidFill>
+                    <a:srgbClr val="D96558"/>
+                  </a:solidFill>
+                </a:ln>
                 <a:solidFill>
-                  <a:srgbClr val="DE862F"/>
+                  <a:srgbClr val="D96558"/>
                 </a:solidFill>
                 <a:latin typeface="Helvetica" panose="020B0604020202020204" pitchFamily="34" charset="0"/>
                 <a:cs typeface="Helvetica" panose="020B0604020202020204" pitchFamily="34" charset="0"/>
@@ -11761,8 +10849,13 @@
               <a:t>BENETECH GM8903 constant‑temperature hot‑wire anemometer</a:t>
             </a:r>
             <a:endParaRPr lang="zh-CN" altLang="en-US" sz="1600" dirty="0">
+              <a:ln w="3175">
+                <a:solidFill>
+                  <a:srgbClr val="D96558"/>
+                </a:solidFill>
+              </a:ln>
               <a:solidFill>
-                <a:srgbClr val="DE862F"/>
+                <a:srgbClr val="D96558"/>
               </a:solidFill>
               <a:latin typeface="Helvetica" panose="020B0604020202020204" pitchFamily="34" charset="0"/>
               <a:cs typeface="Helvetica" panose="020B0604020202020204" pitchFamily="34" charset="0"/>
@@ -11799,6 +10892,11 @@
           <a:lstStyle/>
           <a:p>
             <a:endParaRPr lang="en-GB" altLang="zh-CN" sz="1600" dirty="0">
+              <a:ln w="3175">
+                <a:solidFill>
+                  <a:schemeClr val="tx1"/>
+                </a:solidFill>
+              </a:ln>
               <a:latin typeface="Helvetica" panose="020B0604020202020204" pitchFamily="34" charset="0"/>
               <a:cs typeface="Helvetica" panose="020B0604020202020204" pitchFamily="34" charset="0"/>
             </a:endParaRPr>
@@ -11806,6 +10904,11 @@
           <a:p>
             <a:r>
               <a:rPr lang="en-GB" altLang="zh-CN" sz="1600" dirty="0">
+                <a:ln w="3175">
+                  <a:solidFill>
+                    <a:schemeClr val="tx1"/>
+                  </a:solidFill>
+                </a:ln>
                 <a:latin typeface="Helvetica" panose="020B0604020202020204" pitchFamily="34" charset="0"/>
                 <a:cs typeface="Helvetica" panose="020B0604020202020204" pitchFamily="34" charset="0"/>
               </a:rPr>
@@ -11815,12 +10918,22 @@
           <a:p>
             <a:r>
               <a:rPr lang="en-GB" altLang="zh-CN" sz="1600" dirty="0">
+                <a:ln w="3175">
+                  <a:solidFill>
+                    <a:schemeClr val="tx1"/>
+                  </a:solidFill>
+                </a:ln>
                 <a:latin typeface="Helvetica" panose="020B0604020202020204" pitchFamily="34" charset="0"/>
                 <a:cs typeface="Helvetica" panose="020B0604020202020204" pitchFamily="34" charset="0"/>
               </a:rPr>
               <a:t>custom support</a:t>
             </a:r>
             <a:endParaRPr lang="en-GB" sz="1600" dirty="0">
+              <a:ln w="3175">
+                <a:solidFill>
+                  <a:schemeClr val="tx1"/>
+                </a:solidFill>
+              </a:ln>
               <a:latin typeface="Helvetica" panose="020B0604020202020204" pitchFamily="34" charset="0"/>
               <a:cs typeface="Helvetica" panose="020B0604020202020204" pitchFamily="34" charset="0"/>
             </a:endParaRPr>
@@ -11990,7 +11103,7 @@
             </a:prstGeom>
             <a:ln w="31750">
               <a:solidFill>
-                <a:srgbClr val="67645F"/>
+                <a:srgbClr val="B43970"/>
               </a:solidFill>
               <a:tailEnd type="triangle"/>
             </a:ln>
@@ -12035,7 +11148,7 @@
             </a:prstGeom>
             <a:ln w="31750">
               <a:solidFill>
-                <a:srgbClr val="67645F"/>
+                <a:srgbClr val="B43970"/>
               </a:solidFill>
             </a:ln>
           </p:spPr>
@@ -12104,7 +11217,7 @@
             </a:prstGeom>
             <a:ln w="31750">
               <a:solidFill>
-                <a:srgbClr val="77797D"/>
+                <a:srgbClr val="B43970"/>
               </a:solidFill>
               <a:tailEnd type="triangle"/>
             </a:ln>
@@ -12148,7 +11261,7 @@
             </a:prstGeom>
             <a:ln w="31750">
               <a:solidFill>
-                <a:srgbClr val="77797D"/>
+                <a:srgbClr val="B43970"/>
               </a:solidFill>
             </a:ln>
           </p:spPr>
@@ -12198,8 +11311,13 @@
           <a:p>
             <a:r>
               <a:rPr lang="en-US" altLang="zh-CN" sz="1600" dirty="0" err="1">
+                <a:ln w="3175">
+                  <a:solidFill>
+                    <a:srgbClr val="B43970"/>
+                  </a:solidFill>
+                </a:ln>
                 <a:solidFill>
-                  <a:srgbClr val="77797D"/>
+                  <a:srgbClr val="B43970"/>
                 </a:solidFill>
                 <a:latin typeface="Helvetica" panose="020B0604020202020204" pitchFamily="34" charset="0"/>
                 <a:cs typeface="Helvetica" panose="020B0604020202020204" pitchFamily="34" charset="0"/>
@@ -12208,8 +11326,13 @@
             </a:r>
             <a:r>
               <a:rPr lang="en-US" altLang="zh-CN" sz="1600" dirty="0">
+                <a:ln w="3175">
+                  <a:solidFill>
+                    <a:srgbClr val="B43970"/>
+                  </a:solidFill>
+                </a:ln>
                 <a:solidFill>
-                  <a:srgbClr val="77797D"/>
+                  <a:srgbClr val="B43970"/>
                 </a:solidFill>
                 <a:latin typeface="Helvetica" panose="020B0604020202020204" pitchFamily="34" charset="0"/>
                 <a:cs typeface="Helvetica" panose="020B0604020202020204" pitchFamily="34" charset="0"/>
@@ -12217,8 +11340,13 @@
               <a:t> reinforced tape</a:t>
             </a:r>
             <a:endParaRPr lang="en-GB" sz="1600" dirty="0">
+              <a:ln w="3175">
+                <a:solidFill>
+                  <a:srgbClr val="B43970"/>
+                </a:solidFill>
+              </a:ln>
               <a:solidFill>
-                <a:srgbClr val="77797D"/>
+                <a:srgbClr val="B43970"/>
               </a:solidFill>
               <a:latin typeface="Helvetica" panose="020B0604020202020204" pitchFamily="34" charset="0"/>
               <a:cs typeface="Helvetica" panose="020B0604020202020204" pitchFamily="34" charset="0"/>
@@ -12256,8 +11384,13 @@
           <a:p>
             <a:r>
               <a:rPr lang="en-US" sz="1600" dirty="0">
+                <a:ln w="3175">
+                  <a:solidFill>
+                    <a:srgbClr val="B43970"/>
+                  </a:solidFill>
+                </a:ln>
                 <a:solidFill>
-                  <a:srgbClr val="67645F"/>
+                  <a:srgbClr val="B43970"/>
                 </a:solidFill>
                 <a:latin typeface="Helvetica" panose="020B0604020202020204" pitchFamily="34" charset="0"/>
                 <a:cs typeface="Helvetica" panose="020B0604020202020204" pitchFamily="34" charset="0"/>
@@ -12265,8 +11398,13 @@
               <a:t>probe</a:t>
             </a:r>
             <a:endParaRPr lang="en-GB" sz="1600" dirty="0">
+              <a:ln w="3175">
+                <a:solidFill>
+                  <a:srgbClr val="B43970"/>
+                </a:solidFill>
+              </a:ln>
               <a:solidFill>
-                <a:srgbClr val="67645F"/>
+                <a:srgbClr val="B43970"/>
               </a:solidFill>
               <a:latin typeface="Helvetica" panose="020B0604020202020204" pitchFamily="34" charset="0"/>
               <a:cs typeface="Helvetica" panose="020B0604020202020204" pitchFamily="34" charset="0"/>
@@ -12402,10 +11540,10 @@
           <p:nvPr/>
         </p:nvPicPr>
         <p:blipFill>
-          <a:blip r:embed="rId7">
+          <a:blip r:embed="rId6">
             <a:extLst>
               <a:ext uri="{96DAC541-7B7A-43D3-8B79-37D633B846F1}">
-                <asvg:svgBlip xmlns:asvg="http://schemas.microsoft.com/office/drawing/2016/SVG/main" r:embed="rId8"/>
+                <asvg:svgBlip xmlns:asvg="http://schemas.microsoft.com/office/drawing/2016/SVG/main" r:embed="rId7"/>
               </a:ext>
             </a:extLst>
           </a:blip>
@@ -12415,8 +11553,8 @@
         </p:blipFill>
         <p:spPr>
           <a:xfrm flipH="1">
-            <a:off x="7840468" y="2669667"/>
-            <a:ext cx="713125" cy="1003562"/>
+            <a:off x="7693075" y="2493630"/>
+            <a:ext cx="934140" cy="1314591"/>
           </a:xfrm>
           <a:prstGeom prst="rect">
             <a:avLst/>
@@ -12425,10 +11563,10 @@
       </p:pic>
       <p:sp>
         <p:nvSpPr>
-          <p:cNvPr id="157" name="文本框 156">
+          <p:cNvPr id="5" name="文本框 4">
             <a:extLst>
               <a:ext uri="{FF2B5EF4-FFF2-40B4-BE49-F238E27FC236}">
-                <a16:creationId xmlns:a16="http://schemas.microsoft.com/office/drawing/2014/main" id="{C0D6F6BC-1F30-7B2F-2C54-BE620694E6E6}"/>
+                <a16:creationId xmlns:a16="http://schemas.microsoft.com/office/drawing/2014/main" id="{A10C37A3-F8BB-0A73-46AD-ADB8904485DF}"/>
               </a:ext>
             </a:extLst>
           </p:cNvPr>
@@ -12437,37 +11575,450 @@
         </p:nvSpPr>
         <p:spPr>
           <a:xfrm>
-            <a:off x="7476309" y="2500390"/>
-            <a:ext cx="2034319" cy="338554"/>
+            <a:off x="3528945" y="5555956"/>
+            <a:ext cx="926902" cy="400110"/>
           </a:xfrm>
           <a:prstGeom prst="rect">
             <a:avLst/>
           </a:prstGeom>
-          <a:noFill/>
+          <a:solidFill>
+            <a:schemeClr val="bg1"/>
+          </a:solidFill>
         </p:spPr>
         <p:txBody>
-          <a:bodyPr wrap="square" anchor="ctr">
+          <a:bodyPr wrap="square">
             <a:spAutoFit/>
           </a:bodyPr>
           <a:lstStyle/>
           <a:p>
+            <a:pPr algn="ctr" rtl="0">
+              <a:defRPr sz="1800" b="0" i="0" u="none" strike="noStrike" kern="1200" baseline="0">
+                <a:solidFill>
+                  <a:prstClr val="black"/>
+                </a:solidFill>
+                <a:latin typeface="Helvetica" panose="020B0604020202020204" pitchFamily="34" charset="0"/>
+                <a:ea typeface="+mn-ea"/>
+                <a:cs typeface="Helvetica" panose="020B0604020202020204" pitchFamily="34" charset="0"/>
+              </a:defRPr>
+            </a:pPr>
             <a:r>
-              <a:rPr lang="en-GB" altLang="zh-CN" sz="1600" dirty="0">
+              <a:rPr lang="en-US" altLang="zh-CN" sz="2000" b="0" i="1" dirty="0">
+                <a:solidFill>
+                  <a:schemeClr val="tx1"/>
+                </a:solidFill>
                 <a:latin typeface="Helvetica" panose="020B0604020202020204" pitchFamily="34" charset="0"/>
                 <a:cs typeface="Helvetica" panose="020B0604020202020204" pitchFamily="34" charset="0"/>
               </a:rPr>
-              <a:t>wind       </a:t>
+              <a:t>x </a:t>
             </a:r>
             <a:r>
-              <a:rPr lang="en-GB" sz="1600" dirty="0">
+              <a:rPr lang="en-US" altLang="zh-CN" sz="2000" b="0" dirty="0">
+                <a:solidFill>
+                  <a:schemeClr val="tx1"/>
+                </a:solidFill>
                 <a:latin typeface="Helvetica" panose="020B0604020202020204" pitchFamily="34" charset="0"/>
                 <a:cs typeface="Helvetica" panose="020B0604020202020204" pitchFamily="34" charset="0"/>
               </a:rPr>
-              <a:t>direction</a:t>
+              <a:t>(m)</a:t>
             </a:r>
+            <a:endParaRPr lang="zh-CN" altLang="en-US" sz="2000" b="0" dirty="0">
+              <a:solidFill>
+                <a:schemeClr val="tx1"/>
+              </a:solidFill>
+              <a:latin typeface="Helvetica" panose="020B0604020202020204" pitchFamily="34" charset="0"/>
+              <a:cs typeface="Helvetica" panose="020B0604020202020204" pitchFamily="34" charset="0"/>
+            </a:endParaRPr>
           </a:p>
         </p:txBody>
       </p:sp>
+      <p:sp>
+        <p:nvSpPr>
+          <p:cNvPr id="6" name="文本框 5">
+            <a:extLst>
+              <a:ext uri="{FF2B5EF4-FFF2-40B4-BE49-F238E27FC236}">
+                <a16:creationId xmlns:a16="http://schemas.microsoft.com/office/drawing/2014/main" id="{7514CCCC-9226-1B11-499D-4D18C67C000C}"/>
+              </a:ext>
+            </a:extLst>
+          </p:cNvPr>
+          <p:cNvSpPr txBox="1"/>
+          <p:nvPr/>
+        </p:nvSpPr>
+        <p:spPr>
+          <a:xfrm rot="16200000">
+            <a:off x="-210226" y="3396583"/>
+            <a:ext cx="926902" cy="400110"/>
+          </a:xfrm>
+          <a:prstGeom prst="rect">
+            <a:avLst/>
+          </a:prstGeom>
+          <a:solidFill>
+            <a:schemeClr val="bg1"/>
+          </a:solidFill>
+        </p:spPr>
+        <p:txBody>
+          <a:bodyPr wrap="square">
+            <a:spAutoFit/>
+          </a:bodyPr>
+          <a:lstStyle/>
+          <a:p>
+            <a:pPr algn="ctr" rtl="0">
+              <a:defRPr sz="1800" b="0" i="0" u="none" strike="noStrike" kern="1200" baseline="0">
+                <a:solidFill>
+                  <a:prstClr val="black"/>
+                </a:solidFill>
+                <a:latin typeface="Helvetica" panose="020B0604020202020204" pitchFamily="34" charset="0"/>
+                <a:ea typeface="+mn-ea"/>
+                <a:cs typeface="Helvetica" panose="020B0604020202020204" pitchFamily="34" charset="0"/>
+              </a:defRPr>
+            </a:pPr>
+            <a:r>
+              <a:rPr lang="en-US" altLang="zh-CN" sz="2000" b="0" i="1" dirty="0">
+                <a:solidFill>
+                  <a:schemeClr val="tx1"/>
+                </a:solidFill>
+                <a:latin typeface="Helvetica" panose="020B0604020202020204" pitchFamily="34" charset="0"/>
+                <a:cs typeface="Helvetica" panose="020B0604020202020204" pitchFamily="34" charset="0"/>
+              </a:rPr>
+              <a:t>y </a:t>
+            </a:r>
+            <a:r>
+              <a:rPr lang="en-US" altLang="zh-CN" sz="2000" b="0" dirty="0">
+                <a:solidFill>
+                  <a:schemeClr val="tx1"/>
+                </a:solidFill>
+                <a:latin typeface="Helvetica" panose="020B0604020202020204" pitchFamily="34" charset="0"/>
+                <a:cs typeface="Helvetica" panose="020B0604020202020204" pitchFamily="34" charset="0"/>
+              </a:rPr>
+              <a:t>(m)</a:t>
+            </a:r>
+            <a:endParaRPr lang="zh-CN" altLang="en-US" sz="2000" b="0" dirty="0">
+              <a:solidFill>
+                <a:schemeClr val="tx1"/>
+              </a:solidFill>
+              <a:latin typeface="Helvetica" panose="020B0604020202020204" pitchFamily="34" charset="0"/>
+              <a:cs typeface="Helvetica" panose="020B0604020202020204" pitchFamily="34" charset="0"/>
+            </a:endParaRPr>
+          </a:p>
+        </p:txBody>
+      </p:sp>
+      <p:grpSp>
+        <p:nvGrpSpPr>
+          <p:cNvPr id="7" name="组合 6">
+            <a:extLst>
+              <a:ext uri="{FF2B5EF4-FFF2-40B4-BE49-F238E27FC236}">
+                <a16:creationId xmlns:a16="http://schemas.microsoft.com/office/drawing/2014/main" id="{5E1CF8AE-04E4-25D5-94B9-BA18B3DE535B}"/>
+              </a:ext>
+            </a:extLst>
+          </p:cNvPr>
+          <p:cNvGrpSpPr/>
+          <p:nvPr/>
+        </p:nvGrpSpPr>
+        <p:grpSpPr>
+          <a:xfrm>
+            <a:off x="-49389" y="4985590"/>
+            <a:ext cx="1252365" cy="1466011"/>
+            <a:chOff x="477462" y="5023578"/>
+            <a:chExt cx="1252365" cy="1466011"/>
+          </a:xfrm>
+        </p:grpSpPr>
+        <p:sp>
+          <p:nvSpPr>
+            <p:cNvPr id="8" name="流程图: 汇总连接 7">
+              <a:extLst>
+                <a:ext uri="{FF2B5EF4-FFF2-40B4-BE49-F238E27FC236}">
+                  <a16:creationId xmlns:a16="http://schemas.microsoft.com/office/drawing/2014/main" id="{8CDC6514-4009-BEAD-0D71-715A14505557}"/>
+                </a:ext>
+              </a:extLst>
+            </p:cNvPr>
+            <p:cNvSpPr/>
+            <p:nvPr/>
+          </p:nvSpPr>
+          <p:spPr>
+            <a:xfrm>
+              <a:off x="764580" y="6049510"/>
+              <a:ext cx="124085" cy="124085"/>
+            </a:xfrm>
+            <a:prstGeom prst="flowChartSummingJunction">
+              <a:avLst/>
+            </a:prstGeom>
+            <a:noFill/>
+            <a:ln w="15875">
+              <a:solidFill>
+                <a:srgbClr val="77797D"/>
+              </a:solidFill>
+            </a:ln>
+          </p:spPr>
+          <p:style>
+            <a:lnRef idx="2">
+              <a:schemeClr val="accent1">
+                <a:shade val="15000"/>
+              </a:schemeClr>
+            </a:lnRef>
+            <a:fillRef idx="1">
+              <a:schemeClr val="accent1"/>
+            </a:fillRef>
+            <a:effectRef idx="0">
+              <a:schemeClr val="accent1"/>
+            </a:effectRef>
+            <a:fontRef idx="minor">
+              <a:schemeClr val="lt1"/>
+            </a:fontRef>
+          </p:style>
+          <p:txBody>
+            <a:bodyPr rtlCol="0" anchor="ctr"/>
+            <a:lstStyle/>
+            <a:p>
+              <a:pPr algn="ctr"/>
+              <a:endParaRPr lang="zh-CN" altLang="en-US" i="1" dirty="0">
+                <a:solidFill>
+                  <a:srgbClr val="77797D"/>
+                </a:solidFill>
+              </a:endParaRPr>
+            </a:p>
+          </p:txBody>
+        </p:sp>
+        <p:cxnSp>
+          <p:nvCxnSpPr>
+            <p:cNvPr id="9" name="直接箭头连接符 8">
+              <a:extLst>
+                <a:ext uri="{FF2B5EF4-FFF2-40B4-BE49-F238E27FC236}">
+                  <a16:creationId xmlns:a16="http://schemas.microsoft.com/office/drawing/2014/main" id="{B7ED1122-EC8C-90D2-7671-4E0D5E1412DA}"/>
+                </a:ext>
+              </a:extLst>
+            </p:cNvPr>
+            <p:cNvCxnSpPr>
+              <a:cxnSpLocks/>
+            </p:cNvCxnSpPr>
+            <p:nvPr/>
+          </p:nvCxnSpPr>
+          <p:spPr>
+            <a:xfrm flipH="1" flipV="1">
+              <a:off x="826622" y="5516033"/>
+              <a:ext cx="494" cy="528256"/>
+            </a:xfrm>
+            <a:prstGeom prst="straightConnector1">
+              <a:avLst/>
+            </a:prstGeom>
+            <a:ln w="12700">
+              <a:solidFill>
+                <a:srgbClr val="77797D"/>
+              </a:solidFill>
+              <a:tailEnd type="triangle"/>
+            </a:ln>
+          </p:spPr>
+          <p:style>
+            <a:lnRef idx="2">
+              <a:schemeClr val="accent1"/>
+            </a:lnRef>
+            <a:fillRef idx="0">
+              <a:schemeClr val="accent1"/>
+            </a:fillRef>
+            <a:effectRef idx="1">
+              <a:schemeClr val="accent1"/>
+            </a:effectRef>
+            <a:fontRef idx="minor">
+              <a:schemeClr val="tx1"/>
+            </a:fontRef>
+          </p:style>
+        </p:cxnSp>
+        <p:sp>
+          <p:nvSpPr>
+            <p:cNvPr id="10" name="文本框 9">
+              <a:extLst>
+                <a:ext uri="{FF2B5EF4-FFF2-40B4-BE49-F238E27FC236}">
+                  <a16:creationId xmlns:a16="http://schemas.microsoft.com/office/drawing/2014/main" id="{BD17057F-468B-E944-E9B2-EEA15316E163}"/>
+                </a:ext>
+              </a:extLst>
+            </p:cNvPr>
+            <p:cNvSpPr txBox="1"/>
+            <p:nvPr/>
+          </p:nvSpPr>
+          <p:spPr>
+            <a:xfrm>
+              <a:off x="1416921" y="5897900"/>
+              <a:ext cx="312906" cy="400110"/>
+            </a:xfrm>
+            <a:prstGeom prst="rect">
+              <a:avLst/>
+            </a:prstGeom>
+            <a:noFill/>
+            <a:ln>
+              <a:noFill/>
+            </a:ln>
+          </p:spPr>
+          <p:txBody>
+            <a:bodyPr wrap="none" rtlCol="0">
+              <a:spAutoFit/>
+            </a:bodyPr>
+            <a:lstStyle/>
+            <a:p>
+              <a:r>
+                <a:rPr lang="en-US" altLang="zh-CN" sz="2000" i="1" dirty="0">
+                  <a:solidFill>
+                    <a:srgbClr val="77797D"/>
+                  </a:solidFill>
+                  <a:latin typeface="Helvetica" panose="020B0604020202020204" pitchFamily="34" charset="0"/>
+                  <a:cs typeface="Helvetica" panose="020B0604020202020204" pitchFamily="34" charset="0"/>
+                </a:rPr>
+                <a:t>x</a:t>
+              </a:r>
+              <a:endParaRPr lang="zh-CN" altLang="en-US" sz="2000" i="1" baseline="-25000" dirty="0">
+                <a:solidFill>
+                  <a:srgbClr val="77797D"/>
+                </a:solidFill>
+                <a:latin typeface="Helvetica" panose="020B0604020202020204" pitchFamily="34" charset="0"/>
+                <a:cs typeface="Helvetica" panose="020B0604020202020204" pitchFamily="34" charset="0"/>
+              </a:endParaRPr>
+            </a:p>
+          </p:txBody>
+        </p:sp>
+        <p:sp>
+          <p:nvSpPr>
+            <p:cNvPr id="11" name="文本框 10">
+              <a:extLst>
+                <a:ext uri="{FF2B5EF4-FFF2-40B4-BE49-F238E27FC236}">
+                  <a16:creationId xmlns:a16="http://schemas.microsoft.com/office/drawing/2014/main" id="{6B5BED7B-9DA6-F8AC-3D71-EE0FAA3E0515}"/>
+                </a:ext>
+              </a:extLst>
+            </p:cNvPr>
+            <p:cNvSpPr txBox="1"/>
+            <p:nvPr/>
+          </p:nvSpPr>
+          <p:spPr>
+            <a:xfrm>
+              <a:off x="477462" y="6089479"/>
+              <a:ext cx="312906" cy="400110"/>
+            </a:xfrm>
+            <a:prstGeom prst="rect">
+              <a:avLst/>
+            </a:prstGeom>
+            <a:noFill/>
+            <a:ln>
+              <a:noFill/>
+            </a:ln>
+          </p:spPr>
+          <p:txBody>
+            <a:bodyPr wrap="none" rtlCol="0">
+              <a:spAutoFit/>
+            </a:bodyPr>
+            <a:lstStyle/>
+            <a:p>
+              <a:r>
+                <a:rPr lang="en-US" altLang="zh-CN" sz="2000" i="1" dirty="0">
+                  <a:solidFill>
+                    <a:srgbClr val="77797D"/>
+                  </a:solidFill>
+                  <a:latin typeface="Helvetica" panose="020B0604020202020204" pitchFamily="34" charset="0"/>
+                  <a:cs typeface="Helvetica" panose="020B0604020202020204" pitchFamily="34" charset="0"/>
+                </a:rPr>
+                <a:t>z</a:t>
+              </a:r>
+              <a:endParaRPr lang="zh-CN" altLang="en-US" sz="2000" i="1" baseline="-25000" dirty="0">
+                <a:solidFill>
+                  <a:srgbClr val="77797D"/>
+                </a:solidFill>
+                <a:latin typeface="Helvetica" panose="020B0604020202020204" pitchFamily="34" charset="0"/>
+                <a:cs typeface="Helvetica" panose="020B0604020202020204" pitchFamily="34" charset="0"/>
+              </a:endParaRPr>
+            </a:p>
+          </p:txBody>
+        </p:sp>
+        <p:sp>
+          <p:nvSpPr>
+            <p:cNvPr id="12" name="文本框 11">
+              <a:extLst>
+                <a:ext uri="{FF2B5EF4-FFF2-40B4-BE49-F238E27FC236}">
+                  <a16:creationId xmlns:a16="http://schemas.microsoft.com/office/drawing/2014/main" id="{8F5A32A8-6296-347C-16F2-B619D961D4ED}"/>
+                </a:ext>
+              </a:extLst>
+            </p:cNvPr>
+            <p:cNvSpPr txBox="1"/>
+            <p:nvPr/>
+          </p:nvSpPr>
+          <p:spPr>
+            <a:xfrm>
+              <a:off x="666794" y="5023578"/>
+              <a:ext cx="312906" cy="400110"/>
+            </a:xfrm>
+            <a:prstGeom prst="rect">
+              <a:avLst/>
+            </a:prstGeom>
+            <a:noFill/>
+            <a:ln>
+              <a:noFill/>
+            </a:ln>
+          </p:spPr>
+          <p:txBody>
+            <a:bodyPr wrap="none" rtlCol="0">
+              <a:spAutoFit/>
+            </a:bodyPr>
+            <a:lstStyle/>
+            <a:p>
+              <a:r>
+                <a:rPr lang="en-US" altLang="zh-CN" sz="2000" i="1" dirty="0">
+                  <a:solidFill>
+                    <a:srgbClr val="77797D"/>
+                  </a:solidFill>
+                  <a:latin typeface="Helvetica" panose="020B0604020202020204" pitchFamily="34" charset="0"/>
+                  <a:cs typeface="Helvetica" panose="020B0604020202020204" pitchFamily="34" charset="0"/>
+                </a:rPr>
+                <a:t>y</a:t>
+              </a:r>
+              <a:endParaRPr lang="zh-CN" altLang="en-US" sz="2000" i="1" baseline="-25000" dirty="0">
+                <a:solidFill>
+                  <a:srgbClr val="77797D"/>
+                </a:solidFill>
+                <a:latin typeface="Helvetica" panose="020B0604020202020204" pitchFamily="34" charset="0"/>
+                <a:cs typeface="Helvetica" panose="020B0604020202020204" pitchFamily="34" charset="0"/>
+              </a:endParaRPr>
+            </a:p>
+          </p:txBody>
+        </p:sp>
+        <p:cxnSp>
+          <p:nvCxnSpPr>
+            <p:cNvPr id="13" name="直接箭头连接符 12">
+              <a:extLst>
+                <a:ext uri="{FF2B5EF4-FFF2-40B4-BE49-F238E27FC236}">
+                  <a16:creationId xmlns:a16="http://schemas.microsoft.com/office/drawing/2014/main" id="{AE073A06-4C73-8F4D-605A-A37E53B31C36}"/>
+                </a:ext>
+              </a:extLst>
+            </p:cNvPr>
+            <p:cNvCxnSpPr>
+              <a:cxnSpLocks/>
+            </p:cNvCxnSpPr>
+            <p:nvPr/>
+          </p:nvCxnSpPr>
+          <p:spPr>
+            <a:xfrm rot="5400000" flipH="1" flipV="1">
+              <a:off x="1152546" y="5846739"/>
+              <a:ext cx="494" cy="528256"/>
+            </a:xfrm>
+            <a:prstGeom prst="straightConnector1">
+              <a:avLst/>
+            </a:prstGeom>
+            <a:ln w="12700">
+              <a:solidFill>
+                <a:srgbClr val="77797D"/>
+              </a:solidFill>
+              <a:tailEnd type="triangle"/>
+            </a:ln>
+          </p:spPr>
+          <p:style>
+            <a:lnRef idx="2">
+              <a:schemeClr val="accent1"/>
+            </a:lnRef>
+            <a:fillRef idx="0">
+              <a:schemeClr val="accent1"/>
+            </a:fillRef>
+            <a:effectRef idx="1">
+              <a:schemeClr val="accent1"/>
+            </a:effectRef>
+            <a:fontRef idx="minor">
+              <a:schemeClr val="tx1"/>
+            </a:fontRef>
+          </p:style>
+        </p:cxnSp>
+      </p:grpSp>
     </p:spTree>
     <p:extLst>
       <p:ext uri="{BB962C8B-B14F-4D97-AF65-F5344CB8AC3E}">

--- a/01_Thermal/D_sketch/Flight Arena Sketch.pptx
+++ b/01_Thermal/D_sketch/Flight Arena Sketch.pptx
@@ -120,7 +120,7 @@
 <file path=ppt/revisionInfo.xml><?xml version="1.0" encoding="utf-8"?>
 <p1510:revInfo xmlns:a="http://schemas.openxmlformats.org/drawingml/2006/main" xmlns:r="http://schemas.openxmlformats.org/officeDocument/2006/relationships" xmlns:p1510="http://schemas.microsoft.com/office/powerpoint/2015/10/main">
   <p1510:revLst>
-    <p1510:client id="{081880D3-A72C-42BF-A908-E2C77D9998D0}" v="29" dt="2026-03-24T20:12:33.663"/>
+    <p1510:client id="{081880D3-A72C-42BF-A908-E2C77D9998D0}" v="1" dt="2026-03-26T13:07:31.162"/>
   </p1510:revLst>
 </p1510:revInfo>
 </file>
@@ -130,7 +130,7 @@
   <pc:docChgLst>
     <pc:chgData name="Li, Hanchen F" userId="3aee791e-6a2d-4da7-a77b-fbdf7bf15886" providerId="ADAL" clId="{1EA8FAE0-933A-49DD-A724-68A18B8AE880}"/>
     <pc:docChg chg="undo redo custSel addSld delSld modSld modNotesMaster">
-      <pc:chgData name="Li, Hanchen F" userId="3aee791e-6a2d-4da7-a77b-fbdf7bf15886" providerId="ADAL" clId="{1EA8FAE0-933A-49DD-A724-68A18B8AE880}" dt="2026-03-24T20:15:22.784" v="3484" actId="1076"/>
+      <pc:chgData name="Li, Hanchen F" userId="3aee791e-6a2d-4da7-a77b-fbdf7bf15886" providerId="ADAL" clId="{1EA8FAE0-933A-49DD-A724-68A18B8AE880}" dt="2026-03-26T13:10:16.619" v="3612" actId="1036"/>
       <pc:docMkLst>
         <pc:docMk/>
       </pc:docMkLst>
@@ -146,14 +146,6 @@
             <pc:docMk/>
             <pc:sldMk cId="3629937204" sldId="259"/>
             <ac:spMk id="19" creationId="{05DD7E1A-3AFE-89F1-8750-632571690AB1}"/>
-          </ac:spMkLst>
-        </pc:spChg>
-        <pc:spChg chg="add del mod ord">
-          <ac:chgData name="Li, Hanchen F" userId="3aee791e-6a2d-4da7-a77b-fbdf7bf15886" providerId="ADAL" clId="{1EA8FAE0-933A-49DD-A724-68A18B8AE880}" dt="2026-03-24T20:10:20.202" v="3377" actId="478"/>
-          <ac:spMkLst>
-            <pc:docMk/>
-            <pc:sldMk cId="3629937204" sldId="259"/>
-            <ac:spMk id="21" creationId="{11E7C393-8688-8B96-A604-85CFD019ABC8}"/>
           </ac:spMkLst>
         </pc:spChg>
         <pc:spChg chg="add mod">
@@ -188,38 +180,6 @@
             <ac:spMk id="46" creationId="{4BA0DA3A-6D2B-FB26-C226-1351C5C8D192}"/>
           </ac:spMkLst>
         </pc:spChg>
-        <pc:spChg chg="add del mod">
-          <ac:chgData name="Li, Hanchen F" userId="3aee791e-6a2d-4da7-a77b-fbdf7bf15886" providerId="ADAL" clId="{1EA8FAE0-933A-49DD-A724-68A18B8AE880}" dt="2026-03-24T20:10:23.896" v="3378" actId="478"/>
-          <ac:spMkLst>
-            <pc:docMk/>
-            <pc:sldMk cId="3629937204" sldId="259"/>
-            <ac:spMk id="47" creationId="{F134A86F-C04C-6307-9C75-E04235FF642A}"/>
-          </ac:spMkLst>
-        </pc:spChg>
-        <pc:spChg chg="add del mod">
-          <ac:chgData name="Li, Hanchen F" userId="3aee791e-6a2d-4da7-a77b-fbdf7bf15886" providerId="ADAL" clId="{1EA8FAE0-933A-49DD-A724-68A18B8AE880}" dt="2026-03-24T20:10:23.896" v="3378" actId="478"/>
-          <ac:spMkLst>
-            <pc:docMk/>
-            <pc:sldMk cId="3629937204" sldId="259"/>
-            <ac:spMk id="49" creationId="{24BAAFDD-F195-1346-6C3E-C1C0A3A4CE0B}"/>
-          </ac:spMkLst>
-        </pc:spChg>
-        <pc:spChg chg="add del mod">
-          <ac:chgData name="Li, Hanchen F" userId="3aee791e-6a2d-4da7-a77b-fbdf7bf15886" providerId="ADAL" clId="{1EA8FAE0-933A-49DD-A724-68A18B8AE880}" dt="2026-03-24T20:10:23.896" v="3378" actId="478"/>
-          <ac:spMkLst>
-            <pc:docMk/>
-            <pc:sldMk cId="3629937204" sldId="259"/>
-            <ac:spMk id="55" creationId="{8B653361-2294-2471-71F4-C2E8013CD7A9}"/>
-          </ac:spMkLst>
-        </pc:spChg>
-        <pc:spChg chg="add del mod">
-          <ac:chgData name="Li, Hanchen F" userId="3aee791e-6a2d-4da7-a77b-fbdf7bf15886" providerId="ADAL" clId="{1EA8FAE0-933A-49DD-A724-68A18B8AE880}" dt="2026-03-24T20:10:23.896" v="3378" actId="478"/>
-          <ac:spMkLst>
-            <pc:docMk/>
-            <pc:sldMk cId="3629937204" sldId="259"/>
-            <ac:spMk id="57" creationId="{A1FCA709-E0C9-FADA-AB77-33EEF2F12D69}"/>
-          </ac:spMkLst>
-        </pc:spChg>
         <pc:spChg chg="add mod">
           <ac:chgData name="Li, Hanchen F" userId="3aee791e-6a2d-4da7-a77b-fbdf7bf15886" providerId="ADAL" clId="{1EA8FAE0-933A-49DD-A724-68A18B8AE880}" dt="2026-03-24T20:10:48.309" v="3382" actId="1076"/>
           <ac:spMkLst>
@@ -236,22 +196,6 @@
             <ac:spMk id="61" creationId="{B3CAF2B1-3BD0-4456-8CF1-34A10E9D3671}"/>
           </ac:spMkLst>
         </pc:spChg>
-        <pc:grpChg chg="del">
-          <ac:chgData name="Li, Hanchen F" userId="3aee791e-6a2d-4da7-a77b-fbdf7bf15886" providerId="ADAL" clId="{1EA8FAE0-933A-49DD-A724-68A18B8AE880}" dt="2026-03-24T20:10:26.939" v="3379" actId="478"/>
-          <ac:grpSpMkLst>
-            <pc:docMk/>
-            <pc:sldMk cId="3629937204" sldId="259"/>
-            <ac:grpSpMk id="5" creationId="{C5D41095-A693-E3AE-A84C-B804E5A12ABE}"/>
-          </ac:grpSpMkLst>
-        </pc:grpChg>
-        <pc:graphicFrameChg chg="add del mod">
-          <ac:chgData name="Li, Hanchen F" userId="3aee791e-6a2d-4da7-a77b-fbdf7bf15886" providerId="ADAL" clId="{1EA8FAE0-933A-49DD-A724-68A18B8AE880}" dt="2026-03-24T15:19:14.526" v="3258" actId="478"/>
-          <ac:graphicFrameMkLst>
-            <pc:docMk/>
-            <pc:sldMk cId="3629937204" sldId="259"/>
-            <ac:graphicFrameMk id="10" creationId="{4878FBC0-5F92-6DC5-AF3B-27B6EAA508C2}"/>
-          </ac:graphicFrameMkLst>
-        </pc:graphicFrameChg>
         <pc:graphicFrameChg chg="mod">
           <ac:chgData name="Li, Hanchen F" userId="3aee791e-6a2d-4da7-a77b-fbdf7bf15886" providerId="ADAL" clId="{1EA8FAE0-933A-49DD-A724-68A18B8AE880}" dt="2026-03-24T20:10:17.142" v="3376"/>
           <ac:graphicFrameMkLst>
@@ -262,7 +206,7 @@
         </pc:graphicFrameChg>
       </pc:sldChg>
       <pc:sldChg chg="addSp delSp modSp add mod">
-        <pc:chgData name="Li, Hanchen F" userId="3aee791e-6a2d-4da7-a77b-fbdf7bf15886" providerId="ADAL" clId="{1EA8FAE0-933A-49DD-A724-68A18B8AE880}" dt="2026-03-24T20:15:22.784" v="3484" actId="1076"/>
+        <pc:chgData name="Li, Hanchen F" userId="3aee791e-6a2d-4da7-a77b-fbdf7bf15886" providerId="ADAL" clId="{1EA8FAE0-933A-49DD-A724-68A18B8AE880}" dt="2026-03-26T13:10:16.619" v="3612" actId="1036"/>
         <pc:sldMkLst>
           <pc:docMk/>
           <pc:sldMk cId="3601829480" sldId="260"/>
@@ -315,52 +259,12 @@
             <ac:spMk id="12" creationId="{8F5A32A8-6296-347C-16F2-B619D961D4ED}"/>
           </ac:spMkLst>
         </pc:spChg>
-        <pc:spChg chg="add del mod">
-          <ac:chgData name="Li, Hanchen F" userId="3aee791e-6a2d-4da7-a77b-fbdf7bf15886" providerId="ADAL" clId="{1EA8FAE0-933A-49DD-A724-68A18B8AE880}" dt="2026-03-24T20:14:24.742" v="3454" actId="478"/>
+        <pc:spChg chg="add mod">
+          <ac:chgData name="Li, Hanchen F" userId="3aee791e-6a2d-4da7-a77b-fbdf7bf15886" providerId="ADAL" clId="{1EA8FAE0-933A-49DD-A724-68A18B8AE880}" dt="2026-03-26T13:06:11.423" v="3545" actId="692"/>
           <ac:spMkLst>
             <pc:docMk/>
             <pc:sldMk cId="3601829480" sldId="260"/>
-            <ac:spMk id="14" creationId="{002203EE-21A4-4750-4B21-9F5E0C154688}"/>
-          </ac:spMkLst>
-        </pc:spChg>
-        <pc:spChg chg="add del mod">
-          <ac:chgData name="Li, Hanchen F" userId="3aee791e-6a2d-4da7-a77b-fbdf7bf15886" providerId="ADAL" clId="{1EA8FAE0-933A-49DD-A724-68A18B8AE880}" dt="2026-03-24T20:14:26.050" v="3455" actId="478"/>
-          <ac:spMkLst>
-            <pc:docMk/>
-            <pc:sldMk cId="3601829480" sldId="260"/>
-            <ac:spMk id="15" creationId="{EDDEDE52-B619-1EB1-43E2-5C7C4B2A6861}"/>
-          </ac:spMkLst>
-        </pc:spChg>
-        <pc:spChg chg="mod">
-          <ac:chgData name="Li, Hanchen F" userId="3aee791e-6a2d-4da7-a77b-fbdf7bf15886" providerId="ADAL" clId="{1EA8FAE0-933A-49DD-A724-68A18B8AE880}" dt="2026-03-24T15:20:42.489" v="3292" actId="571"/>
-          <ac:spMkLst>
-            <pc:docMk/>
-            <pc:sldMk cId="3601829480" sldId="260"/>
-            <ac:spMk id="16" creationId="{FEFF3FBE-27E9-DADF-6AAA-3696E642B464}"/>
-          </ac:spMkLst>
-        </pc:spChg>
-        <pc:spChg chg="mod">
-          <ac:chgData name="Li, Hanchen F" userId="3aee791e-6a2d-4da7-a77b-fbdf7bf15886" providerId="ADAL" clId="{1EA8FAE0-933A-49DD-A724-68A18B8AE880}" dt="2026-03-24T15:20:42.489" v="3292" actId="571"/>
-          <ac:spMkLst>
-            <pc:docMk/>
-            <pc:sldMk cId="3601829480" sldId="260"/>
-            <ac:spMk id="17" creationId="{19CD5AB0-71D5-913F-A052-E8F876853460}"/>
-          </ac:spMkLst>
-        </pc:spChg>
-        <pc:spChg chg="add mod">
-          <ac:chgData name="Li, Hanchen F" userId="3aee791e-6a2d-4da7-a77b-fbdf7bf15886" providerId="ADAL" clId="{1EA8FAE0-933A-49DD-A724-68A18B8AE880}" dt="2026-03-24T15:22:11.430" v="3326" actId="1076"/>
-          <ac:spMkLst>
-            <pc:docMk/>
-            <pc:sldMk cId="3601829480" sldId="260"/>
-            <ac:spMk id="18" creationId="{D4D1BDDC-E0C3-4C5C-AA08-A6CCCA207049}"/>
-          </ac:spMkLst>
-        </pc:spChg>
-        <pc:spChg chg="add mod">
-          <ac:chgData name="Li, Hanchen F" userId="3aee791e-6a2d-4da7-a77b-fbdf7bf15886" providerId="ADAL" clId="{1EA8FAE0-933A-49DD-A724-68A18B8AE880}" dt="2026-03-24T15:22:11.430" v="3326" actId="1076"/>
-          <ac:spMkLst>
-            <pc:docMk/>
-            <pc:sldMk cId="3601829480" sldId="260"/>
-            <ac:spMk id="19" creationId="{FA66A814-5E14-E047-9FE6-A154DAB19CE4}"/>
+            <ac:spMk id="25" creationId="{6AD56B28-F329-8FEF-B6F9-F41A1480574C}"/>
           </ac:spMkLst>
         </pc:spChg>
         <pc:spChg chg="add mod">
@@ -372,7 +276,7 @@
           </ac:spMkLst>
         </pc:spChg>
         <pc:spChg chg="add mod">
-          <ac:chgData name="Li, Hanchen F" userId="3aee791e-6a2d-4da7-a77b-fbdf7bf15886" providerId="ADAL" clId="{1EA8FAE0-933A-49DD-A724-68A18B8AE880}" dt="2026-03-24T20:12:54.258" v="3404" actId="692"/>
+          <ac:chgData name="Li, Hanchen F" userId="3aee791e-6a2d-4da7-a77b-fbdf7bf15886" providerId="ADAL" clId="{1EA8FAE0-933A-49DD-A724-68A18B8AE880}" dt="2026-03-26T13:09:23.633" v="3603" actId="1076"/>
           <ac:spMkLst>
             <pc:docMk/>
             <pc:sldMk cId="3601829480" sldId="260"/>
@@ -380,7 +284,7 @@
           </ac:spMkLst>
         </pc:spChg>
         <pc:spChg chg="add mod">
-          <ac:chgData name="Li, Hanchen F" userId="3aee791e-6a2d-4da7-a77b-fbdf7bf15886" providerId="ADAL" clId="{1EA8FAE0-933A-49DD-A724-68A18B8AE880}" dt="2026-03-24T15:15:16.622" v="3238" actId="692"/>
+          <ac:chgData name="Li, Hanchen F" userId="3aee791e-6a2d-4da7-a77b-fbdf7bf15886" providerId="ADAL" clId="{1EA8FAE0-933A-49DD-A724-68A18B8AE880}" dt="2026-03-26T13:07:56.329" v="3582" actId="1076"/>
           <ac:spMkLst>
             <pc:docMk/>
             <pc:sldMk cId="3601829480" sldId="260"/>
@@ -388,7 +292,7 @@
           </ac:spMkLst>
         </pc:spChg>
         <pc:spChg chg="add mod">
-          <ac:chgData name="Li, Hanchen F" userId="3aee791e-6a2d-4da7-a77b-fbdf7bf15886" providerId="ADAL" clId="{1EA8FAE0-933A-49DD-A724-68A18B8AE880}" dt="2026-03-24T20:14:03.065" v="3450" actId="692"/>
+          <ac:chgData name="Li, Hanchen F" userId="3aee791e-6a2d-4da7-a77b-fbdf7bf15886" providerId="ADAL" clId="{1EA8FAE0-933A-49DD-A724-68A18B8AE880}" dt="2026-03-26T13:10:04.243" v="3609" actId="1076"/>
           <ac:spMkLst>
             <pc:docMk/>
             <pc:sldMk cId="3601829480" sldId="260"/>
@@ -396,19 +300,11 @@
           </ac:spMkLst>
         </pc:spChg>
         <pc:spChg chg="add mod">
-          <ac:chgData name="Li, Hanchen F" userId="3aee791e-6a2d-4da7-a77b-fbdf7bf15886" providerId="ADAL" clId="{1EA8FAE0-933A-49DD-A724-68A18B8AE880}" dt="2026-03-24T20:14:12.581" v="3452" actId="207"/>
+          <ac:chgData name="Li, Hanchen F" userId="3aee791e-6a2d-4da7-a77b-fbdf7bf15886" providerId="ADAL" clId="{1EA8FAE0-933A-49DD-A724-68A18B8AE880}" dt="2026-03-26T13:04:05.896" v="3504" actId="1076"/>
           <ac:spMkLst>
             <pc:docMk/>
             <pc:sldMk cId="3601829480" sldId="260"/>
             <ac:spMk id="136" creationId="{9500AF6D-4FC1-F159-5F63-E87E7AFA2541}"/>
-          </ac:spMkLst>
-        </pc:spChg>
-        <pc:spChg chg="add del mod">
-          <ac:chgData name="Li, Hanchen F" userId="3aee791e-6a2d-4da7-a77b-fbdf7bf15886" providerId="ADAL" clId="{1EA8FAE0-933A-49DD-A724-68A18B8AE880}" dt="2026-03-24T20:15:10.731" v="3481" actId="478"/>
-          <ac:spMkLst>
-            <pc:docMk/>
-            <pc:sldMk cId="3601829480" sldId="260"/>
-            <ac:spMk id="157" creationId="{C0D6F6BC-1F30-7B2F-2C54-BE620694E6E6}"/>
           </ac:spMkLst>
         </pc:spChg>
         <pc:grpChg chg="add mod">
@@ -420,22 +316,6 @@
           </ac:grpSpMkLst>
         </pc:grpChg>
         <pc:grpChg chg="add mod">
-          <ac:chgData name="Li, Hanchen F" userId="3aee791e-6a2d-4da7-a77b-fbdf7bf15886" providerId="ADAL" clId="{1EA8FAE0-933A-49DD-A724-68A18B8AE880}" dt="2026-03-24T15:20:42.489" v="3292" actId="571"/>
-          <ac:grpSpMkLst>
-            <pc:docMk/>
-            <pc:sldMk cId="3601829480" sldId="260"/>
-            <ac:grpSpMk id="14" creationId="{B80D0955-8948-D5DF-66F7-BE4201F66548}"/>
-          </ac:grpSpMkLst>
-        </pc:grpChg>
-        <pc:grpChg chg="add del mod">
-          <ac:chgData name="Li, Hanchen F" userId="3aee791e-6a2d-4da7-a77b-fbdf7bf15886" providerId="ADAL" clId="{1EA8FAE0-933A-49DD-A724-68A18B8AE880}" dt="2026-03-24T20:11:13.906" v="3387" actId="478"/>
-          <ac:grpSpMkLst>
-            <pc:docMk/>
-            <pc:sldMk cId="3601829480" sldId="260"/>
-            <ac:grpSpMk id="45" creationId="{FF58B426-DE29-A57F-8B57-2B3E3E28F296}"/>
-          </ac:grpSpMkLst>
-        </pc:grpChg>
-        <pc:grpChg chg="add mod">
           <ac:chgData name="Li, Hanchen F" userId="3aee791e-6a2d-4da7-a77b-fbdf7bf15886" providerId="ADAL" clId="{1EA8FAE0-933A-49DD-A724-68A18B8AE880}" dt="2026-03-16T16:43:38.141" v="2911" actId="14861"/>
           <ac:grpSpMkLst>
             <pc:docMk/>
@@ -443,8 +323,8 @@
             <ac:grpSpMk id="93" creationId="{244AA9C1-5E07-A14B-0D4C-E801B1456F50}"/>
           </ac:grpSpMkLst>
         </pc:grpChg>
-        <pc:grpChg chg="add mod">
-          <ac:chgData name="Li, Hanchen F" userId="3aee791e-6a2d-4da7-a77b-fbdf7bf15886" providerId="ADAL" clId="{1EA8FAE0-933A-49DD-A724-68A18B8AE880}" dt="2026-03-16T16:46:40.996" v="2953" actId="1076"/>
+        <pc:grpChg chg="add del mod">
+          <ac:chgData name="Li, Hanchen F" userId="3aee791e-6a2d-4da7-a77b-fbdf7bf15886" providerId="ADAL" clId="{1EA8FAE0-933A-49DD-A724-68A18B8AE880}" dt="2026-03-26T13:03:36.012" v="3494" actId="478"/>
           <ac:grpSpMkLst>
             <pc:docMk/>
             <pc:sldMk cId="3601829480" sldId="260"/>
@@ -460,87 +340,47 @@
           </ac:grpSpMkLst>
         </pc:grpChg>
         <pc:grpChg chg="add mod">
-          <ac:chgData name="Li, Hanchen F" userId="3aee791e-6a2d-4da7-a77b-fbdf7bf15886" providerId="ADAL" clId="{1EA8FAE0-933A-49DD-A724-68A18B8AE880}" dt="2026-03-16T16:49:38.482" v="2990"/>
+          <ac:chgData name="Li, Hanchen F" userId="3aee791e-6a2d-4da7-a77b-fbdf7bf15886" providerId="ADAL" clId="{1EA8FAE0-933A-49DD-A724-68A18B8AE880}" dt="2026-03-26T13:08:15.717" v="3586" actId="14100"/>
           <ac:grpSpMkLst>
             <pc:docMk/>
             <pc:sldMk cId="3601829480" sldId="260"/>
             <ac:grpSpMk id="117" creationId="{323D098F-BFD7-CB49-30F1-211C01F31ACC}"/>
           </ac:grpSpMkLst>
         </pc:grpChg>
-        <pc:grpChg chg="add mod">
-          <ac:chgData name="Li, Hanchen F" userId="3aee791e-6a2d-4da7-a77b-fbdf7bf15886" providerId="ADAL" clId="{1EA8FAE0-933A-49DD-A724-68A18B8AE880}" dt="2026-03-16T16:56:45.320" v="3089" actId="14100"/>
+        <pc:grpChg chg="add del mod">
+          <ac:chgData name="Li, Hanchen F" userId="3aee791e-6a2d-4da7-a77b-fbdf7bf15886" providerId="ADAL" clId="{1EA8FAE0-933A-49DD-A724-68A18B8AE880}" dt="2026-03-26T13:04:53.163" v="3528" actId="478"/>
           <ac:grpSpMkLst>
             <pc:docMk/>
             <pc:sldMk cId="3601829480" sldId="260"/>
             <ac:grpSpMk id="139" creationId="{38130447-C12B-A7B8-EB4C-5922EB5047DA}"/>
           </ac:grpSpMkLst>
         </pc:grpChg>
-        <pc:graphicFrameChg chg="add mod">
-          <ac:chgData name="Li, Hanchen F" userId="3aee791e-6a2d-4da7-a77b-fbdf7bf15886" providerId="ADAL" clId="{1EA8FAE0-933A-49DD-A724-68A18B8AE880}" dt="2026-03-24T15:19:05.883" v="3255" actId="1076"/>
-          <ac:graphicFrameMkLst>
-            <pc:docMk/>
-            <pc:sldMk cId="3601829480" sldId="260"/>
-            <ac:graphicFrameMk id="3" creationId="{0B085B20-4EE6-AFCF-D5F1-F33B03C94AC1}"/>
-          </ac:graphicFrameMkLst>
-        </pc:graphicFrameChg>
-        <pc:picChg chg="add">
-          <ac:chgData name="Li, Hanchen F" userId="3aee791e-6a2d-4da7-a77b-fbdf7bf15886" providerId="ADAL" clId="{1EA8FAE0-933A-49DD-A724-68A18B8AE880}" dt="2026-03-24T20:10:55.378" v="3383"/>
-          <ac:picMkLst>
-            <pc:docMk/>
-            <pc:sldMk cId="3601829480" sldId="260"/>
-            <ac:picMk id="2" creationId="{1F81E77B-4269-2D38-1A93-D173DFD590B1}"/>
-          </ac:picMkLst>
-        </pc:picChg>
-        <pc:picChg chg="add">
-          <ac:chgData name="Li, Hanchen F" userId="3aee791e-6a2d-4da7-a77b-fbdf7bf15886" providerId="ADAL" clId="{1EA8FAE0-933A-49DD-A724-68A18B8AE880}" dt="2026-03-24T20:10:59.713" v="3384"/>
-          <ac:picMkLst>
-            <pc:docMk/>
-            <pc:sldMk cId="3601829480" sldId="260"/>
-            <ac:picMk id="3" creationId="{EF133752-BC48-B801-61ED-495D5CEDAD5D}"/>
-          </ac:picMkLst>
-        </pc:picChg>
         <pc:picChg chg="add mod ord modCrop">
-          <ac:chgData name="Li, Hanchen F" userId="3aee791e-6a2d-4da7-a77b-fbdf7bf15886" providerId="ADAL" clId="{1EA8FAE0-933A-49DD-A724-68A18B8AE880}" dt="2026-03-24T20:11:51.991" v="3396" actId="1076"/>
+          <ac:chgData name="Li, Hanchen F" userId="3aee791e-6a2d-4da7-a77b-fbdf7bf15886" providerId="ADAL" clId="{1EA8FAE0-933A-49DD-A724-68A18B8AE880}" dt="2026-03-26T13:10:15.464" v="3611" actId="1036"/>
           <ac:picMkLst>
             <pc:docMk/>
             <pc:sldMk cId="3601829480" sldId="260"/>
             <ac:picMk id="4" creationId="{10BF806C-AF9E-4902-3729-7AB1BBB09083}"/>
           </ac:picMkLst>
         </pc:picChg>
-        <pc:picChg chg="mod">
-          <ac:chgData name="Li, Hanchen F" userId="3aee791e-6a2d-4da7-a77b-fbdf7bf15886" providerId="ADAL" clId="{1EA8FAE0-933A-49DD-A724-68A18B8AE880}" dt="2026-03-24T15:20:42.489" v="3292" actId="571"/>
-          <ac:picMkLst>
-            <pc:docMk/>
-            <pc:sldMk cId="3601829480" sldId="260"/>
-            <ac:picMk id="15" creationId="{B033379A-978D-C998-C123-C827F0C83245}"/>
-          </ac:picMkLst>
-        </pc:picChg>
         <pc:picChg chg="add mod modCrop">
-          <ac:chgData name="Li, Hanchen F" userId="3aee791e-6a2d-4da7-a77b-fbdf7bf15886" providerId="ADAL" clId="{1EA8FAE0-933A-49DD-A724-68A18B8AE880}" dt="2026-03-24T15:14:01.318" v="3204" actId="732"/>
+          <ac:chgData name="Li, Hanchen F" userId="3aee791e-6a2d-4da7-a77b-fbdf7bf15886" providerId="ADAL" clId="{1EA8FAE0-933A-49DD-A724-68A18B8AE880}" dt="2026-03-26T13:09:09.324" v="3601" actId="1076"/>
           <ac:picMkLst>
             <pc:docMk/>
             <pc:sldMk cId="3601829480" sldId="260"/>
             <ac:picMk id="37" creationId="{C09BB204-9C6C-3C04-182A-FEBA2E4B5413}"/>
           </ac:picMkLst>
         </pc:picChg>
-        <pc:picChg chg="add del mod ord modCrop">
-          <ac:chgData name="Li, Hanchen F" userId="3aee791e-6a2d-4da7-a77b-fbdf7bf15886" providerId="ADAL" clId="{1EA8FAE0-933A-49DD-A724-68A18B8AE880}" dt="2026-03-24T15:20:21.890" v="3281" actId="478"/>
-          <ac:picMkLst>
-            <pc:docMk/>
-            <pc:sldMk cId="3601829480" sldId="260"/>
-            <ac:picMk id="38" creationId="{B226DDD7-0D3C-C8C4-F666-4CA16C1D3391}"/>
-          </ac:picMkLst>
-        </pc:picChg>
         <pc:picChg chg="add mod modCrop">
-          <ac:chgData name="Li, Hanchen F" userId="3aee791e-6a2d-4da7-a77b-fbdf7bf15886" providerId="ADAL" clId="{1EA8FAE0-933A-49DD-A724-68A18B8AE880}" dt="2026-03-16T16:36:08.428" v="1879" actId="14100"/>
+          <ac:chgData name="Li, Hanchen F" userId="3aee791e-6a2d-4da7-a77b-fbdf7bf15886" providerId="ADAL" clId="{1EA8FAE0-933A-49DD-A724-68A18B8AE880}" dt="2026-03-26T13:10:16.619" v="3612" actId="1036"/>
           <ac:picMkLst>
             <pc:docMk/>
             <pc:sldMk cId="3601829480" sldId="260"/>
             <ac:picMk id="42" creationId="{B632C22F-E55E-2C15-352E-71B3B3268CCD}"/>
           </ac:picMkLst>
         </pc:picChg>
-        <pc:picChg chg="add mod">
-          <ac:chgData name="Li, Hanchen F" userId="3aee791e-6a2d-4da7-a77b-fbdf7bf15886" providerId="ADAL" clId="{1EA8FAE0-933A-49DD-A724-68A18B8AE880}" dt="2026-03-24T20:15:22.784" v="3484" actId="1076"/>
+        <pc:picChg chg="add mod modCrop">
+          <ac:chgData name="Li, Hanchen F" userId="3aee791e-6a2d-4da7-a77b-fbdf7bf15886" providerId="ADAL" clId="{1EA8FAE0-933A-49DD-A724-68A18B8AE880}" dt="2026-03-26T13:07:00.904" v="3568" actId="1036"/>
           <ac:picMkLst>
             <pc:docMk/>
             <pc:sldMk cId="3601829480" sldId="260"/>
@@ -564,7 +404,23 @@
           </ac:cxnSpMkLst>
         </pc:cxnChg>
         <pc:cxnChg chg="add mod">
-          <ac:chgData name="Li, Hanchen F" userId="3aee791e-6a2d-4da7-a77b-fbdf7bf15886" providerId="ADAL" clId="{1EA8FAE0-933A-49DD-A724-68A18B8AE880}" dt="2026-03-24T20:13:06.680" v="3405" actId="692"/>
+          <ac:chgData name="Li, Hanchen F" userId="3aee791e-6a2d-4da7-a77b-fbdf7bf15886" providerId="ADAL" clId="{1EA8FAE0-933A-49DD-A724-68A18B8AE880}" dt="2026-03-26T13:07:29.391" v="3577" actId="1076"/>
+          <ac:cxnSpMkLst>
+            <pc:docMk/>
+            <pc:sldMk cId="3601829480" sldId="260"/>
+            <ac:cxnSpMk id="29" creationId="{310546EE-96BA-82D9-C711-F6A7A9372F50}"/>
+          </ac:cxnSpMkLst>
+        </pc:cxnChg>
+        <pc:cxnChg chg="add mod">
+          <ac:chgData name="Li, Hanchen F" userId="3aee791e-6a2d-4da7-a77b-fbdf7bf15886" providerId="ADAL" clId="{1EA8FAE0-933A-49DD-A724-68A18B8AE880}" dt="2026-03-26T13:07:40.789" v="3581" actId="1076"/>
+          <ac:cxnSpMkLst>
+            <pc:docMk/>
+            <pc:sldMk cId="3601829480" sldId="260"/>
+            <ac:cxnSpMk id="31" creationId="{C67BFF6C-5A0F-1973-5A59-8CF13EB73D3D}"/>
+          </ac:cxnSpMkLst>
+        </pc:cxnChg>
+        <pc:cxnChg chg="add mod">
+          <ac:chgData name="Li, Hanchen F" userId="3aee791e-6a2d-4da7-a77b-fbdf7bf15886" providerId="ADAL" clId="{1EA8FAE0-933A-49DD-A724-68A18B8AE880}" dt="2026-03-26T13:09:37.916" v="3607" actId="14100"/>
           <ac:cxnSpMkLst>
             <pc:docMk/>
             <pc:sldMk cId="3601829480" sldId="260"/>
@@ -572,23 +428,23 @@
           </ac:cxnSpMkLst>
         </pc:cxnChg>
         <pc:cxnChg chg="add mod">
-          <ac:chgData name="Li, Hanchen F" userId="3aee791e-6a2d-4da7-a77b-fbdf7bf15886" providerId="ADAL" clId="{1EA8FAE0-933A-49DD-A724-68A18B8AE880}" dt="2026-03-24T20:13:06.680" v="3405" actId="692"/>
+          <ac:chgData name="Li, Hanchen F" userId="3aee791e-6a2d-4da7-a77b-fbdf7bf15886" providerId="ADAL" clId="{1EA8FAE0-933A-49DD-A724-68A18B8AE880}" dt="2026-03-26T13:09:28.908" v="3604" actId="14100"/>
           <ac:cxnSpMkLst>
             <pc:docMk/>
             <pc:sldMk cId="3601829480" sldId="260"/>
             <ac:cxnSpMk id="81" creationId="{490367D2-3871-1604-4466-5893EC9691DD}"/>
           </ac:cxnSpMkLst>
         </pc:cxnChg>
-        <pc:cxnChg chg="mod">
-          <ac:chgData name="Li, Hanchen F" userId="3aee791e-6a2d-4da7-a77b-fbdf7bf15886" providerId="ADAL" clId="{1EA8FAE0-933A-49DD-A724-68A18B8AE880}" dt="2026-03-16T16:57:46.812" v="3103" actId="692"/>
+        <pc:cxnChg chg="mod topLvl">
+          <ac:chgData name="Li, Hanchen F" userId="3aee791e-6a2d-4da7-a77b-fbdf7bf15886" providerId="ADAL" clId="{1EA8FAE0-933A-49DD-A724-68A18B8AE880}" dt="2026-03-26T13:08:17.514" v="3587" actId="14100"/>
           <ac:cxnSpMkLst>
             <pc:docMk/>
             <pc:sldMk cId="3601829480" sldId="260"/>
             <ac:cxnSpMk id="98" creationId="{5B8710CF-6427-DFDB-2CC3-B7F5BC317BAA}"/>
           </ac:cxnSpMkLst>
         </pc:cxnChg>
-        <pc:cxnChg chg="mod">
-          <ac:chgData name="Li, Hanchen F" userId="3aee791e-6a2d-4da7-a77b-fbdf7bf15886" providerId="ADAL" clId="{1EA8FAE0-933A-49DD-A724-68A18B8AE880}" dt="2026-03-24T15:14:27.641" v="3215" actId="113"/>
+        <pc:cxnChg chg="del mod topLvl">
+          <ac:chgData name="Li, Hanchen F" userId="3aee791e-6a2d-4da7-a77b-fbdf7bf15886" providerId="ADAL" clId="{1EA8FAE0-933A-49DD-A724-68A18B8AE880}" dt="2026-03-26T13:03:36.012" v="3494" actId="478"/>
           <ac:cxnSpMkLst>
             <pc:docMk/>
             <pc:sldMk cId="3601829480" sldId="260"/>
@@ -596,7 +452,7 @@
           </ac:cxnSpMkLst>
         </pc:cxnChg>
         <pc:cxnChg chg="mod">
-          <ac:chgData name="Li, Hanchen F" userId="3aee791e-6a2d-4da7-a77b-fbdf7bf15886" providerId="ADAL" clId="{1EA8FAE0-933A-49DD-A724-68A18B8AE880}" dt="2026-03-24T20:14:20.180" v="3453" actId="208"/>
+          <ac:chgData name="Li, Hanchen F" userId="3aee791e-6a2d-4da7-a77b-fbdf7bf15886" providerId="ADAL" clId="{1EA8FAE0-933A-49DD-A724-68A18B8AE880}" dt="2026-03-26T13:03:17.430" v="3491" actId="14100"/>
           <ac:cxnSpMkLst>
             <pc:docMk/>
             <pc:sldMk cId="3601829480" sldId="260"/>
@@ -604,7 +460,7 @@
           </ac:cxnSpMkLst>
         </pc:cxnChg>
         <pc:cxnChg chg="mod">
-          <ac:chgData name="Li, Hanchen F" userId="3aee791e-6a2d-4da7-a77b-fbdf7bf15886" providerId="ADAL" clId="{1EA8FAE0-933A-49DD-A724-68A18B8AE880}" dt="2026-03-24T20:14:20.180" v="3453" actId="208"/>
+          <ac:chgData name="Li, Hanchen F" userId="3aee791e-6a2d-4da7-a77b-fbdf7bf15886" providerId="ADAL" clId="{1EA8FAE0-933A-49DD-A724-68A18B8AE880}" dt="2026-03-26T13:04:03.724" v="3503" actId="14100"/>
           <ac:cxnSpMkLst>
             <pc:docMk/>
             <pc:sldMk cId="3601829480" sldId="260"/>
@@ -612,7 +468,7 @@
           </ac:cxnSpMkLst>
         </pc:cxnChg>
         <pc:cxnChg chg="mod">
-          <ac:chgData name="Li, Hanchen F" userId="3aee791e-6a2d-4da7-a77b-fbdf7bf15886" providerId="ADAL" clId="{1EA8FAE0-933A-49DD-A724-68A18B8AE880}" dt="2026-03-24T20:14:20.180" v="3453" actId="208"/>
+          <ac:chgData name="Li, Hanchen F" userId="3aee791e-6a2d-4da7-a77b-fbdf7bf15886" providerId="ADAL" clId="{1EA8FAE0-933A-49DD-A724-68A18B8AE880}" dt="2026-03-26T13:03:00.988" v="3488" actId="14100"/>
           <ac:cxnSpMkLst>
             <pc:docMk/>
             <pc:sldMk cId="3601829480" sldId="260"/>
@@ -620,23 +476,23 @@
           </ac:cxnSpMkLst>
         </pc:cxnChg>
         <pc:cxnChg chg="mod">
-          <ac:chgData name="Li, Hanchen F" userId="3aee791e-6a2d-4da7-a77b-fbdf7bf15886" providerId="ADAL" clId="{1EA8FAE0-933A-49DD-A724-68A18B8AE880}" dt="2026-03-24T20:14:20.180" v="3453" actId="208"/>
+          <ac:chgData name="Li, Hanchen F" userId="3aee791e-6a2d-4da7-a77b-fbdf7bf15886" providerId="ADAL" clId="{1EA8FAE0-933A-49DD-A724-68A18B8AE880}" dt="2026-03-26T13:08:38.650" v="3588" actId="14100"/>
           <ac:cxnSpMkLst>
             <pc:docMk/>
             <pc:sldMk cId="3601829480" sldId="260"/>
             <ac:cxnSpMk id="119" creationId="{116040EE-5590-EDE1-2067-00412E180FFB}"/>
           </ac:cxnSpMkLst>
         </pc:cxnChg>
-        <pc:cxnChg chg="mod">
-          <ac:chgData name="Li, Hanchen F" userId="3aee791e-6a2d-4da7-a77b-fbdf7bf15886" providerId="ADAL" clId="{1EA8FAE0-933A-49DD-A724-68A18B8AE880}" dt="2026-03-16T16:57:06.988" v="3096" actId="14100"/>
+        <pc:cxnChg chg="mod topLvl">
+          <ac:chgData name="Li, Hanchen F" userId="3aee791e-6a2d-4da7-a77b-fbdf7bf15886" providerId="ADAL" clId="{1EA8FAE0-933A-49DD-A724-68A18B8AE880}" dt="2026-03-26T13:04:53.163" v="3528" actId="478"/>
           <ac:cxnSpMkLst>
             <pc:docMk/>
             <pc:sldMk cId="3601829480" sldId="260"/>
             <ac:cxnSpMk id="140" creationId="{C7B6B979-85D8-D7CC-B537-7B16ED999594}"/>
           </ac:cxnSpMkLst>
         </pc:cxnChg>
-        <pc:cxnChg chg="mod">
-          <ac:chgData name="Li, Hanchen F" userId="3aee791e-6a2d-4da7-a77b-fbdf7bf15886" providerId="ADAL" clId="{1EA8FAE0-933A-49DD-A724-68A18B8AE880}" dt="2026-03-16T16:59:38.695" v="3130" actId="478"/>
+        <pc:cxnChg chg="add del mod topLvl">
+          <ac:chgData name="Li, Hanchen F" userId="3aee791e-6a2d-4da7-a77b-fbdf7bf15886" providerId="ADAL" clId="{1EA8FAE0-933A-49DD-A724-68A18B8AE880}" dt="2026-03-26T13:06:41.473" v="3550" actId="14100"/>
           <ac:cxnSpMkLst>
             <pc:docMk/>
             <pc:sldMk cId="3601829480" sldId="260"/>
@@ -3442,7 +3298,7 @@
           <a:p>
             <a:fld id="{DF1088C5-931A-42D2-8AA4-FA289862AAD0}" type="datetimeFigureOut">
               <a:rPr lang="zh-CN" altLang="en-US" smtClean="0"/>
-              <a:t>2026/3/24</a:t>
+              <a:t>2026/3/26</a:t>
             </a:fld>
             <a:endParaRPr lang="zh-CN" altLang="en-US"/>
           </a:p>
@@ -4140,7 +3996,7 @@
           <a:p>
             <a:fld id="{3CAF1464-0EA4-453D-A90B-03B04D244405}" type="datetimeFigureOut">
               <a:rPr lang="zh-CN" altLang="en-US" smtClean="0"/>
-              <a:t>2026/3/24</a:t>
+              <a:t>2026/3/26</a:t>
             </a:fld>
             <a:endParaRPr lang="zh-CN" altLang="en-US"/>
           </a:p>
@@ -4310,7 +4166,7 @@
           <a:p>
             <a:fld id="{3CAF1464-0EA4-453D-A90B-03B04D244405}" type="datetimeFigureOut">
               <a:rPr lang="zh-CN" altLang="en-US" smtClean="0"/>
-              <a:t>2026/3/24</a:t>
+              <a:t>2026/3/26</a:t>
             </a:fld>
             <a:endParaRPr lang="zh-CN" altLang="en-US"/>
           </a:p>
@@ -4490,7 +4346,7 @@
           <a:p>
             <a:fld id="{3CAF1464-0EA4-453D-A90B-03B04D244405}" type="datetimeFigureOut">
               <a:rPr lang="zh-CN" altLang="en-US" smtClean="0"/>
-              <a:t>2026/3/24</a:t>
+              <a:t>2026/3/26</a:t>
             </a:fld>
             <a:endParaRPr lang="zh-CN" altLang="en-US"/>
           </a:p>
@@ -4660,7 +4516,7 @@
           <a:p>
             <a:fld id="{3CAF1464-0EA4-453D-A90B-03B04D244405}" type="datetimeFigureOut">
               <a:rPr lang="zh-CN" altLang="en-US" smtClean="0"/>
-              <a:t>2026/3/24</a:t>
+              <a:t>2026/3/26</a:t>
             </a:fld>
             <a:endParaRPr lang="zh-CN" altLang="en-US"/>
           </a:p>
@@ -4906,7 +4762,7 @@
           <a:p>
             <a:fld id="{3CAF1464-0EA4-453D-A90B-03B04D244405}" type="datetimeFigureOut">
               <a:rPr lang="zh-CN" altLang="en-US" smtClean="0"/>
-              <a:t>2026/3/24</a:t>
+              <a:t>2026/3/26</a:t>
             </a:fld>
             <a:endParaRPr lang="zh-CN" altLang="en-US"/>
           </a:p>
@@ -5138,7 +4994,7 @@
           <a:p>
             <a:fld id="{3CAF1464-0EA4-453D-A90B-03B04D244405}" type="datetimeFigureOut">
               <a:rPr lang="zh-CN" altLang="en-US" smtClean="0"/>
-              <a:t>2026/3/24</a:t>
+              <a:t>2026/3/26</a:t>
             </a:fld>
             <a:endParaRPr lang="zh-CN" altLang="en-US"/>
           </a:p>
@@ -5505,7 +5361,7 @@
           <a:p>
             <a:fld id="{3CAF1464-0EA4-453D-A90B-03B04D244405}" type="datetimeFigureOut">
               <a:rPr lang="zh-CN" altLang="en-US" smtClean="0"/>
-              <a:t>2026/3/24</a:t>
+              <a:t>2026/3/26</a:t>
             </a:fld>
             <a:endParaRPr lang="zh-CN" altLang="en-US"/>
           </a:p>
@@ -5623,7 +5479,7 @@
           <a:p>
             <a:fld id="{3CAF1464-0EA4-453D-A90B-03B04D244405}" type="datetimeFigureOut">
               <a:rPr lang="zh-CN" altLang="en-US" smtClean="0"/>
-              <a:t>2026/3/24</a:t>
+              <a:t>2026/3/26</a:t>
             </a:fld>
             <a:endParaRPr lang="zh-CN" altLang="en-US"/>
           </a:p>
@@ -5718,7 +5574,7 @@
           <a:p>
             <a:fld id="{3CAF1464-0EA4-453D-A90B-03B04D244405}" type="datetimeFigureOut">
               <a:rPr lang="zh-CN" altLang="en-US" smtClean="0"/>
-              <a:t>2026/3/24</a:t>
+              <a:t>2026/3/26</a:t>
             </a:fld>
             <a:endParaRPr lang="zh-CN" altLang="en-US"/>
           </a:p>
@@ -5995,7 +5851,7 @@
           <a:p>
             <a:fld id="{3CAF1464-0EA4-453D-A90B-03B04D244405}" type="datetimeFigureOut">
               <a:rPr lang="zh-CN" altLang="en-US" smtClean="0"/>
-              <a:t>2026/3/24</a:t>
+              <a:t>2026/3/26</a:t>
             </a:fld>
             <a:endParaRPr lang="zh-CN" altLang="en-US"/>
           </a:p>
@@ -6252,7 +6108,7 @@
           <a:p>
             <a:fld id="{3CAF1464-0EA4-453D-A90B-03B04D244405}" type="datetimeFigureOut">
               <a:rPr lang="zh-CN" altLang="en-US" smtClean="0"/>
-              <a:t>2026/3/24</a:t>
+              <a:t>2026/3/26</a:t>
             </a:fld>
             <a:endParaRPr lang="zh-CN" altLang="en-US"/>
           </a:p>
@@ -6465,7 +6321,7 @@
           <a:p>
             <a:fld id="{3CAF1464-0EA4-453D-A90B-03B04D244405}" type="datetimeFigureOut">
               <a:rPr lang="zh-CN" altLang="en-US" smtClean="0"/>
-              <a:t>2026/3/24</a:t>
+              <a:t>2026/3/26</a:t>
             </a:fld>
             <a:endParaRPr lang="zh-CN" altLang="en-US"/>
           </a:p>
@@ -10532,7 +10388,7 @@
         </p:blipFill>
         <p:spPr>
           <a:xfrm>
-            <a:off x="466188" y="1752699"/>
+            <a:off x="466188" y="1762324"/>
             <a:ext cx="6694218" cy="3988798"/>
           </a:xfrm>
           <a:prstGeom prst="rect">
@@ -10606,7 +10462,7 @@
         </p:blipFill>
         <p:spPr>
           <a:xfrm>
-            <a:off x="5242663" y="337930"/>
+            <a:off x="5266560" y="386633"/>
             <a:ext cx="1658880" cy="1251384"/>
           </a:xfrm>
           <a:prstGeom prst="rect">
@@ -10701,10 +10557,10 @@
         </p:nvGrpSpPr>
         <p:grpSpPr>
           <a:xfrm>
-            <a:off x="9364436" y="5372100"/>
-            <a:ext cx="2292803" cy="862693"/>
-            <a:chOff x="9364436" y="5372100"/>
-            <a:chExt cx="2292803" cy="862693"/>
+            <a:off x="9581056" y="5385700"/>
+            <a:ext cx="2065351" cy="743826"/>
+            <a:chOff x="9581056" y="5385700"/>
+            <a:chExt cx="2065351" cy="743826"/>
           </a:xfrm>
           <a:effectLst>
             <a:outerShdw blurRad="63500" sx="101000" sy="101000" algn="ctr" rotWithShape="0">
@@ -10728,8 +10584,8 @@
           </p:nvCxnSpPr>
           <p:spPr>
             <a:xfrm flipV="1">
-              <a:off x="11171464" y="5372100"/>
-              <a:ext cx="485775" cy="470752"/>
+              <a:off x="11106150" y="5385700"/>
+              <a:ext cx="540257" cy="457665"/>
             </a:xfrm>
             <a:prstGeom prst="straightConnector1">
               <a:avLst/>
@@ -10767,13 +10623,14 @@
             </p:cNvPr>
             <p:cNvCxnSpPr>
               <a:cxnSpLocks/>
+              <a:endCxn id="92" idx="3"/>
             </p:cNvCxnSpPr>
             <p:nvPr/>
           </p:nvCxnSpPr>
           <p:spPr>
             <a:xfrm flipH="1">
-              <a:off x="9364436" y="5842852"/>
-              <a:ext cx="1807027" cy="391941"/>
+              <a:off x="9581056" y="5843365"/>
+              <a:ext cx="1541314" cy="286161"/>
             </a:xfrm>
             <a:prstGeom prst="line">
               <a:avLst/>
@@ -10814,8 +10671,8 @@
         </p:nvSpPr>
         <p:spPr>
           <a:xfrm>
-            <a:off x="7146391" y="5483938"/>
-            <a:ext cx="2218044" cy="883832"/>
+            <a:off x="7363012" y="5823032"/>
+            <a:ext cx="2218044" cy="612988"/>
           </a:xfrm>
           <a:prstGeom prst="rect">
             <a:avLst/>
@@ -10846,7 +10703,7 @@
                 <a:latin typeface="Helvetica" panose="020B0604020202020204" pitchFamily="34" charset="0"/>
                 <a:cs typeface="Helvetica" panose="020B0604020202020204" pitchFamily="34" charset="0"/>
               </a:rPr>
-              <a:t>BENETECH GM8903 constant‑temperature hot‑wire anemometer</a:t>
+              <a:t>constant‑temperature hot‑wire anemometer</a:t>
             </a:r>
             <a:endParaRPr lang="zh-CN" altLang="en-US" sz="1600" dirty="0">
               <a:ln w="3175">
@@ -10877,7 +10734,7 @@
         </p:nvSpPr>
         <p:spPr>
           <a:xfrm>
-            <a:off x="7146391" y="3813319"/>
+            <a:off x="8067320" y="4057986"/>
             <a:ext cx="1637381" cy="830997"/>
           </a:xfrm>
           <a:prstGeom prst="rect">
@@ -10940,120 +10797,50 @@
           </a:p>
         </p:txBody>
       </p:sp>
-      <p:grpSp>
-        <p:nvGrpSpPr>
-          <p:cNvPr id="97" name="组合 96">
+      <p:cxnSp>
+        <p:nvCxnSpPr>
+          <p:cNvPr id="98" name="直接箭头连接符 97">
             <a:extLst>
               <a:ext uri="{FF2B5EF4-FFF2-40B4-BE49-F238E27FC236}">
-                <a16:creationId xmlns:a16="http://schemas.microsoft.com/office/drawing/2014/main" id="{726F47DF-DC4D-A9E1-35B8-F9671DEE85EC}"/>
+                <a16:creationId xmlns:a16="http://schemas.microsoft.com/office/drawing/2014/main" id="{5B8710CF-6427-DFDB-2CC3-B7F5BC317BAA}"/>
               </a:ext>
             </a:extLst>
           </p:cNvPr>
-          <p:cNvGrpSpPr/>
+          <p:cNvCxnSpPr>
+            <a:cxnSpLocks/>
+          </p:cNvCxnSpPr>
           <p:nvPr/>
-        </p:nvGrpSpPr>
-        <p:grpSpPr>
-          <a:xfrm>
-            <a:off x="8783772" y="4138965"/>
-            <a:ext cx="2820399" cy="129560"/>
-            <a:chOff x="9371958" y="5842852"/>
-            <a:chExt cx="2820399" cy="129560"/>
+        </p:nvCxnSpPr>
+        <p:spPr>
+          <a:xfrm flipV="1">
+            <a:off x="9704701" y="4342384"/>
+            <a:ext cx="1843815" cy="145619"/>
           </a:xfrm>
-          <a:effectLst>
-            <a:outerShdw blurRad="63500" sx="101000" sy="101000" algn="ctr" rotWithShape="0">
-              <a:schemeClr val="bg1"/>
-            </a:outerShdw>
-          </a:effectLst>
-        </p:grpSpPr>
-        <p:cxnSp>
-          <p:nvCxnSpPr>
-            <p:cNvPr id="98" name="直接箭头连接符 97">
-              <a:extLst>
-                <a:ext uri="{FF2B5EF4-FFF2-40B4-BE49-F238E27FC236}">
-                  <a16:creationId xmlns:a16="http://schemas.microsoft.com/office/drawing/2014/main" id="{5B8710CF-6427-DFDB-2CC3-B7F5BC317BAA}"/>
-                </a:ext>
-              </a:extLst>
-            </p:cNvPr>
-            <p:cNvCxnSpPr>
-              <a:cxnSpLocks/>
-            </p:cNvCxnSpPr>
-            <p:nvPr/>
-          </p:nvCxnSpPr>
-          <p:spPr>
-            <a:xfrm>
-              <a:off x="11171464" y="5842852"/>
-              <a:ext cx="1020893" cy="129560"/>
-            </a:xfrm>
-            <a:prstGeom prst="straightConnector1">
-              <a:avLst/>
-            </a:prstGeom>
-            <a:ln w="31750">
-              <a:solidFill>
-                <a:schemeClr val="tx1"/>
-              </a:solidFill>
-              <a:tailEnd type="triangle"/>
-            </a:ln>
-          </p:spPr>
-          <p:style>
-            <a:lnRef idx="2">
-              <a:schemeClr val="accent1"/>
-            </a:lnRef>
-            <a:fillRef idx="0">
-              <a:schemeClr val="accent1"/>
-            </a:fillRef>
-            <a:effectRef idx="1">
-              <a:schemeClr val="accent1"/>
-            </a:effectRef>
-            <a:fontRef idx="minor">
+          <a:prstGeom prst="straightConnector1">
+            <a:avLst/>
+          </a:prstGeom>
+          <a:ln w="31750">
+            <a:solidFill>
               <a:schemeClr val="tx1"/>
-            </a:fontRef>
-          </p:style>
-        </p:cxnSp>
-        <p:cxnSp>
-          <p:nvCxnSpPr>
-            <p:cNvPr id="99" name="直接连接符 98">
-              <a:extLst>
-                <a:ext uri="{FF2B5EF4-FFF2-40B4-BE49-F238E27FC236}">
-                  <a16:creationId xmlns:a16="http://schemas.microsoft.com/office/drawing/2014/main" id="{D30FDA9A-B44C-7A28-85F1-967F50148D04}"/>
-                </a:ext>
-              </a:extLst>
-            </p:cNvPr>
-            <p:cNvCxnSpPr>
-              <a:cxnSpLocks/>
-              <a:endCxn id="96" idx="3"/>
-            </p:cNvCxnSpPr>
-            <p:nvPr/>
-          </p:nvCxnSpPr>
-          <p:spPr>
-            <a:xfrm flipH="1">
-              <a:off x="9371958" y="5842852"/>
-              <a:ext cx="1799505" cy="89853"/>
-            </a:xfrm>
-            <a:prstGeom prst="line">
-              <a:avLst/>
-            </a:prstGeom>
-            <a:ln w="31750">
-              <a:solidFill>
-                <a:schemeClr val="tx1"/>
-              </a:solidFill>
-            </a:ln>
-          </p:spPr>
-          <p:style>
-            <a:lnRef idx="2">
-              <a:schemeClr val="accent1"/>
-            </a:lnRef>
-            <a:fillRef idx="0">
-              <a:schemeClr val="accent1"/>
-            </a:fillRef>
-            <a:effectRef idx="1">
-              <a:schemeClr val="accent1"/>
-            </a:effectRef>
-            <a:fontRef idx="minor">
-              <a:schemeClr val="tx1"/>
-            </a:fontRef>
-          </p:style>
-        </p:cxnSp>
-      </p:grpSp>
+            </a:solidFill>
+            <a:tailEnd type="triangle"/>
+          </a:ln>
+        </p:spPr>
+        <p:style>
+          <a:lnRef idx="2">
+            <a:schemeClr val="accent1"/>
+          </a:lnRef>
+          <a:fillRef idx="0">
+            <a:schemeClr val="accent1"/>
+          </a:fillRef>
+          <a:effectRef idx="1">
+            <a:schemeClr val="accent1"/>
+          </a:effectRef>
+          <a:fontRef idx="minor">
+            <a:schemeClr val="tx1"/>
+          </a:fontRef>
+        </p:style>
+      </p:cxnSp>
       <p:grpSp>
         <p:nvGrpSpPr>
           <p:cNvPr id="104" name="组合 103">
@@ -11068,10 +10855,10 @@
         </p:nvGrpSpPr>
         <p:grpSpPr>
           <a:xfrm>
-            <a:off x="7877626" y="2078852"/>
-            <a:ext cx="3145974" cy="1017720"/>
-            <a:chOff x="8655632" y="5431624"/>
-            <a:chExt cx="3145974" cy="1017720"/>
+            <a:off x="9493250" y="1929324"/>
+            <a:ext cx="1530350" cy="1167248"/>
+            <a:chOff x="10271256" y="5282096"/>
+            <a:chExt cx="1530350" cy="1167248"/>
           </a:xfrm>
           <a:effectLst>
             <a:outerShdw blurRad="63500" sx="101000" sy="101000" algn="ctr" rotWithShape="0">
@@ -11095,8 +10882,8 @@
           </p:nvCxnSpPr>
           <p:spPr>
             <a:xfrm>
-              <a:off x="11679102" y="5787543"/>
-              <a:ext cx="122504" cy="661801"/>
+              <a:off x="11441773" y="5379052"/>
+              <a:ext cx="359833" cy="1070292"/>
             </a:xfrm>
             <a:prstGeom prst="straightConnector1">
               <a:avLst/>
@@ -11134,14 +10921,13 @@
             </p:cNvPr>
             <p:cNvCxnSpPr>
               <a:cxnSpLocks/>
-              <a:endCxn id="136" idx="3"/>
             </p:cNvCxnSpPr>
             <p:nvPr/>
           </p:nvCxnSpPr>
           <p:spPr>
             <a:xfrm flipH="1" flipV="1">
-              <a:off x="8655632" y="5431624"/>
-              <a:ext cx="3036663" cy="363077"/>
+              <a:off x="10271256" y="5282096"/>
+              <a:ext cx="1170517" cy="96956"/>
             </a:xfrm>
             <a:prstGeom prst="line">
               <a:avLst/>
@@ -11182,10 +10968,10 @@
         </p:nvGrpSpPr>
         <p:grpSpPr>
           <a:xfrm>
-            <a:off x="8747760" y="1536413"/>
-            <a:ext cx="2909479" cy="1729301"/>
-            <a:chOff x="9373366" y="4736785"/>
-            <a:chExt cx="2909479" cy="1729301"/>
+            <a:off x="8915400" y="867238"/>
+            <a:ext cx="2741839" cy="2403688"/>
+            <a:chOff x="9541006" y="4067530"/>
+            <a:chExt cx="2741839" cy="2398556"/>
           </a:xfrm>
           <a:effectLst>
             <a:outerShdw blurRad="63500" sx="101000" sy="101000" algn="ctr" rotWithShape="0">
@@ -11209,8 +10995,8 @@
           </p:nvCxnSpPr>
           <p:spPr>
             <a:xfrm>
-              <a:off x="11679102" y="5029172"/>
-              <a:ext cx="603743" cy="1436914"/>
+              <a:off x="11670316" y="4531568"/>
+              <a:ext cx="612529" cy="1934518"/>
             </a:xfrm>
             <a:prstGeom prst="straightConnector1">
               <a:avLst/>
@@ -11253,8 +11039,8 @@
           </p:nvCxnSpPr>
           <p:spPr>
             <a:xfrm flipH="1" flipV="1">
-              <a:off x="9373366" y="4736785"/>
-              <a:ext cx="2316208" cy="301912"/>
+              <a:off x="9541006" y="4067530"/>
+              <a:ext cx="2138096" cy="464038"/>
             </a:xfrm>
             <a:prstGeom prst="line">
               <a:avLst/>
@@ -11295,7 +11081,7 @@
         </p:nvSpPr>
         <p:spPr>
           <a:xfrm>
-            <a:off x="7146391" y="1092367"/>
+            <a:off x="7363012" y="377008"/>
             <a:ext cx="1897289" cy="584775"/>
           </a:xfrm>
           <a:prstGeom prst="rect">
@@ -11368,7 +11154,7 @@
         </p:nvSpPr>
         <p:spPr>
           <a:xfrm>
-            <a:off x="7146392" y="1909575"/>
+            <a:off x="8767800" y="1711249"/>
             <a:ext cx="731234" cy="338554"/>
           </a:xfrm>
           <a:prstGeom prst="rect">
@@ -11426,10 +11212,10 @@
         </p:nvGrpSpPr>
         <p:grpSpPr>
           <a:xfrm flipV="1">
-            <a:off x="8779312" y="2979060"/>
-            <a:ext cx="1770758" cy="358838"/>
-            <a:chOff x="9862795" y="5698475"/>
-            <a:chExt cx="2308273" cy="273931"/>
+            <a:off x="9069698" y="2979060"/>
+            <a:ext cx="1480373" cy="358838"/>
+            <a:chOff x="10241327" y="5698475"/>
+            <a:chExt cx="1929741" cy="273931"/>
           </a:xfrm>
           <a:effectLst>
             <a:outerShdw blurRad="63500" sx="101000" sy="101000" algn="ctr" rotWithShape="0">
@@ -11497,8 +11283,8 @@
           </p:nvCxnSpPr>
           <p:spPr>
             <a:xfrm flipH="1">
-              <a:off x="9862795" y="5698475"/>
-              <a:ext cx="1416665" cy="81359"/>
+              <a:off x="10241327" y="5698475"/>
+              <a:ext cx="1038131" cy="50235"/>
             </a:xfrm>
             <a:prstGeom prst="line">
               <a:avLst/>
@@ -11547,14 +11333,15 @@
               </a:ext>
             </a:extLst>
           </a:blip>
+          <a:srcRect b="2162"/>
           <a:stretch>
             <a:fillRect/>
           </a:stretch>
         </p:blipFill>
         <p:spPr>
           <a:xfrm flipH="1">
-            <a:off x="7693075" y="2493630"/>
-            <a:ext cx="934140" cy="1314591"/>
+            <a:off x="7886986" y="2527014"/>
+            <a:ext cx="946291" cy="1302903"/>
           </a:xfrm>
           <a:prstGeom prst="rect">
             <a:avLst/>
@@ -12019,6 +11806,144 @@
           </p:style>
         </p:cxnSp>
       </p:grpSp>
+      <p:sp>
+        <p:nvSpPr>
+          <p:cNvPr id="25" name="椭圆 24">
+            <a:extLst>
+              <a:ext uri="{FF2B5EF4-FFF2-40B4-BE49-F238E27FC236}">
+                <a16:creationId xmlns:a16="http://schemas.microsoft.com/office/drawing/2014/main" id="{6AD56B28-F329-8FEF-B6F9-F41A1480574C}"/>
+              </a:ext>
+            </a:extLst>
+          </p:cNvPr>
+          <p:cNvSpPr/>
+          <p:nvPr/>
+        </p:nvSpPr>
+        <p:spPr>
+          <a:xfrm>
+            <a:off x="7642837" y="2429856"/>
+            <a:ext cx="1434591" cy="1433893"/>
+          </a:xfrm>
+          <a:prstGeom prst="ellipse">
+            <a:avLst/>
+          </a:prstGeom>
+          <a:noFill/>
+          <a:ln w="31750">
+            <a:solidFill>
+              <a:schemeClr val="tx1"/>
+            </a:solidFill>
+          </a:ln>
+        </p:spPr>
+        <p:style>
+          <a:lnRef idx="2">
+            <a:schemeClr val="accent1">
+              <a:shade val="15000"/>
+            </a:schemeClr>
+          </a:lnRef>
+          <a:fillRef idx="1">
+            <a:schemeClr val="accent1"/>
+          </a:fillRef>
+          <a:effectRef idx="0">
+            <a:schemeClr val="accent1"/>
+          </a:effectRef>
+          <a:fontRef idx="minor">
+            <a:schemeClr val="lt1"/>
+          </a:fontRef>
+        </p:style>
+        <p:txBody>
+          <a:bodyPr rtlCol="0" anchor="ctr"/>
+          <a:lstStyle/>
+          <a:p>
+            <a:pPr algn="ctr"/>
+            <a:endParaRPr lang="en-GB"/>
+          </a:p>
+        </p:txBody>
+      </p:sp>
+      <p:cxnSp>
+        <p:nvCxnSpPr>
+          <p:cNvPr id="29" name="直接连接符 28">
+            <a:extLst>
+              <a:ext uri="{FF2B5EF4-FFF2-40B4-BE49-F238E27FC236}">
+                <a16:creationId xmlns:a16="http://schemas.microsoft.com/office/drawing/2014/main" id="{310546EE-96BA-82D9-C711-F6A7A9372F50}"/>
+              </a:ext>
+            </a:extLst>
+          </p:cNvPr>
+          <p:cNvCxnSpPr>
+            <a:cxnSpLocks/>
+          </p:cNvCxnSpPr>
+          <p:nvPr/>
+        </p:nvCxnSpPr>
+        <p:spPr>
+          <a:xfrm>
+            <a:off x="8613775" y="3013075"/>
+            <a:ext cx="441518" cy="0"/>
+          </a:xfrm>
+          <a:prstGeom prst="line">
+            <a:avLst/>
+          </a:prstGeom>
+          <a:ln w="22225">
+            <a:solidFill>
+              <a:schemeClr val="tx1"/>
+            </a:solidFill>
+          </a:ln>
+        </p:spPr>
+        <p:style>
+          <a:lnRef idx="2">
+            <a:schemeClr val="accent1"/>
+          </a:lnRef>
+          <a:fillRef idx="0">
+            <a:schemeClr val="accent1"/>
+          </a:fillRef>
+          <a:effectRef idx="1">
+            <a:schemeClr val="accent1"/>
+          </a:effectRef>
+          <a:fontRef idx="minor">
+            <a:schemeClr val="tx1"/>
+          </a:fontRef>
+        </p:style>
+      </p:cxnSp>
+      <p:cxnSp>
+        <p:nvCxnSpPr>
+          <p:cNvPr id="31" name="直接连接符 30">
+            <a:extLst>
+              <a:ext uri="{FF2B5EF4-FFF2-40B4-BE49-F238E27FC236}">
+                <a16:creationId xmlns:a16="http://schemas.microsoft.com/office/drawing/2014/main" id="{C67BFF6C-5A0F-1973-5A59-8CF13EB73D3D}"/>
+              </a:ext>
+            </a:extLst>
+          </p:cNvPr>
+          <p:cNvCxnSpPr>
+            <a:cxnSpLocks/>
+          </p:cNvCxnSpPr>
+          <p:nvPr/>
+        </p:nvCxnSpPr>
+        <p:spPr>
+          <a:xfrm>
+            <a:off x="8613775" y="3487737"/>
+            <a:ext cx="374613" cy="0"/>
+          </a:xfrm>
+          <a:prstGeom prst="line">
+            <a:avLst/>
+          </a:prstGeom>
+          <a:ln w="22225">
+            <a:solidFill>
+              <a:schemeClr val="tx1"/>
+            </a:solidFill>
+          </a:ln>
+        </p:spPr>
+        <p:style>
+          <a:lnRef idx="2">
+            <a:schemeClr val="accent1"/>
+          </a:lnRef>
+          <a:fillRef idx="0">
+            <a:schemeClr val="accent1"/>
+          </a:fillRef>
+          <a:effectRef idx="1">
+            <a:schemeClr val="accent1"/>
+          </a:effectRef>
+          <a:fontRef idx="minor">
+            <a:schemeClr val="tx1"/>
+          </a:fontRef>
+        </p:style>
+      </p:cxnSp>
     </p:spTree>
     <p:extLst>
       <p:ext uri="{BB962C8B-B14F-4D97-AF65-F5344CB8AC3E}">

--- a/01_Thermal/D_sketch/Flight Arena Sketch.pptx
+++ b/01_Thermal/D_sketch/Flight Arena Sketch.pptx
@@ -120,7 +120,7 @@
 <file path=ppt/revisionInfo.xml><?xml version="1.0" encoding="utf-8"?>
 <p1510:revInfo xmlns:a="http://schemas.openxmlformats.org/drawingml/2006/main" xmlns:r="http://schemas.openxmlformats.org/officeDocument/2006/relationships" xmlns:p1510="http://schemas.microsoft.com/office/powerpoint/2015/10/main">
   <p1510:revLst>
-    <p1510:client id="{081880D3-A72C-42BF-A908-E2C77D9998D0}" v="1" dt="2026-03-26T13:07:31.162"/>
+    <p1510:client id="{081880D3-A72C-42BF-A908-E2C77D9998D0}" v="38" dt="2026-03-26T13:33:14.604"/>
   </p1510:revLst>
 </p1510:revInfo>
 </file>
@@ -130,7 +130,7 @@
   <pc:docChgLst>
     <pc:chgData name="Li, Hanchen F" userId="3aee791e-6a2d-4da7-a77b-fbdf7bf15886" providerId="ADAL" clId="{1EA8FAE0-933A-49DD-A724-68A18B8AE880}"/>
     <pc:docChg chg="undo redo custSel addSld delSld modSld modNotesMaster">
-      <pc:chgData name="Li, Hanchen F" userId="3aee791e-6a2d-4da7-a77b-fbdf7bf15886" providerId="ADAL" clId="{1EA8FAE0-933A-49DD-A724-68A18B8AE880}" dt="2026-03-26T13:10:16.619" v="3612" actId="1036"/>
+      <pc:chgData name="Li, Hanchen F" userId="3aee791e-6a2d-4da7-a77b-fbdf7bf15886" providerId="ADAL" clId="{1EA8FAE0-933A-49DD-A724-68A18B8AE880}" dt="2026-03-26T13:33:55.887" v="4356" actId="1036"/>
       <pc:docMkLst>
         <pc:docMk/>
       </pc:docMkLst>
@@ -206,13 +206,13 @@
         </pc:graphicFrameChg>
       </pc:sldChg>
       <pc:sldChg chg="addSp delSp modSp add mod">
-        <pc:chgData name="Li, Hanchen F" userId="3aee791e-6a2d-4da7-a77b-fbdf7bf15886" providerId="ADAL" clId="{1EA8FAE0-933A-49DD-A724-68A18B8AE880}" dt="2026-03-26T13:10:16.619" v="3612" actId="1036"/>
+        <pc:chgData name="Li, Hanchen F" userId="3aee791e-6a2d-4da7-a77b-fbdf7bf15886" providerId="ADAL" clId="{1EA8FAE0-933A-49DD-A724-68A18B8AE880}" dt="2026-03-26T13:33:55.887" v="4356" actId="1036"/>
         <pc:sldMkLst>
           <pc:docMk/>
           <pc:sldMk cId="3601829480" sldId="260"/>
         </pc:sldMkLst>
         <pc:spChg chg="add mod">
-          <ac:chgData name="Li, Hanchen F" userId="3aee791e-6a2d-4da7-a77b-fbdf7bf15886" providerId="ADAL" clId="{1EA8FAE0-933A-49DD-A724-68A18B8AE880}" dt="2026-03-24T20:11:58.618" v="3399" actId="1036"/>
+          <ac:chgData name="Li, Hanchen F" userId="3aee791e-6a2d-4da7-a77b-fbdf7bf15886" providerId="ADAL" clId="{1EA8FAE0-933A-49DD-A724-68A18B8AE880}" dt="2026-03-26T13:33:52.797" v="4351" actId="1036"/>
           <ac:spMkLst>
             <pc:docMk/>
             <pc:sldMk cId="3601829480" sldId="260"/>
@@ -220,7 +220,7 @@
           </ac:spMkLst>
         </pc:spChg>
         <pc:spChg chg="add mod">
-          <ac:chgData name="Li, Hanchen F" userId="3aee791e-6a2d-4da7-a77b-fbdf7bf15886" providerId="ADAL" clId="{1EA8FAE0-933A-49DD-A724-68A18B8AE880}" dt="2026-03-24T15:22:47.343" v="3358" actId="1037"/>
+          <ac:chgData name="Li, Hanchen F" userId="3aee791e-6a2d-4da7-a77b-fbdf7bf15886" providerId="ADAL" clId="{1EA8FAE0-933A-49DD-A724-68A18B8AE880}" dt="2026-03-26T13:33:52.797" v="4351" actId="1036"/>
           <ac:spMkLst>
             <pc:docMk/>
             <pc:sldMk cId="3601829480" sldId="260"/>
@@ -260,11 +260,75 @@
           </ac:spMkLst>
         </pc:spChg>
         <pc:spChg chg="add mod">
-          <ac:chgData name="Li, Hanchen F" userId="3aee791e-6a2d-4da7-a77b-fbdf7bf15886" providerId="ADAL" clId="{1EA8FAE0-933A-49DD-A724-68A18B8AE880}" dt="2026-03-26T13:06:11.423" v="3545" actId="692"/>
+          <ac:chgData name="Li, Hanchen F" userId="3aee791e-6a2d-4da7-a77b-fbdf7bf15886" providerId="ADAL" clId="{1EA8FAE0-933A-49DD-A724-68A18B8AE880}" dt="2026-03-26T13:24:05.215" v="4074" actId="1036"/>
+          <ac:spMkLst>
+            <pc:docMk/>
+            <pc:sldMk cId="3601829480" sldId="260"/>
+            <ac:spMk id="20" creationId="{163C3C38-28B3-BDA7-22DD-368F8AC6250C}"/>
+          </ac:spMkLst>
+        </pc:spChg>
+        <pc:spChg chg="add mod">
+          <ac:chgData name="Li, Hanchen F" userId="3aee791e-6a2d-4da7-a77b-fbdf7bf15886" providerId="ADAL" clId="{1EA8FAE0-933A-49DD-A724-68A18B8AE880}" dt="2026-03-26T13:24:05.215" v="4074" actId="1036"/>
+          <ac:spMkLst>
+            <pc:docMk/>
+            <pc:sldMk cId="3601829480" sldId="260"/>
+            <ac:spMk id="22" creationId="{E00F28AF-6672-97C8-1C36-85689A67054A}"/>
+          </ac:spMkLst>
+        </pc:spChg>
+        <pc:spChg chg="add del mod">
+          <ac:chgData name="Li, Hanchen F" userId="3aee791e-6a2d-4da7-a77b-fbdf7bf15886" providerId="ADAL" clId="{1EA8FAE0-933A-49DD-A724-68A18B8AE880}" dt="2026-03-26T13:20:57.129" v="3957" actId="478"/>
+          <ac:spMkLst>
+            <pc:docMk/>
+            <pc:sldMk cId="3601829480" sldId="260"/>
+            <ac:spMk id="24" creationId="{252A5BB9-180D-EDB4-22DA-97F69B5741B1}"/>
+          </ac:spMkLst>
+        </pc:spChg>
+        <pc:spChg chg="add mod">
+          <ac:chgData name="Li, Hanchen F" userId="3aee791e-6a2d-4da7-a77b-fbdf7bf15886" providerId="ADAL" clId="{1EA8FAE0-933A-49DD-A724-68A18B8AE880}" dt="2026-03-26T13:31:44.716" v="4320" actId="1038"/>
           <ac:spMkLst>
             <pc:docMk/>
             <pc:sldMk cId="3601829480" sldId="260"/>
             <ac:spMk id="25" creationId="{6AD56B28-F329-8FEF-B6F9-F41A1480574C}"/>
+          </ac:spMkLst>
+        </pc:spChg>
+        <pc:spChg chg="add mod">
+          <ac:chgData name="Li, Hanchen F" userId="3aee791e-6a2d-4da7-a77b-fbdf7bf15886" providerId="ADAL" clId="{1EA8FAE0-933A-49DD-A724-68A18B8AE880}" dt="2026-03-26T13:24:05.215" v="4074" actId="1036"/>
+          <ac:spMkLst>
+            <pc:docMk/>
+            <pc:sldMk cId="3601829480" sldId="260"/>
+            <ac:spMk id="27" creationId="{9B6B62CE-ED47-229A-25A6-E0C7633650E0}"/>
+          </ac:spMkLst>
+        </pc:spChg>
+        <pc:spChg chg="add mod">
+          <ac:chgData name="Li, Hanchen F" userId="3aee791e-6a2d-4da7-a77b-fbdf7bf15886" providerId="ADAL" clId="{1EA8FAE0-933A-49DD-A724-68A18B8AE880}" dt="2026-03-26T13:24:05.215" v="4074" actId="1036"/>
+          <ac:spMkLst>
+            <pc:docMk/>
+            <pc:sldMk cId="3601829480" sldId="260"/>
+            <ac:spMk id="28" creationId="{7D406737-7DA3-DB2D-8A8C-2183C0FC1F49}"/>
+          </ac:spMkLst>
+        </pc:spChg>
+        <pc:spChg chg="add mod ord">
+          <ac:chgData name="Li, Hanchen F" userId="3aee791e-6a2d-4da7-a77b-fbdf7bf15886" providerId="ADAL" clId="{1EA8FAE0-933A-49DD-A724-68A18B8AE880}" dt="2026-03-26T13:24:05.215" v="4074" actId="1036"/>
+          <ac:spMkLst>
+            <pc:docMk/>
+            <pc:sldMk cId="3601829480" sldId="260"/>
+            <ac:spMk id="30" creationId="{A69304D7-C2B4-8B4A-C102-6B931FAFF72D}"/>
+          </ac:spMkLst>
+        </pc:spChg>
+        <pc:spChg chg="add mod">
+          <ac:chgData name="Li, Hanchen F" userId="3aee791e-6a2d-4da7-a77b-fbdf7bf15886" providerId="ADAL" clId="{1EA8FAE0-933A-49DD-A724-68A18B8AE880}" dt="2026-03-26T13:24:16.505" v="4076" actId="14100"/>
+          <ac:spMkLst>
+            <pc:docMk/>
+            <pc:sldMk cId="3601829480" sldId="260"/>
+            <ac:spMk id="32" creationId="{E94414BA-669F-CFD6-0BBD-442B32C96BEC}"/>
+          </ac:spMkLst>
+        </pc:spChg>
+        <pc:spChg chg="add del mod">
+          <ac:chgData name="Li, Hanchen F" userId="3aee791e-6a2d-4da7-a77b-fbdf7bf15886" providerId="ADAL" clId="{1EA8FAE0-933A-49DD-A724-68A18B8AE880}" dt="2026-03-26T13:28:25.154" v="4272" actId="478"/>
+          <ac:spMkLst>
+            <pc:docMk/>
+            <pc:sldMk cId="3601829480" sldId="260"/>
+            <ac:spMk id="57" creationId="{646E7DDF-1125-DAED-ACF4-48CB0C4D63BA}"/>
           </ac:spMkLst>
         </pc:spChg>
         <pc:spChg chg="add mod">
@@ -276,7 +340,15 @@
           </ac:spMkLst>
         </pc:spChg>
         <pc:spChg chg="add mod">
-          <ac:chgData name="Li, Hanchen F" userId="3aee791e-6a2d-4da7-a77b-fbdf7bf15886" providerId="ADAL" clId="{1EA8FAE0-933A-49DD-A724-68A18B8AE880}" dt="2026-03-26T13:09:23.633" v="3603" actId="1076"/>
+          <ac:chgData name="Li, Hanchen F" userId="3aee791e-6a2d-4da7-a77b-fbdf7bf15886" providerId="ADAL" clId="{1EA8FAE0-933A-49DD-A724-68A18B8AE880}" dt="2026-03-26T13:31:54.326" v="4322" actId="571"/>
+          <ac:spMkLst>
+            <pc:docMk/>
+            <pc:sldMk cId="3601829480" sldId="260"/>
+            <ac:spMk id="77" creationId="{237EADB4-FDC8-08E4-AFFC-7FFA071786B1}"/>
+          </ac:spMkLst>
+        </pc:spChg>
+        <pc:spChg chg="add mod">
+          <ac:chgData name="Li, Hanchen F" userId="3aee791e-6a2d-4da7-a77b-fbdf7bf15886" providerId="ADAL" clId="{1EA8FAE0-933A-49DD-A724-68A18B8AE880}" dt="2026-03-26T13:33:01.370" v="4346" actId="20577"/>
           <ac:spMkLst>
             <pc:docMk/>
             <pc:sldMk cId="3601829480" sldId="260"/>
@@ -284,7 +356,7 @@
           </ac:spMkLst>
         </pc:spChg>
         <pc:spChg chg="add mod">
-          <ac:chgData name="Li, Hanchen F" userId="3aee791e-6a2d-4da7-a77b-fbdf7bf15886" providerId="ADAL" clId="{1EA8FAE0-933A-49DD-A724-68A18B8AE880}" dt="2026-03-26T13:07:56.329" v="3582" actId="1076"/>
+          <ac:chgData name="Li, Hanchen F" userId="3aee791e-6a2d-4da7-a77b-fbdf7bf15886" providerId="ADAL" clId="{1EA8FAE0-933A-49DD-A724-68A18B8AE880}" dt="2026-03-26T13:32:32.785" v="4332" actId="1076"/>
           <ac:spMkLst>
             <pc:docMk/>
             <pc:sldMk cId="3601829480" sldId="260"/>
@@ -292,7 +364,7 @@
           </ac:spMkLst>
         </pc:spChg>
         <pc:spChg chg="add mod">
-          <ac:chgData name="Li, Hanchen F" userId="3aee791e-6a2d-4da7-a77b-fbdf7bf15886" providerId="ADAL" clId="{1EA8FAE0-933A-49DD-A724-68A18B8AE880}" dt="2026-03-26T13:10:04.243" v="3609" actId="1076"/>
+          <ac:chgData name="Li, Hanchen F" userId="3aee791e-6a2d-4da7-a77b-fbdf7bf15886" providerId="ADAL" clId="{1EA8FAE0-933A-49DD-A724-68A18B8AE880}" dt="2026-03-26T13:32:48.377" v="4335" actId="1076"/>
           <ac:spMkLst>
             <pc:docMk/>
             <pc:sldMk cId="3601829480" sldId="260"/>
@@ -300,7 +372,7 @@
           </ac:spMkLst>
         </pc:spChg>
         <pc:spChg chg="add mod">
-          <ac:chgData name="Li, Hanchen F" userId="3aee791e-6a2d-4da7-a77b-fbdf7bf15886" providerId="ADAL" clId="{1EA8FAE0-933A-49DD-A724-68A18B8AE880}" dt="2026-03-26T13:04:05.896" v="3504" actId="1076"/>
+          <ac:chgData name="Li, Hanchen F" userId="3aee791e-6a2d-4da7-a77b-fbdf7bf15886" providerId="ADAL" clId="{1EA8FAE0-933A-49DD-A724-68A18B8AE880}" dt="2026-03-26T13:32:46.670" v="4334" actId="1076"/>
           <ac:spMkLst>
             <pc:docMk/>
             <pc:sldMk cId="3601829480" sldId="260"/>
@@ -308,15 +380,31 @@
           </ac:spMkLst>
         </pc:spChg>
         <pc:grpChg chg="add mod">
-          <ac:chgData name="Li, Hanchen F" userId="3aee791e-6a2d-4da7-a77b-fbdf7bf15886" providerId="ADAL" clId="{1EA8FAE0-933A-49DD-A724-68A18B8AE880}" dt="2026-03-24T15:21:01.696" v="3311" actId="1076"/>
+          <ac:chgData name="Li, Hanchen F" userId="3aee791e-6a2d-4da7-a77b-fbdf7bf15886" providerId="ADAL" clId="{1EA8FAE0-933A-49DD-A724-68A18B8AE880}" dt="2026-03-26T13:25:59.075" v="4100" actId="1076"/>
           <ac:grpSpMkLst>
             <pc:docMk/>
             <pc:sldMk cId="3601829480" sldId="260"/>
             <ac:grpSpMk id="7" creationId="{5E1CF8AE-04E4-25D5-94B9-BA18B3DE535B}"/>
           </ac:grpSpMkLst>
         </pc:grpChg>
+        <pc:grpChg chg="add del mod">
+          <ac:chgData name="Li, Hanchen F" userId="3aee791e-6a2d-4da7-a77b-fbdf7bf15886" providerId="ADAL" clId="{1EA8FAE0-933A-49DD-A724-68A18B8AE880}" dt="2026-03-26T13:21:03.978" v="3960" actId="478"/>
+          <ac:grpSpMkLst>
+            <pc:docMk/>
+            <pc:sldMk cId="3601829480" sldId="260"/>
+            <ac:grpSpMk id="16" creationId="{31E93DB2-57E0-AE69-FA3C-2AD5DFD83617}"/>
+          </ac:grpSpMkLst>
+        </pc:grpChg>
         <pc:grpChg chg="add mod">
-          <ac:chgData name="Li, Hanchen F" userId="3aee791e-6a2d-4da7-a77b-fbdf7bf15886" providerId="ADAL" clId="{1EA8FAE0-933A-49DD-A724-68A18B8AE880}" dt="2026-03-16T16:43:38.141" v="2911" actId="14861"/>
+          <ac:chgData name="Li, Hanchen F" userId="3aee791e-6a2d-4da7-a77b-fbdf7bf15886" providerId="ADAL" clId="{1EA8FAE0-933A-49DD-A724-68A18B8AE880}" dt="2026-03-26T13:33:55.887" v="4356" actId="1036"/>
+          <ac:grpSpMkLst>
+            <pc:docMk/>
+            <pc:sldMk cId="3601829480" sldId="260"/>
+            <ac:grpSpMk id="33" creationId="{20ED2499-AE85-B82D-A58F-C683778AB48C}"/>
+          </ac:grpSpMkLst>
+        </pc:grpChg>
+        <pc:grpChg chg="add mod">
+          <ac:chgData name="Li, Hanchen F" userId="3aee791e-6a2d-4da7-a77b-fbdf7bf15886" providerId="ADAL" clId="{1EA8FAE0-933A-49DD-A724-68A18B8AE880}" dt="2026-03-26T13:32:03.939" v="4324" actId="14100"/>
           <ac:grpSpMkLst>
             <pc:docMk/>
             <pc:sldMk cId="3601829480" sldId="260"/>
@@ -332,7 +420,7 @@
           </ac:grpSpMkLst>
         </pc:grpChg>
         <pc:grpChg chg="add mod">
-          <ac:chgData name="Li, Hanchen F" userId="3aee791e-6a2d-4da7-a77b-fbdf7bf15886" providerId="ADAL" clId="{1EA8FAE0-933A-49DD-A724-68A18B8AE880}" dt="2026-03-16T16:48:16.311" v="2966" actId="1076"/>
+          <ac:chgData name="Li, Hanchen F" userId="3aee791e-6a2d-4da7-a77b-fbdf7bf15886" providerId="ADAL" clId="{1EA8FAE0-933A-49DD-A724-68A18B8AE880}" dt="2026-03-26T13:31:44.716" v="4320" actId="1038"/>
           <ac:grpSpMkLst>
             <pc:docMk/>
             <pc:sldMk cId="3601829480" sldId="260"/>
@@ -340,7 +428,7 @@
           </ac:grpSpMkLst>
         </pc:grpChg>
         <pc:grpChg chg="add mod">
-          <ac:chgData name="Li, Hanchen F" userId="3aee791e-6a2d-4da7-a77b-fbdf7bf15886" providerId="ADAL" clId="{1EA8FAE0-933A-49DD-A724-68A18B8AE880}" dt="2026-03-26T13:08:15.717" v="3586" actId="14100"/>
+          <ac:chgData name="Li, Hanchen F" userId="3aee791e-6a2d-4da7-a77b-fbdf7bf15886" providerId="ADAL" clId="{1EA8FAE0-933A-49DD-A724-68A18B8AE880}" dt="2026-03-26T13:31:44.716" v="4320" actId="1038"/>
           <ac:grpSpMkLst>
             <pc:docMk/>
             <pc:sldMk cId="3601829480" sldId="260"/>
@@ -348,39 +436,119 @@
           </ac:grpSpMkLst>
         </pc:grpChg>
         <pc:grpChg chg="add del mod">
-          <ac:chgData name="Li, Hanchen F" userId="3aee791e-6a2d-4da7-a77b-fbdf7bf15886" providerId="ADAL" clId="{1EA8FAE0-933A-49DD-A724-68A18B8AE880}" dt="2026-03-26T13:04:53.163" v="3528" actId="478"/>
+          <ac:chgData name="Li, Hanchen F" userId="3aee791e-6a2d-4da7-a77b-fbdf7bf15886" providerId="ADAL" clId="{1EA8FAE0-933A-49DD-A724-68A18B8AE880}" dt="2026-03-26T13:31:44.716" v="4320" actId="1038"/>
           <ac:grpSpMkLst>
             <pc:docMk/>
             <pc:sldMk cId="3601829480" sldId="260"/>
             <ac:grpSpMk id="139" creationId="{38130447-C12B-A7B8-EB4C-5922EB5047DA}"/>
           </ac:grpSpMkLst>
         </pc:grpChg>
+        <pc:graphicFrameChg chg="add mod">
+          <ac:chgData name="Li, Hanchen F" userId="3aee791e-6a2d-4da7-a77b-fbdf7bf15886" providerId="ADAL" clId="{1EA8FAE0-933A-49DD-A724-68A18B8AE880}" dt="2026-03-26T13:18:42.848" v="3862"/>
+          <ac:graphicFrameMkLst>
+            <pc:docMk/>
+            <pc:sldMk cId="3601829480" sldId="260"/>
+            <ac:graphicFrameMk id="17" creationId="{976BF5A5-5A2D-833E-5B3E-AD8AC430D757}"/>
+          </ac:graphicFrameMkLst>
+        </pc:graphicFrameChg>
+        <pc:picChg chg="add del mod modCrop">
+          <ac:chgData name="Li, Hanchen F" userId="3aee791e-6a2d-4da7-a77b-fbdf7bf15886" providerId="ADAL" clId="{1EA8FAE0-933A-49DD-A724-68A18B8AE880}" dt="2026-03-26T13:15:39.466" v="3625" actId="478"/>
+          <ac:picMkLst>
+            <pc:docMk/>
+            <pc:sldMk cId="3601829480" sldId="260"/>
+            <ac:picMk id="2" creationId="{9866F34D-FB44-E6DA-255C-A942F1DCA222}"/>
+          </ac:picMkLst>
+        </pc:picChg>
+        <pc:picChg chg="add mod modCrop">
+          <ac:chgData name="Li, Hanchen F" userId="3aee791e-6a2d-4da7-a77b-fbdf7bf15886" providerId="ADAL" clId="{1EA8FAE0-933A-49DD-A724-68A18B8AE880}" dt="2026-03-26T13:15:38.124" v="3624" actId="1076"/>
+          <ac:picMkLst>
+            <pc:docMk/>
+            <pc:sldMk cId="3601829480" sldId="260"/>
+            <ac:picMk id="3" creationId="{DD4B471A-F30C-2B5B-7B4F-32BA58375C13}"/>
+          </ac:picMkLst>
+        </pc:picChg>
         <pc:picChg chg="add mod ord modCrop">
-          <ac:chgData name="Li, Hanchen F" userId="3aee791e-6a2d-4da7-a77b-fbdf7bf15886" providerId="ADAL" clId="{1EA8FAE0-933A-49DD-A724-68A18B8AE880}" dt="2026-03-26T13:10:15.464" v="3611" actId="1036"/>
+          <ac:chgData name="Li, Hanchen F" userId="3aee791e-6a2d-4da7-a77b-fbdf7bf15886" providerId="ADAL" clId="{1EA8FAE0-933A-49DD-A724-68A18B8AE880}" dt="2026-03-26T13:33:52.797" v="4351" actId="1036"/>
           <ac:picMkLst>
             <pc:docMk/>
             <pc:sldMk cId="3601829480" sldId="260"/>
             <ac:picMk id="4" creationId="{10BF806C-AF9E-4902-3729-7AB1BBB09083}"/>
           </ac:picMkLst>
         </pc:picChg>
+        <pc:picChg chg="add mod ord modCrop">
+          <ac:chgData name="Li, Hanchen F" userId="3aee791e-6a2d-4da7-a77b-fbdf7bf15886" providerId="ADAL" clId="{1EA8FAE0-933A-49DD-A724-68A18B8AE880}" dt="2026-03-26T13:17:17.561" v="3828" actId="164"/>
+          <ac:picMkLst>
+            <pc:docMk/>
+            <pc:sldMk cId="3601829480" sldId="260"/>
+            <ac:picMk id="14" creationId="{5A7D5903-4B54-85ED-7CD2-C226CD4E06CF}"/>
+          </ac:picMkLst>
+        </pc:picChg>
+        <pc:picChg chg="add mod ord modCrop">
+          <ac:chgData name="Li, Hanchen F" userId="3aee791e-6a2d-4da7-a77b-fbdf7bf15886" providerId="ADAL" clId="{1EA8FAE0-933A-49DD-A724-68A18B8AE880}" dt="2026-03-26T13:17:17.561" v="3828" actId="164"/>
+          <ac:picMkLst>
+            <pc:docMk/>
+            <pc:sldMk cId="3601829480" sldId="260"/>
+            <ac:picMk id="15" creationId="{2E68AC4C-50D6-F7D4-51CD-71C9684A66C8}"/>
+          </ac:picMkLst>
+        </pc:picChg>
+        <pc:picChg chg="add mod">
+          <ac:chgData name="Li, Hanchen F" userId="3aee791e-6a2d-4da7-a77b-fbdf7bf15886" providerId="ADAL" clId="{1EA8FAE0-933A-49DD-A724-68A18B8AE880}" dt="2026-03-26T13:24:05.215" v="4074" actId="1036"/>
+          <ac:picMkLst>
+            <pc:docMk/>
+            <pc:sldMk cId="3601829480" sldId="260"/>
+            <ac:picMk id="19" creationId="{C14D50C9-77A2-C818-80F8-3A1CEE69FAF3}"/>
+          </ac:picMkLst>
+        </pc:picChg>
+        <pc:picChg chg="add del mod">
+          <ac:chgData name="Li, Hanchen F" userId="3aee791e-6a2d-4da7-a77b-fbdf7bf15886" providerId="ADAL" clId="{1EA8FAE0-933A-49DD-A724-68A18B8AE880}" dt="2026-03-26T13:21:13.134" v="3964" actId="478"/>
+          <ac:picMkLst>
+            <pc:docMk/>
+            <pc:sldMk cId="3601829480" sldId="260"/>
+            <ac:picMk id="21" creationId="{24425FB8-C96E-8267-A35E-4934B250672D}"/>
+          </ac:picMkLst>
+        </pc:picChg>
+        <pc:picChg chg="add del mod">
+          <ac:chgData name="Li, Hanchen F" userId="3aee791e-6a2d-4da7-a77b-fbdf7bf15886" providerId="ADAL" clId="{1EA8FAE0-933A-49DD-A724-68A18B8AE880}" dt="2026-03-26T13:20:56.532" v="3956" actId="478"/>
+          <ac:picMkLst>
+            <pc:docMk/>
+            <pc:sldMk cId="3601829480" sldId="260"/>
+            <ac:picMk id="23" creationId="{1B6A3456-8EA2-E275-493C-C377ECD86BBE}"/>
+          </ac:picMkLst>
+        </pc:picChg>
+        <pc:picChg chg="add del mod">
+          <ac:chgData name="Li, Hanchen F" userId="3aee791e-6a2d-4da7-a77b-fbdf7bf15886" providerId="ADAL" clId="{1EA8FAE0-933A-49DD-A724-68A18B8AE880}" dt="2026-03-26T13:21:39.877" v="3974" actId="478"/>
+          <ac:picMkLst>
+            <pc:docMk/>
+            <pc:sldMk cId="3601829480" sldId="260"/>
+            <ac:picMk id="26" creationId="{4DFD5605-17AA-50C3-6E21-AAC432DEE4D5}"/>
+          </ac:picMkLst>
+        </pc:picChg>
         <pc:picChg chg="add mod modCrop">
-          <ac:chgData name="Li, Hanchen F" userId="3aee791e-6a2d-4da7-a77b-fbdf7bf15886" providerId="ADAL" clId="{1EA8FAE0-933A-49DD-A724-68A18B8AE880}" dt="2026-03-26T13:09:09.324" v="3601" actId="1076"/>
+          <ac:chgData name="Li, Hanchen F" userId="3aee791e-6a2d-4da7-a77b-fbdf7bf15886" providerId="ADAL" clId="{1EA8FAE0-933A-49DD-A724-68A18B8AE880}" dt="2026-03-26T13:31:44.716" v="4320" actId="1038"/>
           <ac:picMkLst>
             <pc:docMk/>
             <pc:sldMk cId="3601829480" sldId="260"/>
             <ac:picMk id="37" creationId="{C09BB204-9C6C-3C04-182A-FEBA2E4B5413}"/>
           </ac:picMkLst>
         </pc:picChg>
-        <pc:picChg chg="add mod modCrop">
-          <ac:chgData name="Li, Hanchen F" userId="3aee791e-6a2d-4da7-a77b-fbdf7bf15886" providerId="ADAL" clId="{1EA8FAE0-933A-49DD-A724-68A18B8AE880}" dt="2026-03-26T13:10:16.619" v="3612" actId="1036"/>
+        <pc:picChg chg="add del mod modCrop">
+          <ac:chgData name="Li, Hanchen F" userId="3aee791e-6a2d-4da7-a77b-fbdf7bf15886" providerId="ADAL" clId="{1EA8FAE0-933A-49DD-A724-68A18B8AE880}" dt="2026-03-26T13:17:17.561" v="3828" actId="164"/>
           <ac:picMkLst>
             <pc:docMk/>
             <pc:sldMk cId="3601829480" sldId="260"/>
             <ac:picMk id="42" creationId="{B632C22F-E55E-2C15-352E-71B3B3268CCD}"/>
           </ac:picMkLst>
         </pc:picChg>
+        <pc:picChg chg="add del">
+          <ac:chgData name="Li, Hanchen F" userId="3aee791e-6a2d-4da7-a77b-fbdf7bf15886" providerId="ADAL" clId="{1EA8FAE0-933A-49DD-A724-68A18B8AE880}" dt="2026-03-26T13:29:04.195" v="4277" actId="478"/>
+          <ac:picMkLst>
+            <pc:docMk/>
+            <pc:sldMk cId="3601829480" sldId="260"/>
+            <ac:picMk id="58" creationId="{81292912-722E-FDE6-49BF-1AC9D9FEC441}"/>
+          </ac:picMkLst>
+        </pc:picChg>
         <pc:picChg chg="add mod modCrop">
-          <ac:chgData name="Li, Hanchen F" userId="3aee791e-6a2d-4da7-a77b-fbdf7bf15886" providerId="ADAL" clId="{1EA8FAE0-933A-49DD-A724-68A18B8AE880}" dt="2026-03-26T13:07:00.904" v="3568" actId="1036"/>
+          <ac:chgData name="Li, Hanchen F" userId="3aee791e-6a2d-4da7-a77b-fbdf7bf15886" providerId="ADAL" clId="{1EA8FAE0-933A-49DD-A724-68A18B8AE880}" dt="2026-03-26T13:31:44.716" v="4320" actId="1038"/>
           <ac:picMkLst>
             <pc:docMk/>
             <pc:sldMk cId="3601829480" sldId="260"/>
@@ -404,7 +572,7 @@
           </ac:cxnSpMkLst>
         </pc:cxnChg>
         <pc:cxnChg chg="add mod">
-          <ac:chgData name="Li, Hanchen F" userId="3aee791e-6a2d-4da7-a77b-fbdf7bf15886" providerId="ADAL" clId="{1EA8FAE0-933A-49DD-A724-68A18B8AE880}" dt="2026-03-26T13:07:29.391" v="3577" actId="1076"/>
+          <ac:chgData name="Li, Hanchen F" userId="3aee791e-6a2d-4da7-a77b-fbdf7bf15886" providerId="ADAL" clId="{1EA8FAE0-933A-49DD-A724-68A18B8AE880}" dt="2026-03-26T13:28:35.173" v="4274" actId="692"/>
           <ac:cxnSpMkLst>
             <pc:docMk/>
             <pc:sldMk cId="3601829480" sldId="260"/>
@@ -412,7 +580,7 @@
           </ac:cxnSpMkLst>
         </pc:cxnChg>
         <pc:cxnChg chg="add mod">
-          <ac:chgData name="Li, Hanchen F" userId="3aee791e-6a2d-4da7-a77b-fbdf7bf15886" providerId="ADAL" clId="{1EA8FAE0-933A-49DD-A724-68A18B8AE880}" dt="2026-03-26T13:07:40.789" v="3581" actId="1076"/>
+          <ac:chgData name="Li, Hanchen F" userId="3aee791e-6a2d-4da7-a77b-fbdf7bf15886" providerId="ADAL" clId="{1EA8FAE0-933A-49DD-A724-68A18B8AE880}" dt="2026-03-26T13:31:39.281" v="4311" actId="1038"/>
           <ac:cxnSpMkLst>
             <pc:docMk/>
             <pc:sldMk cId="3601829480" sldId="260"/>
@@ -420,7 +588,7 @@
           </ac:cxnSpMkLst>
         </pc:cxnChg>
         <pc:cxnChg chg="add mod">
-          <ac:chgData name="Li, Hanchen F" userId="3aee791e-6a2d-4da7-a77b-fbdf7bf15886" providerId="ADAL" clId="{1EA8FAE0-933A-49DD-A724-68A18B8AE880}" dt="2026-03-26T13:09:37.916" v="3607" actId="14100"/>
+          <ac:chgData name="Li, Hanchen F" userId="3aee791e-6a2d-4da7-a77b-fbdf7bf15886" providerId="ADAL" clId="{1EA8FAE0-933A-49DD-A724-68A18B8AE880}" dt="2026-03-26T13:32:28.904" v="4330" actId="14100"/>
           <ac:cxnSpMkLst>
             <pc:docMk/>
             <pc:sldMk cId="3601829480" sldId="260"/>
@@ -428,7 +596,7 @@
           </ac:cxnSpMkLst>
         </pc:cxnChg>
         <pc:cxnChg chg="add mod">
-          <ac:chgData name="Li, Hanchen F" userId="3aee791e-6a2d-4da7-a77b-fbdf7bf15886" providerId="ADAL" clId="{1EA8FAE0-933A-49DD-A724-68A18B8AE880}" dt="2026-03-26T13:09:28.908" v="3604" actId="14100"/>
+          <ac:chgData name="Li, Hanchen F" userId="3aee791e-6a2d-4da7-a77b-fbdf7bf15886" providerId="ADAL" clId="{1EA8FAE0-933A-49DD-A724-68A18B8AE880}" dt="2026-03-26T13:33:00.621" v="4345" actId="14100"/>
           <ac:cxnSpMkLst>
             <pc:docMk/>
             <pc:sldMk cId="3601829480" sldId="260"/>
@@ -436,7 +604,7 @@
           </ac:cxnSpMkLst>
         </pc:cxnChg>
         <pc:cxnChg chg="mod topLvl">
-          <ac:chgData name="Li, Hanchen F" userId="3aee791e-6a2d-4da7-a77b-fbdf7bf15886" providerId="ADAL" clId="{1EA8FAE0-933A-49DD-A724-68A18B8AE880}" dt="2026-03-26T13:08:17.514" v="3587" actId="14100"/>
+          <ac:chgData name="Li, Hanchen F" userId="3aee791e-6a2d-4da7-a77b-fbdf7bf15886" providerId="ADAL" clId="{1EA8FAE0-933A-49DD-A724-68A18B8AE880}" dt="2026-03-26T13:32:37.083" v="4333" actId="1076"/>
           <ac:cxnSpMkLst>
             <pc:docMk/>
             <pc:sldMk cId="3601829480" sldId="260"/>
@@ -452,7 +620,7 @@
           </ac:cxnSpMkLst>
         </pc:cxnChg>
         <pc:cxnChg chg="mod">
-          <ac:chgData name="Li, Hanchen F" userId="3aee791e-6a2d-4da7-a77b-fbdf7bf15886" providerId="ADAL" clId="{1EA8FAE0-933A-49DD-A724-68A18B8AE880}" dt="2026-03-26T13:03:17.430" v="3491" actId="14100"/>
+          <ac:chgData name="Li, Hanchen F" userId="3aee791e-6a2d-4da7-a77b-fbdf7bf15886" providerId="ADAL" clId="{1EA8FAE0-933A-49DD-A724-68A18B8AE880}" dt="2026-03-26T13:30:24.244" v="4291" actId="14100"/>
           <ac:cxnSpMkLst>
             <pc:docMk/>
             <pc:sldMk cId="3601829480" sldId="260"/>
@@ -460,7 +628,7 @@
           </ac:cxnSpMkLst>
         </pc:cxnChg>
         <pc:cxnChg chg="mod">
-          <ac:chgData name="Li, Hanchen F" userId="3aee791e-6a2d-4da7-a77b-fbdf7bf15886" providerId="ADAL" clId="{1EA8FAE0-933A-49DD-A724-68A18B8AE880}" dt="2026-03-26T13:04:03.724" v="3503" actId="14100"/>
+          <ac:chgData name="Li, Hanchen F" userId="3aee791e-6a2d-4da7-a77b-fbdf7bf15886" providerId="ADAL" clId="{1EA8FAE0-933A-49DD-A724-68A18B8AE880}" dt="2026-03-26T13:29:12.471" v="4279" actId="692"/>
           <ac:cxnSpMkLst>
             <pc:docMk/>
             <pc:sldMk cId="3601829480" sldId="260"/>
@@ -468,7 +636,7 @@
           </ac:cxnSpMkLst>
         </pc:cxnChg>
         <pc:cxnChg chg="mod">
-          <ac:chgData name="Li, Hanchen F" userId="3aee791e-6a2d-4da7-a77b-fbdf7bf15886" providerId="ADAL" clId="{1EA8FAE0-933A-49DD-A724-68A18B8AE880}" dt="2026-03-26T13:03:00.988" v="3488" actId="14100"/>
+          <ac:chgData name="Li, Hanchen F" userId="3aee791e-6a2d-4da7-a77b-fbdf7bf15886" providerId="ADAL" clId="{1EA8FAE0-933A-49DD-A724-68A18B8AE880}" dt="2026-03-26T13:30:20.067" v="4290" actId="14100"/>
           <ac:cxnSpMkLst>
             <pc:docMk/>
             <pc:sldMk cId="3601829480" sldId="260"/>
@@ -476,7 +644,7 @@
           </ac:cxnSpMkLst>
         </pc:cxnChg>
         <pc:cxnChg chg="mod">
-          <ac:chgData name="Li, Hanchen F" userId="3aee791e-6a2d-4da7-a77b-fbdf7bf15886" providerId="ADAL" clId="{1EA8FAE0-933A-49DD-A724-68A18B8AE880}" dt="2026-03-26T13:08:38.650" v="3588" actId="14100"/>
+          <ac:chgData name="Li, Hanchen F" userId="3aee791e-6a2d-4da7-a77b-fbdf7bf15886" providerId="ADAL" clId="{1EA8FAE0-933A-49DD-A724-68A18B8AE880}" dt="2026-03-26T13:30:00.345" v="4286" actId="14100"/>
           <ac:cxnSpMkLst>
             <pc:docMk/>
             <pc:sldMk cId="3601829480" sldId="260"/>
@@ -484,7 +652,7 @@
           </ac:cxnSpMkLst>
         </pc:cxnChg>
         <pc:cxnChg chg="mod topLvl">
-          <ac:chgData name="Li, Hanchen F" userId="3aee791e-6a2d-4da7-a77b-fbdf7bf15886" providerId="ADAL" clId="{1EA8FAE0-933A-49DD-A724-68A18B8AE880}" dt="2026-03-26T13:04:53.163" v="3528" actId="478"/>
+          <ac:chgData name="Li, Hanchen F" userId="3aee791e-6a2d-4da7-a77b-fbdf7bf15886" providerId="ADAL" clId="{1EA8FAE0-933A-49DD-A724-68A18B8AE880}" dt="2026-03-26T13:31:30.508" v="4309" actId="14100"/>
           <ac:cxnSpMkLst>
             <pc:docMk/>
             <pc:sldMk cId="3601829480" sldId="260"/>
@@ -492,13 +660,44 @@
           </ac:cxnSpMkLst>
         </pc:cxnChg>
         <pc:cxnChg chg="add del mod topLvl">
-          <ac:chgData name="Li, Hanchen F" userId="3aee791e-6a2d-4da7-a77b-fbdf7bf15886" providerId="ADAL" clId="{1EA8FAE0-933A-49DD-A724-68A18B8AE880}" dt="2026-03-26T13:06:41.473" v="3550" actId="14100"/>
+          <ac:chgData name="Li, Hanchen F" userId="3aee791e-6a2d-4da7-a77b-fbdf7bf15886" providerId="ADAL" clId="{1EA8FAE0-933A-49DD-A724-68A18B8AE880}" dt="2026-03-26T13:30:46.073" v="4297" actId="14100"/>
           <ac:cxnSpMkLst>
             <pc:docMk/>
             <pc:sldMk cId="3601829480" sldId="260"/>
             <ac:cxnSpMk id="141" creationId="{532268C6-1CF2-232B-3609-71DF18EADE88}"/>
           </ac:cxnSpMkLst>
         </pc:cxnChg>
+      </pc:sldChg>
+      <pc:sldChg chg="addSp modSp add del mod">
+        <pc:chgData name="Li, Hanchen F" userId="3aee791e-6a2d-4da7-a77b-fbdf7bf15886" providerId="ADAL" clId="{1EA8FAE0-933A-49DD-A724-68A18B8AE880}" dt="2026-03-26T13:31:23.438" v="4308" actId="2696"/>
+        <pc:sldMkLst>
+          <pc:docMk/>
+          <pc:sldMk cId="4198086889" sldId="261"/>
+        </pc:sldMkLst>
+        <pc:spChg chg="mod">
+          <ac:chgData name="Li, Hanchen F" userId="3aee791e-6a2d-4da7-a77b-fbdf7bf15886" providerId="ADAL" clId="{1EA8FAE0-933A-49DD-A724-68A18B8AE880}" dt="2026-03-26T13:18:58.412" v="3865" actId="1076"/>
+          <ac:spMkLst>
+            <pc:docMk/>
+            <pc:sldMk cId="4198086889" sldId="261"/>
+            <ac:spMk id="19" creationId="{1C322E39-EBDE-00A7-8BEE-41FD7282A241}"/>
+          </ac:spMkLst>
+        </pc:spChg>
+        <pc:graphicFrameChg chg="add mod">
+          <ac:chgData name="Li, Hanchen F" userId="3aee791e-6a2d-4da7-a77b-fbdf7bf15886" providerId="ADAL" clId="{1EA8FAE0-933A-49DD-A724-68A18B8AE880}" dt="2026-03-26T13:19:02.527" v="3867"/>
+          <ac:graphicFrameMkLst>
+            <pc:docMk/>
+            <pc:sldMk cId="4198086889" sldId="261"/>
+            <ac:graphicFrameMk id="5" creationId="{C16F8C49-4DE6-0F99-F1EB-20F283864272}"/>
+          </ac:graphicFrameMkLst>
+        </pc:graphicFrameChg>
+        <pc:graphicFrameChg chg="mod">
+          <ac:chgData name="Li, Hanchen F" userId="3aee791e-6a2d-4da7-a77b-fbdf7bf15886" providerId="ADAL" clId="{1EA8FAE0-933A-49DD-A724-68A18B8AE880}" dt="2026-03-26T13:19:13.306" v="3869" actId="1076"/>
+          <ac:graphicFrameMkLst>
+            <pc:docMk/>
+            <pc:sldMk cId="4198086889" sldId="261"/>
+            <ac:graphicFrameMk id="12" creationId="{518CC744-80E1-EF5A-1834-9FF226FC9A4A}"/>
+          </ac:graphicFrameMkLst>
+        </pc:graphicFrameChg>
       </pc:sldChg>
     </pc:docChg>
   </pc:docChgLst>
@@ -3593,6 +3792,13 @@
           </p:nvPr>
         </p:nvSpPr>
         <p:spPr/>
+        <p:txBody>
+          <a:bodyPr/>
+          <a:lstStyle/>
+          <a:p>
+            <a:endParaRPr lang="en-GB"/>
+          </a:p>
+        </p:txBody>
       </p:sp>
       <p:sp>
         <p:nvSpPr>
@@ -3689,6 +3895,13 @@
           </p:nvPr>
         </p:nvSpPr>
         <p:spPr/>
+        <p:txBody>
+          <a:bodyPr/>
+          <a:lstStyle/>
+          <a:p>
+            <a:endParaRPr lang="en-GB"/>
+          </a:p>
+        </p:txBody>
       </p:sp>
       <p:sp>
         <p:nvSpPr>
@@ -3797,6 +4010,13 @@
           </p:nvPr>
         </p:nvSpPr>
         <p:spPr/>
+        <p:txBody>
+          <a:bodyPr/>
+          <a:lstStyle/>
+          <a:p>
+            <a:endParaRPr lang="en-GB"/>
+          </a:p>
+        </p:txBody>
       </p:sp>
       <p:sp>
         <p:nvSpPr>
@@ -10388,7 +10608,7 @@
         </p:blipFill>
         <p:spPr>
           <a:xfrm>
-            <a:off x="466188" y="1762324"/>
+            <a:off x="585133" y="1591336"/>
             <a:ext cx="6694218" cy="3988798"/>
           </a:xfrm>
           <a:prstGeom prst="rect">
@@ -10418,52 +10638,15 @@
               </a:ext>
             </a:extLst>
           </a:blip>
-          <a:srcRect t="3077" r="15249" b="3818"/>
+          <a:srcRect t="3077" r="16671" b="2658"/>
           <a:stretch>
             <a:fillRect/>
           </a:stretch>
         </p:blipFill>
         <p:spPr>
           <a:xfrm>
-            <a:off x="9057019" y="337931"/>
-            <a:ext cx="3130353" cy="6113670"/>
-          </a:xfrm>
-          <a:prstGeom prst="rect">
-            <a:avLst/>
-          </a:prstGeom>
-        </p:spPr>
-      </p:pic>
-      <p:pic>
-        <p:nvPicPr>
-          <p:cNvPr id="42" name="图片 41">
-            <a:extLst>
-              <a:ext uri="{FF2B5EF4-FFF2-40B4-BE49-F238E27FC236}">
-                <a16:creationId xmlns:a16="http://schemas.microsoft.com/office/drawing/2014/main" id="{B632C22F-E55E-2C15-352E-71B3B3268CCD}"/>
-              </a:ext>
-            </a:extLst>
-          </p:cNvPr>
-          <p:cNvPicPr>
-            <a:picLocks noChangeAspect="1"/>
-          </p:cNvPicPr>
-          <p:nvPr/>
-        </p:nvPicPr>
-        <p:blipFill>
-          <a:blip r:embed="rId5">
-            <a:extLst>
-              <a:ext uri="{28A0092B-C50C-407E-A947-70E740481C1C}">
-                <a14:useLocalDpi xmlns:a14="http://schemas.microsoft.com/office/drawing/2010/main" val="0"/>
-              </a:ext>
-            </a:extLst>
-          </a:blip>
-          <a:srcRect l="-318" t="981" r="80427" b="69004"/>
-          <a:stretch>
-            <a:fillRect/>
-          </a:stretch>
-        </p:blipFill>
-        <p:spPr>
-          <a:xfrm>
-            <a:off x="5266560" y="386633"/>
-            <a:ext cx="1658880" cy="1251384"/>
+            <a:off x="9114169" y="337930"/>
+            <a:ext cx="3077831" cy="6189859"/>
           </a:xfrm>
           <a:prstGeom prst="rect">
             <a:avLst/>
@@ -10557,10 +10740,10 @@
         </p:nvGrpSpPr>
         <p:grpSpPr>
           <a:xfrm>
-            <a:off x="9581056" y="5385700"/>
-            <a:ext cx="2065351" cy="743826"/>
-            <a:chOff x="9581056" y="5385700"/>
-            <a:chExt cx="2065351" cy="743826"/>
+            <a:off x="9274437" y="5369835"/>
+            <a:ext cx="2355587" cy="540887"/>
+            <a:chOff x="9205466" y="5370593"/>
+            <a:chExt cx="2367239" cy="515910"/>
           </a:xfrm>
           <a:effectLst>
             <a:outerShdw blurRad="63500" sx="101000" sy="101000" algn="ctr" rotWithShape="0">
@@ -10584,8 +10767,8 @@
           </p:nvCxnSpPr>
           <p:spPr>
             <a:xfrm flipV="1">
-              <a:off x="11106150" y="5385700"/>
-              <a:ext cx="540257" cy="457665"/>
+              <a:off x="11113244" y="5370593"/>
+              <a:ext cx="459461" cy="247887"/>
             </a:xfrm>
             <a:prstGeom prst="straightConnector1">
               <a:avLst/>
@@ -10629,8 +10812,8 @@
           </p:nvCxnSpPr>
           <p:spPr>
             <a:xfrm flipH="1">
-              <a:off x="9581056" y="5843365"/>
-              <a:ext cx="1541314" cy="286161"/>
+              <a:off x="9205466" y="5618480"/>
+              <a:ext cx="1920543" cy="268024"/>
             </a:xfrm>
             <a:prstGeom prst="line">
               <a:avLst/>
@@ -10671,8 +10854,8 @@
         </p:nvSpPr>
         <p:spPr>
           <a:xfrm>
-            <a:off x="7363012" y="5823032"/>
-            <a:ext cx="2218044" cy="612988"/>
+            <a:off x="7637549" y="5369830"/>
+            <a:ext cx="1636887" cy="1081771"/>
           </a:xfrm>
           <a:prstGeom prst="rect">
             <a:avLst/>
@@ -10685,17 +10868,15 @@
           </a:bodyPr>
           <a:lstStyle/>
           <a:p>
-            <a:pPr>
+            <a:pPr algn="r">
               <a:lnSpc>
                 <a:spcPct val="110000"/>
               </a:lnSpc>
             </a:pPr>
             <a:r>
-              <a:rPr lang="en-US" altLang="zh-CN" sz="1600" dirty="0">
+              <a:rPr lang="en-US" altLang="zh-CN" sz="2000" dirty="0">
                 <a:ln w="3175">
-                  <a:solidFill>
-                    <a:srgbClr val="D96558"/>
-                  </a:solidFill>
+                  <a:noFill/>
                 </a:ln>
                 <a:solidFill>
                   <a:srgbClr val="D96558"/>
@@ -10703,13 +10884,31 @@
                 <a:latin typeface="Helvetica" panose="020B0604020202020204" pitchFamily="34" charset="0"/>
                 <a:cs typeface="Helvetica" panose="020B0604020202020204" pitchFamily="34" charset="0"/>
               </a:rPr>
-              <a:t>constant‑temperature hot‑wire anemometer</a:t>
+              <a:t>constant-</a:t>
             </a:r>
-            <a:endParaRPr lang="zh-CN" altLang="en-US" sz="1600" dirty="0">
-              <a:ln w="3175">
+          </a:p>
+          <a:p>
+            <a:pPr algn="r">
+              <a:lnSpc>
+                <a:spcPct val="110000"/>
+              </a:lnSpc>
+            </a:pPr>
+            <a:r>
+              <a:rPr lang="en-US" altLang="zh-CN" sz="2000" dirty="0">
+                <a:ln w="3175">
+                  <a:noFill/>
+                </a:ln>
                 <a:solidFill>
                   <a:srgbClr val="D96558"/>
                 </a:solidFill>
+                <a:latin typeface="Helvetica" panose="020B0604020202020204" pitchFamily="34" charset="0"/>
+                <a:cs typeface="Helvetica" panose="020B0604020202020204" pitchFamily="34" charset="0"/>
+              </a:rPr>
+              <a:t>temperature HWA</a:t>
+            </a:r>
+            <a:endParaRPr lang="zh-CN" altLang="en-US" sz="2000" dirty="0">
+              <a:ln w="3175">
+                <a:noFill/>
               </a:ln>
               <a:solidFill>
                 <a:srgbClr val="D96558"/>
@@ -10734,8 +10933,8 @@
         </p:nvSpPr>
         <p:spPr>
           <a:xfrm>
-            <a:off x="8067320" y="4057986"/>
-            <a:ext cx="1637381" cy="830997"/>
+            <a:off x="7918919" y="4285933"/>
+            <a:ext cx="2004316" cy="707886"/>
           </a:xfrm>
           <a:prstGeom prst="rect">
             <a:avLst/>
@@ -10748,23 +10947,11 @@
           </a:bodyPr>
           <a:lstStyle/>
           <a:p>
-            <a:endParaRPr lang="en-GB" altLang="zh-CN" sz="1600" dirty="0">
-              <a:ln w="3175">
-                <a:solidFill>
-                  <a:schemeClr val="tx1"/>
-                </a:solidFill>
-              </a:ln>
-              <a:latin typeface="Helvetica" panose="020B0604020202020204" pitchFamily="34" charset="0"/>
-              <a:cs typeface="Helvetica" panose="020B0604020202020204" pitchFamily="34" charset="0"/>
-            </a:endParaRPr>
-          </a:p>
-          <a:p>
+            <a:pPr algn="r"/>
             <a:r>
-              <a:rPr lang="en-GB" altLang="zh-CN" sz="1600" dirty="0">
+              <a:rPr lang="en-GB" altLang="zh-CN" sz="2000" dirty="0">
                 <a:ln w="3175">
-                  <a:solidFill>
-                    <a:schemeClr val="tx1"/>
-                  </a:solidFill>
+                  <a:noFill/>
                 </a:ln>
                 <a:latin typeface="Helvetica" panose="020B0604020202020204" pitchFamily="34" charset="0"/>
                 <a:cs typeface="Helvetica" panose="020B0604020202020204" pitchFamily="34" charset="0"/>
@@ -10773,23 +10960,20 @@
             </a:r>
           </a:p>
           <a:p>
+            <a:pPr algn="r"/>
             <a:r>
-              <a:rPr lang="en-GB" altLang="zh-CN" sz="1600" dirty="0">
+              <a:rPr lang="en-GB" altLang="zh-CN" sz="2000" dirty="0">
                 <a:ln w="3175">
-                  <a:solidFill>
-                    <a:schemeClr val="tx1"/>
-                  </a:solidFill>
+                  <a:noFill/>
                 </a:ln>
                 <a:latin typeface="Helvetica" panose="020B0604020202020204" pitchFamily="34" charset="0"/>
                 <a:cs typeface="Helvetica" panose="020B0604020202020204" pitchFamily="34" charset="0"/>
               </a:rPr>
               <a:t>custom support</a:t>
             </a:r>
-            <a:endParaRPr lang="en-GB" sz="1600" dirty="0">
+            <a:endParaRPr lang="en-GB" sz="2000" dirty="0">
               <a:ln w="3175">
-                <a:solidFill>
-                  <a:schemeClr val="tx1"/>
-                </a:solidFill>
+                <a:noFill/>
               </a:ln>
               <a:latin typeface="Helvetica" panose="020B0604020202020204" pitchFamily="34" charset="0"/>
               <a:cs typeface="Helvetica" panose="020B0604020202020204" pitchFamily="34" charset="0"/>
@@ -10813,8 +10997,8 @@
         </p:nvCxnSpPr>
         <p:spPr>
           <a:xfrm flipV="1">
-            <a:off x="9704701" y="4342384"/>
-            <a:ext cx="1843815" cy="145619"/>
+            <a:off x="9943873" y="4477079"/>
+            <a:ext cx="1645195" cy="162797"/>
           </a:xfrm>
           <a:prstGeom prst="straightConnector1">
             <a:avLst/>
@@ -10855,10 +11039,10 @@
         </p:nvGrpSpPr>
         <p:grpSpPr>
           <a:xfrm>
-            <a:off x="9493250" y="1929324"/>
-            <a:ext cx="1530350" cy="1167248"/>
-            <a:chOff x="10271256" y="5282096"/>
-            <a:chExt cx="1530350" cy="1167248"/>
+            <a:off x="9504803" y="1853628"/>
+            <a:ext cx="1555709" cy="1207371"/>
+            <a:chOff x="10245897" y="5241973"/>
+            <a:chExt cx="1555709" cy="1207371"/>
           </a:xfrm>
           <a:effectLst>
             <a:outerShdw blurRad="63500" sx="101000" sy="101000" algn="ctr" rotWithShape="0">
@@ -10882,15 +11066,15 @@
           </p:nvCxnSpPr>
           <p:spPr>
             <a:xfrm>
-              <a:off x="11441773" y="5379052"/>
-              <a:ext cx="359833" cy="1070292"/>
+              <a:off x="11428544" y="5379052"/>
+              <a:ext cx="373062" cy="1070292"/>
             </a:xfrm>
             <a:prstGeom prst="straightConnector1">
               <a:avLst/>
             </a:prstGeom>
             <a:ln w="31750">
               <a:solidFill>
-                <a:srgbClr val="B43970"/>
+                <a:srgbClr val="692F7C"/>
               </a:solidFill>
               <a:tailEnd type="triangle"/>
             </a:ln>
@@ -10926,15 +11110,15 @@
           </p:nvCxnSpPr>
           <p:spPr>
             <a:xfrm flipH="1" flipV="1">
-              <a:off x="10271256" y="5282096"/>
-              <a:ext cx="1170517" cy="96956"/>
+              <a:off x="10245897" y="5241973"/>
+              <a:ext cx="1195876" cy="137079"/>
             </a:xfrm>
             <a:prstGeom prst="line">
               <a:avLst/>
             </a:prstGeom>
             <a:ln w="31750">
               <a:solidFill>
-                <a:srgbClr val="B43970"/>
+                <a:srgbClr val="692F7C"/>
               </a:solidFill>
             </a:ln>
           </p:spPr>
@@ -10968,10 +11152,10 @@
         </p:nvGrpSpPr>
         <p:grpSpPr>
           <a:xfrm>
-            <a:off x="8915400" y="867238"/>
-            <a:ext cx="2741839" cy="2403688"/>
-            <a:chOff x="9541006" y="4067530"/>
-            <a:chExt cx="2741839" cy="2398556"/>
+            <a:off x="9597276" y="797735"/>
+            <a:ext cx="2117113" cy="2473193"/>
+            <a:chOff x="10165732" y="3998174"/>
+            <a:chExt cx="2117113" cy="2467912"/>
           </a:xfrm>
           <a:effectLst>
             <a:outerShdw blurRad="63500" sx="101000" sy="101000" algn="ctr" rotWithShape="0">
@@ -10995,8 +11179,8 @@
           </p:nvCxnSpPr>
           <p:spPr>
             <a:xfrm>
-              <a:off x="11670316" y="4531568"/>
-              <a:ext cx="612529" cy="1934518"/>
+              <a:off x="11593644" y="4301515"/>
+              <a:ext cx="689201" cy="2164571"/>
             </a:xfrm>
             <a:prstGeom prst="straightConnector1">
               <a:avLst/>
@@ -11039,8 +11223,8 @@
           </p:nvCxnSpPr>
           <p:spPr>
             <a:xfrm flipH="1" flipV="1">
-              <a:off x="9541006" y="4067530"/>
-              <a:ext cx="2138096" cy="464038"/>
+              <a:off x="10165732" y="3998174"/>
+              <a:ext cx="1441141" cy="315874"/>
             </a:xfrm>
             <a:prstGeom prst="line">
               <a:avLst/>
@@ -11081,8 +11265,8 @@
         </p:nvSpPr>
         <p:spPr>
           <a:xfrm>
-            <a:off x="7363012" y="377008"/>
-            <a:ext cx="1897289" cy="584775"/>
+            <a:off x="7627754" y="406399"/>
+            <a:ext cx="1897289" cy="707886"/>
           </a:xfrm>
           <a:prstGeom prst="rect">
             <a:avLst/>
@@ -11095,12 +11279,11 @@
           </a:bodyPr>
           <a:lstStyle/>
           <a:p>
+            <a:pPr algn="r"/>
             <a:r>
-              <a:rPr lang="en-US" altLang="zh-CN" sz="1600" dirty="0" err="1">
+              <a:rPr lang="en-US" altLang="zh-CN" sz="2000" dirty="0">
                 <a:ln w="3175">
-                  <a:solidFill>
-                    <a:srgbClr val="B43970"/>
-                  </a:solidFill>
+                  <a:noFill/>
                 </a:ln>
                 <a:solidFill>
                   <a:srgbClr val="B43970"/>
@@ -11108,28 +11291,11 @@
                 <a:latin typeface="Helvetica" panose="020B0604020202020204" pitchFamily="34" charset="0"/>
                 <a:cs typeface="Helvetica" panose="020B0604020202020204" pitchFamily="34" charset="0"/>
               </a:rPr>
-              <a:t>fibreglass</a:t>
+              <a:t>fibreglass reinforced tape</a:t>
             </a:r>
-            <a:r>
-              <a:rPr lang="en-US" altLang="zh-CN" sz="1600" dirty="0">
-                <a:ln w="3175">
-                  <a:solidFill>
-                    <a:srgbClr val="B43970"/>
-                  </a:solidFill>
-                </a:ln>
-                <a:solidFill>
-                  <a:srgbClr val="B43970"/>
-                </a:solidFill>
-                <a:latin typeface="Helvetica" panose="020B0604020202020204" pitchFamily="34" charset="0"/>
-                <a:cs typeface="Helvetica" panose="020B0604020202020204" pitchFamily="34" charset="0"/>
-              </a:rPr>
-              <a:t> reinforced tape</a:t>
-            </a:r>
-            <a:endParaRPr lang="en-GB" sz="1600" dirty="0">
+            <a:endParaRPr lang="en-GB" sz="2000" dirty="0">
               <a:ln w="3175">
-                <a:solidFill>
-                  <a:srgbClr val="B43970"/>
-                </a:solidFill>
+                <a:noFill/>
               </a:ln>
               <a:solidFill>
                 <a:srgbClr val="B43970"/>
@@ -11154,8 +11320,8 @@
         </p:nvSpPr>
         <p:spPr>
           <a:xfrm>
-            <a:off x="8767800" y="1711249"/>
-            <a:ext cx="731234" cy="338554"/>
+            <a:off x="8647394" y="1631981"/>
+            <a:ext cx="1024946" cy="400110"/>
           </a:xfrm>
           <a:prstGeom prst="rect">
             <a:avLst/>
@@ -11169,28 +11335,24 @@
           <a:lstStyle/>
           <a:p>
             <a:r>
-              <a:rPr lang="en-US" sz="1600" dirty="0">
+              <a:rPr lang="en-US" sz="2000" dirty="0">
                 <a:ln w="3175">
-                  <a:solidFill>
-                    <a:srgbClr val="B43970"/>
-                  </a:solidFill>
+                  <a:noFill/>
                 </a:ln>
                 <a:solidFill>
-                  <a:srgbClr val="B43970"/>
+                  <a:srgbClr val="692F7C"/>
                 </a:solidFill>
                 <a:latin typeface="Helvetica" panose="020B0604020202020204" pitchFamily="34" charset="0"/>
                 <a:cs typeface="Helvetica" panose="020B0604020202020204" pitchFamily="34" charset="0"/>
               </a:rPr>
               <a:t>probe</a:t>
             </a:r>
-            <a:endParaRPr lang="en-GB" sz="1600" dirty="0">
+            <a:endParaRPr lang="en-GB" sz="2000" dirty="0">
               <a:ln w="3175">
-                <a:solidFill>
-                  <a:srgbClr val="B43970"/>
-                </a:solidFill>
+                <a:noFill/>
               </a:ln>
               <a:solidFill>
-                <a:srgbClr val="B43970"/>
+                <a:srgbClr val="692F7C"/>
               </a:solidFill>
               <a:latin typeface="Helvetica" panose="020B0604020202020204" pitchFamily="34" charset="0"/>
               <a:cs typeface="Helvetica" panose="020B0604020202020204" pitchFamily="34" charset="0"/>
@@ -11212,10 +11374,10 @@
         </p:nvGrpSpPr>
         <p:grpSpPr>
           <a:xfrm flipV="1">
-            <a:off x="9069698" y="2979060"/>
-            <a:ext cx="1480373" cy="358838"/>
-            <a:chOff x="10241327" y="5698475"/>
-            <a:chExt cx="1929741" cy="273931"/>
+            <a:off x="9126850" y="2987672"/>
+            <a:ext cx="1458602" cy="327022"/>
+            <a:chOff x="10241327" y="5716184"/>
+            <a:chExt cx="1901361" cy="249643"/>
           </a:xfrm>
           <a:effectLst>
             <a:outerShdw blurRad="63500" sx="101000" sy="101000" algn="ctr" rotWithShape="0">
@@ -11239,15 +11401,15 @@
           </p:nvCxnSpPr>
           <p:spPr>
             <a:xfrm>
-              <a:off x="11260538" y="5698475"/>
-              <a:ext cx="910530" cy="273931"/>
+              <a:off x="11256991" y="5716187"/>
+              <a:ext cx="885697" cy="249640"/>
             </a:xfrm>
             <a:prstGeom prst="straightConnector1">
               <a:avLst/>
             </a:prstGeom>
             <a:ln w="31750">
               <a:solidFill>
-                <a:schemeClr val="tx1"/>
+                <a:srgbClr val="929497"/>
               </a:solidFill>
               <a:tailEnd type="triangle"/>
             </a:ln>
@@ -11283,15 +11445,15 @@
           </p:nvCxnSpPr>
           <p:spPr>
             <a:xfrm flipH="1">
-              <a:off x="10241327" y="5698475"/>
-              <a:ext cx="1038131" cy="50235"/>
+              <a:off x="10241327" y="5716184"/>
+              <a:ext cx="1038131" cy="32526"/>
             </a:xfrm>
             <a:prstGeom prst="line">
               <a:avLst/>
             </a:prstGeom>
             <a:ln w="31750">
               <a:solidFill>
-                <a:schemeClr val="tx1"/>
+                <a:srgbClr val="929497"/>
               </a:solidFill>
             </a:ln>
           </p:spPr>
@@ -11326,10 +11488,10 @@
           <p:nvPr/>
         </p:nvPicPr>
         <p:blipFill>
-          <a:blip r:embed="rId6">
+          <a:blip r:embed="rId5">
             <a:extLst>
               <a:ext uri="{96DAC541-7B7A-43D3-8B79-37D633B846F1}">
-                <asvg:svgBlip xmlns:asvg="http://schemas.microsoft.com/office/drawing/2016/SVG/main" r:embed="rId7"/>
+                <asvg:svgBlip xmlns:asvg="http://schemas.microsoft.com/office/drawing/2016/SVG/main" r:embed="rId6"/>
               </a:ext>
             </a:extLst>
           </a:blip>
@@ -11340,7 +11502,7 @@
         </p:blipFill>
         <p:spPr>
           <a:xfrm flipH="1">
-            <a:off x="7886986" y="2527014"/>
+            <a:off x="7944136" y="2527014"/>
             <a:ext cx="946291" cy="1302903"/>
           </a:xfrm>
           <a:prstGeom prst="rect">
@@ -11362,7 +11524,7 @@
         </p:nvSpPr>
         <p:spPr>
           <a:xfrm>
-            <a:off x="3528945" y="5555956"/>
+            <a:off x="3647890" y="5384968"/>
             <a:ext cx="926902" cy="400110"/>
           </a:xfrm>
           <a:prstGeom prst="rect">
@@ -11432,7 +11594,7 @@
         </p:nvSpPr>
         <p:spPr>
           <a:xfrm rot="16200000">
-            <a:off x="-210226" y="3396583"/>
+            <a:off x="-91281" y="3225595"/>
             <a:ext cx="926902" cy="400110"/>
           </a:xfrm>
           <a:prstGeom prst="rect">
@@ -11502,7 +11664,7 @@
         </p:nvGrpSpPr>
         <p:grpSpPr>
           <a:xfrm>
-            <a:off x="-49389" y="4985590"/>
+            <a:off x="0" y="5061778"/>
             <a:ext cx="1252365" cy="1466011"/>
             <a:chOff x="477462" y="5023578"/>
             <a:chExt cx="1252365" cy="1466011"/>
@@ -11820,7 +11982,7 @@
         </p:nvSpPr>
         <p:spPr>
           <a:xfrm>
-            <a:off x="7642837" y="2429856"/>
+            <a:off x="7699987" y="2429856"/>
             <a:ext cx="1434591" cy="1433893"/>
           </a:xfrm>
           <a:prstGeom prst="ellipse">
@@ -11829,7 +11991,9 @@
           <a:noFill/>
           <a:ln w="31750">
             <a:solidFill>
-              <a:schemeClr val="tx1"/>
+              <a:srgbClr val="77797D">
+                <a:alpha val="80000"/>
+              </a:srgbClr>
             </a:solidFill>
           </a:ln>
         </p:spPr>
@@ -11874,7 +12038,7 @@
         </p:nvCxnSpPr>
         <p:spPr>
           <a:xfrm>
-            <a:off x="8613775" y="3013075"/>
+            <a:off x="8670925" y="3013075"/>
             <a:ext cx="441518" cy="0"/>
           </a:xfrm>
           <a:prstGeom prst="line">
@@ -11882,7 +12046,7 @@
           </a:prstGeom>
           <a:ln w="22225">
             <a:solidFill>
-              <a:schemeClr val="tx1"/>
+              <a:srgbClr val="929497"/>
             </a:solidFill>
           </a:ln>
         </p:spPr>
@@ -11917,7 +12081,7 @@
         </p:nvCxnSpPr>
         <p:spPr>
           <a:xfrm>
-            <a:off x="8613775" y="3487737"/>
+            <a:off x="8670925" y="3487737"/>
             <a:ext cx="374613" cy="0"/>
           </a:xfrm>
           <a:prstGeom prst="line">
@@ -11925,7 +12089,7 @@
           </a:prstGeom>
           <a:ln w="22225">
             <a:solidFill>
-              <a:schemeClr val="tx1"/>
+              <a:srgbClr val="929497"/>
             </a:solidFill>
           </a:ln>
         </p:spPr>
@@ -11944,6 +12108,389 @@
           </a:fontRef>
         </p:style>
       </p:cxnSp>
+      <p:grpSp>
+        <p:nvGrpSpPr>
+          <p:cNvPr id="33" name="组合 32">
+            <a:extLst>
+              <a:ext uri="{FF2B5EF4-FFF2-40B4-BE49-F238E27FC236}">
+                <a16:creationId xmlns:a16="http://schemas.microsoft.com/office/drawing/2014/main" id="{20ED2499-AE85-B82D-A58F-C683778AB48C}"/>
+              </a:ext>
+            </a:extLst>
+          </p:cNvPr>
+          <p:cNvGrpSpPr/>
+          <p:nvPr/>
+        </p:nvGrpSpPr>
+        <p:grpSpPr>
+          <a:xfrm>
+            <a:off x="1176036" y="375101"/>
+            <a:ext cx="4943707" cy="1011291"/>
+            <a:chOff x="847493" y="372117"/>
+            <a:chExt cx="4943707" cy="1011291"/>
+          </a:xfrm>
+        </p:grpSpPr>
+        <p:sp>
+          <p:nvSpPr>
+            <p:cNvPr id="30" name="椭圆 29">
+              <a:extLst>
+                <a:ext uri="{FF2B5EF4-FFF2-40B4-BE49-F238E27FC236}">
+                  <a16:creationId xmlns:a16="http://schemas.microsoft.com/office/drawing/2014/main" id="{A69304D7-C2B4-8B4A-C102-6B931FAFF72D}"/>
+                </a:ext>
+              </a:extLst>
+            </p:cNvPr>
+            <p:cNvSpPr/>
+            <p:nvPr/>
+          </p:nvSpPr>
+          <p:spPr>
+            <a:xfrm>
+              <a:off x="3592102" y="929451"/>
+              <a:ext cx="310273" cy="310273"/>
+            </a:xfrm>
+            <a:prstGeom prst="ellipse">
+              <a:avLst/>
+            </a:prstGeom>
+            <a:solidFill>
+              <a:srgbClr val="CD7BA0"/>
+            </a:solidFill>
+            <a:ln w="25400">
+              <a:prstDash val="dash"/>
+            </a:ln>
+          </p:spPr>
+          <p:style>
+            <a:lnRef idx="2">
+              <a:schemeClr val="accent1">
+                <a:shade val="15000"/>
+              </a:schemeClr>
+            </a:lnRef>
+            <a:fillRef idx="1">
+              <a:schemeClr val="accent1"/>
+            </a:fillRef>
+            <a:effectRef idx="0">
+              <a:schemeClr val="accent1"/>
+            </a:effectRef>
+            <a:fontRef idx="minor">
+              <a:schemeClr val="lt1"/>
+            </a:fontRef>
+          </p:style>
+          <p:txBody>
+            <a:bodyPr rtlCol="0" anchor="ctr"/>
+            <a:lstStyle/>
+            <a:p>
+              <a:pPr algn="ctr"/>
+              <a:endParaRPr lang="zh-CN" altLang="en-US"/>
+            </a:p>
+          </p:txBody>
+        </p:sp>
+        <p:pic>
+          <p:nvPicPr>
+            <p:cNvPr id="19" name="图片 18">
+              <a:extLst>
+                <a:ext uri="{FF2B5EF4-FFF2-40B4-BE49-F238E27FC236}">
+                  <a16:creationId xmlns:a16="http://schemas.microsoft.com/office/drawing/2014/main" id="{C14D50C9-77A2-C818-80F8-3A1CEE69FAF3}"/>
+                </a:ext>
+              </a:extLst>
+            </p:cNvPr>
+            <p:cNvPicPr>
+              <a:picLocks noChangeAspect="1"/>
+            </p:cNvPicPr>
+            <p:nvPr/>
+          </p:nvPicPr>
+          <p:blipFill>
+            <a:blip r:embed="rId7"/>
+            <a:stretch>
+              <a:fillRect/>
+            </a:stretch>
+          </p:blipFill>
+          <p:spPr>
+            <a:xfrm>
+              <a:off x="1050864" y="522549"/>
+              <a:ext cx="237624" cy="251706"/>
+            </a:xfrm>
+            <a:prstGeom prst="rect">
+              <a:avLst/>
+            </a:prstGeom>
+          </p:spPr>
+        </p:pic>
+        <p:sp>
+          <p:nvSpPr>
+            <p:cNvPr id="20" name="文本框 19">
+              <a:extLst>
+                <a:ext uri="{FF2B5EF4-FFF2-40B4-BE49-F238E27FC236}">
+                  <a16:creationId xmlns:a16="http://schemas.microsoft.com/office/drawing/2014/main" id="{163C3C38-28B3-BDA7-22DD-368F8AC6250C}"/>
+                </a:ext>
+              </a:extLst>
+            </p:cNvPr>
+            <p:cNvSpPr txBox="1"/>
+            <p:nvPr/>
+          </p:nvSpPr>
+          <p:spPr>
+            <a:xfrm>
+              <a:off x="1433786" y="431810"/>
+              <a:ext cx="1836173" cy="400110"/>
+            </a:xfrm>
+            <a:prstGeom prst="rect">
+              <a:avLst/>
+            </a:prstGeom>
+            <a:noFill/>
+          </p:spPr>
+          <p:txBody>
+            <a:bodyPr wrap="square">
+              <a:spAutoFit/>
+            </a:bodyPr>
+            <a:lstStyle/>
+            <a:p>
+              <a:pPr rtl="0">
+                <a:defRPr sz="1800" b="0" i="0" u="none" strike="noStrike" kern="1200" baseline="0">
+                  <a:solidFill>
+                    <a:prstClr val="black"/>
+                  </a:solidFill>
+                  <a:latin typeface="Helvetica" panose="020B0604020202020204" pitchFamily="34" charset="0"/>
+                  <a:ea typeface="+mn-ea"/>
+                  <a:cs typeface="Helvetica" panose="020B0604020202020204" pitchFamily="34" charset="0"/>
+                </a:defRPr>
+              </a:pPr>
+              <a:r>
+                <a:rPr lang="en-US" altLang="zh-CN" sz="2000" b="0" dirty="0">
+                  <a:solidFill>
+                    <a:schemeClr val="tx1"/>
+                  </a:solidFill>
+                  <a:latin typeface="Helvetica" panose="020B0604020202020204" pitchFamily="34" charset="0"/>
+                  <a:cs typeface="Helvetica" panose="020B0604020202020204" pitchFamily="34" charset="0"/>
+                </a:rPr>
+                <a:t>sample point</a:t>
+              </a:r>
+              <a:endParaRPr lang="zh-CN" altLang="en-US" sz="2000" b="0" dirty="0">
+                <a:solidFill>
+                  <a:schemeClr val="tx1"/>
+                </a:solidFill>
+                <a:latin typeface="Helvetica" panose="020B0604020202020204" pitchFamily="34" charset="0"/>
+                <a:cs typeface="Helvetica" panose="020B0604020202020204" pitchFamily="34" charset="0"/>
+              </a:endParaRPr>
+            </a:p>
+          </p:txBody>
+        </p:sp>
+        <p:sp>
+          <p:nvSpPr>
+            <p:cNvPr id="22" name="文本框 21">
+              <a:extLst>
+                <a:ext uri="{FF2B5EF4-FFF2-40B4-BE49-F238E27FC236}">
+                  <a16:creationId xmlns:a16="http://schemas.microsoft.com/office/drawing/2014/main" id="{E00F28AF-6672-97C8-1C36-85689A67054A}"/>
+                </a:ext>
+              </a:extLst>
+            </p:cNvPr>
+            <p:cNvSpPr txBox="1"/>
+            <p:nvPr/>
+          </p:nvSpPr>
+          <p:spPr>
+            <a:xfrm>
+              <a:off x="1439719" y="884533"/>
+              <a:ext cx="2041635" cy="400110"/>
+            </a:xfrm>
+            <a:prstGeom prst="rect">
+              <a:avLst/>
+            </a:prstGeom>
+            <a:noFill/>
+          </p:spPr>
+          <p:txBody>
+            <a:bodyPr wrap="square">
+              <a:spAutoFit/>
+            </a:bodyPr>
+            <a:lstStyle/>
+            <a:p>
+              <a:pPr rtl="0">
+                <a:defRPr sz="1800" b="0" i="0" u="none" strike="noStrike" kern="1200" baseline="0">
+                  <a:solidFill>
+                    <a:prstClr val="black"/>
+                  </a:solidFill>
+                  <a:latin typeface="Helvetica" panose="020B0604020202020204" pitchFamily="34" charset="0"/>
+                  <a:ea typeface="+mn-ea"/>
+                  <a:cs typeface="Helvetica" panose="020B0604020202020204" pitchFamily="34" charset="0"/>
+                </a:defRPr>
+              </a:pPr>
+              <a:r>
+                <a:rPr lang="en-US" altLang="zh-CN" sz="2000" b="0" dirty="0">
+                  <a:solidFill>
+                    <a:schemeClr val="tx1"/>
+                  </a:solidFill>
+                  <a:latin typeface="Helvetica" panose="020B0604020202020204" pitchFamily="34" charset="0"/>
+                  <a:cs typeface="Helvetica" panose="020B0604020202020204" pitchFamily="34" charset="0"/>
+                </a:rPr>
+                <a:t>single-fan case</a:t>
+              </a:r>
+              <a:endParaRPr lang="zh-CN" altLang="en-US" sz="2000" b="0" dirty="0">
+                <a:solidFill>
+                  <a:schemeClr val="tx1"/>
+                </a:solidFill>
+                <a:latin typeface="Helvetica" panose="020B0604020202020204" pitchFamily="34" charset="0"/>
+                <a:cs typeface="Helvetica" panose="020B0604020202020204" pitchFamily="34" charset="0"/>
+              </a:endParaRPr>
+            </a:p>
+          </p:txBody>
+        </p:sp>
+        <p:sp>
+          <p:nvSpPr>
+            <p:cNvPr id="27" name="文本框 26">
+              <a:extLst>
+                <a:ext uri="{FF2B5EF4-FFF2-40B4-BE49-F238E27FC236}">
+                  <a16:creationId xmlns:a16="http://schemas.microsoft.com/office/drawing/2014/main" id="{9B6B62CE-ED47-229A-25A6-E0C7633650E0}"/>
+                </a:ext>
+              </a:extLst>
+            </p:cNvPr>
+            <p:cNvSpPr txBox="1"/>
+            <p:nvPr/>
+          </p:nvSpPr>
+          <p:spPr>
+            <a:xfrm>
+              <a:off x="4023043" y="884533"/>
+              <a:ext cx="1695445" cy="400110"/>
+            </a:xfrm>
+            <a:prstGeom prst="rect">
+              <a:avLst/>
+            </a:prstGeom>
+            <a:noFill/>
+          </p:spPr>
+          <p:txBody>
+            <a:bodyPr wrap="square">
+              <a:spAutoFit/>
+            </a:bodyPr>
+            <a:lstStyle/>
+            <a:p>
+              <a:pPr rtl="0">
+                <a:defRPr sz="1800" b="0" i="0" u="none" strike="noStrike" kern="1200" baseline="0">
+                  <a:solidFill>
+                    <a:prstClr val="black"/>
+                  </a:solidFill>
+                  <a:latin typeface="Helvetica" panose="020B0604020202020204" pitchFamily="34" charset="0"/>
+                  <a:ea typeface="+mn-ea"/>
+                  <a:cs typeface="Helvetica" panose="020B0604020202020204" pitchFamily="34" charset="0"/>
+                </a:defRPr>
+              </a:pPr>
+              <a:r>
+                <a:rPr lang="en-US" altLang="zh-CN" sz="2000" b="0" dirty="0">
+                  <a:solidFill>
+                    <a:schemeClr val="tx1"/>
+                  </a:solidFill>
+                  <a:latin typeface="Helvetica" panose="020B0604020202020204" pitchFamily="34" charset="0"/>
+                  <a:cs typeface="Helvetica" panose="020B0604020202020204" pitchFamily="34" charset="0"/>
+                </a:rPr>
+                <a:t>four-fan case</a:t>
+              </a:r>
+              <a:endParaRPr lang="zh-CN" altLang="en-US" sz="2000" b="0" dirty="0">
+                <a:solidFill>
+                  <a:schemeClr val="tx1"/>
+                </a:solidFill>
+                <a:latin typeface="Helvetica" panose="020B0604020202020204" pitchFamily="34" charset="0"/>
+                <a:cs typeface="Helvetica" panose="020B0604020202020204" pitchFamily="34" charset="0"/>
+              </a:endParaRPr>
+            </a:p>
+          </p:txBody>
+        </p:sp>
+        <p:sp>
+          <p:nvSpPr>
+            <p:cNvPr id="28" name="椭圆 27">
+              <a:extLst>
+                <a:ext uri="{FF2B5EF4-FFF2-40B4-BE49-F238E27FC236}">
+                  <a16:creationId xmlns:a16="http://schemas.microsoft.com/office/drawing/2014/main" id="{7D406737-7DA3-DB2D-8A8C-2183C0FC1F49}"/>
+                </a:ext>
+              </a:extLst>
+            </p:cNvPr>
+            <p:cNvSpPr/>
+            <p:nvPr/>
+          </p:nvSpPr>
+          <p:spPr>
+            <a:xfrm>
+              <a:off x="1013986" y="933463"/>
+              <a:ext cx="310273" cy="310273"/>
+            </a:xfrm>
+            <a:prstGeom prst="ellipse">
+              <a:avLst/>
+            </a:prstGeom>
+            <a:solidFill>
+              <a:srgbClr val="F6C63C">
+                <a:alpha val="67000"/>
+              </a:srgbClr>
+            </a:solidFill>
+            <a:ln w="25400">
+              <a:prstDash val="dash"/>
+            </a:ln>
+          </p:spPr>
+          <p:style>
+            <a:lnRef idx="2">
+              <a:schemeClr val="accent1">
+                <a:shade val="15000"/>
+              </a:schemeClr>
+            </a:lnRef>
+            <a:fillRef idx="1">
+              <a:schemeClr val="accent1"/>
+            </a:fillRef>
+            <a:effectRef idx="0">
+              <a:schemeClr val="accent1"/>
+            </a:effectRef>
+            <a:fontRef idx="minor">
+              <a:schemeClr val="lt1"/>
+            </a:fontRef>
+          </p:style>
+          <p:txBody>
+            <a:bodyPr rtlCol="0" anchor="ctr"/>
+            <a:lstStyle/>
+            <a:p>
+              <a:pPr algn="ctr"/>
+              <a:endParaRPr lang="zh-CN" altLang="en-US"/>
+            </a:p>
+          </p:txBody>
+        </p:sp>
+        <p:sp>
+          <p:nvSpPr>
+            <p:cNvPr id="32" name="矩形 31">
+              <a:extLst>
+                <a:ext uri="{FF2B5EF4-FFF2-40B4-BE49-F238E27FC236}">
+                  <a16:creationId xmlns:a16="http://schemas.microsoft.com/office/drawing/2014/main" id="{E94414BA-669F-CFD6-0BBD-442B32C96BEC}"/>
+                </a:ext>
+              </a:extLst>
+            </p:cNvPr>
+            <p:cNvSpPr/>
+            <p:nvPr/>
+          </p:nvSpPr>
+          <p:spPr>
+            <a:xfrm>
+              <a:off x="847493" y="372117"/>
+              <a:ext cx="4943707" cy="1011291"/>
+            </a:xfrm>
+            <a:prstGeom prst="rect">
+              <a:avLst/>
+            </a:prstGeom>
+            <a:noFill/>
+            <a:ln w="22225">
+              <a:solidFill>
+                <a:schemeClr val="tx1"/>
+              </a:solidFill>
+            </a:ln>
+          </p:spPr>
+          <p:style>
+            <a:lnRef idx="2">
+              <a:schemeClr val="accent1">
+                <a:shade val="15000"/>
+              </a:schemeClr>
+            </a:lnRef>
+            <a:fillRef idx="1">
+              <a:schemeClr val="accent1"/>
+            </a:fillRef>
+            <a:effectRef idx="0">
+              <a:schemeClr val="accent1"/>
+            </a:effectRef>
+            <a:fontRef idx="minor">
+              <a:schemeClr val="lt1"/>
+            </a:fontRef>
+          </p:style>
+          <p:txBody>
+            <a:bodyPr rtlCol="0" anchor="ctr"/>
+            <a:lstStyle/>
+            <a:p>
+              <a:pPr algn="ctr"/>
+              <a:endParaRPr lang="en-GB"/>
+            </a:p>
+          </p:txBody>
+        </p:sp>
+      </p:grpSp>
     </p:spTree>
     <p:extLst>
       <p:ext uri="{BB962C8B-B14F-4D97-AF65-F5344CB8AC3E}">
